--- a/course/modules/M01/L003/M01-L003-canva-deck.pptx
+++ b/course/modules/M01/L003/M01-L003-canva-deck.pptx
@@ -8,12 +8,12 @@
     <p:sldId id="256" r:id="rId7"/>
     <p:sldId id="257" r:id="rId8"/>
     <p:sldId id="258" r:id="rId9"/>
-    <p:sldId id="259" r:id="rId10"/>
-    <p:sldId id="260" r:id="rId11"/>
-    <p:sldId id="261" r:id="rId12"/>
-    <p:sldId id="262" r:id="rId13"/>
-    <p:sldId id="263" r:id="rId14"/>
-    <p:sldId id="264" r:id="rId15"/>
+    <p:sldId id="259" r:id="rId11"/>
+    <p:sldId id="260" r:id="rId12"/>
+    <p:sldId id="261" r:id="rId13"/>
+    <p:sldId id="262" r:id="rId14"/>
+    <p:sldId id="263" r:id="rId15"/>
+    <p:sldId id="264" r:id="rId16"/>
   </p:sldIdLst>
   <p:sldSz cx="12191695" cy="6858000" type="screen4x3"/>
   <p:notesSz cx="6858000" cy="9144000"/>
@@ -113,6 +113,708 @@
     </a:lvl9pPr>
   </p:defaultTextStyle>
 </p:presentation>
+</file>
+
+<file path=ppt/notesMasters/notesMaster1.xml><?xml version="1.0" encoding="utf-8"?>
+<p:notesMaster xmlns:a="http://schemas.openxmlformats.org/drawingml/2006/main" xmlns:p="http://schemas.openxmlformats.org/presentationml/2006/main" xmlns:r="http://schemas.openxmlformats.org/officeDocument/2006/relationships">
+  <p:cSld>
+    <p:bg>
+      <p:bgRef idx="1001">
+        <a:schemeClr val="bg1"/>
+      </p:bgRef>
+    </p:bg>
+    <p:spTree>
+      <p:nvGrpSpPr>
+        <p:cNvPr id="1" name=""/>
+        <p:cNvGrpSpPr/>
+        <p:nvPr/>
+      </p:nvGrpSpPr>
+      <p:grpSpPr>
+        <a:xfrm>
+          <a:off x="0" y="0"/>
+          <a:ext cx="0" cy="0"/>
+          <a:chOff x="0" y="0"/>
+          <a:chExt cx="0" cy="0"/>
+        </a:xfrm>
+      </p:grpSpPr>
+      <p:sp>
+        <p:nvSpPr>
+          <p:cNvPr id="2" name="Header Placeholder 1"/>
+          <p:cNvSpPr>
+            <a:spLocks noGrp="1"/>
+          </p:cNvSpPr>
+          <p:nvPr>
+            <p:ph type="hdr" sz="quarter"/>
+          </p:nvPr>
+        </p:nvSpPr>
+        <p:spPr>
+          <a:xfrm>
+            <a:off x="0" y="0"/>
+            <a:ext cx="2971800" cy="457200"/>
+          </a:xfrm>
+          <a:prstGeom prst="rect">
+            <a:avLst/>
+          </a:prstGeom>
+        </p:spPr>
+        <p:txBody>
+          <a:bodyPr vert="horz" lIns="91440" tIns="45720" rIns="91440" bIns="45720" rtlCol="0"/>
+          <a:lstStyle>
+            <a:lvl1pPr algn="l">
+              <a:defRPr sz="1200"/>
+            </a:lvl1pPr>
+          </a:lstStyle>
+          <a:p>
+            <a:endParaRPr lang="en-US"/>
+          </a:p>
+        </p:txBody>
+      </p:sp>
+      <p:sp>
+        <p:nvSpPr>
+          <p:cNvPr id="3" name="Date Placeholder 2"/>
+          <p:cNvSpPr>
+            <a:spLocks noGrp="1"/>
+          </p:cNvSpPr>
+          <p:nvPr>
+            <p:ph type="dt" idx="1"/>
+          </p:nvPr>
+        </p:nvSpPr>
+        <p:spPr>
+          <a:xfrm>
+            <a:off x="3884613" y="0"/>
+            <a:ext cx="2971800" cy="457200"/>
+          </a:xfrm>
+          <a:prstGeom prst="rect">
+            <a:avLst/>
+          </a:prstGeom>
+        </p:spPr>
+        <p:txBody>
+          <a:bodyPr vert="horz" lIns="91440" tIns="45720" rIns="91440" bIns="45720" rtlCol="0"/>
+          <a:lstStyle>
+            <a:lvl1pPr algn="r">
+              <a:defRPr sz="1200"/>
+            </a:lvl1pPr>
+          </a:lstStyle>
+          <a:p>
+            <a:fld id="{0F89C1C7-3DCD-1040-A9CF-14679D8B5DDD}" type="datetimeFigureOut">
+              <a:rPr lang="en-US" smtClean="0"/>
+              <a:t>10/17/16</a:t>
+            </a:fld>
+            <a:endParaRPr lang="en-US"/>
+          </a:p>
+        </p:txBody>
+      </p:sp>
+      <p:sp>
+        <p:nvSpPr>
+          <p:cNvPr id="4" name="Slide Image Placeholder 3"/>
+          <p:cNvSpPr>
+            <a:spLocks noGrp="1" noRot="1" noChangeAspect="1"/>
+          </p:cNvSpPr>
+          <p:nvPr>
+            <p:ph type="sldImg" idx="2"/>
+          </p:nvPr>
+        </p:nvSpPr>
+        <p:spPr>
+          <a:xfrm>
+            <a:off x="1143000" y="685800"/>
+            <a:ext cx="4572000" cy="3429000"/>
+          </a:xfrm>
+          <a:prstGeom prst="rect">
+            <a:avLst/>
+          </a:prstGeom>
+          <a:noFill/>
+          <a:ln w="12700">
+            <a:solidFill>
+              <a:prstClr val="black"/>
+            </a:solidFill>
+          </a:ln>
+        </p:spPr>
+        <p:txBody>
+          <a:bodyPr vert="horz" lIns="91440" tIns="45720" rIns="91440" bIns="45720" rtlCol="0" anchor="ctr"/>
+          <a:lstStyle/>
+          <a:p>
+            <a:endParaRPr lang="en-US"/>
+          </a:p>
+        </p:txBody>
+      </p:sp>
+      <p:sp>
+        <p:nvSpPr>
+          <p:cNvPr id="5" name="Notes Placeholder 4"/>
+          <p:cNvSpPr>
+            <a:spLocks noGrp="1"/>
+          </p:cNvSpPr>
+          <p:nvPr>
+            <p:ph type="body" sz="quarter" idx="3"/>
+          </p:nvPr>
+        </p:nvSpPr>
+        <p:spPr>
+          <a:xfrm>
+            <a:off x="685800" y="4343400"/>
+            <a:ext cx="5486400" cy="4114800"/>
+          </a:xfrm>
+          <a:prstGeom prst="rect">
+            <a:avLst/>
+          </a:prstGeom>
+        </p:spPr>
+        <p:txBody>
+          <a:bodyPr vert="horz" lIns="91440" tIns="45720" rIns="91440" bIns="45720" rtlCol="0"/>
+          <a:lstStyle/>
+          <a:p>
+            <a:pPr lvl="0"/>
+            <a:r>
+              <a:rPr lang="en-US" smtClean="0"/>
+              <a:t>Click to edit Master text styles</a:t>
+            </a:r>
+          </a:p>
+          <a:p>
+            <a:pPr lvl="1"/>
+            <a:r>
+              <a:rPr lang="en-US" smtClean="0"/>
+              <a:t>Second level</a:t>
+            </a:r>
+          </a:p>
+          <a:p>
+            <a:pPr lvl="2"/>
+            <a:r>
+              <a:rPr lang="en-US" smtClean="0"/>
+              <a:t>Third level</a:t>
+            </a:r>
+          </a:p>
+          <a:p>
+            <a:pPr lvl="3"/>
+            <a:r>
+              <a:rPr lang="en-US" smtClean="0"/>
+              <a:t>Fourth level</a:t>
+            </a:r>
+          </a:p>
+          <a:p>
+            <a:pPr lvl="4"/>
+            <a:r>
+              <a:rPr lang="en-US" smtClean="0"/>
+              <a:t>Fifth level</a:t>
+            </a:r>
+            <a:endParaRPr lang="en-US"/>
+          </a:p>
+        </p:txBody>
+      </p:sp>
+      <p:sp>
+        <p:nvSpPr>
+          <p:cNvPr id="6" name="Footer Placeholder 5"/>
+          <p:cNvSpPr>
+            <a:spLocks noGrp="1"/>
+          </p:cNvSpPr>
+          <p:nvPr>
+            <p:ph type="ftr" sz="quarter" idx="4"/>
+          </p:nvPr>
+        </p:nvSpPr>
+        <p:spPr>
+          <a:xfrm>
+            <a:off x="0" y="8685213"/>
+            <a:ext cx="2971800" cy="457200"/>
+          </a:xfrm>
+          <a:prstGeom prst="rect">
+            <a:avLst/>
+          </a:prstGeom>
+        </p:spPr>
+        <p:txBody>
+          <a:bodyPr vert="horz" lIns="91440" tIns="45720" rIns="91440" bIns="45720" rtlCol="0" anchor="b"/>
+          <a:lstStyle>
+            <a:lvl1pPr algn="l">
+              <a:defRPr sz="1200"/>
+            </a:lvl1pPr>
+          </a:lstStyle>
+          <a:p>
+            <a:endParaRPr lang="en-US"/>
+          </a:p>
+        </p:txBody>
+      </p:sp>
+      <p:sp>
+        <p:nvSpPr>
+          <p:cNvPr id="7" name="Slide Number Placeholder 6"/>
+          <p:cNvSpPr>
+            <a:spLocks noGrp="1"/>
+          </p:cNvSpPr>
+          <p:nvPr>
+            <p:ph type="sldNum" sz="quarter" idx="5"/>
+          </p:nvPr>
+        </p:nvSpPr>
+        <p:spPr>
+          <a:xfrm>
+            <a:off x="3884613" y="8685213"/>
+            <a:ext cx="2971800" cy="457200"/>
+          </a:xfrm>
+          <a:prstGeom prst="rect">
+            <a:avLst/>
+          </a:prstGeom>
+        </p:spPr>
+        <p:txBody>
+          <a:bodyPr vert="horz" lIns="91440" tIns="45720" rIns="91440" bIns="45720" rtlCol="0" anchor="b"/>
+          <a:lstStyle>
+            <a:lvl1pPr algn="r">
+              <a:defRPr sz="1200"/>
+            </a:lvl1pPr>
+          </a:lstStyle>
+          <a:p>
+            <a:fld id="{BB5E49A5-4136-284D-997B-48E1D791AD67}" type="slidenum">
+              <a:rPr lang="en-US" smtClean="0"/>
+              <a:t>‹#›</a:t>
+            </a:fld>
+            <a:endParaRPr lang="en-US"/>
+          </a:p>
+        </p:txBody>
+      </p:sp>
+    </p:spTree>
+    <p:extLst>
+      <p:ext uri="{BB962C8B-B14F-4D97-AF65-F5344CB8AC3E}">
+        <p14:creationId xmlns:p14="http://schemas.microsoft.com/office/powerpoint/2010/main" val="2623252185"/>
+      </p:ext>
+    </p:extLst>
+  </p:cSld>
+  <p:clrMap bg1="lt1" tx1="dk1" bg2="lt2" tx2="dk2" accent1="accent1" accent2="accent2" accent3="accent3" accent4="accent4" accent5="accent5" accent6="accent6" hlink="hlink" folHlink="folHlink"/>
+  <p:notesStyle>
+    <a:lvl1pPr marL="0" algn="l" defTabSz="457200" rtl="0" eaLnBrk="1" latinLnBrk="0" hangingPunct="1">
+      <a:defRPr sz="1200" kern="1200">
+        <a:solidFill>
+          <a:schemeClr val="tx1"/>
+        </a:solidFill>
+        <a:latin typeface="+mn-lt"/>
+        <a:ea typeface="+mn-ea"/>
+        <a:cs typeface="+mn-cs"/>
+      </a:defRPr>
+    </a:lvl1pPr>
+    <a:lvl2pPr marL="457200" algn="l" defTabSz="457200" rtl="0" eaLnBrk="1" latinLnBrk="0" hangingPunct="1">
+      <a:defRPr sz="1200" kern="1200">
+        <a:solidFill>
+          <a:schemeClr val="tx1"/>
+        </a:solidFill>
+        <a:latin typeface="+mn-lt"/>
+        <a:ea typeface="+mn-ea"/>
+        <a:cs typeface="+mn-cs"/>
+      </a:defRPr>
+    </a:lvl2pPr>
+    <a:lvl3pPr marL="914400" algn="l" defTabSz="457200" rtl="0" eaLnBrk="1" latinLnBrk="0" hangingPunct="1">
+      <a:defRPr sz="1200" kern="1200">
+        <a:solidFill>
+          <a:schemeClr val="tx1"/>
+        </a:solidFill>
+        <a:latin typeface="+mn-lt"/>
+        <a:ea typeface="+mn-ea"/>
+        <a:cs typeface="+mn-cs"/>
+      </a:defRPr>
+    </a:lvl3pPr>
+    <a:lvl4pPr marL="1371600" algn="l" defTabSz="457200" rtl="0" eaLnBrk="1" latinLnBrk="0" hangingPunct="1">
+      <a:defRPr sz="1200" kern="1200">
+        <a:solidFill>
+          <a:schemeClr val="tx1"/>
+        </a:solidFill>
+        <a:latin typeface="+mn-lt"/>
+        <a:ea typeface="+mn-ea"/>
+        <a:cs typeface="+mn-cs"/>
+      </a:defRPr>
+    </a:lvl4pPr>
+    <a:lvl5pPr marL="1828800" algn="l" defTabSz="457200" rtl="0" eaLnBrk="1" latinLnBrk="0" hangingPunct="1">
+      <a:defRPr sz="1200" kern="1200">
+        <a:solidFill>
+          <a:schemeClr val="tx1"/>
+        </a:solidFill>
+        <a:latin typeface="+mn-lt"/>
+        <a:ea typeface="+mn-ea"/>
+        <a:cs typeface="+mn-cs"/>
+      </a:defRPr>
+    </a:lvl5pPr>
+    <a:lvl6pPr marL="2286000" algn="l" defTabSz="457200" rtl="0" eaLnBrk="1" latinLnBrk="0" hangingPunct="1">
+      <a:defRPr sz="1200" kern="1200">
+        <a:solidFill>
+          <a:schemeClr val="tx1"/>
+        </a:solidFill>
+        <a:latin typeface="+mn-lt"/>
+        <a:ea typeface="+mn-ea"/>
+        <a:cs typeface="+mn-cs"/>
+      </a:defRPr>
+    </a:lvl6pPr>
+    <a:lvl7pPr marL="2743200" algn="l" defTabSz="457200" rtl="0" eaLnBrk="1" latinLnBrk="0" hangingPunct="1">
+      <a:defRPr sz="1200" kern="1200">
+        <a:solidFill>
+          <a:schemeClr val="tx1"/>
+        </a:solidFill>
+        <a:latin typeface="+mn-lt"/>
+        <a:ea typeface="+mn-ea"/>
+        <a:cs typeface="+mn-cs"/>
+      </a:defRPr>
+    </a:lvl7pPr>
+    <a:lvl8pPr marL="3200400" algn="l" defTabSz="457200" rtl="0" eaLnBrk="1" latinLnBrk="0" hangingPunct="1">
+      <a:defRPr sz="1200" kern="1200">
+        <a:solidFill>
+          <a:schemeClr val="tx1"/>
+        </a:solidFill>
+        <a:latin typeface="+mn-lt"/>
+        <a:ea typeface="+mn-ea"/>
+        <a:cs typeface="+mn-cs"/>
+      </a:defRPr>
+    </a:lvl8pPr>
+    <a:lvl9pPr marL="3657600" algn="l" defTabSz="457200" rtl="0" eaLnBrk="1" latinLnBrk="0" hangingPunct="1">
+      <a:defRPr sz="1200" kern="1200">
+        <a:solidFill>
+          <a:schemeClr val="tx1"/>
+        </a:solidFill>
+        <a:latin typeface="+mn-lt"/>
+        <a:ea typeface="+mn-ea"/>
+        <a:cs typeface="+mn-cs"/>
+      </a:defRPr>
+    </a:lvl9pPr>
+  </p:notesStyle>
+</p:notesMaster>
+</file>
+
+<file path=ppt/notesSlides/notesSlide1.xml><?xml version="1.0" encoding="utf-8"?>
+<p:notes xmlns:a="http://schemas.openxmlformats.org/drawingml/2006/main" xmlns:p="http://schemas.openxmlformats.org/presentationml/2006/main" xmlns:r="http://schemas.openxmlformats.org/officeDocument/2006/relationships">
+  <p:cSld>
+    <p:spTree>
+      <p:nvGrpSpPr>
+        <p:cNvPr id="1" name=""/>
+        <p:cNvGrpSpPr/>
+        <p:nvPr/>
+      </p:nvGrpSpPr>
+      <p:grpSpPr>
+        <a:xfrm>
+          <a:off x="0" y="0"/>
+          <a:ext cx="0" cy="0"/>
+          <a:chOff x="0" y="0"/>
+          <a:chExt cx="0" cy="0"/>
+        </a:xfrm>
+      </p:grpSpPr>
+      <p:sp>
+        <p:nvSpPr>
+          <p:cNvPr id="2" name="Slide Image Placeholder 1"/>
+          <p:cNvSpPr>
+            <a:spLocks noGrp="1"/>
+          </p:cNvSpPr>
+          <p:nvPr>
+            <p:ph type="sldImg" idx="2"/>
+          </p:nvPr>
+        </p:nvSpPr>
+        <p:spPr/>
+      </p:sp>
+      <p:sp>
+        <p:nvSpPr>
+          <p:cNvPr id="3" name="Notes Placeholder 2"/>
+          <p:cNvSpPr>
+            <a:spLocks noGrp="1"/>
+          </p:cNvSpPr>
+          <p:nvPr>
+            <p:ph type="body" idx="3" sz="quarter"/>
+          </p:nvPr>
+        </p:nvSpPr>
+        <p:spPr/>
+        <p:txBody>
+          <a:bodyPr/>
+          <a:lstStyle/>
+          <a:p/>
+          <a:p/>
+          <a:p>
+            <a:r>
+              <a:t>[Practice — moved to notes, no room on slide]</a:t>
+            </a:r>
+          </a:p>
+          <a:p>
+            <a:r>
+              <a:t>• Listen and repeat: ฉัน (chǎn), ผม (phǒm), คุณ (khun). Say each one twice.</a:t>
+            </a:r>
+          </a:p>
+          <a:p>
+            <a:r>
+              <a:t>• Pause-and-produce: I say a situation — male speaker or female speaker. You say the right word for I before I show the answer.</a:t>
+            </a:r>
+          </a:p>
+          <a:p>
+            <a:r>
+              <a:t>• Response-building: I say คุณชื่ออะไร (khun chûue à-rai). You answer with ฉันชื่อ... or ผมชื่อ... and your name.</a:t>
+            </a:r>
+          </a:p>
+          <a:p/>
+        </p:txBody>
+      </p:sp>
+      <p:sp>
+        <p:nvSpPr>
+          <p:cNvPr id="4" name="Slide Number Placeholder 3"/>
+          <p:cNvSpPr>
+            <a:spLocks noGrp="1"/>
+          </p:cNvSpPr>
+          <p:nvPr>
+            <p:ph type="sldNum" idx="5" sz="quarter"/>
+          </p:nvPr>
+        </p:nvSpPr>
+        <p:spPr/>
+      </p:sp>
+    </p:spTree>
+  </p:cSld>
+  <p:clrMapOvr>
+    <a:masterClrMapping/>
+  </p:clrMapOvr>
+</p:notes>
+</file>
+
+<file path=ppt/notesSlides/notesSlide2.xml><?xml version="1.0" encoding="utf-8"?>
+<p:notes xmlns:a="http://schemas.openxmlformats.org/drawingml/2006/main" xmlns:p="http://schemas.openxmlformats.org/presentationml/2006/main" xmlns:r="http://schemas.openxmlformats.org/officeDocument/2006/relationships">
+  <p:cSld>
+    <p:spTree>
+      <p:nvGrpSpPr>
+        <p:cNvPr id="1" name=""/>
+        <p:cNvGrpSpPr/>
+        <p:nvPr/>
+      </p:nvGrpSpPr>
+      <p:grpSpPr>
+        <a:xfrm>
+          <a:off x="0" y="0"/>
+          <a:ext cx="0" cy="0"/>
+          <a:chOff x="0" y="0"/>
+          <a:chExt cx="0" cy="0"/>
+        </a:xfrm>
+      </p:grpSpPr>
+      <p:sp>
+        <p:nvSpPr>
+          <p:cNvPr id="2" name="Slide Image Placeholder 1"/>
+          <p:cNvSpPr>
+            <a:spLocks noGrp="1"/>
+          </p:cNvSpPr>
+          <p:nvPr>
+            <p:ph type="sldImg" idx="2"/>
+          </p:nvPr>
+        </p:nvSpPr>
+        <p:spPr/>
+      </p:sp>
+      <p:sp>
+        <p:nvSpPr>
+          <p:cNvPr id="3" name="Notes Placeholder 2"/>
+          <p:cNvSpPr>
+            <a:spLocks noGrp="1"/>
+          </p:cNvSpPr>
+          <p:nvPr>
+            <p:ph type="body" idx="3" sz="quarter"/>
+          </p:nvPr>
+        </p:nvSpPr>
+        <p:spPr/>
+        <p:txBody>
+          <a:bodyPr/>
+          <a:lstStyle/>
+          <a:p/>
+          <a:p/>
+          <a:p>
+            <a:r>
+              <a:t>[Practice — moved to notes, no room on slide]</a:t>
+            </a:r>
+          </a:p>
+          <a:p>
+            <a:r>
+              <a:t>• Listen and repeat: เขา (khǎo), นี่ (nîi), คือ (khuue). Now together: นี่คือ... (nîi khuue...).</a:t>
+            </a:r>
+          </a:p>
+          <a:p>
+            <a:r>
+              <a:t>• Substitution drill: I give a name. You say นี่คือ... with that name. Example: Mike → นี่คือไมค์.</a:t>
+            </a:r>
+          </a:p>
+          <a:p>
+            <a:r>
+              <a:t>• Pause-and-produce: I point to someone and say เขาชื่ออะไร (khǎo chûue à-rai). You answer เขาชื่อ... with a name.</a:t>
+            </a:r>
+          </a:p>
+          <a:p/>
+        </p:txBody>
+      </p:sp>
+      <p:sp>
+        <p:nvSpPr>
+          <p:cNvPr id="4" name="Slide Number Placeholder 3"/>
+          <p:cNvSpPr>
+            <a:spLocks noGrp="1"/>
+          </p:cNvSpPr>
+          <p:nvPr>
+            <p:ph type="sldNum" idx="5" sz="quarter"/>
+          </p:nvPr>
+        </p:nvSpPr>
+        <p:spPr/>
+      </p:sp>
+    </p:spTree>
+  </p:cSld>
+  <p:clrMapOvr>
+    <a:masterClrMapping/>
+  </p:clrMapOvr>
+</p:notes>
+</file>
+
+<file path=ppt/notesSlides/notesSlide3.xml><?xml version="1.0" encoding="utf-8"?>
+<p:notes xmlns:a="http://schemas.openxmlformats.org/drawingml/2006/main" xmlns:p="http://schemas.openxmlformats.org/presentationml/2006/main" xmlns:r="http://schemas.openxmlformats.org/officeDocument/2006/relationships">
+  <p:cSld>
+    <p:spTree>
+      <p:nvGrpSpPr>
+        <p:cNvPr id="1" name=""/>
+        <p:cNvGrpSpPr/>
+        <p:nvPr/>
+      </p:nvGrpSpPr>
+      <p:grpSpPr>
+        <a:xfrm>
+          <a:off x="0" y="0"/>
+          <a:ext cx="0" cy="0"/>
+          <a:chOff x="0" y="0"/>
+          <a:chExt cx="0" cy="0"/>
+        </a:xfrm>
+      </p:grpSpPr>
+      <p:sp>
+        <p:nvSpPr>
+          <p:cNvPr id="2" name="Slide Image Placeholder 1"/>
+          <p:cNvSpPr>
+            <a:spLocks noGrp="1"/>
+          </p:cNvSpPr>
+          <p:nvPr>
+            <p:ph type="sldImg" idx="2"/>
+          </p:nvPr>
+        </p:nvSpPr>
+        <p:spPr/>
+      </p:sp>
+      <p:sp>
+        <p:nvSpPr>
+          <p:cNvPr id="3" name="Notes Placeholder 2"/>
+          <p:cNvSpPr>
+            <a:spLocks noGrp="1"/>
+          </p:cNvSpPr>
+          <p:nvPr>
+            <p:ph type="body" idx="3" sz="quarter"/>
+          </p:nvPr>
+        </p:nvSpPr>
+        <p:spPr/>
+        <p:txBody>
+          <a:bodyPr/>
+          <a:lstStyle/>
+          <a:p/>
+          <a:p/>
+          <a:p>
+            <a:r>
+              <a:t>[Practice — moved to notes, no room on slide]</a:t>
+            </a:r>
+          </a:p>
+          <a:p>
+            <a:r>
+              <a:t>• Listen and repeat: ใคร (khrai). Now the full question: เขาคือใคร (khǎo khuue khrai).</a:t>
+            </a:r>
+          </a:p>
+          <a:p>
+            <a:r>
+              <a:t>• Response-building: I ask เขาคือใคร. You answer เขาคือ... with any name you choose.</a:t>
+            </a:r>
+          </a:p>
+          <a:p>
+            <a:r>
+              <a:t>• Pause-and-produce: I say a name. You build the confirmation: คุณคือ[name]ใช่ไหม before I show it.</a:t>
+            </a:r>
+          </a:p>
+          <a:p/>
+        </p:txBody>
+      </p:sp>
+      <p:sp>
+        <p:nvSpPr>
+          <p:cNvPr id="4" name="Slide Number Placeholder 3"/>
+          <p:cNvSpPr>
+            <a:spLocks noGrp="1"/>
+          </p:cNvSpPr>
+          <p:nvPr>
+            <p:ph type="sldNum" idx="5" sz="quarter"/>
+          </p:nvPr>
+        </p:nvSpPr>
+        <p:spPr/>
+      </p:sp>
+    </p:spTree>
+  </p:cSld>
+  <p:clrMapOvr>
+    <a:masterClrMapping/>
+  </p:clrMapOvr>
+</p:notes>
+</file>
+
+<file path=ppt/notesSlides/notesSlide4.xml><?xml version="1.0" encoding="utf-8"?>
+<p:notes xmlns:a="http://schemas.openxmlformats.org/drawingml/2006/main" xmlns:p="http://schemas.openxmlformats.org/presentationml/2006/main" xmlns:r="http://schemas.openxmlformats.org/officeDocument/2006/relationships">
+  <p:cSld>
+    <p:spTree>
+      <p:nvGrpSpPr>
+        <p:cNvPr id="1" name=""/>
+        <p:cNvGrpSpPr/>
+        <p:nvPr/>
+      </p:nvGrpSpPr>
+      <p:grpSpPr>
+        <a:xfrm>
+          <a:off x="0" y="0"/>
+          <a:ext cx="0" cy="0"/>
+          <a:chOff x="0" y="0"/>
+          <a:chExt cx="0" cy="0"/>
+        </a:xfrm>
+      </p:grpSpPr>
+      <p:sp>
+        <p:nvSpPr>
+          <p:cNvPr id="2" name="Slide Image Placeholder 1"/>
+          <p:cNvSpPr>
+            <a:spLocks noGrp="1"/>
+          </p:cNvSpPr>
+          <p:nvPr>
+            <p:ph type="sldImg" idx="2"/>
+          </p:nvPr>
+        </p:nvSpPr>
+        <p:spPr/>
+      </p:sp>
+      <p:sp>
+        <p:nvSpPr>
+          <p:cNvPr id="3" name="Notes Placeholder 2"/>
+          <p:cNvSpPr>
+            <a:spLocks noGrp="1"/>
+          </p:cNvSpPr>
+          <p:nvPr>
+            <p:ph type="body" idx="3" sz="quarter"/>
+          </p:nvPr>
+        </p:nvSpPr>
+        <p:spPr/>
+        <p:txBody>
+          <a:bodyPr/>
+          <a:lstStyle/>
+          <a:p/>
+          <a:p/>
+          <a:p>
+            <a:r>
+              <a:t>[Practice — moved to notes, no room on slide]</a:t>
+            </a:r>
+          </a:p>
+          <a:p>
+            <a:r>
+              <a:t>• Role swap: I play the friend. You ask เขาคือใคร and I answer. Then you confirm with ใช่ไหม.</a:t>
+            </a:r>
+          </a:p>
+          <a:p>
+            <a:r>
+              <a:t>• Substitution drill: I change the name and country. You rebuild the full exchange each time.</a:t>
+            </a:r>
+          </a:p>
+          <a:p>
+            <a:r>
+              <a:t>• Production challenge: introduce yourself using ฉัน or ผม, then ask who the person next to you is.</a:t>
+            </a:r>
+          </a:p>
+          <a:p/>
+        </p:txBody>
+      </p:sp>
+      <p:sp>
+        <p:nvSpPr>
+          <p:cNvPr id="4" name="Slide Number Placeholder 3"/>
+          <p:cNvSpPr>
+            <a:spLocks noGrp="1"/>
+          </p:cNvSpPr>
+          <p:nvPr>
+            <p:ph type="sldNum" idx="5" sz="quarter"/>
+          </p:nvPr>
+        </p:nvSpPr>
+        <p:spPr/>
+      </p:sp>
+    </p:spTree>
+  </p:cSld>
+  <p:clrMapOvr>
+    <a:masterClrMapping/>
+  </p:clrMapOvr>
+</p:notes>
 </file>
 
 <file path=ppt/slideLayouts/slideLayout1.xml><?xml version="1.0" encoding="utf-8"?>
@@ -3089,6 +3791,14 @@
 <file path=ppt/slides/slide1.xml><?xml version="1.0" encoding="utf-8"?>
 <p:sld xmlns:a="http://schemas.openxmlformats.org/drawingml/2006/main" xmlns:p="http://schemas.openxmlformats.org/presentationml/2006/main" xmlns:r="http://schemas.openxmlformats.org/officeDocument/2006/relationships">
   <p:cSld>
+    <p:bg>
+      <p:bgPr>
+        <a:solidFill>
+          <a:srgbClr val="F5F7F8"/>
+        </a:solidFill>
+        <a:effectLst/>
+      </p:bgPr>
+    </p:bg>
     <p:spTree>
       <p:nvGrpSpPr>
         <p:cNvPr id="1" name=""/>
@@ -3096,40 +3806,116 @@
         <p:nvPr/>
       </p:nvGrpSpPr>
       <p:grpSpPr/>
-      <p:pic>
-        <p:nvPicPr>
-          <p:cNvPr id="2" name="Picture 1" descr="slide-01.png"/>
-          <p:cNvPicPr>
-            <a:picLocks noChangeAspect="1"/>
-          </p:cNvPicPr>
-          <p:nvPr/>
-        </p:nvPicPr>
-        <p:blipFill>
-          <a:blip r:embed="rId2"/>
-          <a:stretch>
-            <a:fillRect/>
-          </a:stretch>
-        </p:blipFill>
+      <p:sp>
+        <p:nvSpPr>
+          <p:cNvPr id="2" name="__pip_placeholder__"/>
+          <p:cNvSpPr/>
+          <p:nvPr/>
+        </p:nvSpPr>
+        <p:spPr>
+          <a:xfrm>
+            <a:off x="8351215" y="0"/>
+            <a:ext cx="3840480" cy="2880360"/>
+          </a:xfrm>
+          <a:prstGeom prst="rect">
+            <a:avLst/>
+          </a:prstGeom>
+          <a:solidFill>
+            <a:srgbClr val="DBE7EC">
+              <a:alpha val="30000"/>
+            </a:srgbClr>
+          </a:solidFill>
+          <a:ln w="19050">
+            <a:solidFill>
+              <a:srgbClr val="355C7D"/>
+            </a:solidFill>
+            <a:prstDash val="sysDash"/>
+          </a:ln>
+        </p:spPr>
+        <p:style>
+          <a:lnRef idx="1">
+            <a:schemeClr val="accent1"/>
+          </a:lnRef>
+          <a:fillRef idx="3">
+            <a:schemeClr val="accent1"/>
+          </a:fillRef>
+          <a:effectRef idx="2">
+            <a:schemeClr val="accent1"/>
+          </a:effectRef>
+          <a:fontRef idx="minor">
+            <a:schemeClr val="lt1"/>
+          </a:fontRef>
+        </p:style>
+        <p:txBody>
+          <a:bodyPr rtlCol="0" anchor="ctr" wrap="none"/>
+          <a:lstStyle/>
+          <a:p>
+            <a:pPr algn="ctr"/>
+            <a:r>
+              <a:rPr sz="1800" b="1">
+                <a:solidFill>
+                  <a:srgbClr val="355C7D"/>
+                </a:solidFill>
+                <a:latin typeface="Sarabun"/>
+              </a:rPr>
+              <a:t>Nine</a:t>
+            </a:r>
+          </a:p>
+        </p:txBody>
+      </p:sp>
+      <p:sp>
+        <p:nvSpPr>
+          <p:cNvPr id="3" name="Rectangle 2"/>
+          <p:cNvSpPr/>
+          <p:nvPr/>
+        </p:nvSpPr>
         <p:spPr>
           <a:xfrm>
             <a:off x="0" y="0"/>
-            <a:ext cx="12191695" cy="6858000"/>
-          </a:xfrm>
-          <a:prstGeom prst="rect">
-            <a:avLst/>
-          </a:prstGeom>
-        </p:spPr>
-      </p:pic>
-      <p:sp>
-        <p:nvSpPr>
-          <p:cNvPr id="3" name="TextBox 2"/>
+            <a:ext cx="12191695" cy="76200"/>
+          </a:xfrm>
+          <a:prstGeom prst="rect">
+            <a:avLst/>
+          </a:prstGeom>
+          <a:solidFill>
+            <a:srgbClr val="355C7D"/>
+          </a:solidFill>
+          <a:ln>
+            <a:noFill/>
+          </a:ln>
+        </p:spPr>
+        <p:style>
+          <a:lnRef idx="1">
+            <a:schemeClr val="accent1"/>
+          </a:lnRef>
+          <a:fillRef idx="3">
+            <a:schemeClr val="accent1"/>
+          </a:fillRef>
+          <a:effectRef idx="2">
+            <a:schemeClr val="accent1"/>
+          </a:effectRef>
+          <a:fontRef idx="minor">
+            <a:schemeClr val="lt1"/>
+          </a:fontRef>
+        </p:style>
+        <p:txBody>
+          <a:bodyPr rtlCol="0" anchor="ctr"/>
+          <a:lstStyle/>
+          <a:p>
+            <a:pPr algn="ctr"/>
+          </a:p>
+        </p:txBody>
+      </p:sp>
+      <p:sp>
+        <p:nvSpPr>
+          <p:cNvPr id="4" name="TextBox 3"/>
           <p:cNvSpPr txBox="1"/>
           <p:nvPr/>
         </p:nvSpPr>
         <p:spPr>
           <a:xfrm>
-            <a:off x="731520" y="1645920"/>
-            <a:ext cx="6858000" cy="365760"/>
+            <a:off x="731520" y="1600200"/>
+            <a:ext cx="7071055" cy="228600"/>
           </a:xfrm>
           <a:prstGeom prst="rect">
             <a:avLst/>
@@ -3159,14 +3945,14 @@
       </p:sp>
       <p:sp>
         <p:nvSpPr>
-          <p:cNvPr id="4" name="TextBox 3"/>
+          <p:cNvPr id="5" name="TextBox 4"/>
           <p:cNvSpPr txBox="1"/>
           <p:nvPr/>
         </p:nvSpPr>
         <p:spPr>
           <a:xfrm>
-            <a:off x="731520" y="2103120"/>
-            <a:ext cx="6858000" cy="457200"/>
+            <a:off x="731520" y="1993392"/>
+            <a:ext cx="7071055" cy="329184"/>
           </a:xfrm>
           <a:prstGeom prst="rect">
             <a:avLst/>
@@ -3181,7 +3967,7 @@
           <a:p>
             <a:pPr algn="l"/>
             <a:r>
-              <a:rPr sz="1900" b="0" i="0" lang="en-US" altLang="en-US">
+              <a:rPr sz="2000" b="0" i="0" lang="en-US" altLang="en-US">
                 <a:solidFill>
                   <a:srgbClr val="566873"/>
                 </a:solidFill>
@@ -3196,14 +3982,14 @@
       </p:sp>
       <p:sp>
         <p:nvSpPr>
-          <p:cNvPr id="5" name="TextBox 4"/>
+          <p:cNvPr id="6" name="TextBox 5"/>
           <p:cNvSpPr txBox="1"/>
           <p:nvPr/>
         </p:nvSpPr>
         <p:spPr>
           <a:xfrm>
-            <a:off x="731520" y="2651760"/>
-            <a:ext cx="6858000" cy="914400"/>
+            <a:off x="731520" y="2542032"/>
+            <a:ext cx="7071055" cy="1097280"/>
           </a:xfrm>
           <a:prstGeom prst="rect">
             <a:avLst/>
@@ -3218,7 +4004,7 @@
           <a:p>
             <a:pPr algn="l"/>
             <a:r>
-              <a:rPr sz="3800" b="1" i="0" lang="en-US" altLang="en-US">
+              <a:rPr sz="3200" b="1" i="0" lang="en-US" altLang="en-US">
                 <a:solidFill>
                   <a:srgbClr val="24333D"/>
                 </a:solidFill>
@@ -3233,14 +4019,14 @@
       </p:sp>
       <p:sp>
         <p:nvSpPr>
-          <p:cNvPr id="6" name="TextBox 5"/>
+          <p:cNvPr id="7" name="TextBox 6"/>
           <p:cNvSpPr txBox="1"/>
           <p:nvPr/>
         </p:nvSpPr>
         <p:spPr>
           <a:xfrm>
-            <a:off x="731520" y="5303520"/>
-            <a:ext cx="6858000" cy="365760"/>
+            <a:off x="932688" y="4261104"/>
+            <a:ext cx="6705295" cy="228600"/>
           </a:xfrm>
           <a:prstGeom prst="rect">
             <a:avLst/>
@@ -3255,9 +4041,206 @@
           <a:p>
             <a:pPr algn="l"/>
             <a:r>
-              <a:rPr sz="1500" b="0" i="0" lang="en-US" altLang="en-US">
-                <a:solidFill>
-                  <a:srgbClr val="566873"/>
+              <a:rPr sz="1700" b="1" i="0" lang="en-US" altLang="en-US">
+                <a:solidFill>
+                  <a:srgbClr val="355C7D"/>
+                </a:solidFill>
+                <a:latin typeface="Sarabun"/>
+                <a:ea typeface="Sarabun"/>
+                <a:cs typeface="Sarabun"/>
+              </a:rPr>
+              <a:t>Lesson focus</a:t>
+            </a:r>
+          </a:p>
+        </p:txBody>
+      </p:sp>
+      <p:sp>
+        <p:nvSpPr>
+          <p:cNvPr id="8" name="Oval 7"/>
+          <p:cNvSpPr/>
+          <p:nvPr/>
+        </p:nvSpPr>
+        <p:spPr>
+          <a:xfrm>
+            <a:off x="932688" y="4645152"/>
+            <a:ext cx="82296" cy="82296"/>
+          </a:xfrm>
+          <a:prstGeom prst="ellipse">
+            <a:avLst/>
+          </a:prstGeom>
+          <a:solidFill>
+            <a:srgbClr val="355C7D"/>
+          </a:solidFill>
+          <a:ln>
+            <a:noFill/>
+          </a:ln>
+        </p:spPr>
+        <p:style>
+          <a:lnRef idx="1">
+            <a:schemeClr val="accent1"/>
+          </a:lnRef>
+          <a:fillRef idx="3">
+            <a:schemeClr val="accent1"/>
+          </a:fillRef>
+          <a:effectRef idx="2">
+            <a:schemeClr val="accent1"/>
+          </a:effectRef>
+          <a:fontRef idx="minor">
+            <a:schemeClr val="lt1"/>
+          </a:fontRef>
+        </p:style>
+        <p:txBody>
+          <a:bodyPr rtlCol="0" anchor="ctr"/>
+          <a:lstStyle/>
+          <a:p>
+            <a:pPr algn="ctr"/>
+          </a:p>
+        </p:txBody>
+      </p:sp>
+      <p:sp>
+        <p:nvSpPr>
+          <p:cNvPr id="9" name="TextBox 8"/>
+          <p:cNvSpPr txBox="1"/>
+          <p:nvPr/>
+        </p:nvSpPr>
+        <p:spPr>
+          <a:xfrm>
+            <a:off x="1078992" y="4553712"/>
+            <a:ext cx="6568135" cy="274320"/>
+          </a:xfrm>
+          <a:prstGeom prst="rect">
+            <a:avLst/>
+          </a:prstGeom>
+          <a:noFill/>
+        </p:spPr>
+        <p:txBody>
+          <a:bodyPr wrap="square" anchor="t">
+            <a:spAutoFit/>
+          </a:bodyPr>
+          <a:lstStyle/>
+          <a:p>
+            <a:pPr algn="l"/>
+            <a:r>
+              <a:rPr sz="1700" b="0" i="0" lang="en-US" altLang="en-US">
+                <a:solidFill>
+                  <a:srgbClr val="24333D"/>
+                </a:solidFill>
+                <a:latin typeface="Sarabun"/>
+                <a:ea typeface="Sarabun"/>
+                <a:cs typeface="Sarabun"/>
+              </a:rPr>
+              <a:t>You can use basic pronouns and ask who someone is.</a:t>
+            </a:r>
+          </a:p>
+        </p:txBody>
+      </p:sp>
+      <p:sp>
+        <p:nvSpPr>
+          <p:cNvPr id="10" name="Oval 9"/>
+          <p:cNvSpPr/>
+          <p:nvPr/>
+        </p:nvSpPr>
+        <p:spPr>
+          <a:xfrm>
+            <a:off x="932688" y="4974336"/>
+            <a:ext cx="82296" cy="82296"/>
+          </a:xfrm>
+          <a:prstGeom prst="ellipse">
+            <a:avLst/>
+          </a:prstGeom>
+          <a:solidFill>
+            <a:srgbClr val="355C7D"/>
+          </a:solidFill>
+          <a:ln>
+            <a:noFill/>
+          </a:ln>
+        </p:spPr>
+        <p:style>
+          <a:lnRef idx="1">
+            <a:schemeClr val="accent1"/>
+          </a:lnRef>
+          <a:fillRef idx="3">
+            <a:schemeClr val="accent1"/>
+          </a:fillRef>
+          <a:effectRef idx="2">
+            <a:schemeClr val="accent1"/>
+          </a:effectRef>
+          <a:fontRef idx="minor">
+            <a:schemeClr val="lt1"/>
+          </a:fontRef>
+        </p:style>
+        <p:txBody>
+          <a:bodyPr rtlCol="0" anchor="ctr"/>
+          <a:lstStyle/>
+          <a:p>
+            <a:pPr algn="ctr"/>
+          </a:p>
+        </p:txBody>
+      </p:sp>
+      <p:sp>
+        <p:nvSpPr>
+          <p:cNvPr id="11" name="TextBox 10"/>
+          <p:cNvSpPr txBox="1"/>
+          <p:nvPr/>
+        </p:nvSpPr>
+        <p:spPr>
+          <a:xfrm>
+            <a:off x="1078992" y="4882896"/>
+            <a:ext cx="6568135" cy="475488"/>
+          </a:xfrm>
+          <a:prstGeom prst="rect">
+            <a:avLst/>
+          </a:prstGeom>
+          <a:noFill/>
+        </p:spPr>
+        <p:txBody>
+          <a:bodyPr wrap="square" anchor="t">
+            <a:spAutoFit/>
+          </a:bodyPr>
+          <a:lstStyle/>
+          <a:p>
+            <a:pPr algn="l"/>
+            <a:r>
+              <a:rPr sz="1700" b="0" i="0" lang="en-US" altLang="en-US">
+                <a:solidFill>
+                  <a:srgbClr val="24333D"/>
+                </a:solidFill>
+                <a:latin typeface="Sarabun"/>
+                <a:ea typeface="Sarabun"/>
+                <a:cs typeface="Sarabun"/>
+              </a:rPr>
+              <a:t>Point, identify, and ask who someone is in a mini-dialogue.</a:t>
+            </a:r>
+          </a:p>
+        </p:txBody>
+      </p:sp>
+      <p:sp>
+        <p:nvSpPr>
+          <p:cNvPr id="12" name="TextBox 11"/>
+          <p:cNvSpPr txBox="1"/>
+          <p:nvPr/>
+        </p:nvSpPr>
+        <p:spPr>
+          <a:xfrm>
+            <a:off x="731520" y="5669280"/>
+            <a:ext cx="10058400" cy="228600"/>
+          </a:xfrm>
+          <a:prstGeom prst="rect">
+            <a:avLst/>
+          </a:prstGeom>
+          <a:noFill/>
+        </p:spPr>
+        <p:txBody>
+          <a:bodyPr wrap="square" anchor="t">
+            <a:spAutoFit/>
+          </a:bodyPr>
+          <a:lstStyle/>
+          <a:p>
+            <a:pPr algn="l"/>
+            <a:r>
+              <a:rPr sz="1200" b="0" i="0" lang="en-US" altLang="en-US">
+                <a:solidFill>
+                  <a:srgbClr val="82909A"/>
                 </a:solidFill>
                 <a:latin typeface="Sarabun"/>
                 <a:ea typeface="Sarabun"/>
@@ -3279,6 +4262,14 @@
 <file path=ppt/slides/slide2.xml><?xml version="1.0" encoding="utf-8"?>
 <p:sld xmlns:a="http://schemas.openxmlformats.org/drawingml/2006/main" xmlns:p="http://schemas.openxmlformats.org/presentationml/2006/main" xmlns:r="http://schemas.openxmlformats.org/officeDocument/2006/relationships">
   <p:cSld>
+    <p:bg>
+      <p:bgPr>
+        <a:solidFill>
+          <a:srgbClr val="F5F7F8"/>
+        </a:solidFill>
+        <a:effectLst/>
+      </p:bgPr>
+    </p:bg>
     <p:spTree>
       <p:nvGrpSpPr>
         <p:cNvPr id="1" name=""/>
@@ -3286,40 +4277,116 @@
         <p:nvPr/>
       </p:nvGrpSpPr>
       <p:grpSpPr/>
-      <p:pic>
-        <p:nvPicPr>
-          <p:cNvPr id="2" name="Picture 1" descr="slide-02.png"/>
-          <p:cNvPicPr>
-            <a:picLocks noChangeAspect="1"/>
-          </p:cNvPicPr>
-          <p:nvPr/>
-        </p:nvPicPr>
-        <p:blipFill>
-          <a:blip r:embed="rId2"/>
-          <a:stretch>
-            <a:fillRect/>
-          </a:stretch>
-        </p:blipFill>
+      <p:sp>
+        <p:nvSpPr>
+          <p:cNvPr id="2" name="__pip_placeholder__"/>
+          <p:cNvSpPr/>
+          <p:nvPr/>
+        </p:nvSpPr>
+        <p:spPr>
+          <a:xfrm>
+            <a:off x="8351215" y="0"/>
+            <a:ext cx="3840480" cy="2880360"/>
+          </a:xfrm>
+          <a:prstGeom prst="rect">
+            <a:avLst/>
+          </a:prstGeom>
+          <a:solidFill>
+            <a:srgbClr val="DBE7EC">
+              <a:alpha val="30000"/>
+            </a:srgbClr>
+          </a:solidFill>
+          <a:ln w="19050">
+            <a:solidFill>
+              <a:srgbClr val="355C7D"/>
+            </a:solidFill>
+            <a:prstDash val="sysDash"/>
+          </a:ln>
+        </p:spPr>
+        <p:style>
+          <a:lnRef idx="1">
+            <a:schemeClr val="accent1"/>
+          </a:lnRef>
+          <a:fillRef idx="3">
+            <a:schemeClr val="accent1"/>
+          </a:fillRef>
+          <a:effectRef idx="2">
+            <a:schemeClr val="accent1"/>
+          </a:effectRef>
+          <a:fontRef idx="minor">
+            <a:schemeClr val="lt1"/>
+          </a:fontRef>
+        </p:style>
+        <p:txBody>
+          <a:bodyPr rtlCol="0" anchor="ctr" wrap="none"/>
+          <a:lstStyle/>
+          <a:p>
+            <a:pPr algn="ctr"/>
+            <a:r>
+              <a:rPr sz="1800" b="1">
+                <a:solidFill>
+                  <a:srgbClr val="355C7D"/>
+                </a:solidFill>
+                <a:latin typeface="Sarabun"/>
+              </a:rPr>
+              <a:t>Nine</a:t>
+            </a:r>
+          </a:p>
+        </p:txBody>
+      </p:sp>
+      <p:sp>
+        <p:nvSpPr>
+          <p:cNvPr id="3" name="Rectangle 2"/>
+          <p:cNvSpPr/>
+          <p:nvPr/>
+        </p:nvSpPr>
         <p:spPr>
           <a:xfrm>
             <a:off x="0" y="0"/>
-            <a:ext cx="12191695" cy="6858000"/>
-          </a:xfrm>
-          <a:prstGeom prst="rect">
-            <a:avLst/>
-          </a:prstGeom>
-        </p:spPr>
-      </p:pic>
-      <p:sp>
-        <p:nvSpPr>
-          <p:cNvPr id="3" name="TextBox 2"/>
+            <a:ext cx="12191695" cy="63500"/>
+          </a:xfrm>
+          <a:prstGeom prst="rect">
+            <a:avLst/>
+          </a:prstGeom>
+          <a:solidFill>
+            <a:srgbClr val="355C7D"/>
+          </a:solidFill>
+          <a:ln>
+            <a:noFill/>
+          </a:ln>
+        </p:spPr>
+        <p:style>
+          <a:lnRef idx="1">
+            <a:schemeClr val="accent1"/>
+          </a:lnRef>
+          <a:fillRef idx="3">
+            <a:schemeClr val="accent1"/>
+          </a:fillRef>
+          <a:effectRef idx="2">
+            <a:schemeClr val="accent1"/>
+          </a:effectRef>
+          <a:fontRef idx="minor">
+            <a:schemeClr val="lt1"/>
+          </a:fontRef>
+        </p:style>
+        <p:txBody>
+          <a:bodyPr rtlCol="0" anchor="ctr"/>
+          <a:lstStyle/>
+          <a:p>
+            <a:pPr algn="ctr"/>
+          </a:p>
+        </p:txBody>
+      </p:sp>
+      <p:sp>
+        <p:nvSpPr>
+          <p:cNvPr id="4" name="TextBox 3"/>
           <p:cNvSpPr txBox="1"/>
           <p:nvPr/>
         </p:nvSpPr>
         <p:spPr>
           <a:xfrm>
-            <a:off x="731520" y="1061443"/>
-            <a:ext cx="6858000" cy="457200"/>
+            <a:off x="731520" y="256032"/>
+            <a:ext cx="7071055" cy="256032"/>
           </a:xfrm>
           <a:prstGeom prst="rect">
             <a:avLst/>
@@ -3334,29 +4401,29 @@
           <a:p>
             <a:pPr algn="l"/>
             <a:r>
-              <a:rPr sz="3000" b="1" i="0" lang="en-US" altLang="en-US">
-                <a:solidFill>
-                  <a:srgbClr val="24333D"/>
-                </a:solidFill>
-                <a:latin typeface="Sarabun"/>
-                <a:ea typeface="Sarabun"/>
-                <a:cs typeface="Sarabun"/>
-              </a:rPr>
-              <a:t>What you will learn</a:t>
-            </a:r>
-          </a:p>
-        </p:txBody>
-      </p:sp>
-      <p:sp>
-        <p:nvSpPr>
-          <p:cNvPr id="4" name="TextBox 3"/>
+              <a:rPr sz="1200" b="1" i="0" lang="en-US" altLang="en-US">
+                <a:solidFill>
+                  <a:srgbClr val="355C7D"/>
+                </a:solidFill>
+                <a:latin typeface="Sarabun"/>
+                <a:ea typeface="Sarabun"/>
+                <a:cs typeface="Sarabun"/>
+              </a:rPr>
+              <a:t>Lesson objectives</a:t>
+            </a:r>
+          </a:p>
+        </p:txBody>
+      </p:sp>
+      <p:sp>
+        <p:nvSpPr>
+          <p:cNvPr id="5" name="TextBox 4"/>
           <p:cNvSpPr txBox="1"/>
           <p:nvPr/>
         </p:nvSpPr>
         <p:spPr>
           <a:xfrm>
-            <a:off x="1280047" y="1964720"/>
-            <a:ext cx="6217800" cy="457200"/>
+            <a:off x="731520" y="530352"/>
+            <a:ext cx="7071055" cy="640080"/>
           </a:xfrm>
           <a:prstGeom prst="rect">
             <a:avLst/>
@@ -3371,7 +4438,7 @@
           <a:p>
             <a:pPr algn="l"/>
             <a:r>
-              <a:rPr sz="1600" b="0" i="0" lang="en-US" altLang="en-US">
+              <a:rPr sz="3600" b="1" i="0" lang="en-US" altLang="en-US">
                 <a:solidFill>
                   <a:srgbClr val="24333D"/>
                 </a:solidFill>
@@ -3379,120 +4446,62 @@
                 <a:ea typeface="Sarabun"/>
                 <a:cs typeface="Sarabun"/>
               </a:rPr>
-              <a:t>1. Choose </a:t>
-            </a:r>
-            <a:r>
-              <a:rPr sz="1600" b="0" i="0" lang="th-TH" altLang="en-US">
-                <a:solidFill>
-                  <a:srgbClr val="24333D"/>
-                </a:solidFill>
-                <a:latin typeface="Sarabun"/>
-                <a:ea typeface="Sarabun"/>
-                <a:cs typeface="Sarabun"/>
-              </a:rPr>
-              <a:t>ฉัน</a:t>
-            </a:r>
-            <a:r>
-              <a:rPr sz="1500" b="0" i="1" lang="en-US" altLang="en-US">
-                <a:solidFill>
-                  <a:srgbClr val="566873"/>
-                </a:solidFill>
-                <a:latin typeface="Sarabun"/>
-                <a:ea typeface="Sarabun"/>
-                <a:cs typeface="Sarabun"/>
-              </a:rPr>
-              <a:t> (chǎn)</a:t>
-            </a:r>
-            <a:r>
-              <a:rPr sz="1600" b="0" i="0" lang="en-US" altLang="en-US">
-                <a:solidFill>
-                  <a:srgbClr val="24333D"/>
-                </a:solidFill>
-                <a:latin typeface="Sarabun"/>
-                <a:ea typeface="Sarabun"/>
-                <a:cs typeface="Sarabun"/>
-              </a:rPr>
-              <a:t>, </a:t>
-            </a:r>
-            <a:r>
-              <a:rPr sz="1600" b="0" i="0" lang="th-TH" altLang="en-US">
-                <a:solidFill>
-                  <a:srgbClr val="24333D"/>
-                </a:solidFill>
-                <a:latin typeface="Sarabun"/>
-                <a:ea typeface="Sarabun"/>
-                <a:cs typeface="Sarabun"/>
-              </a:rPr>
-              <a:t>ผม</a:t>
-            </a:r>
-            <a:r>
-              <a:rPr sz="1500" b="0" i="1" lang="en-US" altLang="en-US">
-                <a:solidFill>
-                  <a:srgbClr val="566873"/>
-                </a:solidFill>
-                <a:latin typeface="Sarabun"/>
-                <a:ea typeface="Sarabun"/>
-                <a:cs typeface="Sarabun"/>
-              </a:rPr>
-              <a:t> (phǒm)</a:t>
-            </a:r>
-            <a:r>
-              <a:rPr sz="1600" b="0" i="0" lang="en-US" altLang="en-US">
-                <a:solidFill>
-                  <a:srgbClr val="24333D"/>
-                </a:solidFill>
-                <a:latin typeface="Sarabun"/>
-                <a:ea typeface="Sarabun"/>
-                <a:cs typeface="Sarabun"/>
-              </a:rPr>
-              <a:t>, and </a:t>
-            </a:r>
-            <a:r>
-              <a:rPr sz="1600" b="0" i="0" lang="th-TH" altLang="en-US">
-                <a:solidFill>
-                  <a:srgbClr val="24333D"/>
-                </a:solidFill>
-                <a:latin typeface="Sarabun"/>
-                <a:ea typeface="Sarabun"/>
-                <a:cs typeface="Sarabun"/>
-              </a:rPr>
-              <a:t>เขา</a:t>
-            </a:r>
-            <a:r>
-              <a:rPr sz="1500" b="0" i="1" lang="en-US" altLang="en-US">
-                <a:solidFill>
-                  <a:srgbClr val="566873"/>
-                </a:solidFill>
-                <a:latin typeface="Sarabun"/>
-                <a:ea typeface="Sarabun"/>
-                <a:cs typeface="Sarabun"/>
-              </a:rPr>
-              <a:t> (khǎo)</a:t>
-            </a:r>
-            <a:r>
-              <a:rPr sz="1600" b="0" i="0" lang="en-US" altLang="en-US">
-                <a:solidFill>
-                  <a:srgbClr val="24333D"/>
-                </a:solidFill>
-                <a:latin typeface="Sarabun"/>
-                <a:ea typeface="Sarabun"/>
-                <a:cs typeface="Sarabun"/>
-              </a:rPr>
-              <a:t> in the right role</a:t>
-            </a:r>
-          </a:p>
-        </p:txBody>
-      </p:sp>
-      <p:sp>
-        <p:nvSpPr>
-          <p:cNvPr id="5" name="TextBox 4"/>
+              <a:t>What you will learn</a:t>
+            </a:r>
+          </a:p>
+        </p:txBody>
+      </p:sp>
+      <p:sp>
+        <p:nvSpPr>
+          <p:cNvPr id="6" name="Rounded Rectangle 5"/>
+          <p:cNvSpPr/>
+          <p:nvPr/>
+        </p:nvSpPr>
+        <p:spPr>
+          <a:xfrm>
+            <a:off x="731520" y="1417320"/>
+            <a:ext cx="3200400" cy="1234440"/>
+          </a:xfrm>
+          <a:prstGeom prst="roundRect">
+            <a:avLst/>
+          </a:prstGeom>
+          <a:noFill/>
+          <a:ln>
+            <a:noFill/>
+          </a:ln>
+        </p:spPr>
+        <p:style>
+          <a:lnRef idx="1">
+            <a:schemeClr val="accent1"/>
+          </a:lnRef>
+          <a:fillRef idx="3">
+            <a:schemeClr val="accent1"/>
+          </a:fillRef>
+          <a:effectRef idx="2">
+            <a:schemeClr val="accent1"/>
+          </a:effectRef>
+          <a:fontRef idx="minor">
+            <a:schemeClr val="lt1"/>
+          </a:fontRef>
+        </p:style>
+        <p:txBody>
+          <a:bodyPr rtlCol="0" anchor="ctr"/>
+          <a:lstStyle/>
+          <a:p>
+            <a:pPr algn="ctr"/>
+          </a:p>
+        </p:txBody>
+      </p:sp>
+      <p:sp>
+        <p:nvSpPr>
+          <p:cNvPr id="7" name="TextBox 6"/>
           <p:cNvSpPr txBox="1"/>
           <p:nvPr/>
         </p:nvSpPr>
         <p:spPr>
           <a:xfrm>
-            <a:off x="1280047" y="2649225"/>
-            <a:ext cx="6217800" cy="457200"/>
+            <a:off x="950976" y="1581912"/>
+            <a:ext cx="365760" cy="228600"/>
           </a:xfrm>
           <a:prstGeom prst="rect">
             <a:avLst/>
@@ -3507,84 +4516,29 @@
           <a:p>
             <a:pPr algn="l"/>
             <a:r>
-              <a:rPr sz="1600" b="0" i="0" lang="en-US" altLang="en-US">
-                <a:solidFill>
-                  <a:srgbClr val="24333D"/>
-                </a:solidFill>
-                <a:latin typeface="Sarabun"/>
-                <a:ea typeface="Sarabun"/>
-                <a:cs typeface="Sarabun"/>
-              </a:rPr>
-              <a:t>2. Introduce someone with </a:t>
-            </a:r>
-            <a:r>
-              <a:rPr sz="1600" b="0" i="0" lang="th-TH" altLang="en-US">
-                <a:solidFill>
-                  <a:srgbClr val="24333D"/>
-                </a:solidFill>
-                <a:latin typeface="Sarabun"/>
-                <a:ea typeface="Sarabun"/>
-                <a:cs typeface="Sarabun"/>
-              </a:rPr>
-              <a:t>นี่คือ...</a:t>
-            </a:r>
-            <a:r>
-              <a:rPr sz="1500" b="0" i="1" lang="en-US" altLang="en-US">
-                <a:solidFill>
-                  <a:srgbClr val="566873"/>
-                </a:solidFill>
-                <a:latin typeface="Sarabun"/>
-                <a:ea typeface="Sarabun"/>
-                <a:cs typeface="Sarabun"/>
-              </a:rPr>
-              <a:t> (nîi kheuu...)</a:t>
-            </a:r>
-            <a:r>
-              <a:rPr sz="1600" b="0" i="0" lang="en-US" altLang="en-US">
-                <a:solidFill>
-                  <a:srgbClr val="24333D"/>
-                </a:solidFill>
-                <a:latin typeface="Sarabun"/>
-                <a:ea typeface="Sarabun"/>
-                <a:cs typeface="Sarabun"/>
-              </a:rPr>
-              <a:t> and </a:t>
-            </a:r>
-            <a:r>
-              <a:rPr sz="1600" b="0" i="0" lang="th-TH" altLang="en-US">
-                <a:solidFill>
-                  <a:srgbClr val="24333D"/>
-                </a:solidFill>
-                <a:latin typeface="Sarabun"/>
-                <a:ea typeface="Sarabun"/>
-                <a:cs typeface="Sarabun"/>
-              </a:rPr>
-              <a:t>เขาคือ...</a:t>
-            </a:r>
-            <a:r>
-              <a:rPr sz="1500" b="0" i="1" lang="en-US" altLang="en-US">
-                <a:solidFill>
-                  <a:srgbClr val="566873"/>
-                </a:solidFill>
-                <a:latin typeface="Sarabun"/>
-                <a:ea typeface="Sarabun"/>
-                <a:cs typeface="Sarabun"/>
-              </a:rPr>
-              <a:t> (khǎo kheuu...)</a:t>
-            </a:r>
-          </a:p>
-        </p:txBody>
-      </p:sp>
-      <p:sp>
-        <p:nvSpPr>
-          <p:cNvPr id="6" name="TextBox 5"/>
+              <a:rPr sz="1200" b="1" i="0" lang="en-US" altLang="en-US">
+                <a:solidFill>
+                  <a:srgbClr val="355C7D"/>
+                </a:solidFill>
+                <a:latin typeface="Sarabun"/>
+                <a:ea typeface="Sarabun"/>
+                <a:cs typeface="Sarabun"/>
+              </a:rPr>
+              <a:t>1</a:t>
+            </a:r>
+          </a:p>
+        </p:txBody>
+      </p:sp>
+      <p:sp>
+        <p:nvSpPr>
+          <p:cNvPr id="8" name="TextBox 7"/>
           <p:cNvSpPr txBox="1"/>
           <p:nvPr/>
         </p:nvSpPr>
         <p:spPr>
           <a:xfrm>
-            <a:off x="1280047" y="3333730"/>
-            <a:ext cx="6217800" cy="457200"/>
+            <a:off x="950976" y="1837944"/>
+            <a:ext cx="2761488" cy="640080"/>
           </a:xfrm>
           <a:prstGeom prst="rect">
             <a:avLst/>
@@ -3599,7 +4553,7 @@
           <a:p>
             <a:pPr algn="l"/>
             <a:r>
-              <a:rPr sz="1600" b="0" i="0" lang="en-US" altLang="en-US">
+              <a:rPr sz="1700" b="0" i="0" lang="en-US" altLang="en-US">
                 <a:solidFill>
                   <a:srgbClr val="24333D"/>
                 </a:solidFill>
@@ -3607,43 +4561,62 @@
                 <a:ea typeface="Sarabun"/>
                 <a:cs typeface="Sarabun"/>
               </a:rPr>
-              <a:t>3. Ask who someone is with </a:t>
-            </a:r>
-            <a:r>
-              <a:rPr sz="1600" b="0" i="0" lang="th-TH" altLang="en-US">
-                <a:solidFill>
-                  <a:srgbClr val="24333D"/>
-                </a:solidFill>
-                <a:latin typeface="Sarabun"/>
-                <a:ea typeface="Sarabun"/>
-                <a:cs typeface="Sarabun"/>
-              </a:rPr>
-              <a:t>เขาคือใคร</a:t>
-            </a:r>
-            <a:r>
-              <a:rPr sz="1500" b="0" i="1" lang="en-US" altLang="en-US">
-                <a:solidFill>
-                  <a:srgbClr val="566873"/>
-                </a:solidFill>
-                <a:latin typeface="Sarabun"/>
-                <a:ea typeface="Sarabun"/>
-                <a:cs typeface="Sarabun"/>
-              </a:rPr>
-              <a:t> (khǎo kheuu khrai)</a:t>
-            </a:r>
-          </a:p>
-        </p:txBody>
-      </p:sp>
-      <p:sp>
-        <p:nvSpPr>
-          <p:cNvPr id="7" name="TextBox 6"/>
+              <a:t>You can use basic pronouns and ask who someone is.</a:t>
+            </a:r>
+          </a:p>
+        </p:txBody>
+      </p:sp>
+      <p:sp>
+        <p:nvSpPr>
+          <p:cNvPr id="9" name="Rounded Rectangle 8"/>
+          <p:cNvSpPr/>
+          <p:nvPr/>
+        </p:nvSpPr>
+        <p:spPr>
+          <a:xfrm>
+            <a:off x="4251960" y="1417320"/>
+            <a:ext cx="3200400" cy="1234440"/>
+          </a:xfrm>
+          <a:prstGeom prst="roundRect">
+            <a:avLst/>
+          </a:prstGeom>
+          <a:noFill/>
+          <a:ln>
+            <a:noFill/>
+          </a:ln>
+        </p:spPr>
+        <p:style>
+          <a:lnRef idx="1">
+            <a:schemeClr val="accent1"/>
+          </a:lnRef>
+          <a:fillRef idx="3">
+            <a:schemeClr val="accent1"/>
+          </a:fillRef>
+          <a:effectRef idx="2">
+            <a:schemeClr val="accent1"/>
+          </a:effectRef>
+          <a:fontRef idx="minor">
+            <a:schemeClr val="lt1"/>
+          </a:fontRef>
+        </p:style>
+        <p:txBody>
+          <a:bodyPr rtlCol="0" anchor="ctr"/>
+          <a:lstStyle/>
+          <a:p>
+            <a:pPr algn="ctr"/>
+          </a:p>
+        </p:txBody>
+      </p:sp>
+      <p:sp>
+        <p:nvSpPr>
+          <p:cNvPr id="10" name="TextBox 9"/>
           <p:cNvSpPr txBox="1"/>
           <p:nvPr/>
         </p:nvSpPr>
         <p:spPr>
           <a:xfrm>
-            <a:off x="1280160" y="4018260"/>
-            <a:ext cx="6217800" cy="457200"/>
+            <a:off x="4471416" y="1581912"/>
+            <a:ext cx="365760" cy="228600"/>
           </a:xfrm>
           <a:prstGeom prst="rect">
             <a:avLst/>
@@ -3658,29 +4631,29 @@
           <a:p>
             <a:pPr algn="l"/>
             <a:r>
-              <a:rPr sz="1600" b="0" i="0" lang="en-US" altLang="en-US">
-                <a:solidFill>
-                  <a:srgbClr val="24333D"/>
-                </a:solidFill>
-                <a:latin typeface="Sarabun"/>
-                <a:ea typeface="Sarabun"/>
-                <a:cs typeface="Sarabun"/>
-              </a:rPr>
-              <a:t>4. Confirm or reject an identification politely</a:t>
-            </a:r>
-          </a:p>
-        </p:txBody>
-      </p:sp>
-      <p:sp>
-        <p:nvSpPr>
-          <p:cNvPr id="8" name="TextBox 7"/>
+              <a:rPr sz="1200" b="1" i="0" lang="en-US" altLang="en-US">
+                <a:solidFill>
+                  <a:srgbClr val="355C7D"/>
+                </a:solidFill>
+                <a:latin typeface="Sarabun"/>
+                <a:ea typeface="Sarabun"/>
+                <a:cs typeface="Sarabun"/>
+              </a:rPr>
+              <a:t>2</a:t>
+            </a:r>
+          </a:p>
+        </p:txBody>
+      </p:sp>
+      <p:sp>
+        <p:nvSpPr>
+          <p:cNvPr id="11" name="TextBox 10"/>
           <p:cNvSpPr txBox="1"/>
           <p:nvPr/>
         </p:nvSpPr>
         <p:spPr>
           <a:xfrm>
-            <a:off x="1280160" y="4690815"/>
-            <a:ext cx="6217800" cy="457200"/>
+            <a:off x="4471416" y="1837944"/>
+            <a:ext cx="2761488" cy="640080"/>
           </a:xfrm>
           <a:prstGeom prst="rect">
             <a:avLst/>
@@ -3695,7 +4668,7 @@
           <a:p>
             <a:pPr algn="l"/>
             <a:r>
-              <a:rPr sz="1600" b="0" i="0" lang="en-US" altLang="en-US">
+              <a:rPr sz="1700" b="0" i="0" lang="en-US" altLang="en-US">
                 <a:solidFill>
                   <a:srgbClr val="24333D"/>
                 </a:solidFill>
@@ -3703,7 +4676,270 @@
                 <a:ea typeface="Sarabun"/>
                 <a:cs typeface="Sarabun"/>
               </a:rPr>
-              <a:t>5. Build a short identity exchange</a:t>
+              <a:t>You can recycle recent vocabulary while using identity question with </a:t>
+            </a:r>
+            <a:r>
+              <a:rPr sz="1700" b="0" i="0" lang="th-TH" altLang="en-US">
+                <a:solidFill>
+                  <a:srgbClr val="24333D"/>
+                </a:solidFill>
+                <a:latin typeface="Sarabun"/>
+                <a:ea typeface="Sarabun"/>
+                <a:cs typeface="Sarabun"/>
+              </a:rPr>
+              <a:t>ใคร</a:t>
+            </a:r>
+            <a:r>
+              <a:rPr sz="1700" b="0" i="1" lang="en-US" altLang="en-US">
+                <a:solidFill>
+                  <a:srgbClr val="566873"/>
+                </a:solidFill>
+                <a:latin typeface="Sarabun"/>
+                <a:ea typeface="Sarabun"/>
+                <a:cs typeface="Sarabun"/>
+              </a:rPr>
+              <a:t> (khrai)</a:t>
+            </a:r>
+            <a:r>
+              <a:rPr sz="1700" b="0" i="0" lang="en-US" altLang="en-US">
+                <a:solidFill>
+                  <a:srgbClr val="24333D"/>
+                </a:solidFill>
+                <a:latin typeface="Sarabun"/>
+                <a:ea typeface="Sarabun"/>
+                <a:cs typeface="Sarabun"/>
+              </a:rPr>
+              <a:t> in short controlled output.</a:t>
+            </a:r>
+          </a:p>
+        </p:txBody>
+      </p:sp>
+      <p:sp>
+        <p:nvSpPr>
+          <p:cNvPr id="12" name="Rounded Rectangle 11"/>
+          <p:cNvSpPr/>
+          <p:nvPr/>
+        </p:nvSpPr>
+        <p:spPr>
+          <a:xfrm>
+            <a:off x="731520" y="3063240"/>
+            <a:ext cx="3200400" cy="1234440"/>
+          </a:xfrm>
+          <a:prstGeom prst="roundRect">
+            <a:avLst/>
+          </a:prstGeom>
+          <a:noFill/>
+          <a:ln>
+            <a:noFill/>
+          </a:ln>
+        </p:spPr>
+        <p:style>
+          <a:lnRef idx="1">
+            <a:schemeClr val="accent1"/>
+          </a:lnRef>
+          <a:fillRef idx="3">
+            <a:schemeClr val="accent1"/>
+          </a:fillRef>
+          <a:effectRef idx="2">
+            <a:schemeClr val="accent1"/>
+          </a:effectRef>
+          <a:fontRef idx="minor">
+            <a:schemeClr val="lt1"/>
+          </a:fontRef>
+        </p:style>
+        <p:txBody>
+          <a:bodyPr rtlCol="0" anchor="ctr"/>
+          <a:lstStyle/>
+          <a:p>
+            <a:pPr algn="ctr"/>
+          </a:p>
+        </p:txBody>
+      </p:sp>
+      <p:sp>
+        <p:nvSpPr>
+          <p:cNvPr id="13" name="TextBox 12"/>
+          <p:cNvSpPr txBox="1"/>
+          <p:nvPr/>
+        </p:nvSpPr>
+        <p:spPr>
+          <a:xfrm>
+            <a:off x="950976" y="3227832"/>
+            <a:ext cx="365760" cy="228600"/>
+          </a:xfrm>
+          <a:prstGeom prst="rect">
+            <a:avLst/>
+          </a:prstGeom>
+          <a:noFill/>
+        </p:spPr>
+        <p:txBody>
+          <a:bodyPr wrap="square" anchor="t">
+            <a:spAutoFit/>
+          </a:bodyPr>
+          <a:lstStyle/>
+          <a:p>
+            <a:pPr algn="l"/>
+            <a:r>
+              <a:rPr sz="1200" b="1" i="0" lang="en-US" altLang="en-US">
+                <a:solidFill>
+                  <a:srgbClr val="355C7D"/>
+                </a:solidFill>
+                <a:latin typeface="Sarabun"/>
+                <a:ea typeface="Sarabun"/>
+                <a:cs typeface="Sarabun"/>
+              </a:rPr>
+              <a:t>3</a:t>
+            </a:r>
+          </a:p>
+        </p:txBody>
+      </p:sp>
+      <p:sp>
+        <p:nvSpPr>
+          <p:cNvPr id="14" name="TextBox 13"/>
+          <p:cNvSpPr txBox="1"/>
+          <p:nvPr/>
+        </p:nvSpPr>
+        <p:spPr>
+          <a:xfrm>
+            <a:off x="950976" y="3483864"/>
+            <a:ext cx="2761488" cy="640080"/>
+          </a:xfrm>
+          <a:prstGeom prst="rect">
+            <a:avLst/>
+          </a:prstGeom>
+          <a:noFill/>
+        </p:spPr>
+        <p:txBody>
+          <a:bodyPr wrap="square" anchor="t">
+            <a:spAutoFit/>
+          </a:bodyPr>
+          <a:lstStyle/>
+          <a:p>
+            <a:pPr algn="l"/>
+            <a:r>
+              <a:rPr sz="1700" b="0" i="0" lang="en-US" altLang="en-US">
+                <a:solidFill>
+                  <a:srgbClr val="24333D"/>
+                </a:solidFill>
+                <a:latin typeface="Sarabun"/>
+                <a:ea typeface="Sarabun"/>
+                <a:cs typeface="Sarabun"/>
+              </a:rPr>
+              <a:t>Point, identify, and ask who someone is in a mini-dialogue.</a:t>
+            </a:r>
+          </a:p>
+        </p:txBody>
+      </p:sp>
+      <p:sp>
+        <p:nvSpPr>
+          <p:cNvPr id="15" name="Rounded Rectangle 14"/>
+          <p:cNvSpPr/>
+          <p:nvPr/>
+        </p:nvSpPr>
+        <p:spPr>
+          <a:xfrm>
+            <a:off x="4251960" y="3063240"/>
+            <a:ext cx="3200400" cy="1234440"/>
+          </a:xfrm>
+          <a:prstGeom prst="roundRect">
+            <a:avLst/>
+          </a:prstGeom>
+          <a:noFill/>
+          <a:ln>
+            <a:noFill/>
+          </a:ln>
+        </p:spPr>
+        <p:style>
+          <a:lnRef idx="1">
+            <a:schemeClr val="accent1"/>
+          </a:lnRef>
+          <a:fillRef idx="3">
+            <a:schemeClr val="accent1"/>
+          </a:fillRef>
+          <a:effectRef idx="2">
+            <a:schemeClr val="accent1"/>
+          </a:effectRef>
+          <a:fontRef idx="minor">
+            <a:schemeClr val="lt1"/>
+          </a:fontRef>
+        </p:style>
+        <p:txBody>
+          <a:bodyPr rtlCol="0" anchor="ctr"/>
+          <a:lstStyle/>
+          <a:p>
+            <a:pPr algn="ctr"/>
+          </a:p>
+        </p:txBody>
+      </p:sp>
+      <p:sp>
+        <p:nvSpPr>
+          <p:cNvPr id="16" name="TextBox 15"/>
+          <p:cNvSpPr txBox="1"/>
+          <p:nvPr/>
+        </p:nvSpPr>
+        <p:spPr>
+          <a:xfrm>
+            <a:off x="4471416" y="3227832"/>
+            <a:ext cx="365760" cy="228600"/>
+          </a:xfrm>
+          <a:prstGeom prst="rect">
+            <a:avLst/>
+          </a:prstGeom>
+          <a:noFill/>
+        </p:spPr>
+        <p:txBody>
+          <a:bodyPr wrap="square" anchor="t">
+            <a:spAutoFit/>
+          </a:bodyPr>
+          <a:lstStyle/>
+          <a:p>
+            <a:pPr algn="l"/>
+            <a:r>
+              <a:rPr sz="1200" b="1" i="0" lang="en-US" altLang="en-US">
+                <a:solidFill>
+                  <a:srgbClr val="355C7D"/>
+                </a:solidFill>
+                <a:latin typeface="Sarabun"/>
+                <a:ea typeface="Sarabun"/>
+                <a:cs typeface="Sarabun"/>
+              </a:rPr>
+              <a:t>4</a:t>
+            </a:r>
+          </a:p>
+        </p:txBody>
+      </p:sp>
+      <p:sp>
+        <p:nvSpPr>
+          <p:cNvPr id="17" name="TextBox 16"/>
+          <p:cNvSpPr txBox="1"/>
+          <p:nvPr/>
+        </p:nvSpPr>
+        <p:spPr>
+          <a:xfrm>
+            <a:off x="4471416" y="3483864"/>
+            <a:ext cx="2761488" cy="640080"/>
+          </a:xfrm>
+          <a:prstGeom prst="rect">
+            <a:avLst/>
+          </a:prstGeom>
+          <a:noFill/>
+        </p:spPr>
+        <p:txBody>
+          <a:bodyPr wrap="square" anchor="t">
+            <a:spAutoFit/>
+          </a:bodyPr>
+          <a:lstStyle/>
+          <a:p>
+            <a:pPr algn="l"/>
+            <a:r>
+              <a:rPr sz="1700" b="0" i="0" lang="en-US" altLang="en-US">
+                <a:solidFill>
+                  <a:srgbClr val="24333D"/>
+                </a:solidFill>
+                <a:latin typeface="Sarabun"/>
+                <a:ea typeface="Sarabun"/>
+                <a:cs typeface="Sarabun"/>
+              </a:rPr>
+              <a:t>Distinguish pronouns and who-questions in short exchanges.</a:t>
             </a:r>
           </a:p>
         </p:txBody>
@@ -3719,6 +4955,14 @@
 <file path=ppt/slides/slide3.xml><?xml version="1.0" encoding="utf-8"?>
 <p:sld xmlns:a="http://schemas.openxmlformats.org/drawingml/2006/main" xmlns:p="http://schemas.openxmlformats.org/presentationml/2006/main" xmlns:r="http://schemas.openxmlformats.org/officeDocument/2006/relationships">
   <p:cSld>
+    <p:bg>
+      <p:bgPr>
+        <a:solidFill>
+          <a:srgbClr val="F5F7F8"/>
+        </a:solidFill>
+        <a:effectLst/>
+      </p:bgPr>
+    </p:bg>
     <p:spTree>
       <p:nvGrpSpPr>
         <p:cNvPr id="1" name=""/>
@@ -3726,40 +4970,116 @@
         <p:nvPr/>
       </p:nvGrpSpPr>
       <p:grpSpPr/>
-      <p:pic>
-        <p:nvPicPr>
-          <p:cNvPr id="2" name="Picture 1" descr="slide-03.png"/>
-          <p:cNvPicPr>
-            <a:picLocks noChangeAspect="1"/>
-          </p:cNvPicPr>
-          <p:nvPr/>
-        </p:nvPicPr>
-        <p:blipFill>
-          <a:blip r:embed="rId2"/>
-          <a:stretch>
-            <a:fillRect/>
-          </a:stretch>
-        </p:blipFill>
+      <p:sp>
+        <p:nvSpPr>
+          <p:cNvPr id="2" name="__pip_placeholder__"/>
+          <p:cNvSpPr/>
+          <p:nvPr/>
+        </p:nvSpPr>
+        <p:spPr>
+          <a:xfrm>
+            <a:off x="8351215" y="0"/>
+            <a:ext cx="3840480" cy="2880360"/>
+          </a:xfrm>
+          <a:prstGeom prst="rect">
+            <a:avLst/>
+          </a:prstGeom>
+          <a:solidFill>
+            <a:srgbClr val="DBE7EC">
+              <a:alpha val="30000"/>
+            </a:srgbClr>
+          </a:solidFill>
+          <a:ln w="19050">
+            <a:solidFill>
+              <a:srgbClr val="355C7D"/>
+            </a:solidFill>
+            <a:prstDash val="sysDash"/>
+          </a:ln>
+        </p:spPr>
+        <p:style>
+          <a:lnRef idx="1">
+            <a:schemeClr val="accent1"/>
+          </a:lnRef>
+          <a:fillRef idx="3">
+            <a:schemeClr val="accent1"/>
+          </a:fillRef>
+          <a:effectRef idx="2">
+            <a:schemeClr val="accent1"/>
+          </a:effectRef>
+          <a:fontRef idx="minor">
+            <a:schemeClr val="lt1"/>
+          </a:fontRef>
+        </p:style>
+        <p:txBody>
+          <a:bodyPr rtlCol="0" anchor="ctr" wrap="none"/>
+          <a:lstStyle/>
+          <a:p>
+            <a:pPr algn="ctr"/>
+            <a:r>
+              <a:rPr sz="1800" b="1">
+                <a:solidFill>
+                  <a:srgbClr val="355C7D"/>
+                </a:solidFill>
+                <a:latin typeface="Sarabun"/>
+              </a:rPr>
+              <a:t>Nine</a:t>
+            </a:r>
+          </a:p>
+        </p:txBody>
+      </p:sp>
+      <p:sp>
+        <p:nvSpPr>
+          <p:cNvPr id="3" name="Rectangle 2"/>
+          <p:cNvSpPr/>
+          <p:nvPr/>
+        </p:nvSpPr>
         <p:spPr>
           <a:xfrm>
             <a:off x="0" y="0"/>
-            <a:ext cx="12191695" cy="6858000"/>
-          </a:xfrm>
-          <a:prstGeom prst="rect">
-            <a:avLst/>
-          </a:prstGeom>
-        </p:spPr>
-      </p:pic>
-      <p:sp>
-        <p:nvSpPr>
-          <p:cNvPr id="3" name="TextBox 2"/>
+            <a:ext cx="12191695" cy="63500"/>
+          </a:xfrm>
+          <a:prstGeom prst="rect">
+            <a:avLst/>
+          </a:prstGeom>
+          <a:solidFill>
+            <a:srgbClr val="355C7D"/>
+          </a:solidFill>
+          <a:ln>
+            <a:noFill/>
+          </a:ln>
+        </p:spPr>
+        <p:style>
+          <a:lnRef idx="1">
+            <a:schemeClr val="accent1"/>
+          </a:lnRef>
+          <a:fillRef idx="3">
+            <a:schemeClr val="accent1"/>
+          </a:fillRef>
+          <a:effectRef idx="2">
+            <a:schemeClr val="accent1"/>
+          </a:effectRef>
+          <a:fontRef idx="minor">
+            <a:schemeClr val="lt1"/>
+          </a:fontRef>
+        </p:style>
+        <p:txBody>
+          <a:bodyPr rtlCol="0" anchor="ctr"/>
+          <a:lstStyle/>
+          <a:p>
+            <a:pPr algn="ctr"/>
+          </a:p>
+        </p:txBody>
+      </p:sp>
+      <p:sp>
+        <p:nvSpPr>
+          <p:cNvPr id="4" name="TextBox 3"/>
           <p:cNvSpPr txBox="1"/>
           <p:nvPr/>
         </p:nvSpPr>
         <p:spPr>
           <a:xfrm>
-            <a:off x="731527" y="809138"/>
-            <a:ext cx="1210500" cy="320100"/>
+            <a:off x="731520" y="256032"/>
+            <a:ext cx="7071055" cy="256032"/>
           </a:xfrm>
           <a:prstGeom prst="rect">
             <a:avLst/>
@@ -3772,31 +5092,31 @@
           </a:bodyPr>
           <a:lstStyle/>
           <a:p>
-            <a:pPr algn="ctr"/>
+            <a:pPr algn="l"/>
             <a:r>
               <a:rPr sz="1200" b="1" i="0" lang="en-US" altLang="en-US">
                 <a:solidFill>
-                  <a:srgbClr val="FFFFFF"/>
-                </a:solidFill>
-                <a:latin typeface="Sarabun"/>
-                <a:ea typeface="Sarabun"/>
-                <a:cs typeface="Sarabun"/>
-              </a:rPr>
-              <a:t>Section 1</a:t>
-            </a:r>
-          </a:p>
-        </p:txBody>
-      </p:sp>
-      <p:sp>
-        <p:nvSpPr>
-          <p:cNvPr id="4" name="TextBox 3"/>
+                  <a:srgbClr val="355C7D"/>
+                </a:solidFill>
+                <a:latin typeface="Sarabun"/>
+                <a:ea typeface="Sarabun"/>
+                <a:cs typeface="Sarabun"/>
+              </a:rPr>
+              <a:t>Teaching slide</a:t>
+            </a:r>
+          </a:p>
+        </p:txBody>
+      </p:sp>
+      <p:sp>
+        <p:nvSpPr>
+          <p:cNvPr id="5" name="TextBox 4"/>
           <p:cNvSpPr txBox="1"/>
           <p:nvPr/>
         </p:nvSpPr>
         <p:spPr>
           <a:xfrm>
-            <a:off x="2029374" y="720278"/>
-            <a:ext cx="7030500" cy="621900"/>
+            <a:off x="731520" y="530352"/>
+            <a:ext cx="7071055" cy="640080"/>
           </a:xfrm>
           <a:prstGeom prst="rect">
             <a:avLst/>
@@ -3811,7 +5131,7 @@
           <a:p>
             <a:pPr algn="l"/>
             <a:r>
-              <a:rPr sz="3000" b="1" i="0" lang="en-US" altLang="en-US">
+              <a:rPr sz="3600" b="1" i="0" lang="en-US" altLang="en-US">
                 <a:solidFill>
                   <a:srgbClr val="24333D"/>
                 </a:solidFill>
@@ -3819,21 +5139,105 @@
                 <a:ea typeface="Sarabun"/>
                 <a:cs typeface="Sarabun"/>
               </a:rPr>
-              <a:t>Use pronouns as practical labels</a:t>
-            </a:r>
-          </a:p>
-        </p:txBody>
-      </p:sp>
-      <p:sp>
-        <p:nvSpPr>
-          <p:cNvPr id="5" name="TextBox 4"/>
+              <a:t>I and you — the first pronouns</a:t>
+            </a:r>
+          </a:p>
+        </p:txBody>
+      </p:sp>
+      <p:sp>
+        <p:nvSpPr>
+          <p:cNvPr id="6" name="Rounded Rectangle 5"/>
+          <p:cNvSpPr/>
+          <p:nvPr/>
+        </p:nvSpPr>
+        <p:spPr>
+          <a:xfrm>
+            <a:off x="731520" y="1325880"/>
+            <a:ext cx="7071055" cy="1572768"/>
+          </a:xfrm>
+          <a:prstGeom prst="roundRect">
+            <a:avLst/>
+          </a:prstGeom>
+          <a:noFill/>
+          <a:ln>
+            <a:noFill/>
+          </a:ln>
+        </p:spPr>
+        <p:style>
+          <a:lnRef idx="1">
+            <a:schemeClr val="accent1"/>
+          </a:lnRef>
+          <a:fillRef idx="3">
+            <a:schemeClr val="accent1"/>
+          </a:fillRef>
+          <a:effectRef idx="2">
+            <a:schemeClr val="accent1"/>
+          </a:effectRef>
+          <a:fontRef idx="minor">
+            <a:schemeClr val="lt1"/>
+          </a:fontRef>
+        </p:style>
+        <p:txBody>
+          <a:bodyPr rtlCol="0" anchor="ctr"/>
+          <a:lstStyle/>
+          <a:p>
+            <a:pPr algn="ctr"/>
+          </a:p>
+        </p:txBody>
+      </p:sp>
+      <p:sp>
+        <p:nvSpPr>
+          <p:cNvPr id="7" name="Rectangle 6"/>
+          <p:cNvSpPr/>
+          <p:nvPr/>
+        </p:nvSpPr>
+        <p:spPr>
+          <a:xfrm>
+            <a:off x="868680" y="1527048"/>
+            <a:ext cx="73152" cy="1143000"/>
+          </a:xfrm>
+          <a:prstGeom prst="rect">
+            <a:avLst/>
+          </a:prstGeom>
+          <a:solidFill>
+            <a:srgbClr val="355C7D"/>
+          </a:solidFill>
+          <a:ln>
+            <a:noFill/>
+          </a:ln>
+        </p:spPr>
+        <p:style>
+          <a:lnRef idx="1">
+            <a:schemeClr val="accent1"/>
+          </a:lnRef>
+          <a:fillRef idx="3">
+            <a:schemeClr val="accent1"/>
+          </a:fillRef>
+          <a:effectRef idx="2">
+            <a:schemeClr val="accent1"/>
+          </a:effectRef>
+          <a:fontRef idx="minor">
+            <a:schemeClr val="lt1"/>
+          </a:fontRef>
+        </p:style>
+        <p:txBody>
+          <a:bodyPr rtlCol="0" anchor="ctr"/>
+          <a:lstStyle/>
+          <a:p>
+            <a:pPr algn="ctr"/>
+          </a:p>
+        </p:txBody>
+      </p:sp>
+      <p:sp>
+        <p:nvSpPr>
+          <p:cNvPr id="8" name="TextBox 7"/>
           <p:cNvSpPr txBox="1"/>
           <p:nvPr/>
         </p:nvSpPr>
         <p:spPr>
           <a:xfrm>
-            <a:off x="731520" y="1193328"/>
-            <a:ext cx="6858000" cy="365700"/>
+            <a:off x="1078992" y="1463040"/>
+            <a:ext cx="6613855" cy="320040"/>
           </a:xfrm>
           <a:prstGeom prst="rect">
             <a:avLst/>
@@ -3848,29 +5252,29 @@
           <a:p>
             <a:pPr algn="l"/>
             <a:r>
-              <a:rPr sz="1500" b="0" i="0" lang="en-US" altLang="en-US">
-                <a:solidFill>
-                  <a:srgbClr val="566873"/>
-                </a:solidFill>
-                <a:latin typeface="Sarabun"/>
-                <a:ea typeface="Sarabun"/>
-                <a:cs typeface="Sarabun"/>
-              </a:rPr>
-              <a:t>Pick the word that matches the speaker or person you are pointing to.</a:t>
-            </a:r>
-          </a:p>
-        </p:txBody>
-      </p:sp>
-      <p:sp>
-        <p:nvSpPr>
-          <p:cNvPr id="6" name="TextBox 5"/>
+              <a:rPr sz="1700" b="0" i="0" lang="th-TH" altLang="en-US">
+                <a:solidFill>
+                  <a:srgbClr val="24333D"/>
+                </a:solidFill>
+                <a:latin typeface="Sarabun"/>
+                <a:ea typeface="Sarabun"/>
+                <a:cs typeface="Sarabun"/>
+              </a:rPr>
+              <a:t>ฉัน</a:t>
+            </a:r>
+          </a:p>
+        </p:txBody>
+      </p:sp>
+      <p:sp>
+        <p:nvSpPr>
+          <p:cNvPr id="9" name="TextBox 8"/>
           <p:cNvSpPr txBox="1"/>
           <p:nvPr/>
         </p:nvSpPr>
         <p:spPr>
           <a:xfrm>
-            <a:off x="731533" y="1623118"/>
-            <a:ext cx="1645800" cy="274200"/>
+            <a:off x="1078992" y="1828800"/>
+            <a:ext cx="6613855" cy="274320"/>
           </a:xfrm>
           <a:prstGeom prst="rect">
             <a:avLst/>
@@ -3885,29 +5289,29 @@
           <a:p>
             <a:pPr algn="l"/>
             <a:r>
-              <a:rPr sz="1300" b="1" i="0" lang="en-US" altLang="en-US">
-                <a:solidFill>
-                  <a:srgbClr val="24333D"/>
-                </a:solidFill>
-                <a:latin typeface="Sarabun"/>
-                <a:ea typeface="Sarabun"/>
-                <a:cs typeface="Sarabun"/>
-              </a:rPr>
-              <a:t>Talking about yourself</a:t>
-            </a:r>
-          </a:p>
-        </p:txBody>
-      </p:sp>
-      <p:sp>
-        <p:nvSpPr>
-          <p:cNvPr id="7" name="TextBox 6"/>
+              <a:rPr sz="1700" b="0" i="1" lang="en-US" altLang="en-US">
+                <a:solidFill>
+                  <a:srgbClr val="566873"/>
+                </a:solidFill>
+                <a:latin typeface="Sarabun"/>
+                <a:ea typeface="Sarabun"/>
+                <a:cs typeface="Sarabun"/>
+              </a:rPr>
+              <a:t>chǎn</a:t>
+            </a:r>
+          </a:p>
+        </p:txBody>
+      </p:sp>
+      <p:sp>
+        <p:nvSpPr>
+          <p:cNvPr id="10" name="TextBox 9"/>
           <p:cNvSpPr txBox="1"/>
           <p:nvPr/>
         </p:nvSpPr>
         <p:spPr>
           <a:xfrm>
-            <a:off x="1051560" y="2057400"/>
-            <a:ext cx="2286000" cy="731520"/>
+            <a:off x="1078992" y="2203704"/>
+            <a:ext cx="6613855" cy="274320"/>
           </a:xfrm>
           <a:prstGeom prst="rect">
             <a:avLst/>
@@ -3922,40 +5326,113 @@
           <a:p>
             <a:pPr algn="l"/>
             <a:r>
-              <a:rPr sz="2300" b="1" i="0" lang="th-TH" altLang="en-US">
-                <a:solidFill>
-                  <a:srgbClr val="24333D"/>
-                </a:solidFill>
-                <a:latin typeface="Sarabun"/>
-                <a:ea typeface="Sarabun"/>
-                <a:cs typeface="Sarabun"/>
-              </a:rPr>
-              <a:t>ฉัน</a:t>
-            </a:r>
-            <a:r>
-              <a:rPr sz="1500" b="0" i="1" lang="en-US" altLang="en-US">
-                <a:solidFill>
-                  <a:srgbClr val="566873"/>
-                </a:solidFill>
-                <a:latin typeface="Sarabun"/>
-                <a:ea typeface="Sarabun"/>
-                <a:cs typeface="Sarabun"/>
-              </a:rPr>
-              <a:t> (chǎn)</a:t>
-            </a:r>
-          </a:p>
-        </p:txBody>
-      </p:sp>
-      <p:sp>
-        <p:nvSpPr>
-          <p:cNvPr id="8" name="TextBox 7"/>
+              <a:rPr sz="1700" b="0" i="0" lang="en-US" altLang="en-US">
+                <a:solidFill>
+                  <a:srgbClr val="82909A"/>
+                </a:solidFill>
+                <a:latin typeface="Sarabun"/>
+                <a:ea typeface="Sarabun"/>
+                <a:cs typeface="Sarabun"/>
+              </a:rPr>
+              <a:t>I (general)</a:t>
+            </a:r>
+          </a:p>
+        </p:txBody>
+      </p:sp>
+      <p:sp>
+        <p:nvSpPr>
+          <p:cNvPr id="11" name="Rounded Rectangle 10"/>
+          <p:cNvSpPr/>
+          <p:nvPr/>
+        </p:nvSpPr>
+        <p:spPr>
+          <a:xfrm>
+            <a:off x="731520" y="3081528"/>
+            <a:ext cx="7071055" cy="1572768"/>
+          </a:xfrm>
+          <a:prstGeom prst="roundRect">
+            <a:avLst/>
+          </a:prstGeom>
+          <a:noFill/>
+          <a:ln>
+            <a:noFill/>
+          </a:ln>
+        </p:spPr>
+        <p:style>
+          <a:lnRef idx="1">
+            <a:schemeClr val="accent1"/>
+          </a:lnRef>
+          <a:fillRef idx="3">
+            <a:schemeClr val="accent1"/>
+          </a:fillRef>
+          <a:effectRef idx="2">
+            <a:schemeClr val="accent1"/>
+          </a:effectRef>
+          <a:fontRef idx="minor">
+            <a:schemeClr val="lt1"/>
+          </a:fontRef>
+        </p:style>
+        <p:txBody>
+          <a:bodyPr rtlCol="0" anchor="ctr"/>
+          <a:lstStyle/>
+          <a:p>
+            <a:pPr algn="ctr"/>
+          </a:p>
+        </p:txBody>
+      </p:sp>
+      <p:sp>
+        <p:nvSpPr>
+          <p:cNvPr id="12" name="Rectangle 11"/>
+          <p:cNvSpPr/>
+          <p:nvPr/>
+        </p:nvSpPr>
+        <p:spPr>
+          <a:xfrm>
+            <a:off x="868680" y="3282696"/>
+            <a:ext cx="73152" cy="1143000"/>
+          </a:xfrm>
+          <a:prstGeom prst="rect">
+            <a:avLst/>
+          </a:prstGeom>
+          <a:solidFill>
+            <a:srgbClr val="355C7D"/>
+          </a:solidFill>
+          <a:ln>
+            <a:noFill/>
+          </a:ln>
+        </p:spPr>
+        <p:style>
+          <a:lnRef idx="1">
+            <a:schemeClr val="accent1"/>
+          </a:lnRef>
+          <a:fillRef idx="3">
+            <a:schemeClr val="accent1"/>
+          </a:fillRef>
+          <a:effectRef idx="2">
+            <a:schemeClr val="accent1"/>
+          </a:effectRef>
+          <a:fontRef idx="minor">
+            <a:schemeClr val="lt1"/>
+          </a:fontRef>
+        </p:style>
+        <p:txBody>
+          <a:bodyPr rtlCol="0" anchor="ctr"/>
+          <a:lstStyle/>
+          <a:p>
+            <a:pPr algn="ctr"/>
+          </a:p>
+        </p:txBody>
+      </p:sp>
+      <p:sp>
+        <p:nvSpPr>
+          <p:cNvPr id="13" name="TextBox 12"/>
           <p:cNvSpPr txBox="1"/>
           <p:nvPr/>
         </p:nvSpPr>
         <p:spPr>
           <a:xfrm>
-            <a:off x="3474720" y="2148840"/>
-            <a:ext cx="3657600" cy="365760"/>
+            <a:off x="1078992" y="3218688"/>
+            <a:ext cx="6613855" cy="320040"/>
           </a:xfrm>
           <a:prstGeom prst="rect">
             <a:avLst/>
@@ -3970,7 +5447,7 @@
           <a:p>
             <a:pPr algn="l"/>
             <a:r>
-              <a:rPr sz="1300" b="1" i="0" lang="en-US" altLang="en-US">
+              <a:rPr sz="1700" b="0" i="0" lang="th-TH" altLang="en-US">
                 <a:solidFill>
                   <a:srgbClr val="24333D"/>
                 </a:solidFill>
@@ -3978,21 +5455,21 @@
                 <a:ea typeface="Sarabun"/>
                 <a:cs typeface="Sarabun"/>
               </a:rPr>
-              <a:t>I</a:t>
-            </a:r>
-          </a:p>
-        </p:txBody>
-      </p:sp>
-      <p:sp>
-        <p:nvSpPr>
-          <p:cNvPr id="9" name="TextBox 8"/>
+              <a:t>ผม</a:t>
+            </a:r>
+          </a:p>
+        </p:txBody>
+      </p:sp>
+      <p:sp>
+        <p:nvSpPr>
+          <p:cNvPr id="14" name="TextBox 13"/>
           <p:cNvSpPr txBox="1"/>
           <p:nvPr/>
         </p:nvSpPr>
         <p:spPr>
           <a:xfrm>
-            <a:off x="3474720" y="2514600"/>
-            <a:ext cx="3657600" cy="365760"/>
+            <a:off x="1078992" y="3584448"/>
+            <a:ext cx="6613855" cy="274320"/>
           </a:xfrm>
           <a:prstGeom prst="rect">
             <a:avLst/>
@@ -4007,7 +5484,7 @@
           <a:p>
             <a:pPr algn="l"/>
             <a:r>
-              <a:rPr sz="1500" b="0" i="0" lang="en-US" altLang="en-US">
+              <a:rPr sz="1700" b="0" i="1" lang="en-US" altLang="en-US">
                 <a:solidFill>
                   <a:srgbClr val="566873"/>
                 </a:solidFill>
@@ -4015,21 +5492,21 @@
                 <a:ea typeface="Sarabun"/>
                 <a:cs typeface="Sarabun"/>
               </a:rPr>
-              <a:t>Common self-word in this course</a:t>
-            </a:r>
-          </a:p>
-        </p:txBody>
-      </p:sp>
-      <p:sp>
-        <p:nvSpPr>
-          <p:cNvPr id="10" name="TextBox 9"/>
+              <a:t>phǒm</a:t>
+            </a:r>
+          </a:p>
+        </p:txBody>
+      </p:sp>
+      <p:sp>
+        <p:nvSpPr>
+          <p:cNvPr id="15" name="TextBox 14"/>
           <p:cNvSpPr txBox="1"/>
           <p:nvPr/>
         </p:nvSpPr>
         <p:spPr>
           <a:xfrm>
-            <a:off x="1051560" y="3291840"/>
-            <a:ext cx="2286000" cy="731520"/>
+            <a:off x="1078992" y="3959352"/>
+            <a:ext cx="6613855" cy="274320"/>
           </a:xfrm>
           <a:prstGeom prst="rect">
             <a:avLst/>
@@ -4044,40 +5521,113 @@
           <a:p>
             <a:pPr algn="l"/>
             <a:r>
-              <a:rPr sz="2300" b="1" i="0" lang="th-TH" altLang="en-US">
-                <a:solidFill>
-                  <a:srgbClr val="24333D"/>
-                </a:solidFill>
-                <a:latin typeface="Sarabun"/>
-                <a:ea typeface="Sarabun"/>
-                <a:cs typeface="Sarabun"/>
-              </a:rPr>
-              <a:t>ผม</a:t>
-            </a:r>
-            <a:r>
-              <a:rPr sz="1500" b="0" i="1" lang="en-US" altLang="en-US">
-                <a:solidFill>
-                  <a:srgbClr val="566873"/>
-                </a:solidFill>
-                <a:latin typeface="Sarabun"/>
-                <a:ea typeface="Sarabun"/>
-                <a:cs typeface="Sarabun"/>
-              </a:rPr>
-              <a:t> (phǒm)</a:t>
-            </a:r>
-          </a:p>
-        </p:txBody>
-      </p:sp>
-      <p:sp>
-        <p:nvSpPr>
-          <p:cNvPr id="11" name="TextBox 10"/>
+              <a:rPr sz="1700" b="0" i="0" lang="en-US" altLang="en-US">
+                <a:solidFill>
+                  <a:srgbClr val="82909A"/>
+                </a:solidFill>
+                <a:latin typeface="Sarabun"/>
+                <a:ea typeface="Sarabun"/>
+                <a:cs typeface="Sarabun"/>
+              </a:rPr>
+              <a:t>I (male, polite)</a:t>
+            </a:r>
+          </a:p>
+        </p:txBody>
+      </p:sp>
+      <p:sp>
+        <p:nvSpPr>
+          <p:cNvPr id="16" name="Rounded Rectangle 15"/>
+          <p:cNvSpPr/>
+          <p:nvPr/>
+        </p:nvSpPr>
+        <p:spPr>
+          <a:xfrm>
+            <a:off x="731520" y="4837176"/>
+            <a:ext cx="7071055" cy="1572768"/>
+          </a:xfrm>
+          <a:prstGeom prst="roundRect">
+            <a:avLst/>
+          </a:prstGeom>
+          <a:noFill/>
+          <a:ln>
+            <a:noFill/>
+          </a:ln>
+        </p:spPr>
+        <p:style>
+          <a:lnRef idx="1">
+            <a:schemeClr val="accent1"/>
+          </a:lnRef>
+          <a:fillRef idx="3">
+            <a:schemeClr val="accent1"/>
+          </a:fillRef>
+          <a:effectRef idx="2">
+            <a:schemeClr val="accent1"/>
+          </a:effectRef>
+          <a:fontRef idx="minor">
+            <a:schemeClr val="lt1"/>
+          </a:fontRef>
+        </p:style>
+        <p:txBody>
+          <a:bodyPr rtlCol="0" anchor="ctr"/>
+          <a:lstStyle/>
+          <a:p>
+            <a:pPr algn="ctr"/>
+          </a:p>
+        </p:txBody>
+      </p:sp>
+      <p:sp>
+        <p:nvSpPr>
+          <p:cNvPr id="17" name="Rectangle 16"/>
+          <p:cNvSpPr/>
+          <p:nvPr/>
+        </p:nvSpPr>
+        <p:spPr>
+          <a:xfrm>
+            <a:off x="868680" y="5038344"/>
+            <a:ext cx="73152" cy="1143000"/>
+          </a:xfrm>
+          <a:prstGeom prst="rect">
+            <a:avLst/>
+          </a:prstGeom>
+          <a:solidFill>
+            <a:srgbClr val="355C7D"/>
+          </a:solidFill>
+          <a:ln>
+            <a:noFill/>
+          </a:ln>
+        </p:spPr>
+        <p:style>
+          <a:lnRef idx="1">
+            <a:schemeClr val="accent1"/>
+          </a:lnRef>
+          <a:fillRef idx="3">
+            <a:schemeClr val="accent1"/>
+          </a:fillRef>
+          <a:effectRef idx="2">
+            <a:schemeClr val="accent1"/>
+          </a:effectRef>
+          <a:fontRef idx="minor">
+            <a:schemeClr val="lt1"/>
+          </a:fontRef>
+        </p:style>
+        <p:txBody>
+          <a:bodyPr rtlCol="0" anchor="ctr"/>
+          <a:lstStyle/>
+          <a:p>
+            <a:pPr algn="ctr"/>
+          </a:p>
+        </p:txBody>
+      </p:sp>
+      <p:sp>
+        <p:nvSpPr>
+          <p:cNvPr id="18" name="TextBox 17"/>
           <p:cNvSpPr txBox="1"/>
           <p:nvPr/>
         </p:nvSpPr>
         <p:spPr>
           <a:xfrm>
-            <a:off x="3474720" y="3383280"/>
-            <a:ext cx="3657600" cy="365760"/>
+            <a:off x="1078992" y="4974336"/>
+            <a:ext cx="6613855" cy="320040"/>
           </a:xfrm>
           <a:prstGeom prst="rect">
             <a:avLst/>
@@ -4092,7 +5642,7 @@
           <a:p>
             <a:pPr algn="l"/>
             <a:r>
-              <a:rPr sz="1300" b="1" i="0" lang="en-US" altLang="en-US">
+              <a:rPr sz="1700" b="0" i="0" lang="th-TH" altLang="en-US">
                 <a:solidFill>
                   <a:srgbClr val="24333D"/>
                 </a:solidFill>
@@ -4100,21 +5650,21 @@
                 <a:ea typeface="Sarabun"/>
                 <a:cs typeface="Sarabun"/>
               </a:rPr>
-              <a:t>I (male speaker)</a:t>
-            </a:r>
-          </a:p>
-        </p:txBody>
-      </p:sp>
-      <p:sp>
-        <p:nvSpPr>
-          <p:cNvPr id="12" name="TextBox 11"/>
+              <a:t>คุณ</a:t>
+            </a:r>
+          </a:p>
+        </p:txBody>
+      </p:sp>
+      <p:sp>
+        <p:nvSpPr>
+          <p:cNvPr id="19" name="TextBox 18"/>
           <p:cNvSpPr txBox="1"/>
           <p:nvPr/>
         </p:nvSpPr>
         <p:spPr>
           <a:xfrm>
-            <a:off x="3474720" y="3749040"/>
-            <a:ext cx="3657600" cy="365760"/>
+            <a:off x="1078992" y="5340096"/>
+            <a:ext cx="6613855" cy="274320"/>
           </a:xfrm>
           <a:prstGeom prst="rect">
             <a:avLst/>
@@ -4129,7 +5679,7 @@
           <a:p>
             <a:pPr algn="l"/>
             <a:r>
-              <a:rPr sz="1500" b="0" i="0" lang="en-US" altLang="en-US">
+              <a:rPr sz="1700" b="0" i="1" lang="en-US" altLang="en-US">
                 <a:solidFill>
                   <a:srgbClr val="566873"/>
                 </a:solidFill>
@@ -4137,21 +5687,21 @@
                 <a:ea typeface="Sarabun"/>
                 <a:cs typeface="Sarabun"/>
               </a:rPr>
-              <a:t>Use when the speaker is male</a:t>
-            </a:r>
-          </a:p>
-        </p:txBody>
-      </p:sp>
-      <p:sp>
-        <p:nvSpPr>
-          <p:cNvPr id="13" name="TextBox 12"/>
+              <a:t>khun</a:t>
+            </a:r>
+          </a:p>
+        </p:txBody>
+      </p:sp>
+      <p:sp>
+        <p:nvSpPr>
+          <p:cNvPr id="20" name="TextBox 19"/>
           <p:cNvSpPr txBox="1"/>
           <p:nvPr/>
         </p:nvSpPr>
         <p:spPr>
           <a:xfrm>
-            <a:off x="731520" y="4594866"/>
-            <a:ext cx="1828800" cy="274200"/>
+            <a:off x="1078992" y="5715000"/>
+            <a:ext cx="6613855" cy="274320"/>
           </a:xfrm>
           <a:prstGeom prst="rect">
             <a:avLst/>
@@ -4166,137 +5716,15 @@
           <a:p>
             <a:pPr algn="l"/>
             <a:r>
-              <a:rPr sz="1300" b="1" i="0" lang="en-US" altLang="en-US">
-                <a:solidFill>
-                  <a:srgbClr val="24333D"/>
-                </a:solidFill>
-                <a:latin typeface="Sarabun"/>
-                <a:ea typeface="Sarabun"/>
-                <a:cs typeface="Sarabun"/>
-              </a:rPr>
-              <a:t>Talking about another person</a:t>
-            </a:r>
-          </a:p>
-        </p:txBody>
-      </p:sp>
-      <p:sp>
-        <p:nvSpPr>
-          <p:cNvPr id="14" name="TextBox 13"/>
-          <p:cNvSpPr txBox="1"/>
-          <p:nvPr/>
-        </p:nvSpPr>
-        <p:spPr>
-          <a:xfrm>
-            <a:off x="1042422" y="5029235"/>
-            <a:ext cx="2286000" cy="777088"/>
-          </a:xfrm>
-          <a:prstGeom prst="rect">
-            <a:avLst/>
-          </a:prstGeom>
-          <a:noFill/>
-        </p:spPr>
-        <p:txBody>
-          <a:bodyPr wrap="square" anchor="t">
-            <a:spAutoFit/>
-          </a:bodyPr>
-          <a:lstStyle/>
-          <a:p>
-            <a:pPr algn="l"/>
-            <a:r>
-              <a:rPr sz="2300" b="1" i="0" lang="th-TH" altLang="en-US">
-                <a:solidFill>
-                  <a:srgbClr val="24333D"/>
-                </a:solidFill>
-                <a:latin typeface="Sarabun"/>
-                <a:ea typeface="Sarabun"/>
-                <a:cs typeface="Sarabun"/>
-              </a:rPr>
-              <a:t>เขา</a:t>
-            </a:r>
-            <a:r>
-              <a:rPr sz="1500" b="0" i="1" lang="en-US" altLang="en-US">
-                <a:solidFill>
-                  <a:srgbClr val="566873"/>
-                </a:solidFill>
-                <a:latin typeface="Sarabun"/>
-                <a:ea typeface="Sarabun"/>
-                <a:cs typeface="Sarabun"/>
-              </a:rPr>
-              <a:t> (khǎo)</a:t>
-            </a:r>
-          </a:p>
-        </p:txBody>
-      </p:sp>
-      <p:sp>
-        <p:nvSpPr>
-          <p:cNvPr id="15" name="TextBox 14"/>
-          <p:cNvSpPr txBox="1"/>
-          <p:nvPr/>
-        </p:nvSpPr>
-        <p:spPr>
-          <a:xfrm>
-            <a:off x="3474670" y="5120700"/>
-            <a:ext cx="3657600" cy="365700"/>
-          </a:xfrm>
-          <a:prstGeom prst="rect">
-            <a:avLst/>
-          </a:prstGeom>
-          <a:noFill/>
-        </p:spPr>
-        <p:txBody>
-          <a:bodyPr wrap="square" anchor="t">
-            <a:spAutoFit/>
-          </a:bodyPr>
-          <a:lstStyle/>
-          <a:p>
-            <a:pPr algn="l"/>
-            <a:r>
-              <a:rPr sz="1300" b="1" i="0" lang="en-US" altLang="en-US">
-                <a:solidFill>
-                  <a:srgbClr val="24333D"/>
-                </a:solidFill>
-                <a:latin typeface="Sarabun"/>
-                <a:ea typeface="Sarabun"/>
-                <a:cs typeface="Sarabun"/>
-              </a:rPr>
-              <a:t>he / she</a:t>
-            </a:r>
-          </a:p>
-        </p:txBody>
-      </p:sp>
-      <p:sp>
-        <p:nvSpPr>
-          <p:cNvPr id="16" name="TextBox 15"/>
-          <p:cNvSpPr txBox="1"/>
-          <p:nvPr/>
-        </p:nvSpPr>
-        <p:spPr>
-          <a:xfrm>
-            <a:off x="3474670" y="5486348"/>
-            <a:ext cx="3657600" cy="365700"/>
-          </a:xfrm>
-          <a:prstGeom prst="rect">
-            <a:avLst/>
-          </a:prstGeom>
-          <a:noFill/>
-        </p:spPr>
-        <p:txBody>
-          <a:bodyPr wrap="square" anchor="t">
-            <a:spAutoFit/>
-          </a:bodyPr>
-          <a:lstStyle/>
-          <a:p>
-            <a:pPr algn="l"/>
-            <a:r>
-              <a:rPr sz="1500" b="0" i="0" lang="en-US" altLang="en-US">
-                <a:solidFill>
-                  <a:srgbClr val="566873"/>
-                </a:solidFill>
-                <a:latin typeface="Sarabun"/>
-                <a:ea typeface="Sarabun"/>
-                <a:cs typeface="Sarabun"/>
-              </a:rPr>
-              <a:t>Use for he or she from context</a:t>
+              <a:rPr sz="1700" b="0" i="0" lang="en-US" altLang="en-US">
+                <a:solidFill>
+                  <a:srgbClr val="82909A"/>
+                </a:solidFill>
+                <a:latin typeface="Sarabun"/>
+                <a:ea typeface="Sarabun"/>
+                <a:cs typeface="Sarabun"/>
+              </a:rPr>
+              <a:t>you</a:t>
             </a:r>
           </a:p>
         </p:txBody>
@@ -4312,6 +5740,14 @@
 <file path=ppt/slides/slide4.xml><?xml version="1.0" encoding="utf-8"?>
 <p:sld xmlns:a="http://schemas.openxmlformats.org/drawingml/2006/main" xmlns:p="http://schemas.openxmlformats.org/presentationml/2006/main" xmlns:r="http://schemas.openxmlformats.org/officeDocument/2006/relationships">
   <p:cSld>
+    <p:bg>
+      <p:bgPr>
+        <a:solidFill>
+          <a:srgbClr val="F5F7F8"/>
+        </a:solidFill>
+        <a:effectLst/>
+      </p:bgPr>
+    </p:bg>
     <p:spTree>
       <p:nvGrpSpPr>
         <p:cNvPr id="1" name=""/>
@@ -4319,40 +5755,116 @@
         <p:nvPr/>
       </p:nvGrpSpPr>
       <p:grpSpPr/>
-      <p:pic>
-        <p:nvPicPr>
-          <p:cNvPr id="2" name="Picture 1" descr="slide-04.png"/>
-          <p:cNvPicPr>
-            <a:picLocks noChangeAspect="1"/>
-          </p:cNvPicPr>
-          <p:nvPr/>
-        </p:nvPicPr>
-        <p:blipFill>
-          <a:blip r:embed="rId2"/>
-          <a:stretch>
-            <a:fillRect/>
-          </a:stretch>
-        </p:blipFill>
+      <p:sp>
+        <p:nvSpPr>
+          <p:cNvPr id="2" name="__pip_placeholder__"/>
+          <p:cNvSpPr/>
+          <p:nvPr/>
+        </p:nvSpPr>
+        <p:spPr>
+          <a:xfrm>
+            <a:off x="8351215" y="0"/>
+            <a:ext cx="3840480" cy="2880360"/>
+          </a:xfrm>
+          <a:prstGeom prst="rect">
+            <a:avLst/>
+          </a:prstGeom>
+          <a:solidFill>
+            <a:srgbClr val="DBE7EC">
+              <a:alpha val="30000"/>
+            </a:srgbClr>
+          </a:solidFill>
+          <a:ln w="19050">
+            <a:solidFill>
+              <a:srgbClr val="355C7D"/>
+            </a:solidFill>
+            <a:prstDash val="sysDash"/>
+          </a:ln>
+        </p:spPr>
+        <p:style>
+          <a:lnRef idx="1">
+            <a:schemeClr val="accent1"/>
+          </a:lnRef>
+          <a:fillRef idx="3">
+            <a:schemeClr val="accent1"/>
+          </a:fillRef>
+          <a:effectRef idx="2">
+            <a:schemeClr val="accent1"/>
+          </a:effectRef>
+          <a:fontRef idx="minor">
+            <a:schemeClr val="lt1"/>
+          </a:fontRef>
+        </p:style>
+        <p:txBody>
+          <a:bodyPr rtlCol="0" anchor="ctr" wrap="none"/>
+          <a:lstStyle/>
+          <a:p>
+            <a:pPr algn="ctr"/>
+            <a:r>
+              <a:rPr sz="1800" b="1">
+                <a:solidFill>
+                  <a:srgbClr val="355C7D"/>
+                </a:solidFill>
+                <a:latin typeface="Sarabun"/>
+              </a:rPr>
+              <a:t>Nine</a:t>
+            </a:r>
+          </a:p>
+        </p:txBody>
+      </p:sp>
+      <p:sp>
+        <p:nvSpPr>
+          <p:cNvPr id="3" name="Rectangle 2"/>
+          <p:cNvSpPr/>
+          <p:nvPr/>
+        </p:nvSpPr>
         <p:spPr>
           <a:xfrm>
             <a:off x="0" y="0"/>
-            <a:ext cx="12191695" cy="6858000"/>
-          </a:xfrm>
-          <a:prstGeom prst="rect">
-            <a:avLst/>
-          </a:prstGeom>
-        </p:spPr>
-      </p:pic>
-      <p:sp>
-        <p:nvSpPr>
-          <p:cNvPr id="3" name="TextBox 2"/>
+            <a:ext cx="12191695" cy="63500"/>
+          </a:xfrm>
+          <a:prstGeom prst="rect">
+            <a:avLst/>
+          </a:prstGeom>
+          <a:solidFill>
+            <a:srgbClr val="355C7D"/>
+          </a:solidFill>
+          <a:ln>
+            <a:noFill/>
+          </a:ln>
+        </p:spPr>
+        <p:style>
+          <a:lnRef idx="1">
+            <a:schemeClr val="accent1"/>
+          </a:lnRef>
+          <a:fillRef idx="3">
+            <a:schemeClr val="accent1"/>
+          </a:fillRef>
+          <a:effectRef idx="2">
+            <a:schemeClr val="accent1"/>
+          </a:effectRef>
+          <a:fontRef idx="minor">
+            <a:schemeClr val="lt1"/>
+          </a:fontRef>
+        </p:style>
+        <p:txBody>
+          <a:bodyPr rtlCol="0" anchor="ctr"/>
+          <a:lstStyle/>
+          <a:p>
+            <a:pPr algn="ctr"/>
+          </a:p>
+        </p:txBody>
+      </p:sp>
+      <p:sp>
+        <p:nvSpPr>
+          <p:cNvPr id="4" name="TextBox 3"/>
           <p:cNvSpPr txBox="1"/>
           <p:nvPr/>
         </p:nvSpPr>
         <p:spPr>
           <a:xfrm>
-            <a:off x="731527" y="694913"/>
-            <a:ext cx="1210500" cy="320100"/>
+            <a:off x="731520" y="256032"/>
+            <a:ext cx="7071055" cy="256032"/>
           </a:xfrm>
           <a:prstGeom prst="rect">
             <a:avLst/>
@@ -4365,31 +5877,31 @@
           </a:bodyPr>
           <a:lstStyle/>
           <a:p>
-            <a:pPr algn="ctr"/>
+            <a:pPr algn="l"/>
             <a:r>
               <a:rPr sz="1200" b="1" i="0" lang="en-US" altLang="en-US">
                 <a:solidFill>
-                  <a:srgbClr val="FFFFFF"/>
-                </a:solidFill>
-                <a:latin typeface="Sarabun"/>
-                <a:ea typeface="Sarabun"/>
-                <a:cs typeface="Sarabun"/>
-              </a:rPr>
-              <a:t>Section 2</a:t>
-            </a:r>
-          </a:p>
-        </p:txBody>
-      </p:sp>
-      <p:sp>
-        <p:nvSpPr>
-          <p:cNvPr id="4" name="TextBox 3"/>
+                  <a:srgbClr val="355C7D"/>
+                </a:solidFill>
+                <a:latin typeface="Sarabun"/>
+                <a:ea typeface="Sarabun"/>
+                <a:cs typeface="Sarabun"/>
+              </a:rPr>
+              <a:t>Teaching slide</a:t>
+            </a:r>
+          </a:p>
+        </p:txBody>
+      </p:sp>
+      <p:sp>
+        <p:nvSpPr>
+          <p:cNvPr id="5" name="TextBox 4"/>
           <p:cNvSpPr txBox="1"/>
           <p:nvPr/>
         </p:nvSpPr>
         <p:spPr>
           <a:xfrm>
-            <a:off x="2063268" y="552443"/>
-            <a:ext cx="5943600" cy="457200"/>
+            <a:off x="731520" y="530352"/>
+            <a:ext cx="7071055" cy="640080"/>
           </a:xfrm>
           <a:prstGeom prst="rect">
             <a:avLst/>
@@ -4404,7 +5916,7 @@
           <a:p>
             <a:pPr algn="l"/>
             <a:r>
-              <a:rPr sz="3000" b="1" i="0" lang="en-US" altLang="en-US">
+              <a:rPr sz="2800" b="1" i="0" lang="en-US" altLang="en-US">
                 <a:solidFill>
                   <a:srgbClr val="24333D"/>
                 </a:solidFill>
@@ -4412,21 +5924,105 @@
                 <a:ea typeface="Sarabun"/>
                 <a:cs typeface="Sarabun"/>
               </a:rPr>
-              <a:t>Introduce and identify</a:t>
-            </a:r>
-          </a:p>
-        </p:txBody>
-      </p:sp>
-      <p:sp>
-        <p:nvSpPr>
-          <p:cNvPr id="5" name="TextBox 4"/>
+              <a:t>He, she, and this — pointing to people</a:t>
+            </a:r>
+          </a:p>
+        </p:txBody>
+      </p:sp>
+      <p:sp>
+        <p:nvSpPr>
+          <p:cNvPr id="6" name="Rounded Rectangle 5"/>
+          <p:cNvSpPr/>
+          <p:nvPr/>
+        </p:nvSpPr>
+        <p:spPr>
+          <a:xfrm>
+            <a:off x="731520" y="1325880"/>
+            <a:ext cx="7071055" cy="1572768"/>
+          </a:xfrm>
+          <a:prstGeom prst="roundRect">
+            <a:avLst/>
+          </a:prstGeom>
+          <a:noFill/>
+          <a:ln>
+            <a:noFill/>
+          </a:ln>
+        </p:spPr>
+        <p:style>
+          <a:lnRef idx="1">
+            <a:schemeClr val="accent1"/>
+          </a:lnRef>
+          <a:fillRef idx="3">
+            <a:schemeClr val="accent1"/>
+          </a:fillRef>
+          <a:effectRef idx="2">
+            <a:schemeClr val="accent1"/>
+          </a:effectRef>
+          <a:fontRef idx="minor">
+            <a:schemeClr val="lt1"/>
+          </a:fontRef>
+        </p:style>
+        <p:txBody>
+          <a:bodyPr rtlCol="0" anchor="ctr"/>
+          <a:lstStyle/>
+          <a:p>
+            <a:pPr algn="ctr"/>
+          </a:p>
+        </p:txBody>
+      </p:sp>
+      <p:sp>
+        <p:nvSpPr>
+          <p:cNvPr id="7" name="Rectangle 6"/>
+          <p:cNvSpPr/>
+          <p:nvPr/>
+        </p:nvSpPr>
+        <p:spPr>
+          <a:xfrm>
+            <a:off x="868680" y="1527048"/>
+            <a:ext cx="73152" cy="1143000"/>
+          </a:xfrm>
+          <a:prstGeom prst="rect">
+            <a:avLst/>
+          </a:prstGeom>
+          <a:solidFill>
+            <a:srgbClr val="355C7D"/>
+          </a:solidFill>
+          <a:ln>
+            <a:noFill/>
+          </a:ln>
+        </p:spPr>
+        <p:style>
+          <a:lnRef idx="1">
+            <a:schemeClr val="accent1"/>
+          </a:lnRef>
+          <a:fillRef idx="3">
+            <a:schemeClr val="accent1"/>
+          </a:fillRef>
+          <a:effectRef idx="2">
+            <a:schemeClr val="accent1"/>
+          </a:effectRef>
+          <a:fontRef idx="minor">
+            <a:schemeClr val="lt1"/>
+          </a:fontRef>
+        </p:style>
+        <p:txBody>
+          <a:bodyPr rtlCol="0" anchor="ctr"/>
+          <a:lstStyle/>
+          <a:p>
+            <a:pPr algn="ctr"/>
+          </a:p>
+        </p:txBody>
+      </p:sp>
+      <p:sp>
+        <p:nvSpPr>
+          <p:cNvPr id="8" name="TextBox 7"/>
           <p:cNvSpPr txBox="1"/>
           <p:nvPr/>
         </p:nvSpPr>
         <p:spPr>
           <a:xfrm>
-            <a:off x="731520" y="1051560"/>
-            <a:ext cx="6858000" cy="365700"/>
+            <a:off x="1078992" y="1463040"/>
+            <a:ext cx="6613855" cy="320040"/>
           </a:xfrm>
           <a:prstGeom prst="rect">
             <a:avLst/>
@@ -4441,29 +6037,29 @@
           <a:p>
             <a:pPr algn="l"/>
             <a:r>
-              <a:rPr sz="1500" b="0" i="0" lang="en-US" altLang="en-US">
-                <a:solidFill>
-                  <a:srgbClr val="566873"/>
-                </a:solidFill>
-                <a:latin typeface="Sarabun"/>
-                <a:ea typeface="Sarabun"/>
-                <a:cs typeface="Sarabun"/>
-              </a:rPr>
-              <a:t>Use these frames to point, identify, and check the person.</a:t>
-            </a:r>
-          </a:p>
-        </p:txBody>
-      </p:sp>
-      <p:sp>
-        <p:nvSpPr>
-          <p:cNvPr id="6" name="TextBox 5"/>
+              <a:rPr sz="1700" b="0" i="0" lang="th-TH" altLang="en-US">
+                <a:solidFill>
+                  <a:srgbClr val="24333D"/>
+                </a:solidFill>
+                <a:latin typeface="Sarabun"/>
+                <a:ea typeface="Sarabun"/>
+                <a:cs typeface="Sarabun"/>
+              </a:rPr>
+              <a:t>เขา</a:t>
+            </a:r>
+          </a:p>
+        </p:txBody>
+      </p:sp>
+      <p:sp>
+        <p:nvSpPr>
+          <p:cNvPr id="9" name="TextBox 8"/>
           <p:cNvSpPr txBox="1"/>
           <p:nvPr/>
         </p:nvSpPr>
         <p:spPr>
           <a:xfrm>
-            <a:off x="1097280" y="1659140"/>
-            <a:ext cx="5029200" cy="858203"/>
+            <a:off x="1078992" y="1828800"/>
+            <a:ext cx="6613855" cy="274320"/>
           </a:xfrm>
           <a:prstGeom prst="rect">
             <a:avLst/>
@@ -4478,18 +6074,7 @@
           <a:p>
             <a:pPr algn="l"/>
             <a:r>
-              <a:rPr sz="2700" b="1" i="0" lang="th-TH" altLang="en-US">
-                <a:solidFill>
-                  <a:srgbClr val="24333D"/>
-                </a:solidFill>
-                <a:latin typeface="Sarabun"/>
-                <a:ea typeface="Sarabun"/>
-                <a:cs typeface="Sarabun"/>
-              </a:rPr>
-              <a:t>นี่คือ...</a:t>
-            </a:r>
-            <a:r>
-              <a:rPr sz="1670" b="0" i="1" lang="en-US" altLang="en-US">
+              <a:rPr sz="1700" b="0" i="1" lang="en-US" altLang="en-US">
                 <a:solidFill>
                   <a:srgbClr val="566873"/>
                 </a:solidFill>
@@ -4497,21 +6082,21 @@
                 <a:ea typeface="Sarabun"/>
                 <a:cs typeface="Sarabun"/>
               </a:rPr>
-              <a:t> (nîi kheuu...)</a:t>
-            </a:r>
-          </a:p>
-        </p:txBody>
-      </p:sp>
-      <p:sp>
-        <p:nvSpPr>
-          <p:cNvPr id="7" name="TextBox 6"/>
+              <a:t>khǎo</a:t>
+            </a:r>
+          </a:p>
+        </p:txBody>
+      </p:sp>
+      <p:sp>
+        <p:nvSpPr>
+          <p:cNvPr id="10" name="TextBox 9"/>
           <p:cNvSpPr txBox="1"/>
           <p:nvPr/>
         </p:nvSpPr>
         <p:spPr>
           <a:xfrm>
-            <a:off x="1097280" y="2475000"/>
-            <a:ext cx="5029200" cy="280000"/>
+            <a:off x="1078992" y="2203704"/>
+            <a:ext cx="6613855" cy="274320"/>
           </a:xfrm>
           <a:prstGeom prst="rect">
             <a:avLst/>
@@ -4526,7 +6111,7 @@
           <a:p>
             <a:pPr algn="l"/>
             <a:r>
-              <a:rPr sz="1500" b="0" i="0" lang="en-US" altLang="en-US">
+              <a:rPr sz="1700" b="0" i="0" lang="en-US" altLang="en-US">
                 <a:solidFill>
                   <a:srgbClr val="82909A"/>
                 </a:solidFill>
@@ -4534,21 +6119,105 @@
                 <a:ea typeface="Sarabun"/>
                 <a:cs typeface="Sarabun"/>
               </a:rPr>
-              <a:t>this is ...</a:t>
-            </a:r>
-          </a:p>
-        </p:txBody>
-      </p:sp>
-      <p:sp>
-        <p:nvSpPr>
-          <p:cNvPr id="8" name="TextBox 7"/>
+              <a:t>he / she</a:t>
+            </a:r>
+          </a:p>
+        </p:txBody>
+      </p:sp>
+      <p:sp>
+        <p:nvSpPr>
+          <p:cNvPr id="11" name="Rounded Rectangle 10"/>
+          <p:cNvSpPr/>
+          <p:nvPr/>
+        </p:nvSpPr>
+        <p:spPr>
+          <a:xfrm>
+            <a:off x="731520" y="3081528"/>
+            <a:ext cx="7071055" cy="1572768"/>
+          </a:xfrm>
+          <a:prstGeom prst="roundRect">
+            <a:avLst/>
+          </a:prstGeom>
+          <a:noFill/>
+          <a:ln>
+            <a:noFill/>
+          </a:ln>
+        </p:spPr>
+        <p:style>
+          <a:lnRef idx="1">
+            <a:schemeClr val="accent1"/>
+          </a:lnRef>
+          <a:fillRef idx="3">
+            <a:schemeClr val="accent1"/>
+          </a:fillRef>
+          <a:effectRef idx="2">
+            <a:schemeClr val="accent1"/>
+          </a:effectRef>
+          <a:fontRef idx="minor">
+            <a:schemeClr val="lt1"/>
+          </a:fontRef>
+        </p:style>
+        <p:txBody>
+          <a:bodyPr rtlCol="0" anchor="ctr"/>
+          <a:lstStyle/>
+          <a:p>
+            <a:pPr algn="ctr"/>
+          </a:p>
+        </p:txBody>
+      </p:sp>
+      <p:sp>
+        <p:nvSpPr>
+          <p:cNvPr id="12" name="Rectangle 11"/>
+          <p:cNvSpPr/>
+          <p:nvPr/>
+        </p:nvSpPr>
+        <p:spPr>
+          <a:xfrm>
+            <a:off x="868680" y="3282696"/>
+            <a:ext cx="73152" cy="1143000"/>
+          </a:xfrm>
+          <a:prstGeom prst="rect">
+            <a:avLst/>
+          </a:prstGeom>
+          <a:solidFill>
+            <a:srgbClr val="355C7D"/>
+          </a:solidFill>
+          <a:ln>
+            <a:noFill/>
+          </a:ln>
+        </p:spPr>
+        <p:style>
+          <a:lnRef idx="1">
+            <a:schemeClr val="accent1"/>
+          </a:lnRef>
+          <a:fillRef idx="3">
+            <a:schemeClr val="accent1"/>
+          </a:fillRef>
+          <a:effectRef idx="2">
+            <a:schemeClr val="accent1"/>
+          </a:effectRef>
+          <a:fontRef idx="minor">
+            <a:schemeClr val="lt1"/>
+          </a:fontRef>
+        </p:style>
+        <p:txBody>
+          <a:bodyPr rtlCol="0" anchor="ctr"/>
+          <a:lstStyle/>
+          <a:p>
+            <a:pPr algn="ctr"/>
+          </a:p>
+        </p:txBody>
+      </p:sp>
+      <p:sp>
+        <p:nvSpPr>
+          <p:cNvPr id="13" name="TextBox 12"/>
           <p:cNvSpPr txBox="1"/>
           <p:nvPr/>
         </p:nvSpPr>
         <p:spPr>
           <a:xfrm>
-            <a:off x="1097280" y="3063303"/>
-            <a:ext cx="5029200" cy="845740"/>
+            <a:off x="1078992" y="3218688"/>
+            <a:ext cx="6613855" cy="320040"/>
           </a:xfrm>
           <a:prstGeom prst="rect">
             <a:avLst/>
@@ -4563,7 +6232,7 @@
           <a:p>
             <a:pPr algn="l"/>
             <a:r>
-              <a:rPr sz="2700" b="1" i="0" lang="th-TH" altLang="en-US">
+              <a:rPr sz="1700" b="0" i="0" lang="th-TH" altLang="en-US">
                 <a:solidFill>
                   <a:srgbClr val="24333D"/>
                 </a:solidFill>
@@ -4571,32 +6240,21 @@
                 <a:ea typeface="Sarabun"/>
                 <a:cs typeface="Sarabun"/>
               </a:rPr>
-              <a:t>เขาคือ...</a:t>
-            </a:r>
-            <a:r>
-              <a:rPr sz="1670" b="0" i="1" lang="en-US" altLang="en-US">
-                <a:solidFill>
-                  <a:srgbClr val="566873"/>
-                </a:solidFill>
-                <a:latin typeface="Sarabun"/>
-                <a:ea typeface="Sarabun"/>
-                <a:cs typeface="Sarabun"/>
-              </a:rPr>
-              <a:t> (khǎo kheuu...)</a:t>
-            </a:r>
-          </a:p>
-        </p:txBody>
-      </p:sp>
-      <p:sp>
-        <p:nvSpPr>
-          <p:cNvPr id="9" name="TextBox 8"/>
+              <a:t>นี่</a:t>
+            </a:r>
+          </a:p>
+        </p:txBody>
+      </p:sp>
+      <p:sp>
+        <p:nvSpPr>
+          <p:cNvPr id="14" name="TextBox 13"/>
           <p:cNvSpPr txBox="1"/>
           <p:nvPr/>
         </p:nvSpPr>
         <p:spPr>
           <a:xfrm>
-            <a:off x="1097280" y="3865000"/>
-            <a:ext cx="5029200" cy="280000"/>
+            <a:off x="1078992" y="3584448"/>
+            <a:ext cx="6613855" cy="274320"/>
           </a:xfrm>
           <a:prstGeom prst="rect">
             <a:avLst/>
@@ -4611,29 +6269,29 @@
           <a:p>
             <a:pPr algn="l"/>
             <a:r>
-              <a:rPr sz="1500" b="0" i="0" lang="en-US" altLang="en-US">
-                <a:solidFill>
-                  <a:srgbClr val="82909A"/>
-                </a:solidFill>
-                <a:latin typeface="Sarabun"/>
-                <a:ea typeface="Sarabun"/>
-                <a:cs typeface="Sarabun"/>
-              </a:rPr>
-              <a:t>he / she is ...</a:t>
-            </a:r>
-          </a:p>
-        </p:txBody>
-      </p:sp>
-      <p:sp>
-        <p:nvSpPr>
-          <p:cNvPr id="10" name="TextBox 9"/>
+              <a:rPr sz="1700" b="0" i="1" lang="en-US" altLang="en-US">
+                <a:solidFill>
+                  <a:srgbClr val="566873"/>
+                </a:solidFill>
+                <a:latin typeface="Sarabun"/>
+                <a:ea typeface="Sarabun"/>
+                <a:cs typeface="Sarabun"/>
+              </a:rPr>
+              <a:t>nîi</a:t>
+            </a:r>
+          </a:p>
+        </p:txBody>
+      </p:sp>
+      <p:sp>
+        <p:nvSpPr>
+          <p:cNvPr id="15" name="TextBox 14"/>
           <p:cNvSpPr txBox="1"/>
           <p:nvPr/>
         </p:nvSpPr>
         <p:spPr>
           <a:xfrm>
-            <a:off x="1165180" y="4477940"/>
-            <a:ext cx="5029200" cy="822815"/>
+            <a:off x="1078992" y="3959352"/>
+            <a:ext cx="6613855" cy="274320"/>
           </a:xfrm>
           <a:prstGeom prst="rect">
             <a:avLst/>
@@ -4648,40 +6306,113 @@
           <a:p>
             <a:pPr algn="l"/>
             <a:r>
-              <a:rPr sz="2700" b="1" i="0" lang="th-TH" altLang="en-US">
-                <a:solidFill>
-                  <a:srgbClr val="24333D"/>
-                </a:solidFill>
-                <a:latin typeface="Sarabun"/>
-                <a:ea typeface="Sarabun"/>
-                <a:cs typeface="Sarabun"/>
-              </a:rPr>
-              <a:t>คุณคือ...ใช่ไหม</a:t>
-            </a:r>
-            <a:r>
-              <a:rPr sz="1670" b="0" i="1" lang="en-US" altLang="en-US">
-                <a:solidFill>
-                  <a:srgbClr val="566873"/>
-                </a:solidFill>
-                <a:latin typeface="Sarabun"/>
-                <a:ea typeface="Sarabun"/>
-                <a:cs typeface="Sarabun"/>
-              </a:rPr>
-              <a:t> (khun kheuu... châi mái)</a:t>
-            </a:r>
-          </a:p>
-        </p:txBody>
-      </p:sp>
-      <p:sp>
-        <p:nvSpPr>
-          <p:cNvPr id="11" name="TextBox 10"/>
+              <a:rPr sz="1700" b="0" i="0" lang="en-US" altLang="en-US">
+                <a:solidFill>
+                  <a:srgbClr val="82909A"/>
+                </a:solidFill>
+                <a:latin typeface="Sarabun"/>
+                <a:ea typeface="Sarabun"/>
+                <a:cs typeface="Sarabun"/>
+              </a:rPr>
+              <a:t>this</a:t>
+            </a:r>
+          </a:p>
+        </p:txBody>
+      </p:sp>
+      <p:sp>
+        <p:nvSpPr>
+          <p:cNvPr id="16" name="Rounded Rectangle 15"/>
+          <p:cNvSpPr/>
+          <p:nvPr/>
+        </p:nvSpPr>
+        <p:spPr>
+          <a:xfrm>
+            <a:off x="731520" y="4837176"/>
+            <a:ext cx="7071055" cy="1572768"/>
+          </a:xfrm>
+          <a:prstGeom prst="roundRect">
+            <a:avLst/>
+          </a:prstGeom>
+          <a:noFill/>
+          <a:ln>
+            <a:noFill/>
+          </a:ln>
+        </p:spPr>
+        <p:style>
+          <a:lnRef idx="1">
+            <a:schemeClr val="accent1"/>
+          </a:lnRef>
+          <a:fillRef idx="3">
+            <a:schemeClr val="accent1"/>
+          </a:fillRef>
+          <a:effectRef idx="2">
+            <a:schemeClr val="accent1"/>
+          </a:effectRef>
+          <a:fontRef idx="minor">
+            <a:schemeClr val="lt1"/>
+          </a:fontRef>
+        </p:style>
+        <p:txBody>
+          <a:bodyPr rtlCol="0" anchor="ctr"/>
+          <a:lstStyle/>
+          <a:p>
+            <a:pPr algn="ctr"/>
+          </a:p>
+        </p:txBody>
+      </p:sp>
+      <p:sp>
+        <p:nvSpPr>
+          <p:cNvPr id="17" name="Rectangle 16"/>
+          <p:cNvSpPr/>
+          <p:nvPr/>
+        </p:nvSpPr>
+        <p:spPr>
+          <a:xfrm>
+            <a:off x="868680" y="5038344"/>
+            <a:ext cx="73152" cy="1143000"/>
+          </a:xfrm>
+          <a:prstGeom prst="rect">
+            <a:avLst/>
+          </a:prstGeom>
+          <a:solidFill>
+            <a:srgbClr val="355C7D"/>
+          </a:solidFill>
+          <a:ln>
+            <a:noFill/>
+          </a:ln>
+        </p:spPr>
+        <p:style>
+          <a:lnRef idx="1">
+            <a:schemeClr val="accent1"/>
+          </a:lnRef>
+          <a:fillRef idx="3">
+            <a:schemeClr val="accent1"/>
+          </a:fillRef>
+          <a:effectRef idx="2">
+            <a:schemeClr val="accent1"/>
+          </a:effectRef>
+          <a:fontRef idx="minor">
+            <a:schemeClr val="lt1"/>
+          </a:fontRef>
+        </p:style>
+        <p:txBody>
+          <a:bodyPr rtlCol="0" anchor="ctr"/>
+          <a:lstStyle/>
+          <a:p>
+            <a:pPr algn="ctr"/>
+          </a:p>
+        </p:txBody>
+      </p:sp>
+      <p:sp>
+        <p:nvSpPr>
+          <p:cNvPr id="18" name="TextBox 17"/>
           <p:cNvSpPr txBox="1"/>
           <p:nvPr/>
         </p:nvSpPr>
         <p:spPr>
           <a:xfrm>
-            <a:off x="1165180" y="5250000"/>
-            <a:ext cx="5029200" cy="280000"/>
+            <a:off x="1078992" y="4974336"/>
+            <a:ext cx="6613855" cy="320040"/>
           </a:xfrm>
           <a:prstGeom prst="rect">
             <a:avLst/>
@@ -4696,7 +6427,81 @@
           <a:p>
             <a:pPr algn="l"/>
             <a:r>
-              <a:rPr sz="1500" b="0" i="0" lang="en-US" altLang="en-US">
+              <a:rPr sz="1700" b="0" i="0" lang="th-TH" altLang="en-US">
+                <a:solidFill>
+                  <a:srgbClr val="24333D"/>
+                </a:solidFill>
+                <a:latin typeface="Sarabun"/>
+                <a:ea typeface="Sarabun"/>
+                <a:cs typeface="Sarabun"/>
+              </a:rPr>
+              <a:t>คือ</a:t>
+            </a:r>
+          </a:p>
+        </p:txBody>
+      </p:sp>
+      <p:sp>
+        <p:nvSpPr>
+          <p:cNvPr id="19" name="TextBox 18"/>
+          <p:cNvSpPr txBox="1"/>
+          <p:nvPr/>
+        </p:nvSpPr>
+        <p:spPr>
+          <a:xfrm>
+            <a:off x="1078992" y="5340096"/>
+            <a:ext cx="6613855" cy="274320"/>
+          </a:xfrm>
+          <a:prstGeom prst="rect">
+            <a:avLst/>
+          </a:prstGeom>
+          <a:noFill/>
+        </p:spPr>
+        <p:txBody>
+          <a:bodyPr wrap="square" anchor="t">
+            <a:spAutoFit/>
+          </a:bodyPr>
+          <a:lstStyle/>
+          <a:p>
+            <a:pPr algn="l"/>
+            <a:r>
+              <a:rPr sz="1700" b="0" i="1" lang="en-US" altLang="en-US">
+                <a:solidFill>
+                  <a:srgbClr val="566873"/>
+                </a:solidFill>
+                <a:latin typeface="Sarabun"/>
+                <a:ea typeface="Sarabun"/>
+                <a:cs typeface="Sarabun"/>
+              </a:rPr>
+              <a:t>khuue</a:t>
+            </a:r>
+          </a:p>
+        </p:txBody>
+      </p:sp>
+      <p:sp>
+        <p:nvSpPr>
+          <p:cNvPr id="20" name="TextBox 19"/>
+          <p:cNvSpPr txBox="1"/>
+          <p:nvPr/>
+        </p:nvSpPr>
+        <p:spPr>
+          <a:xfrm>
+            <a:off x="1078992" y="5715000"/>
+            <a:ext cx="6613855" cy="274320"/>
+          </a:xfrm>
+          <a:prstGeom prst="rect">
+            <a:avLst/>
+          </a:prstGeom>
+          <a:noFill/>
+        </p:spPr>
+        <p:txBody>
+          <a:bodyPr wrap="square" anchor="t">
+            <a:spAutoFit/>
+          </a:bodyPr>
+          <a:lstStyle/>
+          <a:p>
+            <a:pPr algn="l"/>
+            <a:r>
+              <a:rPr sz="1700" b="0" i="0" lang="en-US" altLang="en-US">
                 <a:solidFill>
                   <a:srgbClr val="82909A"/>
                 </a:solidFill>
@@ -4704,7 +6509,7 @@
                 <a:ea typeface="Sarabun"/>
                 <a:cs typeface="Sarabun"/>
               </a:rPr>
-              <a:t>you are ... right?</a:t>
+              <a:t>is (identity)</a:t>
             </a:r>
           </a:p>
         </p:txBody>
@@ -4720,6 +6525,14 @@
 <file path=ppt/slides/slide5.xml><?xml version="1.0" encoding="utf-8"?>
 <p:sld xmlns:a="http://schemas.openxmlformats.org/drawingml/2006/main" xmlns:p="http://schemas.openxmlformats.org/presentationml/2006/main" xmlns:r="http://schemas.openxmlformats.org/officeDocument/2006/relationships">
   <p:cSld>
+    <p:bg>
+      <p:bgPr>
+        <a:solidFill>
+          <a:srgbClr val="F5F7F8"/>
+        </a:solidFill>
+        <a:effectLst/>
+      </p:bgPr>
+    </p:bg>
     <p:spTree>
       <p:nvGrpSpPr>
         <p:cNvPr id="1" name=""/>
@@ -4727,40 +6540,116 @@
         <p:nvPr/>
       </p:nvGrpSpPr>
       <p:grpSpPr/>
-      <p:pic>
-        <p:nvPicPr>
-          <p:cNvPr id="2" name="Picture 1" descr="slide-05.png"/>
-          <p:cNvPicPr>
-            <a:picLocks noChangeAspect="1"/>
-          </p:cNvPicPr>
-          <p:nvPr/>
-        </p:nvPicPr>
-        <p:blipFill>
-          <a:blip r:embed="rId2"/>
-          <a:stretch>
-            <a:fillRect/>
-          </a:stretch>
-        </p:blipFill>
+      <p:sp>
+        <p:nvSpPr>
+          <p:cNvPr id="2" name="__pip_placeholder__"/>
+          <p:cNvSpPr/>
+          <p:nvPr/>
+        </p:nvSpPr>
+        <p:spPr>
+          <a:xfrm>
+            <a:off x="8351215" y="0"/>
+            <a:ext cx="3840480" cy="2880360"/>
+          </a:xfrm>
+          <a:prstGeom prst="rect">
+            <a:avLst/>
+          </a:prstGeom>
+          <a:solidFill>
+            <a:srgbClr val="DBE7EC">
+              <a:alpha val="30000"/>
+            </a:srgbClr>
+          </a:solidFill>
+          <a:ln w="19050">
+            <a:solidFill>
+              <a:srgbClr val="355C7D"/>
+            </a:solidFill>
+            <a:prstDash val="sysDash"/>
+          </a:ln>
+        </p:spPr>
+        <p:style>
+          <a:lnRef idx="1">
+            <a:schemeClr val="accent1"/>
+          </a:lnRef>
+          <a:fillRef idx="3">
+            <a:schemeClr val="accent1"/>
+          </a:fillRef>
+          <a:effectRef idx="2">
+            <a:schemeClr val="accent1"/>
+          </a:effectRef>
+          <a:fontRef idx="minor">
+            <a:schemeClr val="lt1"/>
+          </a:fontRef>
+        </p:style>
+        <p:txBody>
+          <a:bodyPr rtlCol="0" anchor="ctr" wrap="none"/>
+          <a:lstStyle/>
+          <a:p>
+            <a:pPr algn="ctr"/>
+            <a:r>
+              <a:rPr sz="1800" b="1">
+                <a:solidFill>
+                  <a:srgbClr val="355C7D"/>
+                </a:solidFill>
+                <a:latin typeface="Sarabun"/>
+              </a:rPr>
+              <a:t>Nine</a:t>
+            </a:r>
+          </a:p>
+        </p:txBody>
+      </p:sp>
+      <p:sp>
+        <p:nvSpPr>
+          <p:cNvPr id="3" name="Rectangle 2"/>
+          <p:cNvSpPr/>
+          <p:nvPr/>
+        </p:nvSpPr>
         <p:spPr>
           <a:xfrm>
             <a:off x="0" y="0"/>
-            <a:ext cx="12191695" cy="6858000"/>
-          </a:xfrm>
-          <a:prstGeom prst="rect">
-            <a:avLst/>
-          </a:prstGeom>
-        </p:spPr>
-      </p:pic>
-      <p:sp>
-        <p:nvSpPr>
-          <p:cNvPr id="3" name="TextBox 2"/>
+            <a:ext cx="12191695" cy="63500"/>
+          </a:xfrm>
+          <a:prstGeom prst="rect">
+            <a:avLst/>
+          </a:prstGeom>
+          <a:solidFill>
+            <a:srgbClr val="355C7D"/>
+          </a:solidFill>
+          <a:ln>
+            <a:noFill/>
+          </a:ln>
+        </p:spPr>
+        <p:style>
+          <a:lnRef idx="1">
+            <a:schemeClr val="accent1"/>
+          </a:lnRef>
+          <a:fillRef idx="3">
+            <a:schemeClr val="accent1"/>
+          </a:fillRef>
+          <a:effectRef idx="2">
+            <a:schemeClr val="accent1"/>
+          </a:effectRef>
+          <a:fontRef idx="minor">
+            <a:schemeClr val="lt1"/>
+          </a:fontRef>
+        </p:style>
+        <p:txBody>
+          <a:bodyPr rtlCol="0" anchor="ctr"/>
+          <a:lstStyle/>
+          <a:p>
+            <a:pPr algn="ctr"/>
+          </a:p>
+        </p:txBody>
+      </p:sp>
+      <p:sp>
+        <p:nvSpPr>
+          <p:cNvPr id="4" name="TextBox 3"/>
           <p:cNvSpPr txBox="1"/>
           <p:nvPr/>
         </p:nvSpPr>
         <p:spPr>
           <a:xfrm>
-            <a:off x="731527" y="954588"/>
-            <a:ext cx="1210500" cy="320100"/>
+            <a:off x="731520" y="256032"/>
+            <a:ext cx="7071055" cy="256032"/>
           </a:xfrm>
           <a:prstGeom prst="rect">
             <a:avLst/>
@@ -4773,31 +6662,31 @@
           </a:bodyPr>
           <a:lstStyle/>
           <a:p>
-            <a:pPr algn="ctr"/>
+            <a:pPr algn="l"/>
             <a:r>
               <a:rPr sz="1200" b="1" i="0" lang="en-US" altLang="en-US">
                 <a:solidFill>
-                  <a:srgbClr val="FFFFFF"/>
-                </a:solidFill>
-                <a:latin typeface="Sarabun"/>
-                <a:ea typeface="Sarabun"/>
-                <a:cs typeface="Sarabun"/>
-              </a:rPr>
-              <a:t>Section 3</a:t>
-            </a:r>
-          </a:p>
-        </p:txBody>
-      </p:sp>
-      <p:sp>
-        <p:nvSpPr>
-          <p:cNvPr id="4" name="TextBox 3"/>
+                  <a:srgbClr val="355C7D"/>
+                </a:solidFill>
+                <a:latin typeface="Sarabun"/>
+                <a:ea typeface="Sarabun"/>
+                <a:cs typeface="Sarabun"/>
+              </a:rPr>
+              <a:t>Teaching slide</a:t>
+            </a:r>
+          </a:p>
+        </p:txBody>
+      </p:sp>
+      <p:sp>
+        <p:nvSpPr>
+          <p:cNvPr id="5" name="TextBox 4"/>
           <p:cNvSpPr txBox="1"/>
           <p:nvPr/>
         </p:nvSpPr>
         <p:spPr>
           <a:xfrm>
-            <a:off x="1942043" y="870018"/>
-            <a:ext cx="5943600" cy="457200"/>
+            <a:off x="731520" y="530352"/>
+            <a:ext cx="7071055" cy="640080"/>
           </a:xfrm>
           <a:prstGeom prst="rect">
             <a:avLst/>
@@ -4812,7 +6701,7 @@
           <a:p>
             <a:pPr algn="l"/>
             <a:r>
-              <a:rPr sz="3000" b="1" i="0" lang="en-US" altLang="en-US">
+              <a:rPr sz="3600" b="1" i="0" lang="en-US" altLang="en-US">
                 <a:solidFill>
                   <a:srgbClr val="24333D"/>
                 </a:solidFill>
@@ -4827,14 +6716,98 @@
       </p:sp>
       <p:sp>
         <p:nvSpPr>
-          <p:cNvPr id="5" name="TextBox 4"/>
+          <p:cNvPr id="6" name="Rounded Rectangle 5"/>
+          <p:cNvSpPr/>
+          <p:nvPr/>
+        </p:nvSpPr>
+        <p:spPr>
+          <a:xfrm>
+            <a:off x="731520" y="1325880"/>
+            <a:ext cx="7071055" cy="1572768"/>
+          </a:xfrm>
+          <a:prstGeom prst="roundRect">
+            <a:avLst/>
+          </a:prstGeom>
+          <a:noFill/>
+          <a:ln>
+            <a:noFill/>
+          </a:ln>
+        </p:spPr>
+        <p:style>
+          <a:lnRef idx="1">
+            <a:schemeClr val="accent1"/>
+          </a:lnRef>
+          <a:fillRef idx="3">
+            <a:schemeClr val="accent1"/>
+          </a:fillRef>
+          <a:effectRef idx="2">
+            <a:schemeClr val="accent1"/>
+          </a:effectRef>
+          <a:fontRef idx="minor">
+            <a:schemeClr val="lt1"/>
+          </a:fontRef>
+        </p:style>
+        <p:txBody>
+          <a:bodyPr rtlCol="0" anchor="ctr"/>
+          <a:lstStyle/>
+          <a:p>
+            <a:pPr algn="ctr"/>
+          </a:p>
+        </p:txBody>
+      </p:sp>
+      <p:sp>
+        <p:nvSpPr>
+          <p:cNvPr id="7" name="Rectangle 6"/>
+          <p:cNvSpPr/>
+          <p:nvPr/>
+        </p:nvSpPr>
+        <p:spPr>
+          <a:xfrm>
+            <a:off x="868680" y="1527048"/>
+            <a:ext cx="73152" cy="1143000"/>
+          </a:xfrm>
+          <a:prstGeom prst="rect">
+            <a:avLst/>
+          </a:prstGeom>
+          <a:solidFill>
+            <a:srgbClr val="355C7D"/>
+          </a:solidFill>
+          <a:ln>
+            <a:noFill/>
+          </a:ln>
+        </p:spPr>
+        <p:style>
+          <a:lnRef idx="1">
+            <a:schemeClr val="accent1"/>
+          </a:lnRef>
+          <a:fillRef idx="3">
+            <a:schemeClr val="accent1"/>
+          </a:fillRef>
+          <a:effectRef idx="2">
+            <a:schemeClr val="accent1"/>
+          </a:effectRef>
+          <a:fontRef idx="minor">
+            <a:schemeClr val="lt1"/>
+          </a:fontRef>
+        </p:style>
+        <p:txBody>
+          <a:bodyPr rtlCol="0" anchor="ctr"/>
+          <a:lstStyle/>
+          <a:p>
+            <a:pPr algn="ctr"/>
+          </a:p>
+        </p:txBody>
+      </p:sp>
+      <p:sp>
+        <p:nvSpPr>
+          <p:cNvPr id="8" name="TextBox 7"/>
           <p:cNvSpPr txBox="1"/>
           <p:nvPr/>
         </p:nvSpPr>
         <p:spPr>
           <a:xfrm>
-            <a:off x="731520" y="1618433"/>
-            <a:ext cx="3108900" cy="365700"/>
+            <a:off x="1078992" y="1463040"/>
+            <a:ext cx="6613855" cy="320040"/>
           </a:xfrm>
           <a:prstGeom prst="rect">
             <a:avLst/>
@@ -4847,31 +6820,31 @@
           </a:bodyPr>
           <a:lstStyle/>
           <a:p>
-            <a:pPr algn="ctr"/>
-            <a:r>
-              <a:rPr sz="1200" b="1" i="0" lang="en-US" altLang="en-US">
-                <a:solidFill>
-                  <a:srgbClr val="FFFFFF"/>
-                </a:solidFill>
-                <a:latin typeface="Sarabun"/>
-                <a:ea typeface="Sarabun"/>
-                <a:cs typeface="Sarabun"/>
-              </a:rPr>
-              <a:t>Ask about another person</a:t>
-            </a:r>
-          </a:p>
-        </p:txBody>
-      </p:sp>
-      <p:sp>
-        <p:nvSpPr>
-          <p:cNvPr id="6" name="TextBox 5"/>
+            <a:pPr algn="l"/>
+            <a:r>
+              <a:rPr sz="1700" b="0" i="0" lang="th-TH" altLang="en-US">
+                <a:solidFill>
+                  <a:srgbClr val="24333D"/>
+                </a:solidFill>
+                <a:latin typeface="Sarabun"/>
+                <a:ea typeface="Sarabun"/>
+                <a:cs typeface="Sarabun"/>
+              </a:rPr>
+              <a:t>ใคร</a:t>
+            </a:r>
+          </a:p>
+        </p:txBody>
+      </p:sp>
+      <p:sp>
+        <p:nvSpPr>
+          <p:cNvPr id="9" name="TextBox 8"/>
           <p:cNvSpPr txBox="1"/>
           <p:nvPr/>
         </p:nvSpPr>
         <p:spPr>
           <a:xfrm>
-            <a:off x="4114800" y="1593171"/>
-            <a:ext cx="3108900" cy="365700"/>
+            <a:off x="1078992" y="1828800"/>
+            <a:ext cx="6613855" cy="274320"/>
           </a:xfrm>
           <a:prstGeom prst="rect">
             <a:avLst/>
@@ -4884,31 +6857,31 @@
           </a:bodyPr>
           <a:lstStyle/>
           <a:p>
-            <a:pPr algn="ctr"/>
-            <a:r>
-              <a:rPr sz="1200" b="1" i="0" lang="en-US" altLang="en-US">
-                <a:solidFill>
-                  <a:srgbClr val="FFFFFF"/>
-                </a:solidFill>
-                <a:latin typeface="Sarabun"/>
-                <a:ea typeface="Sarabun"/>
-                <a:cs typeface="Sarabun"/>
-              </a:rPr>
-              <a:t>Ask about this person</a:t>
-            </a:r>
-          </a:p>
-        </p:txBody>
-      </p:sp>
-      <p:sp>
-        <p:nvSpPr>
-          <p:cNvPr id="7" name="TextBox 6"/>
+            <a:pPr algn="l"/>
+            <a:r>
+              <a:rPr sz="1700" b="0" i="1" lang="en-US" altLang="en-US">
+                <a:solidFill>
+                  <a:srgbClr val="566873"/>
+                </a:solidFill>
+                <a:latin typeface="Sarabun"/>
+                <a:ea typeface="Sarabun"/>
+                <a:cs typeface="Sarabun"/>
+              </a:rPr>
+              <a:t>khrai</a:t>
+            </a:r>
+          </a:p>
+        </p:txBody>
+      </p:sp>
+      <p:sp>
+        <p:nvSpPr>
+          <p:cNvPr id="10" name="TextBox 9"/>
           <p:cNvSpPr txBox="1"/>
           <p:nvPr/>
         </p:nvSpPr>
         <p:spPr>
           <a:xfrm>
-            <a:off x="1051547" y="2178469"/>
-            <a:ext cx="2651750" cy="836584"/>
+            <a:off x="1078992" y="2203704"/>
+            <a:ext cx="6613855" cy="274320"/>
           </a:xfrm>
           <a:prstGeom prst="rect">
             <a:avLst/>
@@ -4923,40 +6896,113 @@
           <a:p>
             <a:pPr algn="l"/>
             <a:r>
-              <a:rPr sz="2700" b="1" i="0" lang="th-TH" altLang="en-US">
-                <a:solidFill>
-                  <a:srgbClr val="24333D"/>
-                </a:solidFill>
-                <a:latin typeface="Sarabun"/>
-                <a:ea typeface="Sarabun"/>
-                <a:cs typeface="Sarabun"/>
-              </a:rPr>
-              <a:t>เขาคือใคร</a:t>
-            </a:r>
-            <a:r>
-              <a:rPr sz="1670" b="0" i="1" lang="en-US" altLang="en-US">
-                <a:solidFill>
-                  <a:srgbClr val="566873"/>
-                </a:solidFill>
-                <a:latin typeface="Sarabun"/>
-                <a:ea typeface="Sarabun"/>
-                <a:cs typeface="Sarabun"/>
-              </a:rPr>
-              <a:t> (khǎo kheuu khrai)</a:t>
-            </a:r>
-          </a:p>
-        </p:txBody>
-      </p:sp>
-      <p:sp>
-        <p:nvSpPr>
-          <p:cNvPr id="8" name="TextBox 7"/>
+              <a:rPr sz="1700" b="0" i="0" lang="en-US" altLang="en-US">
+                <a:solidFill>
+                  <a:srgbClr val="82909A"/>
+                </a:solidFill>
+                <a:latin typeface="Sarabun"/>
+                <a:ea typeface="Sarabun"/>
+                <a:cs typeface="Sarabun"/>
+              </a:rPr>
+              <a:t>who</a:t>
+            </a:r>
+          </a:p>
+        </p:txBody>
+      </p:sp>
+      <p:sp>
+        <p:nvSpPr>
+          <p:cNvPr id="11" name="Rounded Rectangle 10"/>
+          <p:cNvSpPr/>
+          <p:nvPr/>
+        </p:nvSpPr>
+        <p:spPr>
+          <a:xfrm>
+            <a:off x="731520" y="3081528"/>
+            <a:ext cx="7071055" cy="1572768"/>
+          </a:xfrm>
+          <a:prstGeom prst="roundRect">
+            <a:avLst/>
+          </a:prstGeom>
+          <a:noFill/>
+          <a:ln>
+            <a:noFill/>
+          </a:ln>
+        </p:spPr>
+        <p:style>
+          <a:lnRef idx="1">
+            <a:schemeClr val="accent1"/>
+          </a:lnRef>
+          <a:fillRef idx="3">
+            <a:schemeClr val="accent1"/>
+          </a:fillRef>
+          <a:effectRef idx="2">
+            <a:schemeClr val="accent1"/>
+          </a:effectRef>
+          <a:fontRef idx="minor">
+            <a:schemeClr val="lt1"/>
+          </a:fontRef>
+        </p:style>
+        <p:txBody>
+          <a:bodyPr rtlCol="0" anchor="ctr"/>
+          <a:lstStyle/>
+          <a:p>
+            <a:pPr algn="ctr"/>
+          </a:p>
+        </p:txBody>
+      </p:sp>
+      <p:sp>
+        <p:nvSpPr>
+          <p:cNvPr id="12" name="Rectangle 11"/>
+          <p:cNvSpPr/>
+          <p:nvPr/>
+        </p:nvSpPr>
+        <p:spPr>
+          <a:xfrm>
+            <a:off x="868680" y="3282696"/>
+            <a:ext cx="73152" cy="1143000"/>
+          </a:xfrm>
+          <a:prstGeom prst="rect">
+            <a:avLst/>
+          </a:prstGeom>
+          <a:solidFill>
+            <a:srgbClr val="355C7D"/>
+          </a:solidFill>
+          <a:ln>
+            <a:noFill/>
+          </a:ln>
+        </p:spPr>
+        <p:style>
+          <a:lnRef idx="1">
+            <a:schemeClr val="accent1"/>
+          </a:lnRef>
+          <a:fillRef idx="3">
+            <a:schemeClr val="accent1"/>
+          </a:fillRef>
+          <a:effectRef idx="2">
+            <a:schemeClr val="accent1"/>
+          </a:effectRef>
+          <a:fontRef idx="minor">
+            <a:schemeClr val="lt1"/>
+          </a:fontRef>
+        </p:style>
+        <p:txBody>
+          <a:bodyPr rtlCol="0" anchor="ctr"/>
+          <a:lstStyle/>
+          <a:p>
+            <a:pPr algn="ctr"/>
+          </a:p>
+        </p:txBody>
+      </p:sp>
+      <p:sp>
+        <p:nvSpPr>
+          <p:cNvPr id="13" name="TextBox 12"/>
           <p:cNvSpPr txBox="1"/>
           <p:nvPr/>
         </p:nvSpPr>
         <p:spPr>
           <a:xfrm>
-            <a:off x="1051560" y="3074630"/>
-            <a:ext cx="2651700" cy="274200"/>
+            <a:off x="1078992" y="3218688"/>
+            <a:ext cx="6613855" cy="320040"/>
           </a:xfrm>
           <a:prstGeom prst="rect">
             <a:avLst/>
@@ -4971,29 +7017,29 @@
           <a:p>
             <a:pPr algn="l"/>
             <a:r>
-              <a:rPr sz="1500" b="0" i="0" lang="en-US" altLang="en-US">
-                <a:solidFill>
-                  <a:srgbClr val="82909A"/>
-                </a:solidFill>
-                <a:latin typeface="Sarabun"/>
-                <a:ea typeface="Sarabun"/>
-                <a:cs typeface="Sarabun"/>
-              </a:rPr>
-              <a:t>who is he / she?</a:t>
-            </a:r>
-          </a:p>
-        </p:txBody>
-      </p:sp>
-      <p:sp>
-        <p:nvSpPr>
-          <p:cNvPr id="9" name="TextBox 8"/>
+              <a:rPr sz="1700" b="0" i="0" lang="th-TH" altLang="en-US">
+                <a:solidFill>
+                  <a:srgbClr val="24333D"/>
+                </a:solidFill>
+                <a:latin typeface="Sarabun"/>
+                <a:ea typeface="Sarabun"/>
+                <a:cs typeface="Sarabun"/>
+              </a:rPr>
+              <a:t>เขาคือใคร</a:t>
+            </a:r>
+          </a:p>
+        </p:txBody>
+      </p:sp>
+      <p:sp>
+        <p:nvSpPr>
+          <p:cNvPr id="14" name="TextBox 13"/>
           <p:cNvSpPr txBox="1"/>
           <p:nvPr/>
         </p:nvSpPr>
         <p:spPr>
           <a:xfrm>
-            <a:off x="4434840" y="2178469"/>
-            <a:ext cx="2651700" cy="823896"/>
+            <a:off x="1078992" y="3584448"/>
+            <a:ext cx="6613855" cy="274320"/>
           </a:xfrm>
           <a:prstGeom prst="rect">
             <a:avLst/>
@@ -5008,18 +7054,7 @@
           <a:p>
             <a:pPr algn="l"/>
             <a:r>
-              <a:rPr sz="2700" b="1" i="0" lang="th-TH" altLang="en-US">
-                <a:solidFill>
-                  <a:srgbClr val="24333D"/>
-                </a:solidFill>
-                <a:latin typeface="Sarabun"/>
-                <a:ea typeface="Sarabun"/>
-                <a:cs typeface="Sarabun"/>
-              </a:rPr>
-              <a:t>คนนี้คือใคร</a:t>
-            </a:r>
-            <a:r>
-              <a:rPr sz="1670" b="0" i="1" lang="en-US" altLang="en-US">
+              <a:rPr sz="1700" b="0" i="1" lang="en-US" altLang="en-US">
                 <a:solidFill>
                   <a:srgbClr val="566873"/>
                 </a:solidFill>
@@ -5027,21 +7062,21 @@
                 <a:ea typeface="Sarabun"/>
                 <a:cs typeface="Sarabun"/>
               </a:rPr>
-              <a:t> (khon níi kheuu khrai)</a:t>
-            </a:r>
-          </a:p>
-        </p:txBody>
-      </p:sp>
-      <p:sp>
-        <p:nvSpPr>
-          <p:cNvPr id="10" name="TextBox 9"/>
+              <a:t>khǎo khuue khrai</a:t>
+            </a:r>
+          </a:p>
+        </p:txBody>
+      </p:sp>
+      <p:sp>
+        <p:nvSpPr>
+          <p:cNvPr id="15" name="TextBox 14"/>
           <p:cNvSpPr txBox="1"/>
           <p:nvPr/>
         </p:nvSpPr>
         <p:spPr>
           <a:xfrm>
-            <a:off x="4434840" y="3074630"/>
-            <a:ext cx="2651700" cy="274200"/>
+            <a:off x="1078992" y="3959352"/>
+            <a:ext cx="6613855" cy="274320"/>
           </a:xfrm>
           <a:prstGeom prst="rect">
             <a:avLst/>
@@ -5056,7 +7091,7 @@
           <a:p>
             <a:pPr algn="l"/>
             <a:r>
-              <a:rPr sz="1500" b="0" i="0" lang="en-US" altLang="en-US">
+              <a:rPr sz="1700" b="0" i="0" lang="en-US" altLang="en-US">
                 <a:solidFill>
                   <a:srgbClr val="82909A"/>
                 </a:solidFill>
@@ -5064,21 +7099,105 @@
                 <a:ea typeface="Sarabun"/>
                 <a:cs typeface="Sarabun"/>
               </a:rPr>
-              <a:t>who is this person?</a:t>
-            </a:r>
-          </a:p>
-        </p:txBody>
-      </p:sp>
-      <p:sp>
-        <p:nvSpPr>
-          <p:cNvPr id="11" name="TextBox 10"/>
+              <a:t>who is he/she?</a:t>
+            </a:r>
+          </a:p>
+        </p:txBody>
+      </p:sp>
+      <p:sp>
+        <p:nvSpPr>
+          <p:cNvPr id="16" name="Rounded Rectangle 15"/>
+          <p:cNvSpPr/>
+          <p:nvPr/>
+        </p:nvSpPr>
+        <p:spPr>
+          <a:xfrm>
+            <a:off x="731520" y="4837176"/>
+            <a:ext cx="7071055" cy="1572768"/>
+          </a:xfrm>
+          <a:prstGeom prst="roundRect">
+            <a:avLst/>
+          </a:prstGeom>
+          <a:noFill/>
+          <a:ln>
+            <a:noFill/>
+          </a:ln>
+        </p:spPr>
+        <p:style>
+          <a:lnRef idx="1">
+            <a:schemeClr val="accent1"/>
+          </a:lnRef>
+          <a:fillRef idx="3">
+            <a:schemeClr val="accent1"/>
+          </a:fillRef>
+          <a:effectRef idx="2">
+            <a:schemeClr val="accent1"/>
+          </a:effectRef>
+          <a:fontRef idx="minor">
+            <a:schemeClr val="lt1"/>
+          </a:fontRef>
+        </p:style>
+        <p:txBody>
+          <a:bodyPr rtlCol="0" anchor="ctr"/>
+          <a:lstStyle/>
+          <a:p>
+            <a:pPr algn="ctr"/>
+          </a:p>
+        </p:txBody>
+      </p:sp>
+      <p:sp>
+        <p:nvSpPr>
+          <p:cNvPr id="17" name="Rectangle 16"/>
+          <p:cNvSpPr/>
+          <p:nvPr/>
+        </p:nvSpPr>
+        <p:spPr>
+          <a:xfrm>
+            <a:off x="868680" y="5038344"/>
+            <a:ext cx="73152" cy="1143000"/>
+          </a:xfrm>
+          <a:prstGeom prst="rect">
+            <a:avLst/>
+          </a:prstGeom>
+          <a:solidFill>
+            <a:srgbClr val="355C7D"/>
+          </a:solidFill>
+          <a:ln>
+            <a:noFill/>
+          </a:ln>
+        </p:spPr>
+        <p:style>
+          <a:lnRef idx="1">
+            <a:schemeClr val="accent1"/>
+          </a:lnRef>
+          <a:fillRef idx="3">
+            <a:schemeClr val="accent1"/>
+          </a:fillRef>
+          <a:effectRef idx="2">
+            <a:schemeClr val="accent1"/>
+          </a:effectRef>
+          <a:fontRef idx="minor">
+            <a:schemeClr val="lt1"/>
+          </a:fontRef>
+        </p:style>
+        <p:txBody>
+          <a:bodyPr rtlCol="0" anchor="ctr"/>
+          <a:lstStyle/>
+          <a:p>
+            <a:pPr algn="ctr"/>
+          </a:p>
+        </p:txBody>
+      </p:sp>
+      <p:sp>
+        <p:nvSpPr>
+          <p:cNvPr id="18" name="TextBox 17"/>
           <p:cNvSpPr txBox="1"/>
           <p:nvPr/>
         </p:nvSpPr>
         <p:spPr>
           <a:xfrm>
-            <a:off x="1624195" y="3816533"/>
-            <a:ext cx="3108900" cy="365700"/>
+            <a:off x="1078992" y="4974336"/>
+            <a:ext cx="6613855" cy="320040"/>
           </a:xfrm>
           <a:prstGeom prst="rect">
             <a:avLst/>
@@ -5091,31 +7210,31 @@
           </a:bodyPr>
           <a:lstStyle/>
           <a:p>
-            <a:pPr algn="ctr"/>
-            <a:r>
-              <a:rPr sz="1200" b="1" i="0" lang="en-US" altLang="en-US">
-                <a:solidFill>
-                  <a:srgbClr val="FFFFFF"/>
-                </a:solidFill>
-                <a:latin typeface="Sarabun"/>
-                <a:ea typeface="Sarabun"/>
-                <a:cs typeface="Sarabun"/>
-              </a:rPr>
-              <a:t>Useful confirmation</a:t>
-            </a:r>
-          </a:p>
-        </p:txBody>
-      </p:sp>
-      <p:sp>
-        <p:nvSpPr>
-          <p:cNvPr id="12" name="TextBox 11"/>
+            <a:pPr algn="l"/>
+            <a:r>
+              <a:rPr sz="1700" b="0" i="0" lang="th-TH" altLang="en-US">
+                <a:solidFill>
+                  <a:srgbClr val="24333D"/>
+                </a:solidFill>
+                <a:latin typeface="Sarabun"/>
+                <a:ea typeface="Sarabun"/>
+                <a:cs typeface="Sarabun"/>
+              </a:rPr>
+              <a:t>คุณคือ...ใช่ไหม</a:t>
+            </a:r>
+          </a:p>
+        </p:txBody>
+      </p:sp>
+      <p:sp>
+        <p:nvSpPr>
+          <p:cNvPr id="19" name="TextBox 18"/>
           <p:cNvSpPr txBox="1"/>
           <p:nvPr/>
         </p:nvSpPr>
         <p:spPr>
           <a:xfrm>
-            <a:off x="2103120" y="4525340"/>
-            <a:ext cx="4907431" cy="867034"/>
+            <a:off x="1078992" y="5340096"/>
+            <a:ext cx="6613855" cy="274320"/>
           </a:xfrm>
           <a:prstGeom prst="rect">
             <a:avLst/>
@@ -5130,18 +7249,7 @@
           <a:p>
             <a:pPr algn="l"/>
             <a:r>
-              <a:rPr sz="2700" b="1" i="0" lang="th-TH" altLang="en-US">
-                <a:solidFill>
-                  <a:srgbClr val="24333D"/>
-                </a:solidFill>
-                <a:latin typeface="Sarabun"/>
-                <a:ea typeface="Sarabun"/>
-                <a:cs typeface="Sarabun"/>
-              </a:rPr>
-              <a:t>ใช่</a:t>
-            </a:r>
-            <a:r>
-              <a:rPr sz="1670" b="0" i="1" lang="en-US" altLang="en-US">
+              <a:rPr sz="1700" b="0" i="1" lang="en-US" altLang="en-US">
                 <a:solidFill>
                   <a:srgbClr val="566873"/>
                 </a:solidFill>
@@ -5149,21 +7257,21 @@
                 <a:ea typeface="Sarabun"/>
                 <a:cs typeface="Sarabun"/>
               </a:rPr>
-              <a:t> (châi)</a:t>
-            </a:r>
-          </a:p>
-        </p:txBody>
-      </p:sp>
-      <p:sp>
-        <p:nvSpPr>
-          <p:cNvPr id="13" name="TextBox 12"/>
+              <a:t>khun khuue...châi mǎi</a:t>
+            </a:r>
+          </a:p>
+        </p:txBody>
+      </p:sp>
+      <p:sp>
+        <p:nvSpPr>
+          <p:cNvPr id="20" name="TextBox 19"/>
           <p:cNvSpPr txBox="1"/>
           <p:nvPr/>
         </p:nvSpPr>
         <p:spPr>
           <a:xfrm>
-            <a:off x="2103150" y="5370163"/>
-            <a:ext cx="4023300" cy="593100"/>
+            <a:off x="1078992" y="5715000"/>
+            <a:ext cx="6613855" cy="274320"/>
           </a:xfrm>
           <a:prstGeom prst="rect">
             <a:avLst/>
@@ -5178,15 +7286,15 @@
           <a:p>
             <a:pPr algn="l"/>
             <a:r>
-              <a:rPr sz="1500" b="0" i="0" lang="en-US" altLang="en-US">
-                <a:solidFill>
-                  <a:srgbClr val="566873"/>
-                </a:solidFill>
-                <a:latin typeface="Sarabun"/>
-                <a:ea typeface="Sarabun"/>
-                <a:cs typeface="Sarabun"/>
-              </a:rPr>
-              <a:t>Use after the answer when the identification is correct.</a:t>
+              <a:rPr sz="1700" b="0" i="0" lang="en-US" altLang="en-US">
+                <a:solidFill>
+                  <a:srgbClr val="82909A"/>
+                </a:solidFill>
+                <a:latin typeface="Sarabun"/>
+                <a:ea typeface="Sarabun"/>
+                <a:cs typeface="Sarabun"/>
+              </a:rPr>
+              <a:t>you are...right?</a:t>
             </a:r>
           </a:p>
         </p:txBody>
@@ -5202,6 +7310,14 @@
 <file path=ppt/slides/slide6.xml><?xml version="1.0" encoding="utf-8"?>
 <p:sld xmlns:a="http://schemas.openxmlformats.org/drawingml/2006/main" xmlns:p="http://schemas.openxmlformats.org/presentationml/2006/main" xmlns:r="http://schemas.openxmlformats.org/officeDocument/2006/relationships">
   <p:cSld>
+    <p:bg>
+      <p:bgPr>
+        <a:solidFill>
+          <a:srgbClr val="F5F7F8"/>
+        </a:solidFill>
+        <a:effectLst/>
+      </p:bgPr>
+    </p:bg>
     <p:spTree>
       <p:nvGrpSpPr>
         <p:cNvPr id="1" name=""/>
@@ -5209,40 +7325,116 @@
         <p:nvPr/>
       </p:nvGrpSpPr>
       <p:grpSpPr/>
-      <p:pic>
-        <p:nvPicPr>
-          <p:cNvPr id="2" name="Picture 1" descr="slide-06.png"/>
-          <p:cNvPicPr>
-            <a:picLocks noChangeAspect="1"/>
-          </p:cNvPicPr>
-          <p:nvPr/>
-        </p:nvPicPr>
-        <p:blipFill>
-          <a:blip r:embed="rId2"/>
-          <a:stretch>
-            <a:fillRect/>
-          </a:stretch>
-        </p:blipFill>
+      <p:sp>
+        <p:nvSpPr>
+          <p:cNvPr id="2" name="__pip_placeholder__"/>
+          <p:cNvSpPr/>
+          <p:nvPr/>
+        </p:nvSpPr>
+        <p:spPr>
+          <a:xfrm>
+            <a:off x="8351215" y="0"/>
+            <a:ext cx="3840480" cy="2880360"/>
+          </a:xfrm>
+          <a:prstGeom prst="rect">
+            <a:avLst/>
+          </a:prstGeom>
+          <a:solidFill>
+            <a:srgbClr val="DBE7EC">
+              <a:alpha val="30000"/>
+            </a:srgbClr>
+          </a:solidFill>
+          <a:ln w="19050">
+            <a:solidFill>
+              <a:srgbClr val="355C7D"/>
+            </a:solidFill>
+            <a:prstDash val="sysDash"/>
+          </a:ln>
+        </p:spPr>
+        <p:style>
+          <a:lnRef idx="1">
+            <a:schemeClr val="accent1"/>
+          </a:lnRef>
+          <a:fillRef idx="3">
+            <a:schemeClr val="accent1"/>
+          </a:fillRef>
+          <a:effectRef idx="2">
+            <a:schemeClr val="accent1"/>
+          </a:effectRef>
+          <a:fontRef idx="minor">
+            <a:schemeClr val="lt1"/>
+          </a:fontRef>
+        </p:style>
+        <p:txBody>
+          <a:bodyPr rtlCol="0" anchor="ctr" wrap="none"/>
+          <a:lstStyle/>
+          <a:p>
+            <a:pPr algn="ctr"/>
+            <a:r>
+              <a:rPr sz="1800" b="1">
+                <a:solidFill>
+                  <a:srgbClr val="355C7D"/>
+                </a:solidFill>
+                <a:latin typeface="Sarabun"/>
+              </a:rPr>
+              <a:t>Nine</a:t>
+            </a:r>
+          </a:p>
+        </p:txBody>
+      </p:sp>
+      <p:sp>
+        <p:nvSpPr>
+          <p:cNvPr id="3" name="Rectangle 2"/>
+          <p:cNvSpPr/>
+          <p:nvPr/>
+        </p:nvSpPr>
         <p:spPr>
           <a:xfrm>
             <a:off x="0" y="0"/>
-            <a:ext cx="12191695" cy="6858000"/>
-          </a:xfrm>
-          <a:prstGeom prst="rect">
-            <a:avLst/>
-          </a:prstGeom>
-        </p:spPr>
-      </p:pic>
-      <p:sp>
-        <p:nvSpPr>
-          <p:cNvPr id="3" name="TextBox 2"/>
+            <a:ext cx="12191695" cy="63500"/>
+          </a:xfrm>
+          <a:prstGeom prst="rect">
+            <a:avLst/>
+          </a:prstGeom>
+          <a:solidFill>
+            <a:srgbClr val="355C7D"/>
+          </a:solidFill>
+          <a:ln>
+            <a:noFill/>
+          </a:ln>
+        </p:spPr>
+        <p:style>
+          <a:lnRef idx="1">
+            <a:schemeClr val="accent1"/>
+          </a:lnRef>
+          <a:fillRef idx="3">
+            <a:schemeClr val="accent1"/>
+          </a:fillRef>
+          <a:effectRef idx="2">
+            <a:schemeClr val="accent1"/>
+          </a:effectRef>
+          <a:fontRef idx="minor">
+            <a:schemeClr val="lt1"/>
+          </a:fontRef>
+        </p:style>
+        <p:txBody>
+          <a:bodyPr rtlCol="0" anchor="ctr"/>
+          <a:lstStyle/>
+          <a:p>
+            <a:pPr algn="ctr"/>
+          </a:p>
+        </p:txBody>
+      </p:sp>
+      <p:sp>
+        <p:nvSpPr>
+          <p:cNvPr id="4" name="TextBox 3"/>
           <p:cNvSpPr txBox="1"/>
           <p:nvPr/>
         </p:nvSpPr>
         <p:spPr>
           <a:xfrm>
-            <a:off x="731527" y="642588"/>
-            <a:ext cx="1210500" cy="320100"/>
+            <a:off x="731520" y="256032"/>
+            <a:ext cx="7071055" cy="256032"/>
           </a:xfrm>
           <a:prstGeom prst="rect">
             <a:avLst/>
@@ -5255,31 +7447,31 @@
           </a:bodyPr>
           <a:lstStyle/>
           <a:p>
-            <a:pPr algn="ctr"/>
+            <a:pPr algn="l"/>
             <a:r>
               <a:rPr sz="1200" b="1" i="0" lang="en-US" altLang="en-US">
                 <a:solidFill>
-                  <a:srgbClr val="FFFFFF"/>
-                </a:solidFill>
-                <a:latin typeface="Sarabun"/>
-                <a:ea typeface="Sarabun"/>
-                <a:cs typeface="Sarabun"/>
-              </a:rPr>
-              <a:t>Section 4</a:t>
-            </a:r>
-          </a:p>
-        </p:txBody>
-      </p:sp>
-      <p:sp>
-        <p:nvSpPr>
-          <p:cNvPr id="4" name="TextBox 3"/>
+                  <a:srgbClr val="355C7D"/>
+                </a:solidFill>
+                <a:latin typeface="Sarabun"/>
+                <a:ea typeface="Sarabun"/>
+                <a:cs typeface="Sarabun"/>
+              </a:rPr>
+              <a:t>Teaching slide</a:t>
+            </a:r>
+          </a:p>
+        </p:txBody>
+      </p:sp>
+      <p:sp>
+        <p:nvSpPr>
+          <p:cNvPr id="5" name="TextBox 4"/>
           <p:cNvSpPr txBox="1"/>
           <p:nvPr/>
         </p:nvSpPr>
         <p:spPr>
           <a:xfrm>
-            <a:off x="2063268" y="505418"/>
-            <a:ext cx="5943600" cy="457200"/>
+            <a:off x="731520" y="530352"/>
+            <a:ext cx="7071055" cy="640080"/>
           </a:xfrm>
           <a:prstGeom prst="rect">
             <a:avLst/>
@@ -5294,7 +7486,7 @@
           <a:p>
             <a:pPr algn="l"/>
             <a:r>
-              <a:rPr sz="3000" b="1" i="0" lang="en-US" altLang="en-US">
+              <a:rPr sz="2800" b="1" i="0" lang="en-US" altLang="en-US">
                 <a:solidFill>
                   <a:srgbClr val="24333D"/>
                 </a:solidFill>
@@ -5302,21 +7494,105 @@
                 <a:ea typeface="Sarabun"/>
                 <a:cs typeface="Sarabun"/>
               </a:rPr>
-              <a:t>Build a mini identity exchange</a:t>
-            </a:r>
-          </a:p>
-        </p:txBody>
-      </p:sp>
-      <p:sp>
-        <p:nvSpPr>
-          <p:cNvPr id="5" name="TextBox 4"/>
+              <a:t>Put it together — a mini identity exchange</a:t>
+            </a:r>
+          </a:p>
+        </p:txBody>
+      </p:sp>
+      <p:sp>
+        <p:nvSpPr>
+          <p:cNvPr id="6" name="Rounded Rectangle 5"/>
+          <p:cNvSpPr/>
+          <p:nvPr/>
+        </p:nvSpPr>
+        <p:spPr>
+          <a:xfrm>
+            <a:off x="731520" y="1325880"/>
+            <a:ext cx="7071055" cy="1572768"/>
+          </a:xfrm>
+          <a:prstGeom prst="roundRect">
+            <a:avLst/>
+          </a:prstGeom>
+          <a:noFill/>
+          <a:ln>
+            <a:noFill/>
+          </a:ln>
+        </p:spPr>
+        <p:style>
+          <a:lnRef idx="1">
+            <a:schemeClr val="accent1"/>
+          </a:lnRef>
+          <a:fillRef idx="3">
+            <a:schemeClr val="accent1"/>
+          </a:fillRef>
+          <a:effectRef idx="2">
+            <a:schemeClr val="accent1"/>
+          </a:effectRef>
+          <a:fontRef idx="minor">
+            <a:schemeClr val="lt1"/>
+          </a:fontRef>
+        </p:style>
+        <p:txBody>
+          <a:bodyPr rtlCol="0" anchor="ctr"/>
+          <a:lstStyle/>
+          <a:p>
+            <a:pPr algn="ctr"/>
+          </a:p>
+        </p:txBody>
+      </p:sp>
+      <p:sp>
+        <p:nvSpPr>
+          <p:cNvPr id="7" name="Rectangle 6"/>
+          <p:cNvSpPr/>
+          <p:nvPr/>
+        </p:nvSpPr>
+        <p:spPr>
+          <a:xfrm>
+            <a:off x="868680" y="1527048"/>
+            <a:ext cx="73152" cy="1143000"/>
+          </a:xfrm>
+          <a:prstGeom prst="rect">
+            <a:avLst/>
+          </a:prstGeom>
+          <a:solidFill>
+            <a:srgbClr val="355C7D"/>
+          </a:solidFill>
+          <a:ln>
+            <a:noFill/>
+          </a:ln>
+        </p:spPr>
+        <p:style>
+          <a:lnRef idx="1">
+            <a:schemeClr val="accent1"/>
+          </a:lnRef>
+          <a:fillRef idx="3">
+            <a:schemeClr val="accent1"/>
+          </a:fillRef>
+          <a:effectRef idx="2">
+            <a:schemeClr val="accent1"/>
+          </a:effectRef>
+          <a:fontRef idx="minor">
+            <a:schemeClr val="lt1"/>
+          </a:fontRef>
+        </p:style>
+        <p:txBody>
+          <a:bodyPr rtlCol="0" anchor="ctr"/>
+          <a:lstStyle/>
+          <a:p>
+            <a:pPr algn="ctr"/>
+          </a:p>
+        </p:txBody>
+      </p:sp>
+      <p:sp>
+        <p:nvSpPr>
+          <p:cNvPr id="8" name="TextBox 7"/>
           <p:cNvSpPr txBox="1"/>
           <p:nvPr/>
         </p:nvSpPr>
         <p:spPr>
           <a:xfrm>
-            <a:off x="731520" y="1075703"/>
-            <a:ext cx="6858000" cy="365700"/>
+            <a:off x="1078992" y="1463040"/>
+            <a:ext cx="6613855" cy="320040"/>
           </a:xfrm>
           <a:prstGeom prst="rect">
             <a:avLst/>
@@ -5331,29 +7607,29 @@
           <a:p>
             <a:pPr algn="l"/>
             <a:r>
-              <a:rPr sz="1500" b="0" i="0" lang="en-US" altLang="en-US">
-                <a:solidFill>
-                  <a:srgbClr val="566873"/>
-                </a:solidFill>
-                <a:latin typeface="Sarabun"/>
-                <a:ea typeface="Sarabun"/>
-                <a:cs typeface="Sarabun"/>
-              </a:rPr>
-              <a:t>Stack the exchange one line at a time.</a:t>
-            </a:r>
-          </a:p>
-        </p:txBody>
-      </p:sp>
-      <p:sp>
-        <p:nvSpPr>
-          <p:cNvPr id="6" name="TextBox 5"/>
+              <a:rPr sz="1700" b="0" i="0" lang="th-TH" altLang="en-US">
+                <a:solidFill>
+                  <a:srgbClr val="24333D"/>
+                </a:solidFill>
+                <a:latin typeface="Sarabun"/>
+                <a:ea typeface="Sarabun"/>
+                <a:cs typeface="Sarabun"/>
+              </a:rPr>
+              <a:t>เขาคือใคร</a:t>
+            </a:r>
+          </a:p>
+        </p:txBody>
+      </p:sp>
+      <p:sp>
+        <p:nvSpPr>
+          <p:cNvPr id="9" name="TextBox 8"/>
           <p:cNvSpPr txBox="1"/>
           <p:nvPr/>
         </p:nvSpPr>
         <p:spPr>
           <a:xfrm>
-            <a:off x="1188720" y="1627632"/>
-            <a:ext cx="3200400" cy="658368"/>
+            <a:off x="1078992" y="1828800"/>
+            <a:ext cx="6613855" cy="274320"/>
           </a:xfrm>
           <a:prstGeom prst="rect">
             <a:avLst/>
@@ -5368,18 +7644,7 @@
           <a:p>
             <a:pPr algn="l"/>
             <a:r>
-              <a:rPr sz="2300" b="1" i="0" lang="th-TH" altLang="en-US">
-                <a:solidFill>
-                  <a:srgbClr val="24333D"/>
-                </a:solidFill>
-                <a:latin typeface="Sarabun"/>
-                <a:ea typeface="Sarabun"/>
-                <a:cs typeface="Sarabun"/>
-              </a:rPr>
-              <a:t>ขอโทษนะ</a:t>
-            </a:r>
-            <a:r>
-              <a:rPr sz="1500" b="0" i="1" lang="en-US" altLang="en-US">
+              <a:rPr sz="1700" b="0" i="1" lang="en-US" altLang="en-US">
                 <a:solidFill>
                   <a:srgbClr val="566873"/>
                 </a:solidFill>
@@ -5387,21 +7652,21 @@
                 <a:ea typeface="Sarabun"/>
                 <a:cs typeface="Sarabun"/>
               </a:rPr>
-              <a:t> (khǎaw-thôot ná)</a:t>
-            </a:r>
-          </a:p>
-        </p:txBody>
-      </p:sp>
-      <p:sp>
-        <p:nvSpPr>
-          <p:cNvPr id="7" name="TextBox 6"/>
+              <a:t>khǎo khuue khrai</a:t>
+            </a:r>
+          </a:p>
+        </p:txBody>
+      </p:sp>
+      <p:sp>
+        <p:nvSpPr>
+          <p:cNvPr id="10" name="TextBox 9"/>
           <p:cNvSpPr txBox="1"/>
           <p:nvPr/>
         </p:nvSpPr>
         <p:spPr>
           <a:xfrm>
-            <a:off x="4846320" y="1737360"/>
-            <a:ext cx="2286000" cy="365760"/>
+            <a:off x="1078992" y="2203704"/>
+            <a:ext cx="6613855" cy="274320"/>
           </a:xfrm>
           <a:prstGeom prst="rect">
             <a:avLst/>
@@ -5416,29 +7681,113 @@
           <a:p>
             <a:pPr algn="l"/>
             <a:r>
-              <a:rPr sz="1300" b="1" i="0" lang="en-US" altLang="en-US">
-                <a:solidFill>
-                  <a:srgbClr val="24333D"/>
-                </a:solidFill>
-                <a:latin typeface="Sarabun"/>
-                <a:ea typeface="Sarabun"/>
-                <a:cs typeface="Sarabun"/>
-              </a:rPr>
-              <a:t>Open the interaction politely</a:t>
-            </a:r>
-          </a:p>
-        </p:txBody>
-      </p:sp>
-      <p:sp>
-        <p:nvSpPr>
-          <p:cNvPr id="8" name="TextBox 7"/>
+              <a:rPr sz="1700" b="0" i="0" lang="en-US" altLang="en-US">
+                <a:solidFill>
+                  <a:srgbClr val="82909A"/>
+                </a:solidFill>
+                <a:latin typeface="Sarabun"/>
+                <a:ea typeface="Sarabun"/>
+                <a:cs typeface="Sarabun"/>
+              </a:rPr>
+              <a:t>who is he/she?</a:t>
+            </a:r>
+          </a:p>
+        </p:txBody>
+      </p:sp>
+      <p:sp>
+        <p:nvSpPr>
+          <p:cNvPr id="11" name="Rounded Rectangle 10"/>
+          <p:cNvSpPr/>
+          <p:nvPr/>
+        </p:nvSpPr>
+        <p:spPr>
+          <a:xfrm>
+            <a:off x="731520" y="3081528"/>
+            <a:ext cx="7071055" cy="1572768"/>
+          </a:xfrm>
+          <a:prstGeom prst="roundRect">
+            <a:avLst/>
+          </a:prstGeom>
+          <a:noFill/>
+          <a:ln>
+            <a:noFill/>
+          </a:ln>
+        </p:spPr>
+        <p:style>
+          <a:lnRef idx="1">
+            <a:schemeClr val="accent1"/>
+          </a:lnRef>
+          <a:fillRef idx="3">
+            <a:schemeClr val="accent1"/>
+          </a:fillRef>
+          <a:effectRef idx="2">
+            <a:schemeClr val="accent1"/>
+          </a:effectRef>
+          <a:fontRef idx="minor">
+            <a:schemeClr val="lt1"/>
+          </a:fontRef>
+        </p:style>
+        <p:txBody>
+          <a:bodyPr rtlCol="0" anchor="ctr"/>
+          <a:lstStyle/>
+          <a:p>
+            <a:pPr algn="ctr"/>
+          </a:p>
+        </p:txBody>
+      </p:sp>
+      <p:sp>
+        <p:nvSpPr>
+          <p:cNvPr id="12" name="Rectangle 11"/>
+          <p:cNvSpPr/>
+          <p:nvPr/>
+        </p:nvSpPr>
+        <p:spPr>
+          <a:xfrm>
+            <a:off x="868680" y="3282696"/>
+            <a:ext cx="73152" cy="1143000"/>
+          </a:xfrm>
+          <a:prstGeom prst="rect">
+            <a:avLst/>
+          </a:prstGeom>
+          <a:solidFill>
+            <a:srgbClr val="355C7D"/>
+          </a:solidFill>
+          <a:ln>
+            <a:noFill/>
+          </a:ln>
+        </p:spPr>
+        <p:style>
+          <a:lnRef idx="1">
+            <a:schemeClr val="accent1"/>
+          </a:lnRef>
+          <a:fillRef idx="3">
+            <a:schemeClr val="accent1"/>
+          </a:fillRef>
+          <a:effectRef idx="2">
+            <a:schemeClr val="accent1"/>
+          </a:effectRef>
+          <a:fontRef idx="minor">
+            <a:schemeClr val="lt1"/>
+          </a:fontRef>
+        </p:style>
+        <p:txBody>
+          <a:bodyPr rtlCol="0" anchor="ctr"/>
+          <a:lstStyle/>
+          <a:p>
+            <a:pPr algn="ctr"/>
+          </a:p>
+        </p:txBody>
+      </p:sp>
+      <p:sp>
+        <p:nvSpPr>
+          <p:cNvPr id="13" name="TextBox 12"/>
           <p:cNvSpPr txBox="1"/>
           <p:nvPr/>
         </p:nvSpPr>
         <p:spPr>
           <a:xfrm>
-            <a:off x="1188720" y="2478024"/>
-            <a:ext cx="3200400" cy="658368"/>
+            <a:off x="1078992" y="3218688"/>
+            <a:ext cx="6613855" cy="320040"/>
           </a:xfrm>
           <a:prstGeom prst="rect">
             <a:avLst/>
@@ -5453,7 +7802,7 @@
           <a:p>
             <a:pPr algn="l"/>
             <a:r>
-              <a:rPr sz="2300" b="1" i="0" lang="th-TH" altLang="en-US">
+              <a:rPr sz="1700" b="0" i="0" lang="th-TH" altLang="en-US">
                 <a:solidFill>
                   <a:srgbClr val="24333D"/>
                 </a:solidFill>
@@ -5461,32 +7810,21 @@
                 <a:ea typeface="Sarabun"/>
                 <a:cs typeface="Sarabun"/>
               </a:rPr>
-              <a:t>คนนี้คือใคร</a:t>
-            </a:r>
-            <a:r>
-              <a:rPr sz="1500" b="0" i="1" lang="en-US" altLang="en-US">
-                <a:solidFill>
-                  <a:srgbClr val="566873"/>
-                </a:solidFill>
-                <a:latin typeface="Sarabun"/>
-                <a:ea typeface="Sarabun"/>
-                <a:cs typeface="Sarabun"/>
-              </a:rPr>
-              <a:t> (khon níi kheuu khrai)</a:t>
-            </a:r>
-          </a:p>
-        </p:txBody>
-      </p:sp>
-      <p:sp>
-        <p:nvSpPr>
-          <p:cNvPr id="9" name="TextBox 8"/>
+              <a:t>นี่คือ...</a:t>
+            </a:r>
+          </a:p>
+        </p:txBody>
+      </p:sp>
+      <p:sp>
+        <p:nvSpPr>
+          <p:cNvPr id="14" name="TextBox 13"/>
           <p:cNvSpPr txBox="1"/>
           <p:nvPr/>
         </p:nvSpPr>
         <p:spPr>
           <a:xfrm>
-            <a:off x="4846320" y="2587752"/>
-            <a:ext cx="2286000" cy="365760"/>
+            <a:off x="1078992" y="3584448"/>
+            <a:ext cx="6613855" cy="274320"/>
           </a:xfrm>
           <a:prstGeom prst="rect">
             <a:avLst/>
@@ -5501,29 +7839,29 @@
           <a:p>
             <a:pPr algn="l"/>
             <a:r>
-              <a:rPr sz="1300" b="1" i="0" lang="en-US" altLang="en-US">
-                <a:solidFill>
-                  <a:srgbClr val="24333D"/>
-                </a:solidFill>
-                <a:latin typeface="Sarabun"/>
-                <a:ea typeface="Sarabun"/>
-                <a:cs typeface="Sarabun"/>
-              </a:rPr>
-              <a:t>Ask who the person is</a:t>
-            </a:r>
-          </a:p>
-        </p:txBody>
-      </p:sp>
-      <p:sp>
-        <p:nvSpPr>
-          <p:cNvPr id="10" name="TextBox 9"/>
+              <a:rPr sz="1700" b="0" i="1" lang="en-US" altLang="en-US">
+                <a:solidFill>
+                  <a:srgbClr val="566873"/>
+                </a:solidFill>
+                <a:latin typeface="Sarabun"/>
+                <a:ea typeface="Sarabun"/>
+                <a:cs typeface="Sarabun"/>
+              </a:rPr>
+              <a:t>nîi khuue...</a:t>
+            </a:r>
+          </a:p>
+        </p:txBody>
+      </p:sp>
+      <p:sp>
+        <p:nvSpPr>
+          <p:cNvPr id="15" name="TextBox 14"/>
           <p:cNvSpPr txBox="1"/>
           <p:nvPr/>
         </p:nvSpPr>
         <p:spPr>
           <a:xfrm>
-            <a:off x="1188720" y="3328416"/>
-            <a:ext cx="3200400" cy="658368"/>
+            <a:off x="1078992" y="3959352"/>
+            <a:ext cx="6613855" cy="274320"/>
           </a:xfrm>
           <a:prstGeom prst="rect">
             <a:avLst/>
@@ -5538,40 +7876,113 @@
           <a:p>
             <a:pPr algn="l"/>
             <a:r>
-              <a:rPr sz="2300" b="1" i="0" lang="th-TH" altLang="en-US">
-                <a:solidFill>
-                  <a:srgbClr val="24333D"/>
-                </a:solidFill>
-                <a:latin typeface="Sarabun"/>
-                <a:ea typeface="Sarabun"/>
-                <a:cs typeface="Sarabun"/>
-              </a:rPr>
-              <a:t>เขามาจากไทย</a:t>
-            </a:r>
-            <a:r>
-              <a:rPr sz="1500" b="0" i="1" lang="en-US" altLang="en-US">
-                <a:solidFill>
-                  <a:srgbClr val="566873"/>
-                </a:solidFill>
-                <a:latin typeface="Sarabun"/>
-                <a:ea typeface="Sarabun"/>
-                <a:cs typeface="Sarabun"/>
-              </a:rPr>
-              <a:t> (khǎo maa-jàak thai)</a:t>
-            </a:r>
-          </a:p>
-        </p:txBody>
-      </p:sp>
-      <p:sp>
-        <p:nvSpPr>
-          <p:cNvPr id="11" name="TextBox 10"/>
+              <a:rPr sz="1700" b="0" i="0" lang="en-US" altLang="en-US">
+                <a:solidFill>
+                  <a:srgbClr val="82909A"/>
+                </a:solidFill>
+                <a:latin typeface="Sarabun"/>
+                <a:ea typeface="Sarabun"/>
+                <a:cs typeface="Sarabun"/>
+              </a:rPr>
+              <a:t>this is...</a:t>
+            </a:r>
+          </a:p>
+        </p:txBody>
+      </p:sp>
+      <p:sp>
+        <p:nvSpPr>
+          <p:cNvPr id="16" name="Rounded Rectangle 15"/>
+          <p:cNvSpPr/>
+          <p:nvPr/>
+        </p:nvSpPr>
+        <p:spPr>
+          <a:xfrm>
+            <a:off x="731520" y="4837176"/>
+            <a:ext cx="7071055" cy="1572768"/>
+          </a:xfrm>
+          <a:prstGeom prst="roundRect">
+            <a:avLst/>
+          </a:prstGeom>
+          <a:noFill/>
+          <a:ln>
+            <a:noFill/>
+          </a:ln>
+        </p:spPr>
+        <p:style>
+          <a:lnRef idx="1">
+            <a:schemeClr val="accent1"/>
+          </a:lnRef>
+          <a:fillRef idx="3">
+            <a:schemeClr val="accent1"/>
+          </a:fillRef>
+          <a:effectRef idx="2">
+            <a:schemeClr val="accent1"/>
+          </a:effectRef>
+          <a:fontRef idx="minor">
+            <a:schemeClr val="lt1"/>
+          </a:fontRef>
+        </p:style>
+        <p:txBody>
+          <a:bodyPr rtlCol="0" anchor="ctr"/>
+          <a:lstStyle/>
+          <a:p>
+            <a:pPr algn="ctr"/>
+          </a:p>
+        </p:txBody>
+      </p:sp>
+      <p:sp>
+        <p:nvSpPr>
+          <p:cNvPr id="17" name="Rectangle 16"/>
+          <p:cNvSpPr/>
+          <p:nvPr/>
+        </p:nvSpPr>
+        <p:spPr>
+          <a:xfrm>
+            <a:off x="868680" y="5038344"/>
+            <a:ext cx="73152" cy="1143000"/>
+          </a:xfrm>
+          <a:prstGeom prst="rect">
+            <a:avLst/>
+          </a:prstGeom>
+          <a:solidFill>
+            <a:srgbClr val="355C7D"/>
+          </a:solidFill>
+          <a:ln>
+            <a:noFill/>
+          </a:ln>
+        </p:spPr>
+        <p:style>
+          <a:lnRef idx="1">
+            <a:schemeClr val="accent1"/>
+          </a:lnRef>
+          <a:fillRef idx="3">
+            <a:schemeClr val="accent1"/>
+          </a:fillRef>
+          <a:effectRef idx="2">
+            <a:schemeClr val="accent1"/>
+          </a:effectRef>
+          <a:fontRef idx="minor">
+            <a:schemeClr val="lt1"/>
+          </a:fontRef>
+        </p:style>
+        <p:txBody>
+          <a:bodyPr rtlCol="0" anchor="ctr"/>
+          <a:lstStyle/>
+          <a:p>
+            <a:pPr algn="ctr"/>
+          </a:p>
+        </p:txBody>
+      </p:sp>
+      <p:sp>
+        <p:nvSpPr>
+          <p:cNvPr id="18" name="TextBox 17"/>
           <p:cNvSpPr txBox="1"/>
           <p:nvPr/>
         </p:nvSpPr>
         <p:spPr>
           <a:xfrm>
-            <a:off x="4846320" y="3438144"/>
-            <a:ext cx="2286000" cy="365760"/>
+            <a:off x="1078992" y="4974336"/>
+            <a:ext cx="6613855" cy="320040"/>
           </a:xfrm>
           <a:prstGeom prst="rect">
             <a:avLst/>
@@ -5586,7 +7997,7 @@
           <a:p>
             <a:pPr algn="l"/>
             <a:r>
-              <a:rPr sz="1300" b="1" i="0" lang="en-US" altLang="en-US">
+              <a:rPr sz="1700" b="0" i="0" lang="th-TH" altLang="en-US">
                 <a:solidFill>
                   <a:srgbClr val="24333D"/>
                 </a:solidFill>
@@ -5594,21 +8005,21 @@
                 <a:ea typeface="Sarabun"/>
                 <a:cs typeface="Sarabun"/>
               </a:rPr>
-              <a:t>Add one simple country fact</a:t>
-            </a:r>
-          </a:p>
-        </p:txBody>
-      </p:sp>
-      <p:sp>
-        <p:nvSpPr>
-          <p:cNvPr id="12" name="TextBox 11"/>
+              <a:t>เขามาจากประเทศไทย</a:t>
+            </a:r>
+          </a:p>
+        </p:txBody>
+      </p:sp>
+      <p:sp>
+        <p:nvSpPr>
+          <p:cNvPr id="19" name="TextBox 18"/>
           <p:cNvSpPr txBox="1"/>
           <p:nvPr/>
         </p:nvSpPr>
         <p:spPr>
           <a:xfrm>
-            <a:off x="1188720" y="4178808"/>
-            <a:ext cx="3200400" cy="658368"/>
+            <a:off x="1078992" y="5340096"/>
+            <a:ext cx="6613855" cy="274320"/>
           </a:xfrm>
           <a:prstGeom prst="rect">
             <a:avLst/>
@@ -5623,18 +8034,7 @@
           <a:p>
             <a:pPr algn="l"/>
             <a:r>
-              <a:rPr sz="2300" b="1" i="0" lang="th-TH" altLang="en-US">
-                <a:solidFill>
-                  <a:srgbClr val="24333D"/>
-                </a:solidFill>
-                <a:latin typeface="Sarabun"/>
-                <a:ea typeface="Sarabun"/>
-                <a:cs typeface="Sarabun"/>
-              </a:rPr>
-              <a:t>คุณคือ...ใช่ไหม</a:t>
-            </a:r>
-            <a:r>
-              <a:rPr sz="1500" b="0" i="1" lang="en-US" altLang="en-US">
+              <a:rPr sz="1700" b="0" i="1" lang="en-US" altLang="en-US">
                 <a:solidFill>
                   <a:srgbClr val="566873"/>
                 </a:solidFill>
@@ -5642,21 +8042,21 @@
                 <a:ea typeface="Sarabun"/>
                 <a:cs typeface="Sarabun"/>
               </a:rPr>
-              <a:t> (khun kheuu... châi mái)</a:t>
-            </a:r>
-          </a:p>
-        </p:txBody>
-      </p:sp>
-      <p:sp>
-        <p:nvSpPr>
-          <p:cNvPr id="13" name="TextBox 12"/>
+              <a:t>khǎo maa-jàak prà-thêet thai</a:t>
+            </a:r>
+          </a:p>
+        </p:txBody>
+      </p:sp>
+      <p:sp>
+        <p:nvSpPr>
+          <p:cNvPr id="20" name="TextBox 19"/>
           <p:cNvSpPr txBox="1"/>
           <p:nvPr/>
         </p:nvSpPr>
         <p:spPr>
           <a:xfrm>
-            <a:off x="4846320" y="4288536"/>
-            <a:ext cx="2286000" cy="365760"/>
+            <a:off x="1078992" y="5715000"/>
+            <a:ext cx="6613855" cy="274320"/>
           </a:xfrm>
           <a:prstGeom prst="rect">
             <a:avLst/>
@@ -5671,100 +8071,15 @@
           <a:p>
             <a:pPr algn="l"/>
             <a:r>
-              <a:rPr sz="1300" b="1" i="0" lang="en-US" altLang="en-US">
-                <a:solidFill>
-                  <a:srgbClr val="24333D"/>
-                </a:solidFill>
-                <a:latin typeface="Sarabun"/>
-                <a:ea typeface="Sarabun"/>
-                <a:cs typeface="Sarabun"/>
-              </a:rPr>
-              <a:t>Confirm the identity</a:t>
-            </a:r>
-          </a:p>
-        </p:txBody>
-      </p:sp>
-      <p:sp>
-        <p:nvSpPr>
-          <p:cNvPr id="14" name="TextBox 13"/>
-          <p:cNvSpPr txBox="1"/>
-          <p:nvPr/>
-        </p:nvSpPr>
-        <p:spPr>
-          <a:xfrm>
-            <a:off x="1188720" y="5029200"/>
-            <a:ext cx="3200400" cy="658368"/>
-          </a:xfrm>
-          <a:prstGeom prst="rect">
-            <a:avLst/>
-          </a:prstGeom>
-          <a:noFill/>
-        </p:spPr>
-        <p:txBody>
-          <a:bodyPr wrap="square" anchor="t">
-            <a:spAutoFit/>
-          </a:bodyPr>
-          <a:lstStyle/>
-          <a:p>
-            <a:pPr algn="l"/>
-            <a:r>
-              <a:rPr sz="2300" b="1" i="0" lang="th-TH" altLang="en-US">
-                <a:solidFill>
-                  <a:srgbClr val="24333D"/>
-                </a:solidFill>
-                <a:latin typeface="Sarabun"/>
-                <a:ea typeface="Sarabun"/>
-                <a:cs typeface="Sarabun"/>
-              </a:rPr>
-              <a:t>ไม่ใช่ / ใช่</a:t>
-            </a:r>
-            <a:r>
-              <a:rPr sz="1500" b="0" i="1" lang="en-US" altLang="en-US">
-                <a:solidFill>
-                  <a:srgbClr val="566873"/>
-                </a:solidFill>
-                <a:latin typeface="Sarabun"/>
-                <a:ea typeface="Sarabun"/>
-                <a:cs typeface="Sarabun"/>
-              </a:rPr>
-              <a:t> (mâi châi / châi)</a:t>
-            </a:r>
-          </a:p>
-        </p:txBody>
-      </p:sp>
-      <p:sp>
-        <p:nvSpPr>
-          <p:cNvPr id="15" name="TextBox 14"/>
-          <p:cNvSpPr txBox="1"/>
-          <p:nvPr/>
-        </p:nvSpPr>
-        <p:spPr>
-          <a:xfrm>
-            <a:off x="4846320" y="5138928"/>
-            <a:ext cx="2286000" cy="365760"/>
-          </a:xfrm>
-          <a:prstGeom prst="rect">
-            <a:avLst/>
-          </a:prstGeom>
-          <a:noFill/>
-        </p:spPr>
-        <p:txBody>
-          <a:bodyPr wrap="square" anchor="t">
-            <a:spAutoFit/>
-          </a:bodyPr>
-          <a:lstStyle/>
-          <a:p>
-            <a:pPr algn="l"/>
-            <a:r>
-              <a:rPr sz="1300" b="1" i="0" lang="en-US" altLang="en-US">
-                <a:solidFill>
-                  <a:srgbClr val="24333D"/>
-                </a:solidFill>
-                <a:latin typeface="Sarabun"/>
-                <a:ea typeface="Sarabun"/>
-                <a:cs typeface="Sarabun"/>
-              </a:rPr>
-              <a:t>Accept or repair the guess</a:t>
+              <a:rPr sz="1700" b="0" i="0" lang="en-US" altLang="en-US">
+                <a:solidFill>
+                  <a:srgbClr val="82909A"/>
+                </a:solidFill>
+                <a:latin typeface="Sarabun"/>
+                <a:ea typeface="Sarabun"/>
+                <a:cs typeface="Sarabun"/>
+              </a:rPr>
+              <a:t>he/she comes from Thailand</a:t>
             </a:r>
           </a:p>
         </p:txBody>
@@ -5780,6 +8095,14 @@
 <file path=ppt/slides/slide7.xml><?xml version="1.0" encoding="utf-8"?>
 <p:sld xmlns:a="http://schemas.openxmlformats.org/drawingml/2006/main" xmlns:p="http://schemas.openxmlformats.org/presentationml/2006/main" xmlns:r="http://schemas.openxmlformats.org/officeDocument/2006/relationships">
   <p:cSld>
+    <p:bg>
+      <p:bgPr>
+        <a:solidFill>
+          <a:srgbClr val="F5F7F8"/>
+        </a:solidFill>
+        <a:effectLst/>
+      </p:bgPr>
+    </p:bg>
     <p:spTree>
       <p:nvGrpSpPr>
         <p:cNvPr id="1" name=""/>
@@ -5787,40 +8110,116 @@
         <p:nvPr/>
       </p:nvGrpSpPr>
       <p:grpSpPr/>
-      <p:pic>
-        <p:nvPicPr>
-          <p:cNvPr id="2" name="Picture 1" descr="slide-07.png"/>
-          <p:cNvPicPr>
-            <a:picLocks noChangeAspect="1"/>
-          </p:cNvPicPr>
-          <p:nvPr/>
-        </p:nvPicPr>
-        <p:blipFill>
-          <a:blip r:embed="rId2"/>
-          <a:stretch>
-            <a:fillRect/>
-          </a:stretch>
-        </p:blipFill>
+      <p:sp>
+        <p:nvSpPr>
+          <p:cNvPr id="2" name="__pip_placeholder__"/>
+          <p:cNvSpPr/>
+          <p:nvPr/>
+        </p:nvSpPr>
+        <p:spPr>
+          <a:xfrm>
+            <a:off x="8351215" y="0"/>
+            <a:ext cx="3840480" cy="2880360"/>
+          </a:xfrm>
+          <a:prstGeom prst="rect">
+            <a:avLst/>
+          </a:prstGeom>
+          <a:solidFill>
+            <a:srgbClr val="DBE7EC">
+              <a:alpha val="30000"/>
+            </a:srgbClr>
+          </a:solidFill>
+          <a:ln w="19050">
+            <a:solidFill>
+              <a:srgbClr val="355C7D"/>
+            </a:solidFill>
+            <a:prstDash val="sysDash"/>
+          </a:ln>
+        </p:spPr>
+        <p:style>
+          <a:lnRef idx="1">
+            <a:schemeClr val="accent1"/>
+          </a:lnRef>
+          <a:fillRef idx="3">
+            <a:schemeClr val="accent1"/>
+          </a:fillRef>
+          <a:effectRef idx="2">
+            <a:schemeClr val="accent1"/>
+          </a:effectRef>
+          <a:fontRef idx="minor">
+            <a:schemeClr val="lt1"/>
+          </a:fontRef>
+        </p:style>
+        <p:txBody>
+          <a:bodyPr rtlCol="0" anchor="ctr" wrap="none"/>
+          <a:lstStyle/>
+          <a:p>
+            <a:pPr algn="ctr"/>
+            <a:r>
+              <a:rPr sz="1800" b="1">
+                <a:solidFill>
+                  <a:srgbClr val="355C7D"/>
+                </a:solidFill>
+                <a:latin typeface="Sarabun"/>
+              </a:rPr>
+              <a:t>Nine</a:t>
+            </a:r>
+          </a:p>
+        </p:txBody>
+      </p:sp>
+      <p:sp>
+        <p:nvSpPr>
+          <p:cNvPr id="3" name="Rectangle 2"/>
+          <p:cNvSpPr/>
+          <p:nvPr/>
+        </p:nvSpPr>
         <p:spPr>
           <a:xfrm>
             <a:off x="0" y="0"/>
-            <a:ext cx="12191695" cy="6858000"/>
-          </a:xfrm>
-          <a:prstGeom prst="rect">
-            <a:avLst/>
-          </a:prstGeom>
-        </p:spPr>
-      </p:pic>
-      <p:sp>
-        <p:nvSpPr>
-          <p:cNvPr id="3" name="TextBox 2"/>
+            <a:ext cx="12191695" cy="63500"/>
+          </a:xfrm>
+          <a:prstGeom prst="rect">
+            <a:avLst/>
+          </a:prstGeom>
+          <a:solidFill>
+            <a:srgbClr val="355C7D"/>
+          </a:solidFill>
+          <a:ln>
+            <a:noFill/>
+          </a:ln>
+        </p:spPr>
+        <p:style>
+          <a:lnRef idx="1">
+            <a:schemeClr val="accent1"/>
+          </a:lnRef>
+          <a:fillRef idx="3">
+            <a:schemeClr val="accent1"/>
+          </a:fillRef>
+          <a:effectRef idx="2">
+            <a:schemeClr val="accent1"/>
+          </a:effectRef>
+          <a:fontRef idx="minor">
+            <a:schemeClr val="lt1"/>
+          </a:fontRef>
+        </p:style>
+        <p:txBody>
+          <a:bodyPr rtlCol="0" anchor="ctr"/>
+          <a:lstStyle/>
+          <a:p>
+            <a:pPr algn="ctr"/>
+          </a:p>
+        </p:txBody>
+      </p:sp>
+      <p:sp>
+        <p:nvSpPr>
+          <p:cNvPr id="4" name="TextBox 3"/>
           <p:cNvSpPr txBox="1"/>
           <p:nvPr/>
         </p:nvSpPr>
         <p:spPr>
           <a:xfrm>
-            <a:off x="731520" y="429768"/>
-            <a:ext cx="6858000" cy="457200"/>
+            <a:off x="731520" y="256032"/>
+            <a:ext cx="7071055" cy="256032"/>
           </a:xfrm>
           <a:prstGeom prst="rect">
             <a:avLst/>
@@ -5835,29 +8234,29 @@
           <a:p>
             <a:pPr algn="l"/>
             <a:r>
-              <a:rPr sz="3000" b="1" i="0" lang="en-US" altLang="en-US">
-                <a:solidFill>
-                  <a:srgbClr val="24333D"/>
-                </a:solidFill>
-                <a:latin typeface="Sarabun"/>
-                <a:ea typeface="Sarabun"/>
-                <a:cs typeface="Sarabun"/>
-              </a:rPr>
-              <a:t>Roleplay: Identity exchange</a:t>
-            </a:r>
-          </a:p>
-        </p:txBody>
-      </p:sp>
-      <p:sp>
-        <p:nvSpPr>
-          <p:cNvPr id="4" name="TextBox 3"/>
+              <a:rPr sz="1200" b="1" i="0" lang="en-US" altLang="en-US">
+                <a:solidFill>
+                  <a:srgbClr val="355C7D"/>
+                </a:solidFill>
+                <a:latin typeface="Sarabun"/>
+                <a:ea typeface="Sarabun"/>
+                <a:cs typeface="Sarabun"/>
+              </a:rPr>
+              <a:t>Roleplay</a:t>
+            </a:r>
+          </a:p>
+        </p:txBody>
+      </p:sp>
+      <p:sp>
+        <p:nvSpPr>
+          <p:cNvPr id="5" name="TextBox 4"/>
           <p:cNvSpPr txBox="1"/>
           <p:nvPr/>
         </p:nvSpPr>
         <p:spPr>
           <a:xfrm>
-            <a:off x="731520" y="992138"/>
-            <a:ext cx="6858000" cy="365700"/>
+            <a:off x="731520" y="530352"/>
+            <a:ext cx="7071055" cy="640080"/>
           </a:xfrm>
           <a:prstGeom prst="rect">
             <a:avLst/>
@@ -5872,29 +8271,85 @@
           <a:p>
             <a:pPr algn="l"/>
             <a:r>
-              <a:rPr sz="1500" b="0" i="0" lang="en-US" altLang="en-US">
-                <a:solidFill>
-                  <a:srgbClr val="566873"/>
-                </a:solidFill>
-                <a:latin typeface="Sarabun"/>
-                <a:ea typeface="Sarabun"/>
-                <a:cs typeface="Sarabun"/>
-              </a:rPr>
-              <a:t>Listen, repeat, then perform the exchange.</a:t>
-            </a:r>
-          </a:p>
-        </p:txBody>
-      </p:sp>
-      <p:sp>
-        <p:nvSpPr>
-          <p:cNvPr id="5" name="TextBox 4"/>
+              <a:rPr sz="3600" b="1" i="0" lang="en-US" altLang="en-US">
+                <a:solidFill>
+                  <a:srgbClr val="24333D"/>
+                </a:solidFill>
+                <a:latin typeface="Sarabun"/>
+                <a:ea typeface="Sarabun"/>
+                <a:cs typeface="Sarabun"/>
+              </a:rPr>
+              <a:t>Roleplay</a:t>
+            </a:r>
+          </a:p>
+        </p:txBody>
+      </p:sp>
+      <p:sp>
+        <p:nvSpPr>
+          <p:cNvPr id="6" name="Rounded Rectangle 5"/>
+          <p:cNvSpPr/>
+          <p:nvPr/>
+        </p:nvSpPr>
+        <p:spPr>
+          <a:xfrm>
+            <a:off x="731520" y="1097280"/>
+            <a:ext cx="1051560" cy="274320"/>
+          </a:xfrm>
+          <a:prstGeom prst="roundRect">
+            <a:avLst>
+              <a:gd name="adj" fmla="val 28000"/>
+            </a:avLst>
+          </a:prstGeom>
+          <a:solidFill>
+            <a:srgbClr val="7A8F54"/>
+          </a:solidFill>
+          <a:ln>
+            <a:noFill/>
+          </a:ln>
+        </p:spPr>
+        <p:style>
+          <a:lnRef idx="1">
+            <a:schemeClr val="accent1"/>
+          </a:lnRef>
+          <a:fillRef idx="3">
+            <a:schemeClr val="accent1"/>
+          </a:fillRef>
+          <a:effectRef idx="2">
+            <a:schemeClr val="accent1"/>
+          </a:effectRef>
+          <a:fontRef idx="minor">
+            <a:schemeClr val="lt1"/>
+          </a:fontRef>
+        </p:style>
+        <p:txBody>
+          <a:bodyPr rtlCol="0" anchor="ctr" wrap="none"/>
+          <a:lstStyle/>
+          <a:p>
+            <a:pPr algn="ctr"/>
+            <a:r>
+              <a:rPr sz="1200" b="1" lang="en-US" altLang="en-US">
+                <a:solidFill>
+                  <a:srgbClr val="FFFFFF"/>
+                </a:solidFill>
+                <a:latin typeface="Sarabun"/>
+                <a:ea typeface="Sarabun"/>
+                <a:cs typeface="Sarabun"/>
+              </a:rPr>
+              <a:t>You</a:t>
+            </a:r>
+          </a:p>
+        </p:txBody>
+      </p:sp>
+      <p:sp>
+        <p:nvSpPr>
+          <p:cNvPr id="7" name="TextBox 6"/>
           <p:cNvSpPr txBox="1"/>
           <p:nvPr/>
         </p:nvSpPr>
         <p:spPr>
           <a:xfrm>
-            <a:off x="731520" y="1463040"/>
-            <a:ext cx="1097280" cy="292608"/>
+            <a:off x="1965960" y="1069848"/>
+            <a:ext cx="5836615" cy="228600"/>
           </a:xfrm>
           <a:prstGeom prst="rect">
             <a:avLst/>
@@ -5907,31 +8362,31 @@
           </a:bodyPr>
           <a:lstStyle/>
           <a:p>
-            <a:pPr algn="ctr"/>
-            <a:r>
-              <a:rPr sz="1200" b="1" i="0" lang="en-US" altLang="en-US">
-                <a:solidFill>
-                  <a:srgbClr val="FFFFFF"/>
-                </a:solidFill>
-                <a:latin typeface="Sarabun"/>
-                <a:ea typeface="Sarabun"/>
-                <a:cs typeface="Sarabun"/>
-              </a:rPr>
-              <a:t>A</a:t>
-            </a:r>
-          </a:p>
-        </p:txBody>
-      </p:sp>
-      <p:sp>
-        <p:nvSpPr>
-          <p:cNvPr id="6" name="TextBox 5"/>
+            <a:pPr algn="l"/>
+            <a:r>
+              <a:rPr sz="1700" b="0" i="0" lang="th-TH" altLang="en-US">
+                <a:solidFill>
+                  <a:srgbClr val="24333D"/>
+                </a:solidFill>
+                <a:latin typeface="Sarabun"/>
+                <a:ea typeface="Sarabun"/>
+                <a:cs typeface="Sarabun"/>
+              </a:rPr>
+              <a:t>ขอโทษครับ เขาคือใครครับ</a:t>
+            </a:r>
+          </a:p>
+        </p:txBody>
+      </p:sp>
+      <p:sp>
+        <p:nvSpPr>
+          <p:cNvPr id="8" name="TextBox 7"/>
           <p:cNvSpPr txBox="1"/>
           <p:nvPr/>
         </p:nvSpPr>
         <p:spPr>
           <a:xfrm>
-            <a:off x="2011680" y="1339583"/>
-            <a:ext cx="5303400" cy="411600"/>
+            <a:off x="1965960" y="1298448"/>
+            <a:ext cx="5836615" cy="201168"/>
           </a:xfrm>
           <a:prstGeom prst="rect">
             <a:avLst/>
@@ -5946,18 +8401,7 @@
           <a:p>
             <a:pPr algn="l"/>
             <a:r>
-              <a:rPr sz="2300" b="1" i="0" lang="th-TH" altLang="en-US">
-                <a:solidFill>
-                  <a:srgbClr val="24333D"/>
-                </a:solidFill>
-                <a:latin typeface="Sarabun"/>
-                <a:ea typeface="Sarabun"/>
-                <a:cs typeface="Sarabun"/>
-              </a:rPr>
-              <a:t>สวัสดีค่ะ</a:t>
-            </a:r>
-            <a:r>
-              <a:rPr sz="1500" b="0" i="1" lang="en-US" altLang="en-US">
+              <a:rPr sz="1700" b="0" i="1" lang="en-US" altLang="en-US">
                 <a:solidFill>
                   <a:srgbClr val="566873"/>
                 </a:solidFill>
@@ -5965,21 +8409,21 @@
                 <a:ea typeface="Sarabun"/>
                 <a:cs typeface="Sarabun"/>
               </a:rPr>
-              <a:t> (sà-wàt-dii khâ)</a:t>
-            </a:r>
-          </a:p>
-        </p:txBody>
-      </p:sp>
-      <p:sp>
-        <p:nvSpPr>
-          <p:cNvPr id="7" name="TextBox 6"/>
+              <a:t>khǎaw-thôot khráp khǎo khuue khrai khráp</a:t>
+            </a:r>
+          </a:p>
+        </p:txBody>
+      </p:sp>
+      <p:sp>
+        <p:nvSpPr>
+          <p:cNvPr id="9" name="TextBox 8"/>
           <p:cNvSpPr txBox="1"/>
           <p:nvPr/>
         </p:nvSpPr>
         <p:spPr>
           <a:xfrm>
-            <a:off x="2011693" y="1721362"/>
-            <a:ext cx="5303400" cy="320100"/>
+            <a:off x="1965960" y="1499616"/>
+            <a:ext cx="5836615" cy="201168"/>
           </a:xfrm>
           <a:prstGeom prst="rect">
             <a:avLst/>
@@ -5994,7 +8438,7 @@
           <a:p>
             <a:pPr algn="l"/>
             <a:r>
-              <a:rPr sz="1500" b="0" i="0" lang="en-US" altLang="en-US">
+              <a:rPr sz="1700" b="0" i="0" lang="en-US" altLang="en-US">
                 <a:solidFill>
                   <a:srgbClr val="566873"/>
                 </a:solidFill>
@@ -6002,21 +8446,77 @@
                 <a:ea typeface="Sarabun"/>
                 <a:cs typeface="Sarabun"/>
               </a:rPr>
-              <a:t>Hello.</a:t>
-            </a:r>
-          </a:p>
-        </p:txBody>
-      </p:sp>
-      <p:sp>
-        <p:nvSpPr>
-          <p:cNvPr id="8" name="TextBox 7"/>
+              <a:t>Excuse me, who is he/she?</a:t>
+            </a:r>
+          </a:p>
+        </p:txBody>
+      </p:sp>
+      <p:sp>
+        <p:nvSpPr>
+          <p:cNvPr id="10" name="Rounded Rectangle 9"/>
+          <p:cNvSpPr/>
+          <p:nvPr/>
+        </p:nvSpPr>
+        <p:spPr>
+          <a:xfrm>
+            <a:off x="731520" y="2011680"/>
+            <a:ext cx="1051560" cy="274320"/>
+          </a:xfrm>
+          <a:prstGeom prst="roundRect">
+            <a:avLst>
+              <a:gd name="adj" fmla="val 28000"/>
+            </a:avLst>
+          </a:prstGeom>
+          <a:solidFill>
+            <a:srgbClr val="C96F4A"/>
+          </a:solidFill>
+          <a:ln>
+            <a:noFill/>
+          </a:ln>
+        </p:spPr>
+        <p:style>
+          <a:lnRef idx="1">
+            <a:schemeClr val="accent1"/>
+          </a:lnRef>
+          <a:fillRef idx="3">
+            <a:schemeClr val="accent1"/>
+          </a:fillRef>
+          <a:effectRef idx="2">
+            <a:schemeClr val="accent1"/>
+          </a:effectRef>
+          <a:fontRef idx="minor">
+            <a:schemeClr val="lt1"/>
+          </a:fontRef>
+        </p:style>
+        <p:txBody>
+          <a:bodyPr rtlCol="0" anchor="ctr" wrap="none"/>
+          <a:lstStyle/>
+          <a:p>
+            <a:pPr algn="ctr"/>
+            <a:r>
+              <a:rPr sz="1200" b="1" lang="en-US" altLang="en-US">
+                <a:solidFill>
+                  <a:srgbClr val="FFFFFF"/>
+                </a:solidFill>
+                <a:latin typeface="Sarabun"/>
+                <a:ea typeface="Sarabun"/>
+                <a:cs typeface="Sarabun"/>
+              </a:rPr>
+              <a:t>Friend</a:t>
+            </a:r>
+          </a:p>
+        </p:txBody>
+      </p:sp>
+      <p:sp>
+        <p:nvSpPr>
+          <p:cNvPr id="11" name="TextBox 10"/>
           <p:cNvSpPr txBox="1"/>
           <p:nvPr/>
         </p:nvSpPr>
         <p:spPr>
           <a:xfrm>
-            <a:off x="731520" y="2199095"/>
-            <a:ext cx="1097400" cy="292500"/>
+            <a:off x="1965960" y="1984248"/>
+            <a:ext cx="5836615" cy="228600"/>
           </a:xfrm>
           <a:prstGeom prst="rect">
             <a:avLst/>
@@ -6029,31 +8529,31 @@
           </a:bodyPr>
           <a:lstStyle/>
           <a:p>
-            <a:pPr algn="ctr"/>
-            <a:r>
-              <a:rPr sz="1200" b="1" i="0" lang="en-US" altLang="en-US">
-                <a:solidFill>
-                  <a:srgbClr val="FFFFFF"/>
-                </a:solidFill>
-                <a:latin typeface="Sarabun"/>
-                <a:ea typeface="Sarabun"/>
-                <a:cs typeface="Sarabun"/>
-              </a:rPr>
-              <a:t>B</a:t>
-            </a:r>
-          </a:p>
-        </p:txBody>
-      </p:sp>
-      <p:sp>
-        <p:nvSpPr>
-          <p:cNvPr id="9" name="TextBox 8"/>
+            <a:pPr algn="l"/>
+            <a:r>
+              <a:rPr sz="1700" b="0" i="0" lang="th-TH" altLang="en-US">
+                <a:solidFill>
+                  <a:srgbClr val="24333D"/>
+                </a:solidFill>
+                <a:latin typeface="Sarabun"/>
+                <a:ea typeface="Sarabun"/>
+                <a:cs typeface="Sarabun"/>
+              </a:rPr>
+              <a:t>นี่คือแอนค่ะ</a:t>
+            </a:r>
+          </a:p>
+        </p:txBody>
+      </p:sp>
+      <p:sp>
+        <p:nvSpPr>
+          <p:cNvPr id="12" name="TextBox 11"/>
           <p:cNvSpPr txBox="1"/>
           <p:nvPr/>
         </p:nvSpPr>
         <p:spPr>
           <a:xfrm>
-            <a:off x="2011743" y="2048200"/>
-            <a:ext cx="5303400" cy="411600"/>
+            <a:off x="1965960" y="2212848"/>
+            <a:ext cx="5836615" cy="201168"/>
           </a:xfrm>
           <a:prstGeom prst="rect">
             <a:avLst/>
@@ -6068,18 +8568,7 @@
           <a:p>
             <a:pPr algn="l"/>
             <a:r>
-              <a:rPr sz="2300" b="1" i="0" lang="th-TH" altLang="en-US">
-                <a:solidFill>
-                  <a:srgbClr val="24333D"/>
-                </a:solidFill>
-                <a:latin typeface="Sarabun"/>
-                <a:ea typeface="Sarabun"/>
-                <a:cs typeface="Sarabun"/>
-              </a:rPr>
-              <a:t>สวัสดีครับ</a:t>
-            </a:r>
-            <a:r>
-              <a:rPr sz="1500" b="0" i="1" lang="en-US" altLang="en-US">
+              <a:rPr sz="1700" b="0" i="1" lang="en-US" altLang="en-US">
                 <a:solidFill>
                   <a:srgbClr val="566873"/>
                 </a:solidFill>
@@ -6087,21 +8576,21 @@
                 <a:ea typeface="Sarabun"/>
                 <a:cs typeface="Sarabun"/>
               </a:rPr>
-              <a:t> (sà-wàt-dii khráp)</a:t>
-            </a:r>
-          </a:p>
-        </p:txBody>
-      </p:sp>
-      <p:sp>
-        <p:nvSpPr>
-          <p:cNvPr id="10" name="TextBox 9"/>
+              <a:t>nîi khuue Anne khâ</a:t>
+            </a:r>
+          </a:p>
+        </p:txBody>
+      </p:sp>
+      <p:sp>
+        <p:nvSpPr>
+          <p:cNvPr id="13" name="TextBox 12"/>
           <p:cNvSpPr txBox="1"/>
           <p:nvPr/>
         </p:nvSpPr>
         <p:spPr>
           <a:xfrm>
-            <a:off x="2011693" y="2482592"/>
-            <a:ext cx="5303400" cy="320100"/>
+            <a:off x="1965960" y="2414016"/>
+            <a:ext cx="5836615" cy="201168"/>
           </a:xfrm>
           <a:prstGeom prst="rect">
             <a:avLst/>
@@ -6116,7 +8605,7 @@
           <a:p>
             <a:pPr algn="l"/>
             <a:r>
-              <a:rPr sz="1500" b="0" i="0" lang="en-US" altLang="en-US">
+              <a:rPr sz="1700" b="0" i="0" lang="en-US" altLang="en-US">
                 <a:solidFill>
                   <a:srgbClr val="566873"/>
                 </a:solidFill>
@@ -6124,21 +8613,77 @@
                 <a:ea typeface="Sarabun"/>
                 <a:cs typeface="Sarabun"/>
               </a:rPr>
-              <a:t>Hello.</a:t>
-            </a:r>
-          </a:p>
-        </p:txBody>
-      </p:sp>
-      <p:sp>
-        <p:nvSpPr>
-          <p:cNvPr id="11" name="TextBox 10"/>
+              <a:t>This is Anne.</a:t>
+            </a:r>
+          </a:p>
+        </p:txBody>
+      </p:sp>
+      <p:sp>
+        <p:nvSpPr>
+          <p:cNvPr id="14" name="Rounded Rectangle 13"/>
+          <p:cNvSpPr/>
+          <p:nvPr/>
+        </p:nvSpPr>
+        <p:spPr>
+          <a:xfrm>
+            <a:off x="731520" y="2926080"/>
+            <a:ext cx="1051560" cy="274320"/>
+          </a:xfrm>
+          <a:prstGeom prst="roundRect">
+            <a:avLst>
+              <a:gd name="adj" fmla="val 28000"/>
+            </a:avLst>
+          </a:prstGeom>
+          <a:solidFill>
+            <a:srgbClr val="7A8F54"/>
+          </a:solidFill>
+          <a:ln>
+            <a:noFill/>
+          </a:ln>
+        </p:spPr>
+        <p:style>
+          <a:lnRef idx="1">
+            <a:schemeClr val="accent1"/>
+          </a:lnRef>
+          <a:fillRef idx="3">
+            <a:schemeClr val="accent1"/>
+          </a:fillRef>
+          <a:effectRef idx="2">
+            <a:schemeClr val="accent1"/>
+          </a:effectRef>
+          <a:fontRef idx="minor">
+            <a:schemeClr val="lt1"/>
+          </a:fontRef>
+        </p:style>
+        <p:txBody>
+          <a:bodyPr rtlCol="0" anchor="ctr" wrap="none"/>
+          <a:lstStyle/>
+          <a:p>
+            <a:pPr algn="ctr"/>
+            <a:r>
+              <a:rPr sz="1200" b="1" lang="en-US" altLang="en-US">
+                <a:solidFill>
+                  <a:srgbClr val="FFFFFF"/>
+                </a:solidFill>
+                <a:latin typeface="Sarabun"/>
+                <a:ea typeface="Sarabun"/>
+                <a:cs typeface="Sarabun"/>
+              </a:rPr>
+              <a:t>You</a:t>
+            </a:r>
+          </a:p>
+        </p:txBody>
+      </p:sp>
+      <p:sp>
+        <p:nvSpPr>
+          <p:cNvPr id="15" name="TextBox 14"/>
           <p:cNvSpPr txBox="1"/>
           <p:nvPr/>
         </p:nvSpPr>
         <p:spPr>
           <a:xfrm>
-            <a:off x="731583" y="2962650"/>
-            <a:ext cx="1097400" cy="292500"/>
+            <a:off x="1965960" y="2898648"/>
+            <a:ext cx="8823960" cy="228600"/>
           </a:xfrm>
           <a:prstGeom prst="rect">
             <a:avLst/>
@@ -6151,31 +8696,31 @@
           </a:bodyPr>
           <a:lstStyle/>
           <a:p>
-            <a:pPr algn="ctr"/>
-            <a:r>
-              <a:rPr sz="1200" b="1" i="0" lang="en-US" altLang="en-US">
-                <a:solidFill>
-                  <a:srgbClr val="FFFFFF"/>
-                </a:solidFill>
-                <a:latin typeface="Sarabun"/>
-                <a:ea typeface="Sarabun"/>
-                <a:cs typeface="Sarabun"/>
-              </a:rPr>
-              <a:t>A</a:t>
-            </a:r>
-          </a:p>
-        </p:txBody>
-      </p:sp>
-      <p:sp>
-        <p:nvSpPr>
-          <p:cNvPr id="12" name="TextBox 11"/>
+            <a:pPr algn="l"/>
+            <a:r>
+              <a:rPr sz="1700" b="0" i="0" lang="th-TH" altLang="en-US">
+                <a:solidFill>
+                  <a:srgbClr val="24333D"/>
+                </a:solidFill>
+                <a:latin typeface="Sarabun"/>
+                <a:ea typeface="Sarabun"/>
+                <a:cs typeface="Sarabun"/>
+              </a:rPr>
+              <a:t>เขามาจากประเทศอะไรครับ</a:t>
+            </a:r>
+          </a:p>
+        </p:txBody>
+      </p:sp>
+      <p:sp>
+        <p:nvSpPr>
+          <p:cNvPr id="16" name="TextBox 15"/>
           <p:cNvSpPr txBox="1"/>
           <p:nvPr/>
         </p:nvSpPr>
         <p:spPr>
           <a:xfrm>
-            <a:off x="2011693" y="2878130"/>
-            <a:ext cx="5303400" cy="411600"/>
+            <a:off x="1965960" y="3127248"/>
+            <a:ext cx="8823960" cy="201168"/>
           </a:xfrm>
           <a:prstGeom prst="rect">
             <a:avLst/>
@@ -6190,18 +8735,7 @@
           <a:p>
             <a:pPr algn="l"/>
             <a:r>
-              <a:rPr sz="2300" b="1" i="0" lang="th-TH" altLang="en-US">
-                <a:solidFill>
-                  <a:srgbClr val="24333D"/>
-                </a:solidFill>
-                <a:latin typeface="Sarabun"/>
-                <a:ea typeface="Sarabun"/>
-                <a:cs typeface="Sarabun"/>
-              </a:rPr>
-              <a:t>ขอโทษนะคะ คนนี้คือใครคะ</a:t>
-            </a:r>
-            <a:r>
-              <a:rPr sz="1500" b="0" i="1" lang="en-US" altLang="en-US">
+              <a:rPr sz="1700" b="0" i="1" lang="en-US" altLang="en-US">
                 <a:solidFill>
                   <a:srgbClr val="566873"/>
                 </a:solidFill>
@@ -6209,21 +8743,21 @@
                 <a:ea typeface="Sarabun"/>
                 <a:cs typeface="Sarabun"/>
               </a:rPr>
-              <a:t> (khǎaw-thôot ná khá khon níi kheuu khrai khá)</a:t>
-            </a:r>
-          </a:p>
-        </p:txBody>
-      </p:sp>
-      <p:sp>
-        <p:nvSpPr>
-          <p:cNvPr id="13" name="TextBox 12"/>
+              <a:t>khǎo maa-jàak prà-thêet à-rai khráp</a:t>
+            </a:r>
+          </a:p>
+        </p:txBody>
+      </p:sp>
+      <p:sp>
+        <p:nvSpPr>
+          <p:cNvPr id="17" name="TextBox 16"/>
           <p:cNvSpPr txBox="1"/>
           <p:nvPr/>
         </p:nvSpPr>
         <p:spPr>
           <a:xfrm>
-            <a:off x="2011693" y="3253010"/>
-            <a:ext cx="5303400" cy="320100"/>
+            <a:off x="1965960" y="3328416"/>
+            <a:ext cx="8823960" cy="201168"/>
           </a:xfrm>
           <a:prstGeom prst="rect">
             <a:avLst/>
@@ -6238,7 +8772,7 @@
           <a:p>
             <a:pPr algn="l"/>
             <a:r>
-              <a:rPr sz="1500" b="0" i="0" lang="en-US" altLang="en-US">
+              <a:rPr sz="1700" b="0" i="0" lang="en-US" altLang="en-US">
                 <a:solidFill>
                   <a:srgbClr val="566873"/>
                 </a:solidFill>
@@ -6246,21 +8780,77 @@
                 <a:ea typeface="Sarabun"/>
                 <a:cs typeface="Sarabun"/>
               </a:rPr>
-              <a:t>Excuse me, who is this person?</a:t>
-            </a:r>
-          </a:p>
-        </p:txBody>
-      </p:sp>
-      <p:sp>
-        <p:nvSpPr>
-          <p:cNvPr id="14" name="TextBox 13"/>
+              <a:t>What country is she from?</a:t>
+            </a:r>
+          </a:p>
+        </p:txBody>
+      </p:sp>
+      <p:sp>
+        <p:nvSpPr>
+          <p:cNvPr id="18" name="Rounded Rectangle 17"/>
+          <p:cNvSpPr/>
+          <p:nvPr/>
+        </p:nvSpPr>
+        <p:spPr>
+          <a:xfrm>
+            <a:off x="731520" y="3840480"/>
+            <a:ext cx="1051560" cy="274320"/>
+          </a:xfrm>
+          <a:prstGeom prst="roundRect">
+            <a:avLst>
+              <a:gd name="adj" fmla="val 28000"/>
+            </a:avLst>
+          </a:prstGeom>
+          <a:solidFill>
+            <a:srgbClr val="C96F4A"/>
+          </a:solidFill>
+          <a:ln>
+            <a:noFill/>
+          </a:ln>
+        </p:spPr>
+        <p:style>
+          <a:lnRef idx="1">
+            <a:schemeClr val="accent1"/>
+          </a:lnRef>
+          <a:fillRef idx="3">
+            <a:schemeClr val="accent1"/>
+          </a:fillRef>
+          <a:effectRef idx="2">
+            <a:schemeClr val="accent1"/>
+          </a:effectRef>
+          <a:fontRef idx="minor">
+            <a:schemeClr val="lt1"/>
+          </a:fontRef>
+        </p:style>
+        <p:txBody>
+          <a:bodyPr rtlCol="0" anchor="ctr" wrap="none"/>
+          <a:lstStyle/>
+          <a:p>
+            <a:pPr algn="ctr"/>
+            <a:r>
+              <a:rPr sz="1200" b="1" lang="en-US" altLang="en-US">
+                <a:solidFill>
+                  <a:srgbClr val="FFFFFF"/>
+                </a:solidFill>
+                <a:latin typeface="Sarabun"/>
+                <a:ea typeface="Sarabun"/>
+                <a:cs typeface="Sarabun"/>
+              </a:rPr>
+              <a:t>Friend</a:t>
+            </a:r>
+          </a:p>
+        </p:txBody>
+      </p:sp>
+      <p:sp>
+        <p:nvSpPr>
+          <p:cNvPr id="19" name="TextBox 18"/>
           <p:cNvSpPr txBox="1"/>
           <p:nvPr/>
         </p:nvSpPr>
         <p:spPr>
           <a:xfrm>
-            <a:off x="731583" y="3726205"/>
-            <a:ext cx="1097400" cy="292500"/>
+            <a:off x="1965960" y="3813048"/>
+            <a:ext cx="8823960" cy="228600"/>
           </a:xfrm>
           <a:prstGeom prst="rect">
             <a:avLst/>
@@ -6273,31 +8863,31 @@
           </a:bodyPr>
           <a:lstStyle/>
           <a:p>
-            <a:pPr algn="ctr"/>
-            <a:r>
-              <a:rPr sz="1200" b="1" i="0" lang="en-US" altLang="en-US">
-                <a:solidFill>
-                  <a:srgbClr val="FFFFFF"/>
-                </a:solidFill>
-                <a:latin typeface="Sarabun"/>
-                <a:ea typeface="Sarabun"/>
-                <a:cs typeface="Sarabun"/>
-              </a:rPr>
-              <a:t>B</a:t>
-            </a:r>
-          </a:p>
-        </p:txBody>
-      </p:sp>
-      <p:sp>
-        <p:nvSpPr>
-          <p:cNvPr id="15" name="TextBox 14"/>
+            <a:pPr algn="l"/>
+            <a:r>
+              <a:rPr sz="1700" b="0" i="0" lang="th-TH" altLang="en-US">
+                <a:solidFill>
+                  <a:srgbClr val="24333D"/>
+                </a:solidFill>
+                <a:latin typeface="Sarabun"/>
+                <a:ea typeface="Sarabun"/>
+                <a:cs typeface="Sarabun"/>
+              </a:rPr>
+              <a:t>เขามาจากประเทศไทยค่ะ</a:t>
+            </a:r>
+          </a:p>
+        </p:txBody>
+      </p:sp>
+      <p:sp>
+        <p:nvSpPr>
+          <p:cNvPr id="20" name="TextBox 19"/>
           <p:cNvSpPr txBox="1"/>
           <p:nvPr/>
         </p:nvSpPr>
         <p:spPr>
           <a:xfrm>
-            <a:off x="2011693" y="3666773"/>
-            <a:ext cx="5303400" cy="411600"/>
+            <a:off x="1965960" y="4041648"/>
+            <a:ext cx="8823960" cy="201168"/>
           </a:xfrm>
           <a:prstGeom prst="rect">
             <a:avLst/>
@@ -6312,18 +8902,7 @@
           <a:p>
             <a:pPr algn="l"/>
             <a:r>
-              <a:rPr sz="2300" b="1" i="0" lang="th-TH" altLang="en-US">
-                <a:solidFill>
-                  <a:srgbClr val="24333D"/>
-                </a:solidFill>
-                <a:latin typeface="Sarabun"/>
-                <a:ea typeface="Sarabun"/>
-                <a:cs typeface="Sarabun"/>
-              </a:rPr>
-              <a:t>คนนี้คือไมค์ครับ</a:t>
-            </a:r>
-            <a:r>
-              <a:rPr sz="1500" b="0" i="1" lang="en-US" altLang="en-US">
+              <a:rPr sz="1700" b="0" i="1" lang="en-US" altLang="en-US">
                 <a:solidFill>
                   <a:srgbClr val="566873"/>
                 </a:solidFill>
@@ -6331,21 +8910,21 @@
                 <a:ea typeface="Sarabun"/>
                 <a:cs typeface="Sarabun"/>
               </a:rPr>
-              <a:t> (khon níi kheuu Mike khráp)</a:t>
-            </a:r>
-          </a:p>
-        </p:txBody>
-      </p:sp>
-      <p:sp>
-        <p:nvSpPr>
-          <p:cNvPr id="16" name="TextBox 15"/>
+              <a:t>khǎo maa-jàak prà-thêet thai khâ</a:t>
+            </a:r>
+          </a:p>
+        </p:txBody>
+      </p:sp>
+      <p:sp>
+        <p:nvSpPr>
+          <p:cNvPr id="21" name="TextBox 20"/>
           <p:cNvSpPr txBox="1"/>
           <p:nvPr/>
         </p:nvSpPr>
         <p:spPr>
           <a:xfrm>
-            <a:off x="2011680" y="4072527"/>
-            <a:ext cx="5303400" cy="320100"/>
+            <a:off x="1965960" y="4242816"/>
+            <a:ext cx="8823960" cy="201168"/>
           </a:xfrm>
           <a:prstGeom prst="rect">
             <a:avLst/>
@@ -6360,7 +8939,7 @@
           <a:p>
             <a:pPr algn="l"/>
             <a:r>
-              <a:rPr sz="1500" b="0" i="0" lang="en-US" altLang="en-US">
+              <a:rPr sz="1700" b="0" i="0" lang="en-US" altLang="en-US">
                 <a:solidFill>
                   <a:srgbClr val="566873"/>
                 </a:solidFill>
@@ -6368,21 +8947,77 @@
                 <a:ea typeface="Sarabun"/>
                 <a:cs typeface="Sarabun"/>
               </a:rPr>
-              <a:t>This is Mike.</a:t>
-            </a:r>
-          </a:p>
-        </p:txBody>
-      </p:sp>
-      <p:sp>
-        <p:nvSpPr>
-          <p:cNvPr id="17" name="TextBox 16"/>
+              <a:t>She's from Thailand.</a:t>
+            </a:r>
+          </a:p>
+        </p:txBody>
+      </p:sp>
+      <p:sp>
+        <p:nvSpPr>
+          <p:cNvPr id="22" name="Rounded Rectangle 21"/>
+          <p:cNvSpPr/>
+          <p:nvPr/>
+        </p:nvSpPr>
+        <p:spPr>
+          <a:xfrm>
+            <a:off x="731520" y="4754880"/>
+            <a:ext cx="1051560" cy="274320"/>
+          </a:xfrm>
+          <a:prstGeom prst="roundRect">
+            <a:avLst>
+              <a:gd name="adj" fmla="val 28000"/>
+            </a:avLst>
+          </a:prstGeom>
+          <a:solidFill>
+            <a:srgbClr val="7A8F54"/>
+          </a:solidFill>
+          <a:ln>
+            <a:noFill/>
+          </a:ln>
+        </p:spPr>
+        <p:style>
+          <a:lnRef idx="1">
+            <a:schemeClr val="accent1"/>
+          </a:lnRef>
+          <a:fillRef idx="3">
+            <a:schemeClr val="accent1"/>
+          </a:fillRef>
+          <a:effectRef idx="2">
+            <a:schemeClr val="accent1"/>
+          </a:effectRef>
+          <a:fontRef idx="minor">
+            <a:schemeClr val="lt1"/>
+          </a:fontRef>
+        </p:style>
+        <p:txBody>
+          <a:bodyPr rtlCol="0" anchor="ctr" wrap="none"/>
+          <a:lstStyle/>
+          <a:p>
+            <a:pPr algn="ctr"/>
+            <a:r>
+              <a:rPr sz="1200" b="1" lang="en-US" altLang="en-US">
+                <a:solidFill>
+                  <a:srgbClr val="FFFFFF"/>
+                </a:solidFill>
+                <a:latin typeface="Sarabun"/>
+                <a:ea typeface="Sarabun"/>
+                <a:cs typeface="Sarabun"/>
+              </a:rPr>
+              <a:t>You</a:t>
+            </a:r>
+          </a:p>
+        </p:txBody>
+      </p:sp>
+      <p:sp>
+        <p:nvSpPr>
+          <p:cNvPr id="23" name="TextBox 22"/>
           <p:cNvSpPr txBox="1"/>
           <p:nvPr/>
         </p:nvSpPr>
         <p:spPr>
           <a:xfrm>
-            <a:off x="791795" y="4489760"/>
-            <a:ext cx="1097400" cy="292500"/>
+            <a:off x="1965960" y="4727448"/>
+            <a:ext cx="8823960" cy="228600"/>
           </a:xfrm>
           <a:prstGeom prst="rect">
             <a:avLst/>
@@ -6395,31 +9030,31 @@
           </a:bodyPr>
           <a:lstStyle/>
           <a:p>
-            <a:pPr algn="ctr"/>
-            <a:r>
-              <a:rPr sz="1200" b="1" i="0" lang="en-US" altLang="en-US">
-                <a:solidFill>
-                  <a:srgbClr val="FFFFFF"/>
-                </a:solidFill>
-                <a:latin typeface="Sarabun"/>
-                <a:ea typeface="Sarabun"/>
-                <a:cs typeface="Sarabun"/>
-              </a:rPr>
-              <a:t>A</a:t>
-            </a:r>
-          </a:p>
-        </p:txBody>
-      </p:sp>
-      <p:sp>
-        <p:nvSpPr>
-          <p:cNvPr id="18" name="TextBox 17"/>
+            <a:pPr algn="l"/>
+            <a:r>
+              <a:rPr sz="1700" b="0" i="0" lang="th-TH" altLang="en-US">
+                <a:solidFill>
+                  <a:srgbClr val="24333D"/>
+                </a:solidFill>
+                <a:latin typeface="Sarabun"/>
+                <a:ea typeface="Sarabun"/>
+                <a:cs typeface="Sarabun"/>
+              </a:rPr>
+              <a:t>คนไทยใช่ไหมครับ</a:t>
+            </a:r>
+          </a:p>
+        </p:txBody>
+      </p:sp>
+      <p:sp>
+        <p:nvSpPr>
+          <p:cNvPr id="24" name="TextBox 23"/>
           <p:cNvSpPr txBox="1"/>
           <p:nvPr/>
         </p:nvSpPr>
         <p:spPr>
           <a:xfrm>
-            <a:off x="2011755" y="4366290"/>
-            <a:ext cx="5303400" cy="411600"/>
+            <a:off x="1965960" y="4956048"/>
+            <a:ext cx="8823960" cy="201168"/>
           </a:xfrm>
           <a:prstGeom prst="rect">
             <a:avLst/>
@@ -6434,18 +9069,7 @@
           <a:p>
             <a:pPr algn="l"/>
             <a:r>
-              <a:rPr sz="2300" b="1" i="0" lang="th-TH" altLang="en-US">
-                <a:solidFill>
-                  <a:srgbClr val="24333D"/>
-                </a:solidFill>
-                <a:latin typeface="Sarabun"/>
-                <a:ea typeface="Sarabun"/>
-                <a:cs typeface="Sarabun"/>
-              </a:rPr>
-              <a:t>เขามาจากประเทศอะไรคะ</a:t>
-            </a:r>
-            <a:r>
-              <a:rPr sz="1500" b="0" i="1" lang="en-US" altLang="en-US">
+              <a:rPr sz="1700" b="0" i="1" lang="en-US" altLang="en-US">
                 <a:solidFill>
                   <a:srgbClr val="566873"/>
                 </a:solidFill>
@@ -6453,21 +9077,21 @@
                 <a:ea typeface="Sarabun"/>
                 <a:cs typeface="Sarabun"/>
               </a:rPr>
-              <a:t> (khǎo maa-jàak bprà-thêet à-rai khá)</a:t>
-            </a:r>
-          </a:p>
-        </p:txBody>
-      </p:sp>
-      <p:sp>
-        <p:nvSpPr>
-          <p:cNvPr id="19" name="TextBox 18"/>
+              <a:t>khon thai châi mǎi khráp</a:t>
+            </a:r>
+          </a:p>
+        </p:txBody>
+      </p:sp>
+      <p:sp>
+        <p:nvSpPr>
+          <p:cNvPr id="25" name="TextBox 24"/>
           <p:cNvSpPr txBox="1"/>
           <p:nvPr/>
         </p:nvSpPr>
         <p:spPr>
           <a:xfrm>
-            <a:off x="2011693" y="4759532"/>
-            <a:ext cx="5303400" cy="320100"/>
+            <a:off x="1965960" y="5157216"/>
+            <a:ext cx="8823960" cy="201168"/>
           </a:xfrm>
           <a:prstGeom prst="rect">
             <a:avLst/>
@@ -6482,7 +9106,7 @@
           <a:p>
             <a:pPr algn="l"/>
             <a:r>
-              <a:rPr sz="1500" b="0" i="0" lang="en-US" altLang="en-US">
+              <a:rPr sz="1700" b="0" i="0" lang="en-US" altLang="en-US">
                 <a:solidFill>
                   <a:srgbClr val="566873"/>
                 </a:solidFill>
@@ -6490,129 +9114,7 @@
                 <a:ea typeface="Sarabun"/>
                 <a:cs typeface="Sarabun"/>
               </a:rPr>
-              <a:t>What country is he from?</a:t>
-            </a:r>
-          </a:p>
-        </p:txBody>
-      </p:sp>
-      <p:sp>
-        <p:nvSpPr>
-          <p:cNvPr id="20" name="TextBox 19"/>
-          <p:cNvSpPr txBox="1"/>
-          <p:nvPr/>
-        </p:nvSpPr>
-        <p:spPr>
-          <a:xfrm>
-            <a:off x="731633" y="5253290"/>
-            <a:ext cx="1097400" cy="292500"/>
-          </a:xfrm>
-          <a:prstGeom prst="rect">
-            <a:avLst/>
-          </a:prstGeom>
-          <a:noFill/>
-        </p:spPr>
-        <p:txBody>
-          <a:bodyPr wrap="square" anchor="t">
-            <a:spAutoFit/>
-          </a:bodyPr>
-          <a:lstStyle/>
-          <a:p>
-            <a:pPr algn="ctr"/>
-            <a:r>
-              <a:rPr sz="1200" b="1" i="0" lang="en-US" altLang="en-US">
-                <a:solidFill>
-                  <a:srgbClr val="FFFFFF"/>
-                </a:solidFill>
-                <a:latin typeface="Sarabun"/>
-                <a:ea typeface="Sarabun"/>
-                <a:cs typeface="Sarabun"/>
-              </a:rPr>
-              <a:t>B</a:t>
-            </a:r>
-          </a:p>
-        </p:txBody>
-      </p:sp>
-      <p:sp>
-        <p:nvSpPr>
-          <p:cNvPr id="21" name="TextBox 20"/>
-          <p:cNvSpPr txBox="1"/>
-          <p:nvPr/>
-        </p:nvSpPr>
-        <p:spPr>
-          <a:xfrm>
-            <a:off x="2011680" y="5175433"/>
-            <a:ext cx="5303400" cy="411600"/>
-          </a:xfrm>
-          <a:prstGeom prst="rect">
-            <a:avLst/>
-          </a:prstGeom>
-          <a:noFill/>
-        </p:spPr>
-        <p:txBody>
-          <a:bodyPr wrap="square" anchor="t">
-            <a:spAutoFit/>
-          </a:bodyPr>
-          <a:lstStyle/>
-          <a:p>
-            <a:pPr algn="l"/>
-            <a:r>
-              <a:rPr sz="2300" b="1" i="0" lang="th-TH" altLang="en-US">
-                <a:solidFill>
-                  <a:srgbClr val="24333D"/>
-                </a:solidFill>
-                <a:latin typeface="Sarabun"/>
-                <a:ea typeface="Sarabun"/>
-                <a:cs typeface="Sarabun"/>
-              </a:rPr>
-              <a:t>เขามาจากอังกฤษครับ</a:t>
-            </a:r>
-            <a:r>
-              <a:rPr sz="1500" b="0" i="1" lang="en-US" altLang="en-US">
-                <a:solidFill>
-                  <a:srgbClr val="566873"/>
-                </a:solidFill>
-                <a:latin typeface="Sarabun"/>
-                <a:ea typeface="Sarabun"/>
-                <a:cs typeface="Sarabun"/>
-              </a:rPr>
-              <a:t> (khǎo maa-jàak ang-grìt khráp)</a:t>
-            </a:r>
-          </a:p>
-        </p:txBody>
-      </p:sp>
-      <p:sp>
-        <p:nvSpPr>
-          <p:cNvPr id="22" name="TextBox 21"/>
-          <p:cNvSpPr txBox="1"/>
-          <p:nvPr/>
-        </p:nvSpPr>
-        <p:spPr>
-          <a:xfrm>
-            <a:off x="2011693" y="5571112"/>
-            <a:ext cx="5303400" cy="320100"/>
-          </a:xfrm>
-          <a:prstGeom prst="rect">
-            <a:avLst/>
-          </a:prstGeom>
-          <a:noFill/>
-        </p:spPr>
-        <p:txBody>
-          <a:bodyPr wrap="square" anchor="t">
-            <a:spAutoFit/>
-          </a:bodyPr>
-          <a:lstStyle/>
-          <a:p>
-            <a:pPr algn="l"/>
-            <a:r>
-              <a:rPr sz="1500" b="0" i="0" lang="en-US" altLang="en-US">
-                <a:solidFill>
-                  <a:srgbClr val="566873"/>
-                </a:solidFill>
-                <a:latin typeface="Sarabun"/>
-                <a:ea typeface="Sarabun"/>
-                <a:cs typeface="Sarabun"/>
-              </a:rPr>
-              <a:t>He is from England.</a:t>
+              <a:t>A Thai person, right?</a:t>
             </a:r>
           </a:p>
         </p:txBody>
@@ -6628,6 +9130,14 @@
 <file path=ppt/slides/slide8.xml><?xml version="1.0" encoding="utf-8"?>
 <p:sld xmlns:a="http://schemas.openxmlformats.org/drawingml/2006/main" xmlns:p="http://schemas.openxmlformats.org/presentationml/2006/main" xmlns:r="http://schemas.openxmlformats.org/officeDocument/2006/relationships">
   <p:cSld>
+    <p:bg>
+      <p:bgPr>
+        <a:solidFill>
+          <a:srgbClr val="F5F7F8"/>
+        </a:solidFill>
+        <a:effectLst/>
+      </p:bgPr>
+    </p:bg>
     <p:spTree>
       <p:nvGrpSpPr>
         <p:cNvPr id="1" name=""/>
@@ -6635,40 +9145,116 @@
         <p:nvPr/>
       </p:nvGrpSpPr>
       <p:grpSpPr/>
-      <p:pic>
-        <p:nvPicPr>
-          <p:cNvPr id="2" name="Picture 1" descr="slide-08.png"/>
-          <p:cNvPicPr>
-            <a:picLocks noChangeAspect="1"/>
-          </p:cNvPicPr>
-          <p:nvPr/>
-        </p:nvPicPr>
-        <p:blipFill>
-          <a:blip r:embed="rId2"/>
-          <a:stretch>
-            <a:fillRect/>
-          </a:stretch>
-        </p:blipFill>
+      <p:sp>
+        <p:nvSpPr>
+          <p:cNvPr id="2" name="__pip_placeholder__"/>
+          <p:cNvSpPr/>
+          <p:nvPr/>
+        </p:nvSpPr>
+        <p:spPr>
+          <a:xfrm>
+            <a:off x="8351215" y="0"/>
+            <a:ext cx="3840480" cy="2880360"/>
+          </a:xfrm>
+          <a:prstGeom prst="rect">
+            <a:avLst/>
+          </a:prstGeom>
+          <a:solidFill>
+            <a:srgbClr val="DBE7EC">
+              <a:alpha val="30000"/>
+            </a:srgbClr>
+          </a:solidFill>
+          <a:ln w="19050">
+            <a:solidFill>
+              <a:srgbClr val="355C7D"/>
+            </a:solidFill>
+            <a:prstDash val="sysDash"/>
+          </a:ln>
+        </p:spPr>
+        <p:style>
+          <a:lnRef idx="1">
+            <a:schemeClr val="accent1"/>
+          </a:lnRef>
+          <a:fillRef idx="3">
+            <a:schemeClr val="accent1"/>
+          </a:fillRef>
+          <a:effectRef idx="2">
+            <a:schemeClr val="accent1"/>
+          </a:effectRef>
+          <a:fontRef idx="minor">
+            <a:schemeClr val="lt1"/>
+          </a:fontRef>
+        </p:style>
+        <p:txBody>
+          <a:bodyPr rtlCol="0" anchor="ctr" wrap="none"/>
+          <a:lstStyle/>
+          <a:p>
+            <a:pPr algn="ctr"/>
+            <a:r>
+              <a:rPr sz="1800" b="1">
+                <a:solidFill>
+                  <a:srgbClr val="355C7D"/>
+                </a:solidFill>
+                <a:latin typeface="Sarabun"/>
+              </a:rPr>
+              <a:t>Nine</a:t>
+            </a:r>
+          </a:p>
+        </p:txBody>
+      </p:sp>
+      <p:sp>
+        <p:nvSpPr>
+          <p:cNvPr id="3" name="Rectangle 2"/>
+          <p:cNvSpPr/>
+          <p:nvPr/>
+        </p:nvSpPr>
         <p:spPr>
           <a:xfrm>
             <a:off x="0" y="0"/>
-            <a:ext cx="12191695" cy="6858000"/>
-          </a:xfrm>
-          <a:prstGeom prst="rect">
-            <a:avLst/>
-          </a:prstGeom>
-        </p:spPr>
-      </p:pic>
-      <p:sp>
-        <p:nvSpPr>
-          <p:cNvPr id="3" name="TextBox 2"/>
+            <a:ext cx="12191695" cy="63500"/>
+          </a:xfrm>
+          <a:prstGeom prst="rect">
+            <a:avLst/>
+          </a:prstGeom>
+          <a:solidFill>
+            <a:srgbClr val="355C7D"/>
+          </a:solidFill>
+          <a:ln>
+            <a:noFill/>
+          </a:ln>
+        </p:spPr>
+        <p:style>
+          <a:lnRef idx="1">
+            <a:schemeClr val="accent1"/>
+          </a:lnRef>
+          <a:fillRef idx="3">
+            <a:schemeClr val="accent1"/>
+          </a:fillRef>
+          <a:effectRef idx="2">
+            <a:schemeClr val="accent1"/>
+          </a:effectRef>
+          <a:fontRef idx="minor">
+            <a:schemeClr val="lt1"/>
+          </a:fontRef>
+        </p:style>
+        <p:txBody>
+          <a:bodyPr rtlCol="0" anchor="ctr"/>
+          <a:lstStyle/>
+          <a:p>
+            <a:pPr algn="ctr"/>
+          </a:p>
+        </p:txBody>
+      </p:sp>
+      <p:sp>
+        <p:nvSpPr>
+          <p:cNvPr id="4" name="TextBox 3"/>
           <p:cNvSpPr txBox="1"/>
           <p:nvPr/>
         </p:nvSpPr>
         <p:spPr>
           <a:xfrm>
-            <a:off x="1137970" y="1015518"/>
-            <a:ext cx="6858000" cy="457200"/>
+            <a:off x="731520" y="256032"/>
+            <a:ext cx="7071055" cy="256032"/>
           </a:xfrm>
           <a:prstGeom prst="rect">
             <a:avLst/>
@@ -6683,9 +9269,9 @@
           <a:p>
             <a:pPr algn="l"/>
             <a:r>
-              <a:rPr sz="3000" b="1" i="0" lang="en-US" altLang="en-US">
-                <a:solidFill>
-                  <a:srgbClr val="24333D"/>
+              <a:rPr sz="1200" b="1" i="0" lang="en-US" altLang="en-US">
+                <a:solidFill>
+                  <a:srgbClr val="355C7D"/>
                 </a:solidFill>
                 <a:latin typeface="Sarabun"/>
                 <a:ea typeface="Sarabun"/>
@@ -6698,14 +9284,14 @@
       </p:sp>
       <p:sp>
         <p:nvSpPr>
-          <p:cNvPr id="4" name="TextBox 3"/>
+          <p:cNvPr id="5" name="TextBox 4"/>
           <p:cNvSpPr txBox="1"/>
           <p:nvPr/>
         </p:nvSpPr>
         <p:spPr>
           <a:xfrm>
-            <a:off x="1097280" y="1776945"/>
-            <a:ext cx="6400800" cy="457200"/>
+            <a:off x="731520" y="530352"/>
+            <a:ext cx="7071055" cy="640080"/>
           </a:xfrm>
           <a:prstGeom prst="rect">
             <a:avLst/>
@@ -6720,7 +9306,7 @@
           <a:p>
             <a:pPr algn="l"/>
             <a:r>
-              <a:rPr sz="1600" b="0" i="0" lang="en-US" altLang="en-US">
+              <a:rPr sz="3600" b="1" i="0" lang="en-US" altLang="en-US">
                 <a:solidFill>
                   <a:srgbClr val="24333D"/>
                 </a:solidFill>
@@ -6728,120 +9314,21 @@
                 <a:ea typeface="Sarabun"/>
                 <a:cs typeface="Sarabun"/>
               </a:rPr>
-              <a:t>Use pronouns as speaking tools: </a:t>
-            </a:r>
-            <a:r>
-              <a:rPr sz="1600" b="0" i="0" lang="th-TH" altLang="en-US">
-                <a:solidFill>
-                  <a:srgbClr val="24333D"/>
-                </a:solidFill>
-                <a:latin typeface="Sarabun"/>
-                <a:ea typeface="Sarabun"/>
-                <a:cs typeface="Sarabun"/>
-              </a:rPr>
-              <a:t>ฉัน</a:t>
-            </a:r>
-            <a:r>
-              <a:rPr sz="1500" b="0" i="1" lang="en-US" altLang="en-US">
-                <a:solidFill>
-                  <a:srgbClr val="566873"/>
-                </a:solidFill>
-                <a:latin typeface="Sarabun"/>
-                <a:ea typeface="Sarabun"/>
-                <a:cs typeface="Sarabun"/>
-              </a:rPr>
-              <a:t> (chǎn)</a:t>
-            </a:r>
-            <a:r>
-              <a:rPr sz="1600" b="0" i="0" lang="en-US" altLang="en-US">
-                <a:solidFill>
-                  <a:srgbClr val="24333D"/>
-                </a:solidFill>
-                <a:latin typeface="Sarabun"/>
-                <a:ea typeface="Sarabun"/>
-                <a:cs typeface="Sarabun"/>
-              </a:rPr>
-              <a:t> and </a:t>
-            </a:r>
-            <a:r>
-              <a:rPr sz="1600" b="0" i="0" lang="th-TH" altLang="en-US">
-                <a:solidFill>
-                  <a:srgbClr val="24333D"/>
-                </a:solidFill>
-                <a:latin typeface="Sarabun"/>
-                <a:ea typeface="Sarabun"/>
-                <a:cs typeface="Sarabun"/>
-              </a:rPr>
-              <a:t>ผม</a:t>
-            </a:r>
-            <a:r>
-              <a:rPr sz="1500" b="0" i="1" lang="en-US" altLang="en-US">
-                <a:solidFill>
-                  <a:srgbClr val="566873"/>
-                </a:solidFill>
-                <a:latin typeface="Sarabun"/>
-                <a:ea typeface="Sarabun"/>
-                <a:cs typeface="Sarabun"/>
-              </a:rPr>
-              <a:t> (phǒm)</a:t>
-            </a:r>
-            <a:r>
-              <a:rPr sz="1600" b="0" i="0" lang="en-US" altLang="en-US">
-                <a:solidFill>
-                  <a:srgbClr val="24333D"/>
-                </a:solidFill>
-                <a:latin typeface="Sarabun"/>
-                <a:ea typeface="Sarabun"/>
-                <a:cs typeface="Sarabun"/>
-              </a:rPr>
-              <a:t> for yourself, </a:t>
-            </a:r>
-            <a:r>
-              <a:rPr sz="1600" b="0" i="0" lang="th-TH" altLang="en-US">
-                <a:solidFill>
-                  <a:srgbClr val="24333D"/>
-                </a:solidFill>
-                <a:latin typeface="Sarabun"/>
-                <a:ea typeface="Sarabun"/>
-                <a:cs typeface="Sarabun"/>
-              </a:rPr>
-              <a:t>เขา</a:t>
-            </a:r>
-            <a:r>
-              <a:rPr sz="1500" b="0" i="1" lang="en-US" altLang="en-US">
-                <a:solidFill>
-                  <a:srgbClr val="566873"/>
-                </a:solidFill>
-                <a:latin typeface="Sarabun"/>
-                <a:ea typeface="Sarabun"/>
-                <a:cs typeface="Sarabun"/>
-              </a:rPr>
-              <a:t> (khǎo)</a:t>
-            </a:r>
-            <a:r>
-              <a:rPr sz="1600" b="0" i="0" lang="en-US" altLang="en-US">
-                <a:solidFill>
-                  <a:srgbClr val="24333D"/>
-                </a:solidFill>
-                <a:latin typeface="Sarabun"/>
-                <a:ea typeface="Sarabun"/>
-                <a:cs typeface="Sarabun"/>
-              </a:rPr>
-              <a:t> for another person.</a:t>
-            </a:r>
-          </a:p>
-        </p:txBody>
-      </p:sp>
-      <p:sp>
-        <p:nvSpPr>
-          <p:cNvPr id="5" name="TextBox 4"/>
+              <a:t>Recap</a:t>
+            </a:r>
+          </a:p>
+        </p:txBody>
+      </p:sp>
+      <p:sp>
+        <p:nvSpPr>
+          <p:cNvPr id="6" name="TextBox 5"/>
           <p:cNvSpPr txBox="1"/>
           <p:nvPr/>
         </p:nvSpPr>
         <p:spPr>
           <a:xfrm>
-            <a:off x="1097280" y="2437455"/>
-            <a:ext cx="6400800" cy="457200"/>
+            <a:off x="932688" y="1563624"/>
+            <a:ext cx="6705295" cy="228600"/>
           </a:xfrm>
           <a:prstGeom prst="rect">
             <a:avLst/>
@@ -6856,95 +9343,72 @@
           <a:p>
             <a:pPr algn="l"/>
             <a:r>
-              <a:rPr sz="1600" b="0" i="0" lang="en-US" altLang="en-US">
-                <a:solidFill>
-                  <a:srgbClr val="24333D"/>
-                </a:solidFill>
-                <a:latin typeface="Sarabun"/>
-                <a:ea typeface="Sarabun"/>
-                <a:cs typeface="Sarabun"/>
-              </a:rPr>
-              <a:t>Use </a:t>
-            </a:r>
-            <a:r>
-              <a:rPr sz="1600" b="0" i="0" lang="th-TH" altLang="en-US">
-                <a:solidFill>
-                  <a:srgbClr val="24333D"/>
-                </a:solidFill>
-                <a:latin typeface="Sarabun"/>
-                <a:ea typeface="Sarabun"/>
-                <a:cs typeface="Sarabun"/>
-              </a:rPr>
-              <a:t>นี่คือ...</a:t>
-            </a:r>
-            <a:r>
-              <a:rPr sz="1500" b="0" i="1" lang="en-US" altLang="en-US">
-                <a:solidFill>
-                  <a:srgbClr val="566873"/>
-                </a:solidFill>
-                <a:latin typeface="Sarabun"/>
-                <a:ea typeface="Sarabun"/>
-                <a:cs typeface="Sarabun"/>
-              </a:rPr>
-              <a:t> (nîi kheuu...)</a:t>
-            </a:r>
-            <a:r>
-              <a:rPr sz="1600" b="0" i="0" lang="en-US" altLang="en-US">
-                <a:solidFill>
-                  <a:srgbClr val="24333D"/>
-                </a:solidFill>
-                <a:latin typeface="Sarabun"/>
-                <a:ea typeface="Sarabun"/>
-                <a:cs typeface="Sarabun"/>
-              </a:rPr>
-              <a:t> and </a:t>
-            </a:r>
-            <a:r>
-              <a:rPr sz="1600" b="0" i="0" lang="th-TH" altLang="en-US">
-                <a:solidFill>
-                  <a:srgbClr val="24333D"/>
-                </a:solidFill>
-                <a:latin typeface="Sarabun"/>
-                <a:ea typeface="Sarabun"/>
-                <a:cs typeface="Sarabun"/>
-              </a:rPr>
-              <a:t>เขาคือ...</a:t>
-            </a:r>
-            <a:r>
-              <a:rPr sz="1500" b="0" i="1" lang="en-US" altLang="en-US">
-                <a:solidFill>
-                  <a:srgbClr val="566873"/>
-                </a:solidFill>
-                <a:latin typeface="Sarabun"/>
-                <a:ea typeface="Sarabun"/>
-                <a:cs typeface="Sarabun"/>
-              </a:rPr>
-              <a:t> (khǎo kheuu...)</a:t>
-            </a:r>
-            <a:r>
-              <a:rPr sz="1600" b="0" i="0" lang="en-US" altLang="en-US">
-                <a:solidFill>
-                  <a:srgbClr val="24333D"/>
-                </a:solidFill>
-                <a:latin typeface="Sarabun"/>
-                <a:ea typeface="Sarabun"/>
-                <a:cs typeface="Sarabun"/>
-              </a:rPr>
-              <a:t> to introduce or identify, not as rigid word-for-word translations only.</a:t>
-            </a:r>
-          </a:p>
-        </p:txBody>
-      </p:sp>
-      <p:sp>
-        <p:nvSpPr>
-          <p:cNvPr id="6" name="TextBox 5"/>
+              <a:rPr sz="1700" b="1" i="0" lang="en-US" altLang="en-US">
+                <a:solidFill>
+                  <a:srgbClr val="355C7D"/>
+                </a:solidFill>
+                <a:latin typeface="Sarabun"/>
+                <a:ea typeface="Sarabun"/>
+                <a:cs typeface="Sarabun"/>
+              </a:rPr>
+              <a:t>What you can now do</a:t>
+            </a:r>
+          </a:p>
+        </p:txBody>
+      </p:sp>
+      <p:sp>
+        <p:nvSpPr>
+          <p:cNvPr id="7" name="Oval 6"/>
+          <p:cNvSpPr/>
+          <p:nvPr/>
+        </p:nvSpPr>
+        <p:spPr>
+          <a:xfrm>
+            <a:off x="932688" y="1947672"/>
+            <a:ext cx="82296" cy="82296"/>
+          </a:xfrm>
+          <a:prstGeom prst="ellipse">
+            <a:avLst/>
+          </a:prstGeom>
+          <a:solidFill>
+            <a:srgbClr val="355C7D"/>
+          </a:solidFill>
+          <a:ln>
+            <a:noFill/>
+          </a:ln>
+        </p:spPr>
+        <p:style>
+          <a:lnRef idx="1">
+            <a:schemeClr val="accent1"/>
+          </a:lnRef>
+          <a:fillRef idx="3">
+            <a:schemeClr val="accent1"/>
+          </a:fillRef>
+          <a:effectRef idx="2">
+            <a:schemeClr val="accent1"/>
+          </a:effectRef>
+          <a:fontRef idx="minor">
+            <a:schemeClr val="lt1"/>
+          </a:fontRef>
+        </p:style>
+        <p:txBody>
+          <a:bodyPr rtlCol="0" anchor="ctr"/>
+          <a:lstStyle/>
+          <a:p>
+            <a:pPr algn="ctr"/>
+          </a:p>
+        </p:txBody>
+      </p:sp>
+      <p:sp>
+        <p:nvSpPr>
+          <p:cNvPr id="8" name="TextBox 7"/>
           <p:cNvSpPr txBox="1"/>
           <p:nvPr/>
         </p:nvSpPr>
         <p:spPr>
           <a:xfrm>
-            <a:off x="1005855" y="3097940"/>
-            <a:ext cx="6400800" cy="457200"/>
+            <a:off x="1078992" y="1856232"/>
+            <a:ext cx="6568135" cy="274320"/>
           </a:xfrm>
           <a:prstGeom prst="rect">
             <a:avLst/>
@@ -6959,7 +9423,7 @@
           <a:p>
             <a:pPr algn="l"/>
             <a:r>
-              <a:rPr sz="1600" b="0" i="0" lang="en-US" altLang="en-US">
+              <a:rPr sz="1700" b="0" i="0" lang="th-TH" altLang="en-US">
                 <a:solidFill>
                   <a:srgbClr val="24333D"/>
                 </a:solidFill>
@@ -6967,87 +9431,64 @@
                 <a:ea typeface="Sarabun"/>
                 <a:cs typeface="Sarabun"/>
               </a:rPr>
-              <a:t>Ask </a:t>
-            </a:r>
-            <a:r>
-              <a:rPr sz="1600" b="0" i="0" lang="th-TH" altLang="en-US">
-                <a:solidFill>
-                  <a:srgbClr val="24333D"/>
-                </a:solidFill>
-                <a:latin typeface="Sarabun"/>
-                <a:ea typeface="Sarabun"/>
-                <a:cs typeface="Sarabun"/>
-              </a:rPr>
-              <a:t>เขาคือใคร</a:t>
-            </a:r>
-            <a:r>
-              <a:rPr sz="1500" b="0" i="1" lang="en-US" altLang="en-US">
-                <a:solidFill>
-                  <a:srgbClr val="566873"/>
-                </a:solidFill>
-                <a:latin typeface="Sarabun"/>
-                <a:ea typeface="Sarabun"/>
-                <a:cs typeface="Sarabun"/>
-              </a:rPr>
-              <a:t> (khǎo kheuu khrai)</a:t>
-            </a:r>
-            <a:r>
-              <a:rPr sz="1600" b="0" i="0" lang="en-US" altLang="en-US">
-                <a:solidFill>
-                  <a:srgbClr val="24333D"/>
-                </a:solidFill>
-                <a:latin typeface="Sarabun"/>
-                <a:ea typeface="Sarabun"/>
-                <a:cs typeface="Sarabun"/>
-              </a:rPr>
-              <a:t> or </a:t>
-            </a:r>
-            <a:r>
-              <a:rPr sz="1600" b="0" i="0" lang="th-TH" altLang="en-US">
-                <a:solidFill>
-                  <a:srgbClr val="24333D"/>
-                </a:solidFill>
-                <a:latin typeface="Sarabun"/>
-                <a:ea typeface="Sarabun"/>
-                <a:cs typeface="Sarabun"/>
-              </a:rPr>
-              <a:t>คนนี้คือใคร</a:t>
-            </a:r>
-            <a:r>
-              <a:rPr sz="1500" b="0" i="1" lang="en-US" altLang="en-US">
-                <a:solidFill>
-                  <a:srgbClr val="566873"/>
-                </a:solidFill>
-                <a:latin typeface="Sarabun"/>
-                <a:ea typeface="Sarabun"/>
-                <a:cs typeface="Sarabun"/>
-              </a:rPr>
-              <a:t> (khon níi kheuu khrai)</a:t>
-            </a:r>
-            <a:r>
-              <a:rPr sz="1600" b="0" i="0" lang="en-US" altLang="en-US">
-                <a:solidFill>
-                  <a:srgbClr val="24333D"/>
-                </a:solidFill>
-                <a:latin typeface="Sarabun"/>
-                <a:ea typeface="Sarabun"/>
-                <a:cs typeface="Sarabun"/>
-              </a:rPr>
-              <a:t> when you want identity first, not just a name.</a:t>
-            </a:r>
-          </a:p>
-        </p:txBody>
-      </p:sp>
-      <p:sp>
-        <p:nvSpPr>
-          <p:cNvPr id="7" name="TextBox 6"/>
+              <a:t>How do you say I if you are male? ผม (phǒm).</a:t>
+            </a:r>
+          </a:p>
+        </p:txBody>
+      </p:sp>
+      <p:sp>
+        <p:nvSpPr>
+          <p:cNvPr id="9" name="Oval 8"/>
+          <p:cNvSpPr/>
+          <p:nvPr/>
+        </p:nvSpPr>
+        <p:spPr>
+          <a:xfrm>
+            <a:off x="932688" y="2276856"/>
+            <a:ext cx="82296" cy="82296"/>
+          </a:xfrm>
+          <a:prstGeom prst="ellipse">
+            <a:avLst/>
+          </a:prstGeom>
+          <a:solidFill>
+            <a:srgbClr val="355C7D"/>
+          </a:solidFill>
+          <a:ln>
+            <a:noFill/>
+          </a:ln>
+        </p:spPr>
+        <p:style>
+          <a:lnRef idx="1">
+            <a:schemeClr val="accent1"/>
+          </a:lnRef>
+          <a:fillRef idx="3">
+            <a:schemeClr val="accent1"/>
+          </a:fillRef>
+          <a:effectRef idx="2">
+            <a:schemeClr val="accent1"/>
+          </a:effectRef>
+          <a:fontRef idx="minor">
+            <a:schemeClr val="lt1"/>
+          </a:fontRef>
+        </p:style>
+        <p:txBody>
+          <a:bodyPr rtlCol="0" anchor="ctr"/>
+          <a:lstStyle/>
+          <a:p>
+            <a:pPr algn="ctr"/>
+          </a:p>
+        </p:txBody>
+      </p:sp>
+      <p:sp>
+        <p:nvSpPr>
+          <p:cNvPr id="10" name="TextBox 9"/>
           <p:cNvSpPr txBox="1"/>
           <p:nvPr/>
         </p:nvSpPr>
         <p:spPr>
           <a:xfrm>
-            <a:off x="1097280" y="3686175"/>
-            <a:ext cx="6400800" cy="457200"/>
+            <a:off x="1078992" y="2185416"/>
+            <a:ext cx="6568135" cy="475488"/>
           </a:xfrm>
           <a:prstGeom prst="rect">
             <a:avLst/>
@@ -7062,7 +9503,7 @@
           <a:p>
             <a:pPr algn="l"/>
             <a:r>
-              <a:rPr sz="1600" b="0" i="0" lang="en-US" altLang="en-US">
+              <a:rPr sz="1700" b="0" i="0" lang="en-US" altLang="en-US">
                 <a:solidFill>
                   <a:srgbClr val="24333D"/>
                 </a:solidFill>
@@ -7070,10 +9511,10 @@
                 <a:ea typeface="Sarabun"/>
                 <a:cs typeface="Sarabun"/>
               </a:rPr>
-              <a:t>Reuse </a:t>
-            </a:r>
-            <a:r>
-              <a:rPr sz="1600" b="0" i="0" lang="th-TH" altLang="en-US">
+              <a:t>How do you say this is...? </a:t>
+            </a:r>
+            <a:r>
+              <a:rPr sz="1700" b="0" i="0" lang="th-TH" altLang="en-US">
                 <a:solidFill>
                   <a:srgbClr val="24333D"/>
                 </a:solidFill>
@@ -7081,10 +9522,10 @@
                 <a:ea typeface="Sarabun"/>
                 <a:cs typeface="Sarabun"/>
               </a:rPr>
-              <a:t>ชื่อ</a:t>
-            </a:r>
-            <a:r>
-              <a:rPr sz="1500" b="0" i="1" lang="en-US" altLang="en-US">
+              <a:t>นี่</a:t>
+            </a:r>
+            <a:r>
+              <a:rPr sz="1700" b="0" i="1" lang="en-US" altLang="en-US">
                 <a:solidFill>
                   <a:srgbClr val="566873"/>
                 </a:solidFill>
@@ -7092,10 +9533,10 @@
                 <a:ea typeface="Sarabun"/>
                 <a:cs typeface="Sarabun"/>
               </a:rPr>
-              <a:t> (chûue)</a:t>
-            </a:r>
-            <a:r>
-              <a:rPr sz="1600" b="0" i="0" lang="en-US" altLang="en-US">
+              <a:t> (nîi)</a:t>
+            </a:r>
+            <a:r>
+              <a:rPr sz="1700" b="0" i="0" lang="th-TH" altLang="en-US">
                 <a:solidFill>
                   <a:srgbClr val="24333D"/>
                 </a:solidFill>
@@ -7103,10 +9544,21 @@
                 <a:ea typeface="Sarabun"/>
                 <a:cs typeface="Sarabun"/>
               </a:rPr>
-              <a:t>, </a:t>
-            </a:r>
-            <a:r>
-              <a:rPr sz="1600" b="0" i="0" lang="th-TH" altLang="en-US">
+              <a:t>คือ</a:t>
+            </a:r>
+            <a:r>
+              <a:rPr sz="1700" b="0" i="1" lang="en-US" altLang="en-US">
+                <a:solidFill>
+                  <a:srgbClr val="566873"/>
+                </a:solidFill>
+                <a:latin typeface="Sarabun"/>
+                <a:ea typeface="Sarabun"/>
+                <a:cs typeface="Sarabun"/>
+              </a:rPr>
+              <a:t> (khuue)</a:t>
+            </a:r>
+            <a:r>
+              <a:rPr sz="1700" b="0" i="0" lang="en-US" altLang="en-US">
                 <a:solidFill>
                   <a:srgbClr val="24333D"/>
                 </a:solidFill>
@@ -7114,43 +9566,64 @@
                 <a:ea typeface="Sarabun"/>
                 <a:cs typeface="Sarabun"/>
               </a:rPr>
-              <a:t>ประเทศ</a:t>
-            </a:r>
-            <a:r>
-              <a:rPr sz="1500" b="0" i="1" lang="en-US" altLang="en-US">
-                <a:solidFill>
-                  <a:srgbClr val="566873"/>
-                </a:solidFill>
-                <a:latin typeface="Sarabun"/>
-                <a:ea typeface="Sarabun"/>
-                <a:cs typeface="Sarabun"/>
-              </a:rPr>
-              <a:t> (bprà-thêet)</a:t>
-            </a:r>
-            <a:r>
-              <a:rPr sz="1600" b="0" i="0" lang="en-US" altLang="en-US">
-                <a:solidFill>
-                  <a:srgbClr val="24333D"/>
-                </a:solidFill>
-                <a:latin typeface="Sarabun"/>
-                <a:ea typeface="Sarabun"/>
-                <a:cs typeface="Sarabun"/>
-              </a:rPr>
-              <a:t>, and earlier greeting material so the dialogue grows naturally.</a:t>
-            </a:r>
-          </a:p>
-        </p:txBody>
-      </p:sp>
-      <p:sp>
-        <p:nvSpPr>
-          <p:cNvPr id="8" name="TextBox 7"/>
+              <a:t>... (nîi khuue...).</a:t>
+            </a:r>
+          </a:p>
+        </p:txBody>
+      </p:sp>
+      <p:sp>
+        <p:nvSpPr>
+          <p:cNvPr id="11" name="Oval 10"/>
+          <p:cNvSpPr/>
+          <p:nvPr/>
+        </p:nvSpPr>
+        <p:spPr>
+          <a:xfrm>
+            <a:off x="932688" y="2807208"/>
+            <a:ext cx="82296" cy="82296"/>
+          </a:xfrm>
+          <a:prstGeom prst="ellipse">
+            <a:avLst/>
+          </a:prstGeom>
+          <a:solidFill>
+            <a:srgbClr val="355C7D"/>
+          </a:solidFill>
+          <a:ln>
+            <a:noFill/>
+          </a:ln>
+        </p:spPr>
+        <p:style>
+          <a:lnRef idx="1">
+            <a:schemeClr val="accent1"/>
+          </a:lnRef>
+          <a:fillRef idx="3">
+            <a:schemeClr val="accent1"/>
+          </a:fillRef>
+          <a:effectRef idx="2">
+            <a:schemeClr val="accent1"/>
+          </a:effectRef>
+          <a:fontRef idx="minor">
+            <a:schemeClr val="lt1"/>
+          </a:fontRef>
+        </p:style>
+        <p:txBody>
+          <a:bodyPr rtlCol="0" anchor="ctr"/>
+          <a:lstStyle/>
+          <a:p>
+            <a:pPr algn="ctr"/>
+          </a:p>
+        </p:txBody>
+      </p:sp>
+      <p:sp>
+        <p:nvSpPr>
+          <p:cNvPr id="12" name="TextBox 11"/>
           <p:cNvSpPr txBox="1"/>
           <p:nvPr/>
         </p:nvSpPr>
         <p:spPr>
           <a:xfrm>
-            <a:off x="1005855" y="4412835"/>
-            <a:ext cx="6400800" cy="457200"/>
+            <a:off x="1078992" y="2715768"/>
+            <a:ext cx="6568135" cy="475488"/>
           </a:xfrm>
           <a:prstGeom prst="rect">
             <a:avLst/>
@@ -7165,7 +9638,7 @@
           <a:p>
             <a:pPr algn="l"/>
             <a:r>
-              <a:rPr sz="1600" b="0" i="0" lang="en-US" altLang="en-US">
+              <a:rPr sz="1700" b="0" i="0" lang="en-US" altLang="en-US">
                 <a:solidFill>
                   <a:srgbClr val="24333D"/>
                 </a:solidFill>
@@ -7173,7 +9646,460 @@
                 <a:ea typeface="Sarabun"/>
                 <a:cs typeface="Sarabun"/>
               </a:rPr>
-              <a:t>Keep the exchange short: identify, ask who, confirm, and move on.</a:t>
+              <a:t>How do you ask who someone is? </a:t>
+            </a:r>
+            <a:r>
+              <a:rPr sz="1700" b="0" i="0" lang="th-TH" altLang="en-US">
+                <a:solidFill>
+                  <a:srgbClr val="24333D"/>
+                </a:solidFill>
+                <a:latin typeface="Sarabun"/>
+                <a:ea typeface="Sarabun"/>
+                <a:cs typeface="Sarabun"/>
+              </a:rPr>
+              <a:t>เขา</a:t>
+            </a:r>
+            <a:r>
+              <a:rPr sz="1700" b="0" i="1" lang="en-US" altLang="en-US">
+                <a:solidFill>
+                  <a:srgbClr val="566873"/>
+                </a:solidFill>
+                <a:latin typeface="Sarabun"/>
+                <a:ea typeface="Sarabun"/>
+                <a:cs typeface="Sarabun"/>
+              </a:rPr>
+              <a:t> (khǎo)</a:t>
+            </a:r>
+            <a:r>
+              <a:rPr sz="1700" b="0" i="0" lang="th-TH" altLang="en-US">
+                <a:solidFill>
+                  <a:srgbClr val="24333D"/>
+                </a:solidFill>
+                <a:latin typeface="Sarabun"/>
+                <a:ea typeface="Sarabun"/>
+                <a:cs typeface="Sarabun"/>
+              </a:rPr>
+              <a:t>คือ</a:t>
+            </a:r>
+            <a:r>
+              <a:rPr sz="1700" b="0" i="1" lang="en-US" altLang="en-US">
+                <a:solidFill>
+                  <a:srgbClr val="566873"/>
+                </a:solidFill>
+                <a:latin typeface="Sarabun"/>
+                <a:ea typeface="Sarabun"/>
+                <a:cs typeface="Sarabun"/>
+              </a:rPr>
+              <a:t> (khuue)</a:t>
+            </a:r>
+            <a:r>
+              <a:rPr sz="1700" b="0" i="0" lang="th-TH" altLang="en-US">
+                <a:solidFill>
+                  <a:srgbClr val="24333D"/>
+                </a:solidFill>
+                <a:latin typeface="Sarabun"/>
+                <a:ea typeface="Sarabun"/>
+                <a:cs typeface="Sarabun"/>
+              </a:rPr>
+              <a:t>ใคร (khǎo khuue khrai).</a:t>
+            </a:r>
+          </a:p>
+        </p:txBody>
+      </p:sp>
+      <p:sp>
+        <p:nvSpPr>
+          <p:cNvPr id="13" name="Oval 12"/>
+          <p:cNvSpPr/>
+          <p:nvPr/>
+        </p:nvSpPr>
+        <p:spPr>
+          <a:xfrm>
+            <a:off x="932688" y="3337560"/>
+            <a:ext cx="82296" cy="82296"/>
+          </a:xfrm>
+          <a:prstGeom prst="ellipse">
+            <a:avLst/>
+          </a:prstGeom>
+          <a:solidFill>
+            <a:srgbClr val="355C7D"/>
+          </a:solidFill>
+          <a:ln>
+            <a:noFill/>
+          </a:ln>
+        </p:spPr>
+        <p:style>
+          <a:lnRef idx="1">
+            <a:schemeClr val="accent1"/>
+          </a:lnRef>
+          <a:fillRef idx="3">
+            <a:schemeClr val="accent1"/>
+          </a:fillRef>
+          <a:effectRef idx="2">
+            <a:schemeClr val="accent1"/>
+          </a:effectRef>
+          <a:fontRef idx="minor">
+            <a:schemeClr val="lt1"/>
+          </a:fontRef>
+        </p:style>
+        <p:txBody>
+          <a:bodyPr rtlCol="0" anchor="ctr"/>
+          <a:lstStyle/>
+          <a:p>
+            <a:pPr algn="ctr"/>
+          </a:p>
+        </p:txBody>
+      </p:sp>
+      <p:sp>
+        <p:nvSpPr>
+          <p:cNvPr id="14" name="TextBox 13"/>
+          <p:cNvSpPr txBox="1"/>
+          <p:nvPr/>
+        </p:nvSpPr>
+        <p:spPr>
+          <a:xfrm>
+            <a:off x="1078992" y="3246120"/>
+            <a:ext cx="6568135" cy="475488"/>
+          </a:xfrm>
+          <a:prstGeom prst="rect">
+            <a:avLst/>
+          </a:prstGeom>
+          <a:noFill/>
+        </p:spPr>
+        <p:txBody>
+          <a:bodyPr wrap="square" anchor="t">
+            <a:spAutoFit/>
+          </a:bodyPr>
+          <a:lstStyle/>
+          <a:p>
+            <a:pPr algn="l"/>
+            <a:r>
+              <a:rPr sz="1700" b="0" i="0" lang="en-US" altLang="en-US">
+                <a:solidFill>
+                  <a:srgbClr val="24333D"/>
+                </a:solidFill>
+                <a:latin typeface="Sarabun"/>
+                <a:ea typeface="Sarabun"/>
+                <a:cs typeface="Sarabun"/>
+              </a:rPr>
+              <a:t>How do you confirm someone's identity? </a:t>
+            </a:r>
+            <a:r>
+              <a:rPr sz="1700" b="0" i="0" lang="th-TH" altLang="en-US">
+                <a:solidFill>
+                  <a:srgbClr val="24333D"/>
+                </a:solidFill>
+                <a:latin typeface="Sarabun"/>
+                <a:ea typeface="Sarabun"/>
+                <a:cs typeface="Sarabun"/>
+              </a:rPr>
+              <a:t>คุณ</a:t>
+            </a:r>
+            <a:r>
+              <a:rPr sz="1700" b="0" i="1" lang="en-US" altLang="en-US">
+                <a:solidFill>
+                  <a:srgbClr val="566873"/>
+                </a:solidFill>
+                <a:latin typeface="Sarabun"/>
+                <a:ea typeface="Sarabun"/>
+                <a:cs typeface="Sarabun"/>
+              </a:rPr>
+              <a:t> (khun)</a:t>
+            </a:r>
+            <a:r>
+              <a:rPr sz="1700" b="0" i="0" lang="th-TH" altLang="en-US">
+                <a:solidFill>
+                  <a:srgbClr val="24333D"/>
+                </a:solidFill>
+                <a:latin typeface="Sarabun"/>
+                <a:ea typeface="Sarabun"/>
+                <a:cs typeface="Sarabun"/>
+              </a:rPr>
+              <a:t>คือ</a:t>
+            </a:r>
+            <a:r>
+              <a:rPr sz="1700" b="0" i="1" lang="en-US" altLang="en-US">
+                <a:solidFill>
+                  <a:srgbClr val="566873"/>
+                </a:solidFill>
+                <a:latin typeface="Sarabun"/>
+                <a:ea typeface="Sarabun"/>
+                <a:cs typeface="Sarabun"/>
+              </a:rPr>
+              <a:t> (khuue)</a:t>
+            </a:r>
+            <a:r>
+              <a:rPr sz="1700" b="0" i="0" lang="th-TH" altLang="en-US">
+                <a:solidFill>
+                  <a:srgbClr val="24333D"/>
+                </a:solidFill>
+                <a:latin typeface="Sarabun"/>
+                <a:ea typeface="Sarabun"/>
+                <a:cs typeface="Sarabun"/>
+              </a:rPr>
+              <a:t>...ใช่ไหม (khun khuue...châi mǎi).</a:t>
+            </a:r>
+          </a:p>
+        </p:txBody>
+      </p:sp>
+      <p:sp>
+        <p:nvSpPr>
+          <p:cNvPr id="15" name="Oval 14"/>
+          <p:cNvSpPr/>
+          <p:nvPr/>
+        </p:nvSpPr>
+        <p:spPr>
+          <a:xfrm>
+            <a:off x="932688" y="3867912"/>
+            <a:ext cx="82296" cy="82296"/>
+          </a:xfrm>
+          <a:prstGeom prst="ellipse">
+            <a:avLst/>
+          </a:prstGeom>
+          <a:solidFill>
+            <a:srgbClr val="355C7D"/>
+          </a:solidFill>
+          <a:ln>
+            <a:noFill/>
+          </a:ln>
+        </p:spPr>
+        <p:style>
+          <a:lnRef idx="1">
+            <a:schemeClr val="accent1"/>
+          </a:lnRef>
+          <a:fillRef idx="3">
+            <a:schemeClr val="accent1"/>
+          </a:fillRef>
+          <a:effectRef idx="2">
+            <a:schemeClr val="accent1"/>
+          </a:effectRef>
+          <a:fontRef idx="minor">
+            <a:schemeClr val="lt1"/>
+          </a:fontRef>
+        </p:style>
+        <p:txBody>
+          <a:bodyPr rtlCol="0" anchor="ctr"/>
+          <a:lstStyle/>
+          <a:p>
+            <a:pPr algn="ctr"/>
+          </a:p>
+        </p:txBody>
+      </p:sp>
+      <p:sp>
+        <p:nvSpPr>
+          <p:cNvPr id="16" name="TextBox 15"/>
+          <p:cNvSpPr txBox="1"/>
+          <p:nvPr/>
+        </p:nvSpPr>
+        <p:spPr>
+          <a:xfrm>
+            <a:off x="1078992" y="3776472"/>
+            <a:ext cx="6568135" cy="475488"/>
+          </a:xfrm>
+          <a:prstGeom prst="rect">
+            <a:avLst/>
+          </a:prstGeom>
+          <a:noFill/>
+        </p:spPr>
+        <p:txBody>
+          <a:bodyPr wrap="square" anchor="t">
+            <a:spAutoFit/>
+          </a:bodyPr>
+          <a:lstStyle/>
+          <a:p>
+            <a:pPr algn="l"/>
+            <a:r>
+              <a:rPr sz="1700" b="0" i="0" lang="en-US" altLang="en-US">
+                <a:solidFill>
+                  <a:srgbClr val="24333D"/>
+                </a:solidFill>
+                <a:latin typeface="Sarabun"/>
+                <a:ea typeface="Sarabun"/>
+                <a:cs typeface="Sarabun"/>
+              </a:rPr>
+              <a:t>What does </a:t>
+            </a:r>
+            <a:r>
+              <a:rPr sz="1700" b="0" i="0" lang="th-TH" altLang="en-US">
+                <a:solidFill>
+                  <a:srgbClr val="24333D"/>
+                </a:solidFill>
+                <a:latin typeface="Sarabun"/>
+                <a:ea typeface="Sarabun"/>
+                <a:cs typeface="Sarabun"/>
+              </a:rPr>
+              <a:t>คือ</a:t>
+            </a:r>
+            <a:r>
+              <a:rPr sz="1700" b="0" i="1" lang="en-US" altLang="en-US">
+                <a:solidFill>
+                  <a:srgbClr val="566873"/>
+                </a:solidFill>
+                <a:latin typeface="Sarabun"/>
+                <a:ea typeface="Sarabun"/>
+                <a:cs typeface="Sarabun"/>
+              </a:rPr>
+              <a:t> (khuue)</a:t>
+            </a:r>
+            <a:r>
+              <a:rPr sz="1700" b="0" i="0" lang="en-US" altLang="en-US">
+                <a:solidFill>
+                  <a:srgbClr val="24333D"/>
+                </a:solidFill>
+                <a:latin typeface="Sarabun"/>
+                <a:ea typeface="Sarabun"/>
+                <a:cs typeface="Sarabun"/>
+              </a:rPr>
+              <a:t> mean? It connects a person to their identity — is.</a:t>
+            </a:r>
+          </a:p>
+        </p:txBody>
+      </p:sp>
+      <p:sp>
+        <p:nvSpPr>
+          <p:cNvPr id="17" name="TextBox 16"/>
+          <p:cNvSpPr txBox="1"/>
+          <p:nvPr/>
+        </p:nvSpPr>
+        <p:spPr>
+          <a:xfrm>
+            <a:off x="932688" y="4727448"/>
+            <a:ext cx="9692640" cy="228600"/>
+          </a:xfrm>
+          <a:prstGeom prst="rect">
+            <a:avLst/>
+          </a:prstGeom>
+          <a:noFill/>
+        </p:spPr>
+        <p:txBody>
+          <a:bodyPr wrap="square" anchor="t">
+            <a:spAutoFit/>
+          </a:bodyPr>
+          <a:lstStyle/>
+          <a:p>
+            <a:pPr algn="l"/>
+            <a:r>
+              <a:rPr sz="1700" b="1" i="0" lang="en-US" altLang="en-US">
+                <a:solidFill>
+                  <a:srgbClr val="7A8F54"/>
+                </a:solidFill>
+                <a:latin typeface="Sarabun"/>
+                <a:ea typeface="Sarabun"/>
+                <a:cs typeface="Sarabun"/>
+              </a:rPr>
+              <a:t>Remember</a:t>
+            </a:r>
+          </a:p>
+        </p:txBody>
+      </p:sp>
+      <p:sp>
+        <p:nvSpPr>
+          <p:cNvPr id="18" name="Oval 17"/>
+          <p:cNvSpPr/>
+          <p:nvPr/>
+        </p:nvSpPr>
+        <p:spPr>
+          <a:xfrm>
+            <a:off x="932688" y="5111496"/>
+            <a:ext cx="82296" cy="82296"/>
+          </a:xfrm>
+          <a:prstGeom prst="ellipse">
+            <a:avLst/>
+          </a:prstGeom>
+          <a:solidFill>
+            <a:srgbClr val="7A8F54"/>
+          </a:solidFill>
+          <a:ln>
+            <a:noFill/>
+          </a:ln>
+        </p:spPr>
+        <p:style>
+          <a:lnRef idx="1">
+            <a:schemeClr val="accent1"/>
+          </a:lnRef>
+          <a:fillRef idx="3">
+            <a:schemeClr val="accent1"/>
+          </a:fillRef>
+          <a:effectRef idx="2">
+            <a:schemeClr val="accent1"/>
+          </a:effectRef>
+          <a:fontRef idx="minor">
+            <a:schemeClr val="lt1"/>
+          </a:fontRef>
+        </p:style>
+        <p:txBody>
+          <a:bodyPr rtlCol="0" anchor="ctr"/>
+          <a:lstStyle/>
+          <a:p>
+            <a:pPr algn="ctr"/>
+          </a:p>
+        </p:txBody>
+      </p:sp>
+      <p:sp>
+        <p:nvSpPr>
+          <p:cNvPr id="19" name="TextBox 18"/>
+          <p:cNvSpPr txBox="1"/>
+          <p:nvPr/>
+        </p:nvSpPr>
+        <p:spPr>
+          <a:xfrm>
+            <a:off x="1078992" y="5020056"/>
+            <a:ext cx="9555480" cy="274320"/>
+          </a:xfrm>
+          <a:prstGeom prst="rect">
+            <a:avLst/>
+          </a:prstGeom>
+          <a:noFill/>
+        </p:spPr>
+        <p:txBody>
+          <a:bodyPr wrap="square" anchor="t">
+            <a:spAutoFit/>
+          </a:bodyPr>
+          <a:lstStyle/>
+          <a:p>
+            <a:pPr algn="l"/>
+            <a:r>
+              <a:rPr sz="1700" b="0" i="0" lang="en-US" altLang="en-US">
+                <a:solidFill>
+                  <a:srgbClr val="24333D"/>
+                </a:solidFill>
+                <a:latin typeface="Sarabun"/>
+                <a:ea typeface="Sarabun"/>
+                <a:cs typeface="Sarabun"/>
+              </a:rPr>
+              <a:t>What does </a:t>
+            </a:r>
+            <a:r>
+              <a:rPr sz="1700" b="0" i="0" lang="th-TH" altLang="en-US">
+                <a:solidFill>
+                  <a:srgbClr val="24333D"/>
+                </a:solidFill>
+                <a:latin typeface="Sarabun"/>
+                <a:ea typeface="Sarabun"/>
+                <a:cs typeface="Sarabun"/>
+              </a:rPr>
+              <a:t>คือ</a:t>
+            </a:r>
+            <a:r>
+              <a:rPr sz="1700" b="0" i="1" lang="en-US" altLang="en-US">
+                <a:solidFill>
+                  <a:srgbClr val="566873"/>
+                </a:solidFill>
+                <a:latin typeface="Sarabun"/>
+                <a:ea typeface="Sarabun"/>
+                <a:cs typeface="Sarabun"/>
+              </a:rPr>
+              <a:t> (khuue)</a:t>
+            </a:r>
+            <a:r>
+              <a:rPr sz="1700" b="0" i="0" lang="en-US" altLang="en-US">
+                <a:solidFill>
+                  <a:srgbClr val="24333D"/>
+                </a:solidFill>
+                <a:latin typeface="Sarabun"/>
+                <a:ea typeface="Sarabun"/>
+                <a:cs typeface="Sarabun"/>
+              </a:rPr>
+              <a:t> mean? It connects a person to their identity — is.</a:t>
             </a:r>
           </a:p>
         </p:txBody>
@@ -7189,6 +10115,14 @@
 <file path=ppt/slides/slide9.xml><?xml version="1.0" encoding="utf-8"?>
 <p:sld xmlns:a="http://schemas.openxmlformats.org/drawingml/2006/main" xmlns:p="http://schemas.openxmlformats.org/presentationml/2006/main" xmlns:r="http://schemas.openxmlformats.org/officeDocument/2006/relationships">
   <p:cSld>
+    <p:bg>
+      <p:bgPr>
+        <a:solidFill>
+          <a:srgbClr val="F5F7F8"/>
+        </a:solidFill>
+        <a:effectLst/>
+      </p:bgPr>
+    </p:bg>
     <p:spTree>
       <p:nvGrpSpPr>
         <p:cNvPr id="1" name=""/>
@@ -7196,40 +10130,116 @@
         <p:nvPr/>
       </p:nvGrpSpPr>
       <p:grpSpPr/>
-      <p:pic>
-        <p:nvPicPr>
-          <p:cNvPr id="2" name="Picture 1" descr="slide-01.png"/>
-          <p:cNvPicPr>
-            <a:picLocks noChangeAspect="1"/>
-          </p:cNvPicPr>
-          <p:nvPr/>
-        </p:nvPicPr>
-        <p:blipFill>
-          <a:blip r:embed="rId2"/>
-          <a:stretch>
-            <a:fillRect/>
-          </a:stretch>
-        </p:blipFill>
+      <p:sp>
+        <p:nvSpPr>
+          <p:cNvPr id="2" name="__pip_placeholder__"/>
+          <p:cNvSpPr/>
+          <p:nvPr/>
+        </p:nvSpPr>
+        <p:spPr>
+          <a:xfrm>
+            <a:off x="8351215" y="0"/>
+            <a:ext cx="3840480" cy="2880360"/>
+          </a:xfrm>
+          <a:prstGeom prst="rect">
+            <a:avLst/>
+          </a:prstGeom>
+          <a:solidFill>
+            <a:srgbClr val="DBE7EC">
+              <a:alpha val="30000"/>
+            </a:srgbClr>
+          </a:solidFill>
+          <a:ln w="19050">
+            <a:solidFill>
+              <a:srgbClr val="355C7D"/>
+            </a:solidFill>
+            <a:prstDash val="sysDash"/>
+          </a:ln>
+        </p:spPr>
+        <p:style>
+          <a:lnRef idx="1">
+            <a:schemeClr val="accent1"/>
+          </a:lnRef>
+          <a:fillRef idx="3">
+            <a:schemeClr val="accent1"/>
+          </a:fillRef>
+          <a:effectRef idx="2">
+            <a:schemeClr val="accent1"/>
+          </a:effectRef>
+          <a:fontRef idx="minor">
+            <a:schemeClr val="lt1"/>
+          </a:fontRef>
+        </p:style>
+        <p:txBody>
+          <a:bodyPr rtlCol="0" anchor="ctr" wrap="none"/>
+          <a:lstStyle/>
+          <a:p>
+            <a:pPr algn="ctr"/>
+            <a:r>
+              <a:rPr sz="1800" b="1">
+                <a:solidFill>
+                  <a:srgbClr val="355C7D"/>
+                </a:solidFill>
+                <a:latin typeface="Sarabun"/>
+              </a:rPr>
+              <a:t>Nine</a:t>
+            </a:r>
+          </a:p>
+        </p:txBody>
+      </p:sp>
+      <p:sp>
+        <p:nvSpPr>
+          <p:cNvPr id="3" name="Rectangle 2"/>
+          <p:cNvSpPr/>
+          <p:nvPr/>
+        </p:nvSpPr>
         <p:spPr>
           <a:xfrm>
             <a:off x="0" y="0"/>
-            <a:ext cx="12191695" cy="6858000"/>
-          </a:xfrm>
-          <a:prstGeom prst="rect">
-            <a:avLst/>
-          </a:prstGeom>
-        </p:spPr>
-      </p:pic>
-      <p:sp>
-        <p:nvSpPr>
-          <p:cNvPr id="3" name="TextBox 2"/>
+            <a:ext cx="12191695" cy="63500"/>
+          </a:xfrm>
+          <a:prstGeom prst="rect">
+            <a:avLst/>
+          </a:prstGeom>
+          <a:solidFill>
+            <a:srgbClr val="355C7D"/>
+          </a:solidFill>
+          <a:ln>
+            <a:noFill/>
+          </a:ln>
+        </p:spPr>
+        <p:style>
+          <a:lnRef idx="1">
+            <a:schemeClr val="accent1"/>
+          </a:lnRef>
+          <a:fillRef idx="3">
+            <a:schemeClr val="accent1"/>
+          </a:fillRef>
+          <a:effectRef idx="2">
+            <a:schemeClr val="accent1"/>
+          </a:effectRef>
+          <a:fontRef idx="minor">
+            <a:schemeClr val="lt1"/>
+          </a:fontRef>
+        </p:style>
+        <p:txBody>
+          <a:bodyPr rtlCol="0" anchor="ctr"/>
+          <a:lstStyle/>
+          <a:p>
+            <a:pPr algn="ctr"/>
+          </a:p>
+        </p:txBody>
+      </p:sp>
+      <p:sp>
+        <p:nvSpPr>
+          <p:cNvPr id="4" name="TextBox 3"/>
           <p:cNvSpPr txBox="1"/>
           <p:nvPr/>
         </p:nvSpPr>
         <p:spPr>
           <a:xfrm>
-            <a:off x="731520" y="1371600"/>
-            <a:ext cx="6858000" cy="365760"/>
+            <a:off x="731520" y="256032"/>
+            <a:ext cx="7071055" cy="256032"/>
           </a:xfrm>
           <a:prstGeom prst="rect">
             <a:avLst/>
@@ -7244,29 +10254,29 @@
           <a:p>
             <a:pPr algn="l"/>
             <a:r>
-              <a:rPr sz="1900" b="0" i="0" lang="en-US" altLang="en-US">
-                <a:solidFill>
-                  <a:srgbClr val="566873"/>
-                </a:solidFill>
-                <a:latin typeface="Sarabun"/>
-                <a:ea typeface="Sarabun"/>
-                <a:cs typeface="Sarabun"/>
-              </a:rPr>
-              <a:t>M01-L003</a:t>
-            </a:r>
-          </a:p>
-        </p:txBody>
-      </p:sp>
-      <p:sp>
-        <p:nvSpPr>
-          <p:cNvPr id="4" name="TextBox 3"/>
+              <a:rPr sz="1200" b="1" i="0" lang="en-US" altLang="en-US">
+                <a:solidFill>
+                  <a:srgbClr val="355C7D"/>
+                </a:solidFill>
+                <a:latin typeface="Sarabun"/>
+                <a:ea typeface="Sarabun"/>
+                <a:cs typeface="Sarabun"/>
+              </a:rPr>
+              <a:t>Closing</a:t>
+            </a:r>
+          </a:p>
+        </p:txBody>
+      </p:sp>
+      <p:sp>
+        <p:nvSpPr>
+          <p:cNvPr id="5" name="TextBox 4"/>
           <p:cNvSpPr txBox="1"/>
           <p:nvPr/>
         </p:nvSpPr>
         <p:spPr>
           <a:xfrm>
-            <a:off x="731520" y="1920240"/>
-            <a:ext cx="6858000" cy="914400"/>
+            <a:off x="731520" y="530352"/>
+            <a:ext cx="7071055" cy="640080"/>
           </a:xfrm>
           <a:prstGeom prst="rect">
             <a:avLst/>
@@ -7281,7 +10291,7 @@
           <a:p>
             <a:pPr algn="l"/>
             <a:r>
-              <a:rPr sz="3800" b="1" i="0" lang="en-US" altLang="en-US">
+              <a:rPr sz="3600" b="1" i="0" lang="en-US" altLang="en-US">
                 <a:solidFill>
                   <a:srgbClr val="24333D"/>
                 </a:solidFill>
@@ -7289,35 +10299,21 @@
                 <a:ea typeface="Sarabun"/>
                 <a:cs typeface="Sarabun"/>
               </a:rPr>
-              <a:t>You can now identify people</a:t>
-            </a:r>
-          </a:p>
-          <a:p>
-            <a:pPr algn="l"/>
-            <a:r>
-              <a:rPr sz="3800" b="1" i="0" lang="en-US" altLang="en-US">
-                <a:solidFill>
-                  <a:srgbClr val="24333D"/>
-                </a:solidFill>
-                <a:latin typeface="Sarabun"/>
-                <a:ea typeface="Sarabun"/>
-                <a:cs typeface="Sarabun"/>
-              </a:rPr>
-              <a:t>and ask who someone is.</a:t>
-            </a:r>
-          </a:p>
-        </p:txBody>
-      </p:sp>
-      <p:sp>
-        <p:nvSpPr>
-          <p:cNvPr id="5" name="TextBox 4"/>
+              <a:t>Closing</a:t>
+            </a:r>
+          </a:p>
+        </p:txBody>
+      </p:sp>
+      <p:sp>
+        <p:nvSpPr>
+          <p:cNvPr id="6" name="TextBox 5"/>
           <p:cNvSpPr txBox="1"/>
           <p:nvPr/>
         </p:nvSpPr>
         <p:spPr>
           <a:xfrm>
-            <a:off x="731520" y="3200400"/>
-            <a:ext cx="6858000" cy="411480"/>
+            <a:off x="932688" y="1746504"/>
+            <a:ext cx="6705295" cy="228600"/>
           </a:xfrm>
           <a:prstGeom prst="rect">
             <a:avLst/>
@@ -7332,29 +10328,72 @@
           <a:p>
             <a:pPr algn="l"/>
             <a:r>
-              <a:rPr sz="1600" b="0" i="0" lang="en-US" altLang="en-US">
-                <a:solidFill>
-                  <a:srgbClr val="24333D"/>
-                </a:solidFill>
-                <a:latin typeface="Sarabun"/>
-                <a:ea typeface="Sarabun"/>
-                <a:cs typeface="Sarabun"/>
-              </a:rPr>
-              <a:t>Use short pronoun, identity, and who-question lines with confidence.</a:t>
-            </a:r>
-          </a:p>
-        </p:txBody>
-      </p:sp>
-      <p:sp>
-        <p:nvSpPr>
-          <p:cNvPr id="6" name="TextBox 5"/>
+              <a:rPr sz="1700" b="1" i="0" lang="en-US" altLang="en-US">
+                <a:solidFill>
+                  <a:srgbClr val="C96F4A"/>
+                </a:solidFill>
+                <a:latin typeface="Sarabun"/>
+                <a:ea typeface="Sarabun"/>
+                <a:cs typeface="Sarabun"/>
+              </a:rPr>
+              <a:t>Next steps</a:t>
+            </a:r>
+          </a:p>
+        </p:txBody>
+      </p:sp>
+      <p:sp>
+        <p:nvSpPr>
+          <p:cNvPr id="7" name="Oval 6"/>
+          <p:cNvSpPr/>
+          <p:nvPr/>
+        </p:nvSpPr>
+        <p:spPr>
+          <a:xfrm>
+            <a:off x="932688" y="2130552"/>
+            <a:ext cx="82296" cy="82296"/>
+          </a:xfrm>
+          <a:prstGeom prst="ellipse">
+            <a:avLst/>
+          </a:prstGeom>
+          <a:solidFill>
+            <a:srgbClr val="C96F4A"/>
+          </a:solidFill>
+          <a:ln>
+            <a:noFill/>
+          </a:ln>
+        </p:spPr>
+        <p:style>
+          <a:lnRef idx="1">
+            <a:schemeClr val="accent1"/>
+          </a:lnRef>
+          <a:fillRef idx="3">
+            <a:schemeClr val="accent1"/>
+          </a:fillRef>
+          <a:effectRef idx="2">
+            <a:schemeClr val="accent1"/>
+          </a:effectRef>
+          <a:fontRef idx="minor">
+            <a:schemeClr val="lt1"/>
+          </a:fontRef>
+        </p:style>
+        <p:txBody>
+          <a:bodyPr rtlCol="0" anchor="ctr"/>
+          <a:lstStyle/>
+          <a:p>
+            <a:pPr algn="ctr"/>
+          </a:p>
+        </p:txBody>
+      </p:sp>
+      <p:sp>
+        <p:nvSpPr>
+          <p:cNvPr id="8" name="TextBox 7"/>
           <p:cNvSpPr txBox="1"/>
           <p:nvPr/>
         </p:nvSpPr>
         <p:spPr>
           <a:xfrm>
-            <a:off x="731520" y="3657600"/>
-            <a:ext cx="6858000" cy="411480"/>
+            <a:off x="1078992" y="2039112"/>
+            <a:ext cx="6568135" cy="475488"/>
           </a:xfrm>
           <a:prstGeom prst="rect">
             <a:avLst/>
@@ -7369,7 +10408,7 @@
           <a:p>
             <a:pPr algn="l"/>
             <a:r>
-              <a:rPr sz="1600" b="0" i="0" lang="en-US" altLang="en-US">
+              <a:rPr sz="1700" b="0" i="0" lang="en-US" altLang="en-US">
                 <a:solidFill>
                   <a:srgbClr val="24333D"/>
                 </a:solidFill>
@@ -7377,21 +10416,64 @@
                 <a:ea typeface="Sarabun"/>
                 <a:cs typeface="Sarabun"/>
               </a:rPr>
-              <a:t>Keep the exchange tidy and easy to repeat.</a:t>
-            </a:r>
-          </a:p>
-        </p:txBody>
-      </p:sp>
-      <p:sp>
-        <p:nvSpPr>
-          <p:cNvPr id="7" name="TextBox 6"/>
+              <a:t>You can now say I, you, he/she, point to someone and say who they are, and ask who someone is.</a:t>
+            </a:r>
+          </a:p>
+        </p:txBody>
+      </p:sp>
+      <p:sp>
+        <p:nvSpPr>
+          <p:cNvPr id="9" name="Oval 8"/>
+          <p:cNvSpPr/>
+          <p:nvPr/>
+        </p:nvSpPr>
+        <p:spPr>
+          <a:xfrm>
+            <a:off x="932688" y="2660904"/>
+            <a:ext cx="82296" cy="82296"/>
+          </a:xfrm>
+          <a:prstGeom prst="ellipse">
+            <a:avLst/>
+          </a:prstGeom>
+          <a:solidFill>
+            <a:srgbClr val="C96F4A"/>
+          </a:solidFill>
+          <a:ln>
+            <a:noFill/>
+          </a:ln>
+        </p:spPr>
+        <p:style>
+          <a:lnRef idx="1">
+            <a:schemeClr val="accent1"/>
+          </a:lnRef>
+          <a:fillRef idx="3">
+            <a:schemeClr val="accent1"/>
+          </a:fillRef>
+          <a:effectRef idx="2">
+            <a:schemeClr val="accent1"/>
+          </a:effectRef>
+          <a:fontRef idx="minor">
+            <a:schemeClr val="lt1"/>
+          </a:fontRef>
+        </p:style>
+        <p:txBody>
+          <a:bodyPr rtlCol="0" anchor="ctr"/>
+          <a:lstStyle/>
+          <a:p>
+            <a:pPr algn="ctr"/>
+          </a:p>
+        </p:txBody>
+      </p:sp>
+      <p:sp>
+        <p:nvSpPr>
+          <p:cNvPr id="10" name="TextBox 9"/>
           <p:cNvSpPr txBox="1"/>
           <p:nvPr/>
         </p:nvSpPr>
         <p:spPr>
           <a:xfrm>
-            <a:off x="731520" y="5303520"/>
-            <a:ext cx="6858000" cy="365760"/>
+            <a:off x="1078992" y="2569464"/>
+            <a:ext cx="6568135" cy="274320"/>
           </a:xfrm>
           <a:prstGeom prst="rect">
             <a:avLst/>
@@ -7406,15 +10488,15 @@
           <a:p>
             <a:pPr algn="l"/>
             <a:r>
-              <a:rPr sz="1500" b="0" i="0" lang="en-US" altLang="en-US">
-                <a:solidFill>
-                  <a:srgbClr val="566873"/>
-                </a:solidFill>
-                <a:latin typeface="Sarabun"/>
-                <a:ea typeface="Sarabun"/>
-                <a:cs typeface="Sarabun"/>
-              </a:rPr>
-              <a:t>Immersion Thai with Nine</a:t>
+              <a:rPr sz="1700" b="0" i="0" lang="en-US" altLang="en-US">
+                <a:solidFill>
+                  <a:srgbClr val="24333D"/>
+                </a:solidFill>
+                <a:latin typeface="Sarabun"/>
+                <a:ea typeface="Sarabun"/>
+                <a:cs typeface="Sarabun"/>
+              </a:rPr>
+              <a:t>Next: First Contact and Courtesy continues.</a:t>
             </a:r>
           </a:p>
         </p:txBody>
@@ -7745,4 +10827,324 @@
   </ns0:objectDefaults>
   <ns0:extraClrSchemeLst/>
 </ns0:theme>
+</file>
+
+<file path=ppt/theme/theme2.xml><?xml version="1.0" encoding="utf-8"?>
+<a:theme xmlns:a="http://schemas.openxmlformats.org/drawingml/2006/main" name="Office Theme">
+  <a:themeElements>
+    <a:clrScheme name="Office">
+      <a:dk1>
+        <a:sysClr val="windowText" lastClr="000000"/>
+      </a:dk1>
+      <a:lt1>
+        <a:sysClr val="window" lastClr="FFFFFF"/>
+      </a:lt1>
+      <a:dk2>
+        <a:srgbClr val="1F497D"/>
+      </a:dk2>
+      <a:lt2>
+        <a:srgbClr val="EEECE1"/>
+      </a:lt2>
+      <a:accent1>
+        <a:srgbClr val="4F81BD"/>
+      </a:accent1>
+      <a:accent2>
+        <a:srgbClr val="C0504D"/>
+      </a:accent2>
+      <a:accent3>
+        <a:srgbClr val="9BBB59"/>
+      </a:accent3>
+      <a:accent4>
+        <a:srgbClr val="8064A2"/>
+      </a:accent4>
+      <a:accent5>
+        <a:srgbClr val="4BACC6"/>
+      </a:accent5>
+      <a:accent6>
+        <a:srgbClr val="F79646"/>
+      </a:accent6>
+      <a:hlink>
+        <a:srgbClr val="0000FF"/>
+      </a:hlink>
+      <a:folHlink>
+        <a:srgbClr val="800080"/>
+      </a:folHlink>
+    </a:clrScheme>
+    <a:fontScheme name="Office">
+      <a:majorFont>
+        <a:latin typeface="Calibri"/>
+        <a:ea typeface=""/>
+        <a:cs typeface=""/>
+        <a:font script="Jpan" typeface="ＭＳ Ｐゴシック"/>
+        <a:font script="Hang" typeface="맑은 고딕"/>
+        <a:font script="Hans" typeface="宋体"/>
+        <a:font script="Hant" typeface="新細明體"/>
+        <a:font script="Arab" typeface="Times New Roman"/>
+        <a:font script="Hebr" typeface="Times New Roman"/>
+        <a:font script="Thai" typeface="Angsana New"/>
+        <a:font script="Ethi" typeface="Nyala"/>
+        <a:font script="Beng" typeface="Vrinda"/>
+        <a:font script="Gujr" typeface="Shruti"/>
+        <a:font script="Khmr" typeface="MoolBoran"/>
+        <a:font script="Knda" typeface="Tunga"/>
+        <a:font script="Guru" typeface="Raavi"/>
+        <a:font script="Cans" typeface="Euphemia"/>
+        <a:font script="Cher" typeface="Plantagenet Cherokee"/>
+        <a:font script="Yiii" typeface="Microsoft Yi Baiti"/>
+        <a:font script="Tibt" typeface="Microsoft Himalaya"/>
+        <a:font script="Thaa" typeface="MV Boli"/>
+        <a:font script="Deva" typeface="Mangal"/>
+        <a:font script="Telu" typeface="Gautami"/>
+        <a:font script="Taml" typeface="Latha"/>
+        <a:font script="Syrc" typeface="Estrangelo Edessa"/>
+        <a:font script="Orya" typeface="Kalinga"/>
+        <a:font script="Mlym" typeface="Kartika"/>
+        <a:font script="Laoo" typeface="DokChampa"/>
+        <a:font script="Sinh" typeface="Iskoola Pota"/>
+        <a:font script="Mong" typeface="Mongolian Baiti"/>
+        <a:font script="Viet" typeface="Times New Roman"/>
+        <a:font script="Uigh" typeface="Microsoft Uighur"/>
+        <a:font script="Geor" typeface="Sylfaen"/>
+      </a:majorFont>
+      <a:minorFont>
+        <a:latin typeface="Calibri"/>
+        <a:ea typeface=""/>
+        <a:cs typeface=""/>
+        <a:font script="Jpan" typeface="ＭＳ Ｐゴシック"/>
+        <a:font script="Hang" typeface="맑은 고딕"/>
+        <a:font script="Hans" typeface="宋体"/>
+        <a:font script="Hant" typeface="新細明體"/>
+        <a:font script="Arab" typeface="Arial"/>
+        <a:font script="Hebr" typeface="Arial"/>
+        <a:font script="Thai" typeface="Cordia New"/>
+        <a:font script="Ethi" typeface="Nyala"/>
+        <a:font script="Beng" typeface="Vrinda"/>
+        <a:font script="Gujr" typeface="Shruti"/>
+        <a:font script="Khmr" typeface="DaunPenh"/>
+        <a:font script="Knda" typeface="Tunga"/>
+        <a:font script="Guru" typeface="Raavi"/>
+        <a:font script="Cans" typeface="Euphemia"/>
+        <a:font script="Cher" typeface="Plantagenet Cherokee"/>
+        <a:font script="Yiii" typeface="Microsoft Yi Baiti"/>
+        <a:font script="Tibt" typeface="Microsoft Himalaya"/>
+        <a:font script="Thaa" typeface="MV Boli"/>
+        <a:font script="Deva" typeface="Mangal"/>
+        <a:font script="Telu" typeface="Gautami"/>
+        <a:font script="Taml" typeface="Latha"/>
+        <a:font script="Syrc" typeface="Estrangelo Edessa"/>
+        <a:font script="Orya" typeface="Kalinga"/>
+        <a:font script="Mlym" typeface="Kartika"/>
+        <a:font script="Laoo" typeface="DokChampa"/>
+        <a:font script="Sinh" typeface="Iskoola Pota"/>
+        <a:font script="Mong" typeface="Mongolian Baiti"/>
+        <a:font script="Viet" typeface="Arial"/>
+        <a:font script="Uigh" typeface="Microsoft Uighur"/>
+        <a:font script="Geor" typeface="Sylfaen"/>
+      </a:minorFont>
+    </a:fontScheme>
+    <a:fmtScheme name="Office">
+      <a:fillStyleLst>
+        <a:solidFill>
+          <a:schemeClr val="phClr"/>
+        </a:solidFill>
+        <a:gradFill rotWithShape="1">
+          <a:gsLst>
+            <a:gs pos="0">
+              <a:schemeClr val="phClr">
+                <a:tint val="50000"/>
+                <a:satMod val="300000"/>
+              </a:schemeClr>
+            </a:gs>
+            <a:gs pos="35000">
+              <a:schemeClr val="phClr">
+                <a:tint val="37000"/>
+                <a:satMod val="300000"/>
+              </a:schemeClr>
+            </a:gs>
+            <a:gs pos="100000">
+              <a:schemeClr val="phClr">
+                <a:tint val="15000"/>
+                <a:satMod val="350000"/>
+              </a:schemeClr>
+            </a:gs>
+          </a:gsLst>
+          <a:lin ang="16200000" scaled="1"/>
+        </a:gradFill>
+        <a:gradFill rotWithShape="1">
+          <a:gsLst>
+            <a:gs pos="0">
+              <a:schemeClr val="phClr">
+                <a:tint val="100000"/>
+                <a:shade val="100000"/>
+                <a:satMod val="130000"/>
+              </a:schemeClr>
+            </a:gs>
+            <a:gs pos="100000">
+              <a:schemeClr val="phClr">
+                <a:tint val="50000"/>
+                <a:shade val="100000"/>
+                <a:satMod val="350000"/>
+              </a:schemeClr>
+            </a:gs>
+          </a:gsLst>
+          <a:lin ang="16200000" scaled="0"/>
+        </a:gradFill>
+      </a:fillStyleLst>
+      <a:lnStyleLst>
+        <a:ln w="9525" cap="flat" cmpd="sng" algn="ctr">
+          <a:solidFill>
+            <a:schemeClr val="phClr">
+              <a:shade val="95000"/>
+              <a:satMod val="105000"/>
+            </a:schemeClr>
+          </a:solidFill>
+          <a:prstDash val="solid"/>
+        </a:ln>
+        <a:ln w="25400" cap="flat" cmpd="sng" algn="ctr">
+          <a:solidFill>
+            <a:schemeClr val="phClr"/>
+          </a:solidFill>
+          <a:prstDash val="solid"/>
+        </a:ln>
+        <a:ln w="38100" cap="flat" cmpd="sng" algn="ctr">
+          <a:solidFill>
+            <a:schemeClr val="phClr"/>
+          </a:solidFill>
+          <a:prstDash val="solid"/>
+        </a:ln>
+      </a:lnStyleLst>
+      <a:effectStyleLst>
+        <a:effectStyle>
+          <a:effectLst>
+            <a:outerShdw blurRad="40000" dist="20000" dir="5400000" rotWithShape="0">
+              <a:srgbClr val="000000">
+                <a:alpha val="38000"/>
+              </a:srgbClr>
+            </a:outerShdw>
+          </a:effectLst>
+        </a:effectStyle>
+        <a:effectStyle>
+          <a:effectLst>
+            <a:outerShdw blurRad="40000" dist="23000" dir="5400000" rotWithShape="0">
+              <a:srgbClr val="000000">
+                <a:alpha val="35000"/>
+              </a:srgbClr>
+            </a:outerShdw>
+          </a:effectLst>
+        </a:effectStyle>
+        <a:effectStyle>
+          <a:effectLst>
+            <a:outerShdw blurRad="40000" dist="23000" dir="5400000" rotWithShape="0">
+              <a:srgbClr val="000000">
+                <a:alpha val="35000"/>
+              </a:srgbClr>
+            </a:outerShdw>
+          </a:effectLst>
+          <a:scene3d>
+            <a:camera prst="orthographicFront">
+              <a:rot lat="0" lon="0" rev="0"/>
+            </a:camera>
+            <a:lightRig rig="threePt" dir="t">
+              <a:rot lat="0" lon="0" rev="1200000"/>
+            </a:lightRig>
+          </a:scene3d>
+          <a:sp3d>
+            <a:bevelT w="63500" h="25400"/>
+          </a:sp3d>
+        </a:effectStyle>
+      </a:effectStyleLst>
+      <a:bgFillStyleLst>
+        <a:solidFill>
+          <a:schemeClr val="phClr"/>
+        </a:solidFill>
+        <a:gradFill rotWithShape="1">
+          <a:gsLst>
+            <a:gs pos="0">
+              <a:schemeClr val="phClr">
+                <a:tint val="40000"/>
+                <a:satMod val="350000"/>
+              </a:schemeClr>
+            </a:gs>
+            <a:gs pos="40000">
+              <a:schemeClr val="phClr">
+                <a:tint val="45000"/>
+                <a:shade val="99000"/>
+                <a:satMod val="350000"/>
+              </a:schemeClr>
+            </a:gs>
+            <a:gs pos="100000">
+              <a:schemeClr val="phClr">
+                <a:shade val="20000"/>
+                <a:satMod val="255000"/>
+              </a:schemeClr>
+            </a:gs>
+          </a:gsLst>
+          <a:path path="circle">
+            <a:fillToRect l="50000" t="-80000" r="50000" b="180000"/>
+          </a:path>
+        </a:gradFill>
+        <a:gradFill rotWithShape="1">
+          <a:gsLst>
+            <a:gs pos="0">
+              <a:schemeClr val="phClr">
+                <a:tint val="80000"/>
+                <a:satMod val="300000"/>
+              </a:schemeClr>
+            </a:gs>
+            <a:gs pos="100000">
+              <a:schemeClr val="phClr">
+                <a:shade val="30000"/>
+                <a:satMod val="200000"/>
+              </a:schemeClr>
+            </a:gs>
+          </a:gsLst>
+          <a:path path="circle">
+            <a:fillToRect l="50000" t="50000" r="50000" b="50000"/>
+          </a:path>
+        </a:gradFill>
+      </a:bgFillStyleLst>
+    </a:fmtScheme>
+  </a:themeElements>
+  <a:objectDefaults>
+    <a:spDef>
+      <a:spPr/>
+      <a:bodyPr/>
+      <a:lstStyle/>
+      <a:style>
+        <a:lnRef idx="1">
+          <a:schemeClr val="accent1"/>
+        </a:lnRef>
+        <a:fillRef idx="3">
+          <a:schemeClr val="accent1"/>
+        </a:fillRef>
+        <a:effectRef idx="2">
+          <a:schemeClr val="accent1"/>
+        </a:effectRef>
+        <a:fontRef idx="minor">
+          <a:schemeClr val="lt1"/>
+        </a:fontRef>
+      </a:style>
+    </a:spDef>
+    <a:lnDef>
+      <a:spPr/>
+      <a:bodyPr/>
+      <a:lstStyle/>
+      <a:style>
+        <a:lnRef idx="2">
+          <a:schemeClr val="accent1"/>
+        </a:lnRef>
+        <a:fillRef idx="0">
+          <a:schemeClr val="accent1"/>
+        </a:fillRef>
+        <a:effectRef idx="1">
+          <a:schemeClr val="accent1"/>
+        </a:effectRef>
+        <a:fontRef idx="minor">
+          <a:schemeClr val="tx1"/>
+        </a:fontRef>
+      </a:style>
+    </a:lnDef>
+  </a:objectDefaults>
+  <a:extraClrSchemeLst/>
+</a:theme>
 </file>
--- a/course/modules/M01/L003/M01-L003-canva-deck.pptx
+++ b/course/modules/M01/L003/M01-L003-canva-deck.pptx
@@ -14,6 +14,7 @@
     <p:sldId id="262" r:id="rId14"/>
     <p:sldId id="263" r:id="rId15"/>
     <p:sldId id="264" r:id="rId16"/>
+    <p:sldId id="265" r:id="rId17"/>
   </p:sldIdLst>
   <p:sldSz cx="12191695" cy="6858000" type="screen4x3"/>
   <p:notesSz cx="6858000" cy="9144000"/>
@@ -517,17 +518,17 @@
           </a:p>
           <a:p>
             <a:r>
-              <a:t>• Listen and repeat: ฉัน (chǎn), ผม (phǒm), คุณ (khun). Say each one twice.</a:t>
-            </a:r>
-          </a:p>
-          <a:p>
-            <a:r>
-              <a:t>• Pause-and-produce: I say a situation — male speaker or female speaker. You say the right word for I before I show the answer.</a:t>
-            </a:r>
-          </a:p>
-          <a:p>
-            <a:r>
-              <a:t>• Response-building: I say คุณชื่ออะไร (khun chûue à-rai). You answer with ฉันชื่อ... or ผมชื่อ... and your name.</a:t>
+              <a:t>• Listen and repeat: ฉัน chǎn. Again. ผม phǒm. Again.</a:t>
+            </a:r>
+          </a:p>
+          <a:p>
+            <a:r>
+              <a:t>• Choose the right 'I': I describe a speaker. Say ฉัน or ผม before I show the answer. Male teacher introducing himself? Your turn. Female student talking about herself? Your turn.</a:t>
+            </a:r>
+          </a:p>
+          <a:p>
+            <a:r>
+              <a:t>• Substitution drill: say 'my name is...' using ผม first — ผมชื่อ... Now switch to ฉัน — ฉันชื่อ...</a:t>
             </a:r>
           </a:p>
           <a:p/>
@@ -605,17 +606,17 @@
           </a:p>
           <a:p>
             <a:r>
-              <a:t>• Listen and repeat: เขา (khǎo), นี่ (nîi), คือ (khuue). Now together: นี่คือ... (nîi khuue...).</a:t>
-            </a:r>
-          </a:p>
-          <a:p>
-            <a:r>
-              <a:t>• Substitution drill: I give a name. You say นี่คือ... with that name. Example: Mike → นี่คือไมค์.</a:t>
-            </a:r>
-          </a:p>
-          <a:p>
-            <a:r>
-              <a:t>• Pause-and-produce: I point to someone and say เขาชื่ออะไร (khǎo chûue à-rai). You answer เขาชื่อ... with a name.</a:t>
+              <a:t>• Listen and repeat: คุณ khun. เขา khǎo. Again faster.</a:t>
+            </a:r>
+          </a:p>
+          <a:p>
+            <a:r>
+              <a:t>• Response-building: I point to someone and ask คุณชื่ออะไร. Pause and answer with ฉันชื่อ... or ผมชื่อ... using your real name.</a:t>
+            </a:r>
+          </a:p>
+          <a:p>
+            <a:r>
+              <a:t>• Substitution drill: say 'his/her name is...' — เขาชื่อ... Try it with three different names.</a:t>
             </a:r>
           </a:p>
           <a:p/>
@@ -693,17 +694,17 @@
           </a:p>
           <a:p>
             <a:r>
-              <a:t>• Listen and repeat: ใคร (khrai). Now the full question: เขาคือใคร (khǎo khuue khrai).</a:t>
-            </a:r>
-          </a:p>
-          <a:p>
-            <a:r>
-              <a:t>• Response-building: I ask เขาคือใคร. You answer เขาคือ... with any name you choose.</a:t>
-            </a:r>
-          </a:p>
-          <a:p>
-            <a:r>
-              <a:t>• Pause-and-produce: I say a name. You build the confirmation: คุณคือ[name]ใช่ไหม before I show it.</a:t>
+              <a:t>• Listen and repeat: นี่ nîi. คือ khuu. นี่คือ nîi khuu.</a:t>
+            </a:r>
+          </a:p>
+          <a:p>
+            <a:r>
+              <a:t>• Substitution drill: I give you a word, you build the introduction. เพื่อน — say นี่คือเพื่อน. คนไทย — say นี่คือคนไทย. คุณนิ — say นี่คือคุณนิ.</a:t>
+            </a:r>
+          </a:p>
+          <a:p>
+            <a:r>
+              <a:t>• Pause-and-produce: I point to someone. Say 'this is...' in Thai before I show the answer. Your turn.</a:t>
             </a:r>
           </a:p>
           <a:p/>
@@ -781,17 +782,100 @@
           </a:p>
           <a:p>
             <a:r>
-              <a:t>• Role swap: I play the friend. You ask เขาคือใคร and I answer. Then you confirm with ใช่ไหม.</a:t>
-            </a:r>
-          </a:p>
-          <a:p>
-            <a:r>
-              <a:t>• Substitution drill: I change the name and country. You rebuild the full exchange each time.</a:t>
-            </a:r>
-          </a:p>
-          <a:p>
-            <a:r>
-              <a:t>• Production challenge: introduce yourself using ฉัน or ผม, then ask who the person next to you is.</a:t>
+              <a:t>• Listen and repeat: ใคร khrai. เขาคือใคร khǎo khuu khrai. คุณคือ...ใช่ไหม khun khuu... châi mái.</a:t>
+            </a:r>
+          </a:p>
+          <a:p>
+            <a:r>
+              <a:t>• Response-building: I point to a person. Ask เขาคือใคร. I answer. Then confirm with คุณคือ...ใช่ไหม. Build the full exchange.</a:t>
+            </a:r>
+          </a:p>
+          <a:p>
+            <a:r>
+              <a:t>• Substitution drill: ask 'who is he/she?' — เขาคือใคร. Now confirm identity: คุณคือคุณนิใช่ไหม. Try with another name: คุณคือคุณมาร์คใช่ไหม.</a:t>
+            </a:r>
+          </a:p>
+          <a:p/>
+        </p:txBody>
+      </p:sp>
+      <p:sp>
+        <p:nvSpPr>
+          <p:cNvPr id="4" name="Slide Number Placeholder 3"/>
+          <p:cNvSpPr>
+            <a:spLocks noGrp="1"/>
+          </p:cNvSpPr>
+          <p:nvPr>
+            <p:ph type="sldNum" idx="5" sz="quarter"/>
+          </p:nvPr>
+        </p:nvSpPr>
+        <p:spPr/>
+      </p:sp>
+    </p:spTree>
+  </p:cSld>
+  <p:clrMapOvr>
+    <a:masterClrMapping/>
+  </p:clrMapOvr>
+</p:notes>
+</file>
+
+<file path=ppt/notesSlides/notesSlide5.xml><?xml version="1.0" encoding="utf-8"?>
+<p:notes xmlns:a="http://schemas.openxmlformats.org/drawingml/2006/main" xmlns:p="http://schemas.openxmlformats.org/presentationml/2006/main" xmlns:r="http://schemas.openxmlformats.org/officeDocument/2006/relationships">
+  <p:cSld>
+    <p:spTree>
+      <p:nvGrpSpPr>
+        <p:cNvPr id="1" name=""/>
+        <p:cNvGrpSpPr/>
+        <p:nvPr/>
+      </p:nvGrpSpPr>
+      <p:grpSpPr>
+        <a:xfrm>
+          <a:off x="0" y="0"/>
+          <a:ext cx="0" cy="0"/>
+          <a:chOff x="0" y="0"/>
+          <a:chExt cx="0" cy="0"/>
+        </a:xfrm>
+      </p:grpSpPr>
+      <p:sp>
+        <p:nvSpPr>
+          <p:cNvPr id="2" name="Slide Image Placeholder 1"/>
+          <p:cNvSpPr>
+            <a:spLocks noGrp="1"/>
+          </p:cNvSpPr>
+          <p:nvPr>
+            <p:ph type="sldImg" idx="2"/>
+          </p:nvPr>
+        </p:nvSpPr>
+        <p:spPr/>
+      </p:sp>
+      <p:sp>
+        <p:nvSpPr>
+          <p:cNvPr id="3" name="Notes Placeholder 2"/>
+          <p:cNvSpPr>
+            <a:spLocks noGrp="1"/>
+          </p:cNvSpPr>
+          <p:nvPr>
+            <p:ph type="body" idx="3" sz="quarter"/>
+          </p:nvPr>
+        </p:nvSpPr>
+        <p:spPr/>
+        <p:txBody>
+          <a:bodyPr/>
+          <a:lstStyle/>
+          <a:p/>
+          <a:p/>
+          <a:p>
+            <a:r>
+              <a:t>[Practice — moved to notes, no room on slide]</a:t>
+            </a:r>
+          </a:p>
+          <a:p>
+            <a:r>
+              <a:t>• Tone echo: I say ฉัน chǎn. Repeat it. Now ผม phǒm. Repeat. Now เขา khǎo. Repeat. Feel the rise.</a:t>
+            </a:r>
+          </a:p>
+          <a:p>
+            <a:r>
+              <a:t>• Minimal pair choice: I say two words — khun and khǎo. Which one is 'you' and which is 'he/she'? Point to the answer.</a:t>
             </a:r>
           </a:p>
           <a:p/>
@@ -4259,6 +4343,403 @@
 </p:sld>
 </file>
 
+<file path=ppt/slides/slide10.xml><?xml version="1.0" encoding="utf-8"?>
+<p:sld xmlns:a="http://schemas.openxmlformats.org/drawingml/2006/main" xmlns:p="http://schemas.openxmlformats.org/presentationml/2006/main" xmlns:r="http://schemas.openxmlformats.org/officeDocument/2006/relationships">
+  <p:cSld>
+    <p:bg>
+      <p:bgPr>
+        <a:solidFill>
+          <a:srgbClr val="F5F7F8"/>
+        </a:solidFill>
+        <a:effectLst/>
+      </p:bgPr>
+    </p:bg>
+    <p:spTree>
+      <p:nvGrpSpPr>
+        <p:cNvPr id="1" name=""/>
+        <p:cNvGrpSpPr/>
+        <p:nvPr/>
+      </p:nvGrpSpPr>
+      <p:grpSpPr/>
+      <p:sp>
+        <p:nvSpPr>
+          <p:cNvPr id="2" name="__pip_placeholder__"/>
+          <p:cNvSpPr/>
+          <p:nvPr/>
+        </p:nvSpPr>
+        <p:spPr>
+          <a:xfrm>
+            <a:off x="8351215" y="0"/>
+            <a:ext cx="3840480" cy="2880360"/>
+          </a:xfrm>
+          <a:prstGeom prst="rect">
+            <a:avLst/>
+          </a:prstGeom>
+          <a:solidFill>
+            <a:srgbClr val="DBE7EC">
+              <a:alpha val="30000"/>
+            </a:srgbClr>
+          </a:solidFill>
+          <a:ln w="19050">
+            <a:solidFill>
+              <a:srgbClr val="355C7D"/>
+            </a:solidFill>
+            <a:prstDash val="sysDash"/>
+          </a:ln>
+        </p:spPr>
+        <p:style>
+          <a:lnRef idx="1">
+            <a:schemeClr val="accent1"/>
+          </a:lnRef>
+          <a:fillRef idx="3">
+            <a:schemeClr val="accent1"/>
+          </a:fillRef>
+          <a:effectRef idx="2">
+            <a:schemeClr val="accent1"/>
+          </a:effectRef>
+          <a:fontRef idx="minor">
+            <a:schemeClr val="lt1"/>
+          </a:fontRef>
+        </p:style>
+        <p:txBody>
+          <a:bodyPr rtlCol="0" anchor="ctr" wrap="none"/>
+          <a:lstStyle/>
+          <a:p>
+            <a:pPr algn="ctr"/>
+            <a:r>
+              <a:rPr sz="1800" b="1">
+                <a:solidFill>
+                  <a:srgbClr val="355C7D"/>
+                </a:solidFill>
+                <a:latin typeface="Sarabun"/>
+              </a:rPr>
+              <a:t>Nine</a:t>
+            </a:r>
+          </a:p>
+        </p:txBody>
+      </p:sp>
+      <p:sp>
+        <p:nvSpPr>
+          <p:cNvPr id="3" name="Rectangle 2"/>
+          <p:cNvSpPr/>
+          <p:nvPr/>
+        </p:nvSpPr>
+        <p:spPr>
+          <a:xfrm>
+            <a:off x="0" y="0"/>
+            <a:ext cx="12191695" cy="63500"/>
+          </a:xfrm>
+          <a:prstGeom prst="rect">
+            <a:avLst/>
+          </a:prstGeom>
+          <a:solidFill>
+            <a:srgbClr val="355C7D"/>
+          </a:solidFill>
+          <a:ln>
+            <a:noFill/>
+          </a:ln>
+        </p:spPr>
+        <p:style>
+          <a:lnRef idx="1">
+            <a:schemeClr val="accent1"/>
+          </a:lnRef>
+          <a:fillRef idx="3">
+            <a:schemeClr val="accent1"/>
+          </a:fillRef>
+          <a:effectRef idx="2">
+            <a:schemeClr val="accent1"/>
+          </a:effectRef>
+          <a:fontRef idx="minor">
+            <a:schemeClr val="lt1"/>
+          </a:fontRef>
+        </p:style>
+        <p:txBody>
+          <a:bodyPr rtlCol="0" anchor="ctr"/>
+          <a:lstStyle/>
+          <a:p>
+            <a:pPr algn="ctr"/>
+          </a:p>
+        </p:txBody>
+      </p:sp>
+      <p:sp>
+        <p:nvSpPr>
+          <p:cNvPr id="4" name="TextBox 3"/>
+          <p:cNvSpPr txBox="1"/>
+          <p:nvPr/>
+        </p:nvSpPr>
+        <p:spPr>
+          <a:xfrm>
+            <a:off x="731520" y="256032"/>
+            <a:ext cx="7071055" cy="256032"/>
+          </a:xfrm>
+          <a:prstGeom prst="rect">
+            <a:avLst/>
+          </a:prstGeom>
+          <a:noFill/>
+        </p:spPr>
+        <p:txBody>
+          <a:bodyPr wrap="square" anchor="t">
+            <a:spAutoFit/>
+          </a:bodyPr>
+          <a:lstStyle/>
+          <a:p>
+            <a:pPr algn="l"/>
+            <a:r>
+              <a:rPr sz="1200" b="1" i="0" lang="en-US" altLang="en-US">
+                <a:solidFill>
+                  <a:srgbClr val="355C7D"/>
+                </a:solidFill>
+                <a:latin typeface="Sarabun"/>
+                <a:ea typeface="Sarabun"/>
+                <a:cs typeface="Sarabun"/>
+              </a:rPr>
+              <a:t>Closing</a:t>
+            </a:r>
+          </a:p>
+        </p:txBody>
+      </p:sp>
+      <p:sp>
+        <p:nvSpPr>
+          <p:cNvPr id="5" name="TextBox 4"/>
+          <p:cNvSpPr txBox="1"/>
+          <p:nvPr/>
+        </p:nvSpPr>
+        <p:spPr>
+          <a:xfrm>
+            <a:off x="731520" y="530352"/>
+            <a:ext cx="7071055" cy="640080"/>
+          </a:xfrm>
+          <a:prstGeom prst="rect">
+            <a:avLst/>
+          </a:prstGeom>
+          <a:noFill/>
+        </p:spPr>
+        <p:txBody>
+          <a:bodyPr wrap="square" anchor="t">
+            <a:spAutoFit/>
+          </a:bodyPr>
+          <a:lstStyle/>
+          <a:p>
+            <a:pPr algn="l"/>
+            <a:r>
+              <a:rPr sz="3600" b="1" i="0" lang="en-US" altLang="en-US">
+                <a:solidFill>
+                  <a:srgbClr val="24333D"/>
+                </a:solidFill>
+                <a:latin typeface="Sarabun"/>
+                <a:ea typeface="Sarabun"/>
+                <a:cs typeface="Sarabun"/>
+              </a:rPr>
+              <a:t>Closing</a:t>
+            </a:r>
+          </a:p>
+        </p:txBody>
+      </p:sp>
+      <p:sp>
+        <p:nvSpPr>
+          <p:cNvPr id="6" name="TextBox 5"/>
+          <p:cNvSpPr txBox="1"/>
+          <p:nvPr/>
+        </p:nvSpPr>
+        <p:spPr>
+          <a:xfrm>
+            <a:off x="932688" y="1746504"/>
+            <a:ext cx="6705295" cy="228600"/>
+          </a:xfrm>
+          <a:prstGeom prst="rect">
+            <a:avLst/>
+          </a:prstGeom>
+          <a:noFill/>
+        </p:spPr>
+        <p:txBody>
+          <a:bodyPr wrap="square" anchor="t">
+            <a:spAutoFit/>
+          </a:bodyPr>
+          <a:lstStyle/>
+          <a:p>
+            <a:pPr algn="l"/>
+            <a:r>
+              <a:rPr sz="1700" b="1" i="0" lang="en-US" altLang="en-US">
+                <a:solidFill>
+                  <a:srgbClr val="C96F4A"/>
+                </a:solidFill>
+                <a:latin typeface="Sarabun"/>
+                <a:ea typeface="Sarabun"/>
+                <a:cs typeface="Sarabun"/>
+              </a:rPr>
+              <a:t>Next steps</a:t>
+            </a:r>
+          </a:p>
+        </p:txBody>
+      </p:sp>
+      <p:sp>
+        <p:nvSpPr>
+          <p:cNvPr id="7" name="Oval 6"/>
+          <p:cNvSpPr/>
+          <p:nvPr/>
+        </p:nvSpPr>
+        <p:spPr>
+          <a:xfrm>
+            <a:off x="932688" y="2130552"/>
+            <a:ext cx="82296" cy="82296"/>
+          </a:xfrm>
+          <a:prstGeom prst="ellipse">
+            <a:avLst/>
+          </a:prstGeom>
+          <a:solidFill>
+            <a:srgbClr val="C96F4A"/>
+          </a:solidFill>
+          <a:ln>
+            <a:noFill/>
+          </a:ln>
+        </p:spPr>
+        <p:style>
+          <a:lnRef idx="1">
+            <a:schemeClr val="accent1"/>
+          </a:lnRef>
+          <a:fillRef idx="3">
+            <a:schemeClr val="accent1"/>
+          </a:fillRef>
+          <a:effectRef idx="2">
+            <a:schemeClr val="accent1"/>
+          </a:effectRef>
+          <a:fontRef idx="minor">
+            <a:schemeClr val="lt1"/>
+          </a:fontRef>
+        </p:style>
+        <p:txBody>
+          <a:bodyPr rtlCol="0" anchor="ctr"/>
+          <a:lstStyle/>
+          <a:p>
+            <a:pPr algn="ctr"/>
+          </a:p>
+        </p:txBody>
+      </p:sp>
+      <p:sp>
+        <p:nvSpPr>
+          <p:cNvPr id="8" name="TextBox 7"/>
+          <p:cNvSpPr txBox="1"/>
+          <p:nvPr/>
+        </p:nvSpPr>
+        <p:spPr>
+          <a:xfrm>
+            <a:off x="1078992" y="2039112"/>
+            <a:ext cx="6568135" cy="676656"/>
+          </a:xfrm>
+          <a:prstGeom prst="rect">
+            <a:avLst/>
+          </a:prstGeom>
+          <a:noFill/>
+        </p:spPr>
+        <p:txBody>
+          <a:bodyPr wrap="square" anchor="t">
+            <a:spAutoFit/>
+          </a:bodyPr>
+          <a:lstStyle/>
+          <a:p>
+            <a:pPr algn="l"/>
+            <a:r>
+              <a:rPr sz="1700" b="0" i="0" lang="en-US" altLang="en-US">
+                <a:solidFill>
+                  <a:srgbClr val="24333D"/>
+                </a:solidFill>
+                <a:latin typeface="Sarabun"/>
+                <a:ea typeface="Sarabun"/>
+                <a:cs typeface="Sarabun"/>
+              </a:rPr>
+              <a:t>By the end, you can say I, you, he/she, introduce someone with 'this is...', and ask 'who is that?' in Thai.</a:t>
+            </a:r>
+          </a:p>
+        </p:txBody>
+      </p:sp>
+      <p:sp>
+        <p:nvSpPr>
+          <p:cNvPr id="9" name="Oval 8"/>
+          <p:cNvSpPr/>
+          <p:nvPr/>
+        </p:nvSpPr>
+        <p:spPr>
+          <a:xfrm>
+            <a:off x="932688" y="2862072"/>
+            <a:ext cx="82296" cy="82296"/>
+          </a:xfrm>
+          <a:prstGeom prst="ellipse">
+            <a:avLst/>
+          </a:prstGeom>
+          <a:solidFill>
+            <a:srgbClr val="C96F4A"/>
+          </a:solidFill>
+          <a:ln>
+            <a:noFill/>
+          </a:ln>
+        </p:spPr>
+        <p:style>
+          <a:lnRef idx="1">
+            <a:schemeClr val="accent1"/>
+          </a:lnRef>
+          <a:fillRef idx="3">
+            <a:schemeClr val="accent1"/>
+          </a:fillRef>
+          <a:effectRef idx="2">
+            <a:schemeClr val="accent1"/>
+          </a:effectRef>
+          <a:fontRef idx="minor">
+            <a:schemeClr val="lt1"/>
+          </a:fontRef>
+        </p:style>
+        <p:txBody>
+          <a:bodyPr rtlCol="0" anchor="ctr"/>
+          <a:lstStyle/>
+          <a:p>
+            <a:pPr algn="ctr"/>
+          </a:p>
+        </p:txBody>
+      </p:sp>
+      <p:sp>
+        <p:nvSpPr>
+          <p:cNvPr id="10" name="TextBox 9"/>
+          <p:cNvSpPr txBox="1"/>
+          <p:nvPr/>
+        </p:nvSpPr>
+        <p:spPr>
+          <a:xfrm>
+            <a:off x="1078992" y="2770632"/>
+            <a:ext cx="6568135" cy="274320"/>
+          </a:xfrm>
+          <a:prstGeom prst="rect">
+            <a:avLst/>
+          </a:prstGeom>
+          <a:noFill/>
+        </p:spPr>
+        <p:txBody>
+          <a:bodyPr wrap="square" anchor="t">
+            <a:spAutoFit/>
+          </a:bodyPr>
+          <a:lstStyle/>
+          <a:p>
+            <a:pPr algn="l"/>
+            <a:r>
+              <a:rPr sz="1700" b="0" i="0" lang="en-US" altLang="en-US">
+                <a:solidFill>
+                  <a:srgbClr val="24333D"/>
+                </a:solidFill>
+                <a:latin typeface="Sarabun"/>
+                <a:ea typeface="Sarabun"/>
+                <a:cs typeface="Sarabun"/>
+              </a:rPr>
+              <a:t>Next: First Contact and Courtesy continues.</a:t>
+            </a:r>
+          </a:p>
+        </p:txBody>
+      </p:sp>
+    </p:spTree>
+  </p:cSld>
+  <p:clrMapOvr>
+    <a:masterClrMapping/>
+  </p:clrMapOvr>
+</p:sld>
+</file>
+
 <file path=ppt/slides/slide2.xml><?xml version="1.0" encoding="utf-8"?>
 <p:sld xmlns:a="http://schemas.openxmlformats.org/drawingml/2006/main" xmlns:p="http://schemas.openxmlformats.org/presentationml/2006/main" xmlns:r="http://schemas.openxmlformats.org/officeDocument/2006/relationships">
   <p:cSld>
@@ -5139,7 +5620,7 @@
                 <a:ea typeface="Sarabun"/>
                 <a:cs typeface="Sarabun"/>
               </a:rPr>
-              <a:t>I and you — the first pronouns</a:t>
+              <a:t>Two ways to say I</a:t>
             </a:r>
           </a:p>
         </p:txBody>
@@ -5334,7 +5815,7 @@
                 <a:ea typeface="Sarabun"/>
                 <a:cs typeface="Sarabun"/>
               </a:rPr>
-              <a:t>I (general)</a:t>
+              <a:t>I (female / neutral)</a:t>
             </a:r>
           </a:p>
         </p:txBody>
@@ -5347,7 +5828,7 @@
         </p:nvSpPr>
         <p:spPr>
           <a:xfrm>
-            <a:off x="731520" y="3081528"/>
+            <a:off x="731520" y="2606040"/>
             <a:ext cx="7071055" cy="1572768"/>
           </a:xfrm>
           <a:prstGeom prst="roundRect">
@@ -5388,7 +5869,7 @@
         </p:nvSpPr>
         <p:spPr>
           <a:xfrm>
-            <a:off x="868680" y="3282696"/>
+            <a:off x="868680" y="2807208"/>
             <a:ext cx="73152" cy="1143000"/>
           </a:xfrm>
           <a:prstGeom prst="rect">
@@ -5431,7 +5912,7 @@
         </p:nvSpPr>
         <p:spPr>
           <a:xfrm>
-            <a:off x="1078992" y="3218688"/>
+            <a:off x="1078992" y="2743200"/>
             <a:ext cx="6613855" cy="320040"/>
           </a:xfrm>
           <a:prstGeom prst="rect">
@@ -5468,7 +5949,7 @@
         </p:nvSpPr>
         <p:spPr>
           <a:xfrm>
-            <a:off x="1078992" y="3584448"/>
+            <a:off x="1078992" y="3108960"/>
             <a:ext cx="6613855" cy="274320"/>
           </a:xfrm>
           <a:prstGeom prst="rect">
@@ -5505,7 +5986,7 @@
         </p:nvSpPr>
         <p:spPr>
           <a:xfrm>
-            <a:off x="1078992" y="3959352"/>
+            <a:off x="1078992" y="3483864"/>
             <a:ext cx="6613855" cy="274320"/>
           </a:xfrm>
           <a:prstGeom prst="rect">
@@ -5529,7 +6010,7 @@
                 <a:ea typeface="Sarabun"/>
                 <a:cs typeface="Sarabun"/>
               </a:rPr>
-              <a:t>I (male, polite)</a:t>
+              <a:t>I (male polite)</a:t>
             </a:r>
           </a:p>
         </p:txBody>
@@ -5542,7 +6023,7 @@
         </p:nvSpPr>
         <p:spPr>
           <a:xfrm>
-            <a:off x="731520" y="4837176"/>
+            <a:off x="731520" y="3886200"/>
             <a:ext cx="7071055" cy="1572768"/>
           </a:xfrm>
           <a:prstGeom prst="roundRect">
@@ -5583,7 +6064,7 @@
         </p:nvSpPr>
         <p:spPr>
           <a:xfrm>
-            <a:off x="868680" y="5038344"/>
+            <a:off x="868680" y="4087368"/>
             <a:ext cx="73152" cy="1143000"/>
           </a:xfrm>
           <a:prstGeom prst="rect">
@@ -5626,7 +6107,7 @@
         </p:nvSpPr>
         <p:spPr>
           <a:xfrm>
-            <a:off x="1078992" y="4974336"/>
+            <a:off x="1078992" y="4023360"/>
             <a:ext cx="6613855" cy="320040"/>
           </a:xfrm>
           <a:prstGeom prst="rect">
@@ -5650,7 +6131,7 @@
                 <a:ea typeface="Sarabun"/>
                 <a:cs typeface="Sarabun"/>
               </a:rPr>
-              <a:t>คุณ</a:t>
+              <a:t>ฉันชื่อ...</a:t>
             </a:r>
           </a:p>
         </p:txBody>
@@ -5663,7 +6144,7 @@
         </p:nvSpPr>
         <p:spPr>
           <a:xfrm>
-            <a:off x="1078992" y="5340096"/>
+            <a:off x="1078992" y="4389120"/>
             <a:ext cx="6613855" cy="274320"/>
           </a:xfrm>
           <a:prstGeom prst="rect">
@@ -5687,7 +6168,7 @@
                 <a:ea typeface="Sarabun"/>
                 <a:cs typeface="Sarabun"/>
               </a:rPr>
-              <a:t>khun</a:t>
+              <a:t>chǎn chûue...</a:t>
             </a:r>
           </a:p>
         </p:txBody>
@@ -5700,7 +6181,7 @@
         </p:nvSpPr>
         <p:spPr>
           <a:xfrm>
-            <a:off x="1078992" y="5715000"/>
+            <a:off x="1078992" y="4764024"/>
             <a:ext cx="6613855" cy="274320"/>
           </a:xfrm>
           <a:prstGeom prst="rect">
@@ -5724,7 +6205,202 @@
                 <a:ea typeface="Sarabun"/>
                 <a:cs typeface="Sarabun"/>
               </a:rPr>
-              <a:t>you</a:t>
+              <a:t>my name is... (female)</a:t>
+            </a:r>
+          </a:p>
+        </p:txBody>
+      </p:sp>
+      <p:sp>
+        <p:nvSpPr>
+          <p:cNvPr id="21" name="Rounded Rectangle 20"/>
+          <p:cNvSpPr/>
+          <p:nvPr/>
+        </p:nvSpPr>
+        <p:spPr>
+          <a:xfrm>
+            <a:off x="731520" y="5166360"/>
+            <a:ext cx="7071055" cy="1572768"/>
+          </a:xfrm>
+          <a:prstGeom prst="roundRect">
+            <a:avLst/>
+          </a:prstGeom>
+          <a:noFill/>
+          <a:ln>
+            <a:noFill/>
+          </a:ln>
+        </p:spPr>
+        <p:style>
+          <a:lnRef idx="1">
+            <a:schemeClr val="accent1"/>
+          </a:lnRef>
+          <a:fillRef idx="3">
+            <a:schemeClr val="accent1"/>
+          </a:fillRef>
+          <a:effectRef idx="2">
+            <a:schemeClr val="accent1"/>
+          </a:effectRef>
+          <a:fontRef idx="minor">
+            <a:schemeClr val="lt1"/>
+          </a:fontRef>
+        </p:style>
+        <p:txBody>
+          <a:bodyPr rtlCol="0" anchor="ctr"/>
+          <a:lstStyle/>
+          <a:p>
+            <a:pPr algn="ctr"/>
+          </a:p>
+        </p:txBody>
+      </p:sp>
+      <p:sp>
+        <p:nvSpPr>
+          <p:cNvPr id="22" name="Rectangle 21"/>
+          <p:cNvSpPr/>
+          <p:nvPr/>
+        </p:nvSpPr>
+        <p:spPr>
+          <a:xfrm>
+            <a:off x="868680" y="5367528"/>
+            <a:ext cx="73152" cy="1143000"/>
+          </a:xfrm>
+          <a:prstGeom prst="rect">
+            <a:avLst/>
+          </a:prstGeom>
+          <a:solidFill>
+            <a:srgbClr val="355C7D"/>
+          </a:solidFill>
+          <a:ln>
+            <a:noFill/>
+          </a:ln>
+        </p:spPr>
+        <p:style>
+          <a:lnRef idx="1">
+            <a:schemeClr val="accent1"/>
+          </a:lnRef>
+          <a:fillRef idx="3">
+            <a:schemeClr val="accent1"/>
+          </a:fillRef>
+          <a:effectRef idx="2">
+            <a:schemeClr val="accent1"/>
+          </a:effectRef>
+          <a:fontRef idx="minor">
+            <a:schemeClr val="lt1"/>
+          </a:fontRef>
+        </p:style>
+        <p:txBody>
+          <a:bodyPr rtlCol="0" anchor="ctr"/>
+          <a:lstStyle/>
+          <a:p>
+            <a:pPr algn="ctr"/>
+          </a:p>
+        </p:txBody>
+      </p:sp>
+      <p:sp>
+        <p:nvSpPr>
+          <p:cNvPr id="23" name="TextBox 22"/>
+          <p:cNvSpPr txBox="1"/>
+          <p:nvPr/>
+        </p:nvSpPr>
+        <p:spPr>
+          <a:xfrm>
+            <a:off x="1078992" y="5303520"/>
+            <a:ext cx="6613855" cy="320040"/>
+          </a:xfrm>
+          <a:prstGeom prst="rect">
+            <a:avLst/>
+          </a:prstGeom>
+          <a:noFill/>
+        </p:spPr>
+        <p:txBody>
+          <a:bodyPr wrap="square" anchor="t">
+            <a:spAutoFit/>
+          </a:bodyPr>
+          <a:lstStyle/>
+          <a:p>
+            <a:pPr algn="l"/>
+            <a:r>
+              <a:rPr sz="1700" b="0" i="0" lang="th-TH" altLang="en-US">
+                <a:solidFill>
+                  <a:srgbClr val="24333D"/>
+                </a:solidFill>
+                <a:latin typeface="Sarabun"/>
+                <a:ea typeface="Sarabun"/>
+                <a:cs typeface="Sarabun"/>
+              </a:rPr>
+              <a:t>ผมชื่อ...</a:t>
+            </a:r>
+          </a:p>
+        </p:txBody>
+      </p:sp>
+      <p:sp>
+        <p:nvSpPr>
+          <p:cNvPr id="24" name="TextBox 23"/>
+          <p:cNvSpPr txBox="1"/>
+          <p:nvPr/>
+        </p:nvSpPr>
+        <p:spPr>
+          <a:xfrm>
+            <a:off x="1078992" y="5669280"/>
+            <a:ext cx="6613855" cy="274320"/>
+          </a:xfrm>
+          <a:prstGeom prst="rect">
+            <a:avLst/>
+          </a:prstGeom>
+          <a:noFill/>
+        </p:spPr>
+        <p:txBody>
+          <a:bodyPr wrap="square" anchor="t">
+            <a:spAutoFit/>
+          </a:bodyPr>
+          <a:lstStyle/>
+          <a:p>
+            <a:pPr algn="l"/>
+            <a:r>
+              <a:rPr sz="1700" b="0" i="1" lang="en-US" altLang="en-US">
+                <a:solidFill>
+                  <a:srgbClr val="566873"/>
+                </a:solidFill>
+                <a:latin typeface="Sarabun"/>
+                <a:ea typeface="Sarabun"/>
+                <a:cs typeface="Sarabun"/>
+              </a:rPr>
+              <a:t>phǒm chûue...</a:t>
+            </a:r>
+          </a:p>
+        </p:txBody>
+      </p:sp>
+      <p:sp>
+        <p:nvSpPr>
+          <p:cNvPr id="25" name="TextBox 24"/>
+          <p:cNvSpPr txBox="1"/>
+          <p:nvPr/>
+        </p:nvSpPr>
+        <p:spPr>
+          <a:xfrm>
+            <a:off x="1078992" y="6044184"/>
+            <a:ext cx="6613855" cy="274320"/>
+          </a:xfrm>
+          <a:prstGeom prst="rect">
+            <a:avLst/>
+          </a:prstGeom>
+          <a:noFill/>
+        </p:spPr>
+        <p:txBody>
+          <a:bodyPr wrap="square" anchor="t">
+            <a:spAutoFit/>
+          </a:bodyPr>
+          <a:lstStyle/>
+          <a:p>
+            <a:pPr algn="l"/>
+            <a:r>
+              <a:rPr sz="1700" b="0" i="0" lang="en-US" altLang="en-US">
+                <a:solidFill>
+                  <a:srgbClr val="82909A"/>
+                </a:solidFill>
+                <a:latin typeface="Sarabun"/>
+                <a:ea typeface="Sarabun"/>
+                <a:cs typeface="Sarabun"/>
+              </a:rPr>
+              <a:t>my name is... (male)</a:t>
             </a:r>
           </a:p>
         </p:txBody>
@@ -5916,7 +6592,7 @@
           <a:p>
             <a:pPr algn="l"/>
             <a:r>
-              <a:rPr sz="2800" b="1" i="0" lang="en-US" altLang="en-US">
+              <a:rPr sz="3600" b="1" i="0" lang="en-US" altLang="en-US">
                 <a:solidFill>
                   <a:srgbClr val="24333D"/>
                 </a:solidFill>
@@ -5924,7 +6600,7 @@
                 <a:ea typeface="Sarabun"/>
                 <a:cs typeface="Sarabun"/>
               </a:rPr>
-              <a:t>He, she, and this — pointing to people</a:t>
+              <a:t>Talking about you and someone else</a:t>
             </a:r>
           </a:p>
         </p:txBody>
@@ -6045,7 +6721,7 @@
                 <a:ea typeface="Sarabun"/>
                 <a:cs typeface="Sarabun"/>
               </a:rPr>
-              <a:t>เขา</a:t>
+              <a:t>คุณ</a:t>
             </a:r>
           </a:p>
         </p:txBody>
@@ -6082,7 +6758,7 @@
                 <a:ea typeface="Sarabun"/>
                 <a:cs typeface="Sarabun"/>
               </a:rPr>
-              <a:t>khǎo</a:t>
+              <a:t>khun</a:t>
             </a:r>
           </a:p>
         </p:txBody>
@@ -6119,7 +6795,7 @@
                 <a:ea typeface="Sarabun"/>
                 <a:cs typeface="Sarabun"/>
               </a:rPr>
-              <a:t>he / she</a:t>
+              <a:t>you (polite)</a:t>
             </a:r>
           </a:p>
         </p:txBody>
@@ -6132,7 +6808,7 @@
         </p:nvSpPr>
         <p:spPr>
           <a:xfrm>
-            <a:off x="731520" y="3081528"/>
+            <a:off x="731520" y="2606040"/>
             <a:ext cx="7071055" cy="1572768"/>
           </a:xfrm>
           <a:prstGeom prst="roundRect">
@@ -6173,7 +6849,7 @@
         </p:nvSpPr>
         <p:spPr>
           <a:xfrm>
-            <a:off x="868680" y="3282696"/>
+            <a:off x="868680" y="2807208"/>
             <a:ext cx="73152" cy="1143000"/>
           </a:xfrm>
           <a:prstGeom prst="rect">
@@ -6216,7 +6892,7 @@
         </p:nvSpPr>
         <p:spPr>
           <a:xfrm>
-            <a:off x="1078992" y="3218688"/>
+            <a:off x="1078992" y="2743200"/>
             <a:ext cx="6613855" cy="320040"/>
           </a:xfrm>
           <a:prstGeom prst="rect">
@@ -6240,7 +6916,7 @@
                 <a:ea typeface="Sarabun"/>
                 <a:cs typeface="Sarabun"/>
               </a:rPr>
-              <a:t>นี่</a:t>
+              <a:t>เขา</a:t>
             </a:r>
           </a:p>
         </p:txBody>
@@ -6253,7 +6929,7 @@
         </p:nvSpPr>
         <p:spPr>
           <a:xfrm>
-            <a:off x="1078992" y="3584448"/>
+            <a:off x="1078992" y="3108960"/>
             <a:ext cx="6613855" cy="274320"/>
           </a:xfrm>
           <a:prstGeom prst="rect">
@@ -6277,7 +6953,7 @@
                 <a:ea typeface="Sarabun"/>
                 <a:cs typeface="Sarabun"/>
               </a:rPr>
-              <a:t>nîi</a:t>
+              <a:t>khǎo</a:t>
             </a:r>
           </a:p>
         </p:txBody>
@@ -6290,7 +6966,7 @@
         </p:nvSpPr>
         <p:spPr>
           <a:xfrm>
-            <a:off x="1078992" y="3959352"/>
+            <a:off x="1078992" y="3483864"/>
             <a:ext cx="6613855" cy="274320"/>
           </a:xfrm>
           <a:prstGeom prst="rect">
@@ -6314,7 +6990,7 @@
                 <a:ea typeface="Sarabun"/>
                 <a:cs typeface="Sarabun"/>
               </a:rPr>
-              <a:t>this</a:t>
+              <a:t>he / she</a:t>
             </a:r>
           </a:p>
         </p:txBody>
@@ -6327,7 +7003,7 @@
         </p:nvSpPr>
         <p:spPr>
           <a:xfrm>
-            <a:off x="731520" y="4837176"/>
+            <a:off x="731520" y="3886200"/>
             <a:ext cx="7071055" cy="1572768"/>
           </a:xfrm>
           <a:prstGeom prst="roundRect">
@@ -6368,7 +7044,7 @@
         </p:nvSpPr>
         <p:spPr>
           <a:xfrm>
-            <a:off x="868680" y="5038344"/>
+            <a:off x="868680" y="4087368"/>
             <a:ext cx="73152" cy="1143000"/>
           </a:xfrm>
           <a:prstGeom prst="rect">
@@ -6411,7 +7087,7 @@
         </p:nvSpPr>
         <p:spPr>
           <a:xfrm>
-            <a:off x="1078992" y="4974336"/>
+            <a:off x="1078992" y="4023360"/>
             <a:ext cx="6613855" cy="320040"/>
           </a:xfrm>
           <a:prstGeom prst="rect">
@@ -6435,7 +7111,7 @@
                 <a:ea typeface="Sarabun"/>
                 <a:cs typeface="Sarabun"/>
               </a:rPr>
-              <a:t>คือ</a:t>
+              <a:t>คุณชื่ออะไร</a:t>
             </a:r>
           </a:p>
         </p:txBody>
@@ -6448,7 +7124,7 @@
         </p:nvSpPr>
         <p:spPr>
           <a:xfrm>
-            <a:off x="1078992" y="5340096"/>
+            <a:off x="1078992" y="4389120"/>
             <a:ext cx="6613855" cy="274320"/>
           </a:xfrm>
           <a:prstGeom prst="rect">
@@ -6472,7 +7148,7 @@
                 <a:ea typeface="Sarabun"/>
                 <a:cs typeface="Sarabun"/>
               </a:rPr>
-              <a:t>khuue</a:t>
+              <a:t>khun chûue à-rai</a:t>
             </a:r>
           </a:p>
         </p:txBody>
@@ -6485,7 +7161,7 @@
         </p:nvSpPr>
         <p:spPr>
           <a:xfrm>
-            <a:off x="1078992" y="5715000"/>
+            <a:off x="1078992" y="4764024"/>
             <a:ext cx="6613855" cy="274320"/>
           </a:xfrm>
           <a:prstGeom prst="rect">
@@ -6509,7 +7185,202 @@
                 <a:ea typeface="Sarabun"/>
                 <a:cs typeface="Sarabun"/>
               </a:rPr>
-              <a:t>is (identity)</a:t>
+              <a:t>what is your name?</a:t>
+            </a:r>
+          </a:p>
+        </p:txBody>
+      </p:sp>
+      <p:sp>
+        <p:nvSpPr>
+          <p:cNvPr id="21" name="Rounded Rectangle 20"/>
+          <p:cNvSpPr/>
+          <p:nvPr/>
+        </p:nvSpPr>
+        <p:spPr>
+          <a:xfrm>
+            <a:off x="731520" y="5166360"/>
+            <a:ext cx="7071055" cy="1572768"/>
+          </a:xfrm>
+          <a:prstGeom prst="roundRect">
+            <a:avLst/>
+          </a:prstGeom>
+          <a:noFill/>
+          <a:ln>
+            <a:noFill/>
+          </a:ln>
+        </p:spPr>
+        <p:style>
+          <a:lnRef idx="1">
+            <a:schemeClr val="accent1"/>
+          </a:lnRef>
+          <a:fillRef idx="3">
+            <a:schemeClr val="accent1"/>
+          </a:fillRef>
+          <a:effectRef idx="2">
+            <a:schemeClr val="accent1"/>
+          </a:effectRef>
+          <a:fontRef idx="minor">
+            <a:schemeClr val="lt1"/>
+          </a:fontRef>
+        </p:style>
+        <p:txBody>
+          <a:bodyPr rtlCol="0" anchor="ctr"/>
+          <a:lstStyle/>
+          <a:p>
+            <a:pPr algn="ctr"/>
+          </a:p>
+        </p:txBody>
+      </p:sp>
+      <p:sp>
+        <p:nvSpPr>
+          <p:cNvPr id="22" name="Rectangle 21"/>
+          <p:cNvSpPr/>
+          <p:nvPr/>
+        </p:nvSpPr>
+        <p:spPr>
+          <a:xfrm>
+            <a:off x="868680" y="5367528"/>
+            <a:ext cx="73152" cy="1143000"/>
+          </a:xfrm>
+          <a:prstGeom prst="rect">
+            <a:avLst/>
+          </a:prstGeom>
+          <a:solidFill>
+            <a:srgbClr val="355C7D"/>
+          </a:solidFill>
+          <a:ln>
+            <a:noFill/>
+          </a:ln>
+        </p:spPr>
+        <p:style>
+          <a:lnRef idx="1">
+            <a:schemeClr val="accent1"/>
+          </a:lnRef>
+          <a:fillRef idx="3">
+            <a:schemeClr val="accent1"/>
+          </a:fillRef>
+          <a:effectRef idx="2">
+            <a:schemeClr val="accent1"/>
+          </a:effectRef>
+          <a:fontRef idx="minor">
+            <a:schemeClr val="lt1"/>
+          </a:fontRef>
+        </p:style>
+        <p:txBody>
+          <a:bodyPr rtlCol="0" anchor="ctr"/>
+          <a:lstStyle/>
+          <a:p>
+            <a:pPr algn="ctr"/>
+          </a:p>
+        </p:txBody>
+      </p:sp>
+      <p:sp>
+        <p:nvSpPr>
+          <p:cNvPr id="23" name="TextBox 22"/>
+          <p:cNvSpPr txBox="1"/>
+          <p:nvPr/>
+        </p:nvSpPr>
+        <p:spPr>
+          <a:xfrm>
+            <a:off x="1078992" y="5303520"/>
+            <a:ext cx="6613855" cy="320040"/>
+          </a:xfrm>
+          <a:prstGeom prst="rect">
+            <a:avLst/>
+          </a:prstGeom>
+          <a:noFill/>
+        </p:spPr>
+        <p:txBody>
+          <a:bodyPr wrap="square" anchor="t">
+            <a:spAutoFit/>
+          </a:bodyPr>
+          <a:lstStyle/>
+          <a:p>
+            <a:pPr algn="l"/>
+            <a:r>
+              <a:rPr sz="1700" b="0" i="0" lang="th-TH" altLang="en-US">
+                <a:solidFill>
+                  <a:srgbClr val="24333D"/>
+                </a:solidFill>
+                <a:latin typeface="Sarabun"/>
+                <a:ea typeface="Sarabun"/>
+                <a:cs typeface="Sarabun"/>
+              </a:rPr>
+              <a:t>เขาชื่อ...</a:t>
+            </a:r>
+          </a:p>
+        </p:txBody>
+      </p:sp>
+      <p:sp>
+        <p:nvSpPr>
+          <p:cNvPr id="24" name="TextBox 23"/>
+          <p:cNvSpPr txBox="1"/>
+          <p:nvPr/>
+        </p:nvSpPr>
+        <p:spPr>
+          <a:xfrm>
+            <a:off x="1078992" y="5669280"/>
+            <a:ext cx="6613855" cy="274320"/>
+          </a:xfrm>
+          <a:prstGeom prst="rect">
+            <a:avLst/>
+          </a:prstGeom>
+          <a:noFill/>
+        </p:spPr>
+        <p:txBody>
+          <a:bodyPr wrap="square" anchor="t">
+            <a:spAutoFit/>
+          </a:bodyPr>
+          <a:lstStyle/>
+          <a:p>
+            <a:pPr algn="l"/>
+            <a:r>
+              <a:rPr sz="1700" b="0" i="1" lang="en-US" altLang="en-US">
+                <a:solidFill>
+                  <a:srgbClr val="566873"/>
+                </a:solidFill>
+                <a:latin typeface="Sarabun"/>
+                <a:ea typeface="Sarabun"/>
+                <a:cs typeface="Sarabun"/>
+              </a:rPr>
+              <a:t>khǎo chûue...</a:t>
+            </a:r>
+          </a:p>
+        </p:txBody>
+      </p:sp>
+      <p:sp>
+        <p:nvSpPr>
+          <p:cNvPr id="25" name="TextBox 24"/>
+          <p:cNvSpPr txBox="1"/>
+          <p:nvPr/>
+        </p:nvSpPr>
+        <p:spPr>
+          <a:xfrm>
+            <a:off x="1078992" y="6044184"/>
+            <a:ext cx="6613855" cy="274320"/>
+          </a:xfrm>
+          <a:prstGeom prst="rect">
+            <a:avLst/>
+          </a:prstGeom>
+          <a:noFill/>
+        </p:spPr>
+        <p:txBody>
+          <a:bodyPr wrap="square" anchor="t">
+            <a:spAutoFit/>
+          </a:bodyPr>
+          <a:lstStyle/>
+          <a:p>
+            <a:pPr algn="l"/>
+            <a:r>
+              <a:rPr sz="1700" b="0" i="0" lang="en-US" altLang="en-US">
+                <a:solidFill>
+                  <a:srgbClr val="82909A"/>
+                </a:solidFill>
+                <a:latin typeface="Sarabun"/>
+                <a:ea typeface="Sarabun"/>
+                <a:cs typeface="Sarabun"/>
+              </a:rPr>
+              <a:t>he/she is called...</a:t>
             </a:r>
           </a:p>
         </p:txBody>
@@ -6709,7 +7580,7 @@
                 <a:ea typeface="Sarabun"/>
                 <a:cs typeface="Sarabun"/>
               </a:rPr>
-              <a:t>Ask who someone is</a:t>
+              <a:t>This is... — introducing someone</a:t>
             </a:r>
           </a:p>
         </p:txBody>
@@ -6830,7 +7701,7 @@
                 <a:ea typeface="Sarabun"/>
                 <a:cs typeface="Sarabun"/>
               </a:rPr>
-              <a:t>ใคร</a:t>
+              <a:t>นี่</a:t>
             </a:r>
           </a:p>
         </p:txBody>
@@ -6867,7 +7738,7 @@
                 <a:ea typeface="Sarabun"/>
                 <a:cs typeface="Sarabun"/>
               </a:rPr>
-              <a:t>khrai</a:t>
+              <a:t>nîi</a:t>
             </a:r>
           </a:p>
         </p:txBody>
@@ -6904,7 +7775,7 @@
                 <a:ea typeface="Sarabun"/>
                 <a:cs typeface="Sarabun"/>
               </a:rPr>
-              <a:t>who</a:t>
+              <a:t>this</a:t>
             </a:r>
           </a:p>
         </p:txBody>
@@ -6917,7 +7788,7 @@
         </p:nvSpPr>
         <p:spPr>
           <a:xfrm>
-            <a:off x="731520" y="3081528"/>
+            <a:off x="731520" y="2606040"/>
             <a:ext cx="7071055" cy="1572768"/>
           </a:xfrm>
           <a:prstGeom prst="roundRect">
@@ -6958,7 +7829,7 @@
         </p:nvSpPr>
         <p:spPr>
           <a:xfrm>
-            <a:off x="868680" y="3282696"/>
+            <a:off x="868680" y="2807208"/>
             <a:ext cx="73152" cy="1143000"/>
           </a:xfrm>
           <a:prstGeom prst="rect">
@@ -7001,7 +7872,7 @@
         </p:nvSpPr>
         <p:spPr>
           <a:xfrm>
-            <a:off x="1078992" y="3218688"/>
+            <a:off x="1078992" y="2743200"/>
             <a:ext cx="6613855" cy="320040"/>
           </a:xfrm>
           <a:prstGeom prst="rect">
@@ -7025,7 +7896,7 @@
                 <a:ea typeface="Sarabun"/>
                 <a:cs typeface="Sarabun"/>
               </a:rPr>
-              <a:t>เขาคือใคร</a:t>
+              <a:t>คือ</a:t>
             </a:r>
           </a:p>
         </p:txBody>
@@ -7038,7 +7909,7 @@
         </p:nvSpPr>
         <p:spPr>
           <a:xfrm>
-            <a:off x="1078992" y="3584448"/>
+            <a:off x="1078992" y="3108960"/>
             <a:ext cx="6613855" cy="274320"/>
           </a:xfrm>
           <a:prstGeom prst="rect">
@@ -7062,7 +7933,7 @@
                 <a:ea typeface="Sarabun"/>
                 <a:cs typeface="Sarabun"/>
               </a:rPr>
-              <a:t>khǎo khuue khrai</a:t>
+              <a:t>khuu</a:t>
             </a:r>
           </a:p>
         </p:txBody>
@@ -7075,7 +7946,7 @@
         </p:nvSpPr>
         <p:spPr>
           <a:xfrm>
-            <a:off x="1078992" y="3959352"/>
+            <a:off x="1078992" y="3483864"/>
             <a:ext cx="6613855" cy="274320"/>
           </a:xfrm>
           <a:prstGeom prst="rect">
@@ -7099,7 +7970,7 @@
                 <a:ea typeface="Sarabun"/>
                 <a:cs typeface="Sarabun"/>
               </a:rPr>
-              <a:t>who is he/she?</a:t>
+              <a:t>is</a:t>
             </a:r>
           </a:p>
         </p:txBody>
@@ -7112,7 +7983,7 @@
         </p:nvSpPr>
         <p:spPr>
           <a:xfrm>
-            <a:off x="731520" y="4837176"/>
+            <a:off x="731520" y="3886200"/>
             <a:ext cx="7071055" cy="1572768"/>
           </a:xfrm>
           <a:prstGeom prst="roundRect">
@@ -7153,7 +8024,7 @@
         </p:nvSpPr>
         <p:spPr>
           <a:xfrm>
-            <a:off x="868680" y="5038344"/>
+            <a:off x="868680" y="4087368"/>
             <a:ext cx="73152" cy="1143000"/>
           </a:xfrm>
           <a:prstGeom prst="rect">
@@ -7196,7 +8067,7 @@
         </p:nvSpPr>
         <p:spPr>
           <a:xfrm>
-            <a:off x="1078992" y="4974336"/>
+            <a:off x="1078992" y="4023360"/>
             <a:ext cx="6613855" cy="320040"/>
           </a:xfrm>
           <a:prstGeom prst="rect">
@@ -7220,7 +8091,7 @@
                 <a:ea typeface="Sarabun"/>
                 <a:cs typeface="Sarabun"/>
               </a:rPr>
-              <a:t>คุณคือ...ใช่ไหม</a:t>
+              <a:t>นี่คือ...</a:t>
             </a:r>
           </a:p>
         </p:txBody>
@@ -7233,7 +8104,7 @@
         </p:nvSpPr>
         <p:spPr>
           <a:xfrm>
-            <a:off x="1078992" y="5340096"/>
+            <a:off x="1078992" y="4389120"/>
             <a:ext cx="6613855" cy="274320"/>
           </a:xfrm>
           <a:prstGeom prst="rect">
@@ -7257,7 +8128,7 @@
                 <a:ea typeface="Sarabun"/>
                 <a:cs typeface="Sarabun"/>
               </a:rPr>
-              <a:t>khun khuue...châi mǎi</a:t>
+              <a:t>nîi khuu...</a:t>
             </a:r>
           </a:p>
         </p:txBody>
@@ -7270,7 +8141,7 @@
         </p:nvSpPr>
         <p:spPr>
           <a:xfrm>
-            <a:off x="1078992" y="5715000"/>
+            <a:off x="1078992" y="4764024"/>
             <a:ext cx="6613855" cy="274320"/>
           </a:xfrm>
           <a:prstGeom prst="rect">
@@ -7294,7 +8165,202 @@
                 <a:ea typeface="Sarabun"/>
                 <a:cs typeface="Sarabun"/>
               </a:rPr>
-              <a:t>you are...right?</a:t>
+              <a:t>this is...</a:t>
+            </a:r>
+          </a:p>
+        </p:txBody>
+      </p:sp>
+      <p:sp>
+        <p:nvSpPr>
+          <p:cNvPr id="21" name="Rounded Rectangle 20"/>
+          <p:cNvSpPr/>
+          <p:nvPr/>
+        </p:nvSpPr>
+        <p:spPr>
+          <a:xfrm>
+            <a:off x="731520" y="5166360"/>
+            <a:ext cx="7071055" cy="1572768"/>
+          </a:xfrm>
+          <a:prstGeom prst="roundRect">
+            <a:avLst/>
+          </a:prstGeom>
+          <a:noFill/>
+          <a:ln>
+            <a:noFill/>
+          </a:ln>
+        </p:spPr>
+        <p:style>
+          <a:lnRef idx="1">
+            <a:schemeClr val="accent1"/>
+          </a:lnRef>
+          <a:fillRef idx="3">
+            <a:schemeClr val="accent1"/>
+          </a:fillRef>
+          <a:effectRef idx="2">
+            <a:schemeClr val="accent1"/>
+          </a:effectRef>
+          <a:fontRef idx="minor">
+            <a:schemeClr val="lt1"/>
+          </a:fontRef>
+        </p:style>
+        <p:txBody>
+          <a:bodyPr rtlCol="0" anchor="ctr"/>
+          <a:lstStyle/>
+          <a:p>
+            <a:pPr algn="ctr"/>
+          </a:p>
+        </p:txBody>
+      </p:sp>
+      <p:sp>
+        <p:nvSpPr>
+          <p:cNvPr id="22" name="Rectangle 21"/>
+          <p:cNvSpPr/>
+          <p:nvPr/>
+        </p:nvSpPr>
+        <p:spPr>
+          <a:xfrm>
+            <a:off x="868680" y="5367528"/>
+            <a:ext cx="73152" cy="1143000"/>
+          </a:xfrm>
+          <a:prstGeom prst="rect">
+            <a:avLst/>
+          </a:prstGeom>
+          <a:solidFill>
+            <a:srgbClr val="355C7D"/>
+          </a:solidFill>
+          <a:ln>
+            <a:noFill/>
+          </a:ln>
+        </p:spPr>
+        <p:style>
+          <a:lnRef idx="1">
+            <a:schemeClr val="accent1"/>
+          </a:lnRef>
+          <a:fillRef idx="3">
+            <a:schemeClr val="accent1"/>
+          </a:fillRef>
+          <a:effectRef idx="2">
+            <a:schemeClr val="accent1"/>
+          </a:effectRef>
+          <a:fontRef idx="minor">
+            <a:schemeClr val="lt1"/>
+          </a:fontRef>
+        </p:style>
+        <p:txBody>
+          <a:bodyPr rtlCol="0" anchor="ctr"/>
+          <a:lstStyle/>
+          <a:p>
+            <a:pPr algn="ctr"/>
+          </a:p>
+        </p:txBody>
+      </p:sp>
+      <p:sp>
+        <p:nvSpPr>
+          <p:cNvPr id="23" name="TextBox 22"/>
+          <p:cNvSpPr txBox="1"/>
+          <p:nvPr/>
+        </p:nvSpPr>
+        <p:spPr>
+          <a:xfrm>
+            <a:off x="1078992" y="5303520"/>
+            <a:ext cx="6613855" cy="320040"/>
+          </a:xfrm>
+          <a:prstGeom prst="rect">
+            <a:avLst/>
+          </a:prstGeom>
+          <a:noFill/>
+        </p:spPr>
+        <p:txBody>
+          <a:bodyPr wrap="square" anchor="t">
+            <a:spAutoFit/>
+          </a:bodyPr>
+          <a:lstStyle/>
+          <a:p>
+            <a:pPr algn="l"/>
+            <a:r>
+              <a:rPr sz="1700" b="0" i="0" lang="th-TH" altLang="en-US">
+                <a:solidFill>
+                  <a:srgbClr val="24333D"/>
+                </a:solidFill>
+                <a:latin typeface="Sarabun"/>
+                <a:ea typeface="Sarabun"/>
+                <a:cs typeface="Sarabun"/>
+              </a:rPr>
+              <a:t>นี่คือคนไทย</a:t>
+            </a:r>
+          </a:p>
+        </p:txBody>
+      </p:sp>
+      <p:sp>
+        <p:nvSpPr>
+          <p:cNvPr id="24" name="TextBox 23"/>
+          <p:cNvSpPr txBox="1"/>
+          <p:nvPr/>
+        </p:nvSpPr>
+        <p:spPr>
+          <a:xfrm>
+            <a:off x="1078992" y="5669280"/>
+            <a:ext cx="6613855" cy="274320"/>
+          </a:xfrm>
+          <a:prstGeom prst="rect">
+            <a:avLst/>
+          </a:prstGeom>
+          <a:noFill/>
+        </p:spPr>
+        <p:txBody>
+          <a:bodyPr wrap="square" anchor="t">
+            <a:spAutoFit/>
+          </a:bodyPr>
+          <a:lstStyle/>
+          <a:p>
+            <a:pPr algn="l"/>
+            <a:r>
+              <a:rPr sz="1700" b="0" i="1" lang="en-US" altLang="en-US">
+                <a:solidFill>
+                  <a:srgbClr val="566873"/>
+                </a:solidFill>
+                <a:latin typeface="Sarabun"/>
+                <a:ea typeface="Sarabun"/>
+                <a:cs typeface="Sarabun"/>
+              </a:rPr>
+              <a:t>nîi khuu khon thai</a:t>
+            </a:r>
+          </a:p>
+        </p:txBody>
+      </p:sp>
+      <p:sp>
+        <p:nvSpPr>
+          <p:cNvPr id="25" name="TextBox 24"/>
+          <p:cNvSpPr txBox="1"/>
+          <p:nvPr/>
+        </p:nvSpPr>
+        <p:spPr>
+          <a:xfrm>
+            <a:off x="1078992" y="6044184"/>
+            <a:ext cx="6613855" cy="274320"/>
+          </a:xfrm>
+          <a:prstGeom prst="rect">
+            <a:avLst/>
+          </a:prstGeom>
+          <a:noFill/>
+        </p:spPr>
+        <p:txBody>
+          <a:bodyPr wrap="square" anchor="t">
+            <a:spAutoFit/>
+          </a:bodyPr>
+          <a:lstStyle/>
+          <a:p>
+            <a:pPr algn="l"/>
+            <a:r>
+              <a:rPr sz="1700" b="0" i="0" lang="en-US" altLang="en-US">
+                <a:solidFill>
+                  <a:srgbClr val="82909A"/>
+                </a:solidFill>
+                <a:latin typeface="Sarabun"/>
+                <a:ea typeface="Sarabun"/>
+                <a:cs typeface="Sarabun"/>
+              </a:rPr>
+              <a:t>this is a Thai person</a:t>
             </a:r>
           </a:p>
         </p:txBody>
@@ -7494,7 +8560,7 @@
                 <a:ea typeface="Sarabun"/>
                 <a:cs typeface="Sarabun"/>
               </a:rPr>
-              <a:t>Put it together — a mini identity exchange</a:t>
+              <a:t>Who is that? — asking identity questions</a:t>
             </a:r>
           </a:p>
         </p:txBody>
@@ -7615,7 +8681,7 @@
                 <a:ea typeface="Sarabun"/>
                 <a:cs typeface="Sarabun"/>
               </a:rPr>
-              <a:t>เขาคือใคร</a:t>
+              <a:t>ใคร</a:t>
             </a:r>
           </a:p>
         </p:txBody>
@@ -7652,7 +8718,7 @@
                 <a:ea typeface="Sarabun"/>
                 <a:cs typeface="Sarabun"/>
               </a:rPr>
-              <a:t>khǎo khuue khrai</a:t>
+              <a:t>khrai</a:t>
             </a:r>
           </a:p>
         </p:txBody>
@@ -7689,7 +8755,7 @@
                 <a:ea typeface="Sarabun"/>
                 <a:cs typeface="Sarabun"/>
               </a:rPr>
-              <a:t>who is he/she?</a:t>
+              <a:t>who</a:t>
             </a:r>
           </a:p>
         </p:txBody>
@@ -7702,7 +8768,7 @@
         </p:nvSpPr>
         <p:spPr>
           <a:xfrm>
-            <a:off x="731520" y="3081528"/>
+            <a:off x="731520" y="2606040"/>
             <a:ext cx="7071055" cy="1572768"/>
           </a:xfrm>
           <a:prstGeom prst="roundRect">
@@ -7743,7 +8809,7 @@
         </p:nvSpPr>
         <p:spPr>
           <a:xfrm>
-            <a:off x="868680" y="3282696"/>
+            <a:off x="868680" y="2807208"/>
             <a:ext cx="73152" cy="1143000"/>
           </a:xfrm>
           <a:prstGeom prst="rect">
@@ -7786,7 +8852,7 @@
         </p:nvSpPr>
         <p:spPr>
           <a:xfrm>
-            <a:off x="1078992" y="3218688"/>
+            <a:off x="1078992" y="2743200"/>
             <a:ext cx="6613855" cy="320040"/>
           </a:xfrm>
           <a:prstGeom prst="rect">
@@ -7810,7 +8876,7 @@
                 <a:ea typeface="Sarabun"/>
                 <a:cs typeface="Sarabun"/>
               </a:rPr>
-              <a:t>นี่คือ...</a:t>
+              <a:t>เขาคือใคร</a:t>
             </a:r>
           </a:p>
         </p:txBody>
@@ -7823,7 +8889,7 @@
         </p:nvSpPr>
         <p:spPr>
           <a:xfrm>
-            <a:off x="1078992" y="3584448"/>
+            <a:off x="1078992" y="3108960"/>
             <a:ext cx="6613855" cy="274320"/>
           </a:xfrm>
           <a:prstGeom prst="rect">
@@ -7847,7 +8913,7 @@
                 <a:ea typeface="Sarabun"/>
                 <a:cs typeface="Sarabun"/>
               </a:rPr>
-              <a:t>nîi khuue...</a:t>
+              <a:t>khǎo khuu khrai</a:t>
             </a:r>
           </a:p>
         </p:txBody>
@@ -7860,7 +8926,7 @@
         </p:nvSpPr>
         <p:spPr>
           <a:xfrm>
-            <a:off x="1078992" y="3959352"/>
+            <a:off x="1078992" y="3483864"/>
             <a:ext cx="6613855" cy="274320"/>
           </a:xfrm>
           <a:prstGeom prst="rect">
@@ -7884,7 +8950,7 @@
                 <a:ea typeface="Sarabun"/>
                 <a:cs typeface="Sarabun"/>
               </a:rPr>
-              <a:t>this is...</a:t>
+              <a:t>who is he/she?</a:t>
             </a:r>
           </a:p>
         </p:txBody>
@@ -7897,7 +8963,7 @@
         </p:nvSpPr>
         <p:spPr>
           <a:xfrm>
-            <a:off x="731520" y="4837176"/>
+            <a:off x="731520" y="3886200"/>
             <a:ext cx="7071055" cy="1572768"/>
           </a:xfrm>
           <a:prstGeom prst="roundRect">
@@ -7938,7 +9004,7 @@
         </p:nvSpPr>
         <p:spPr>
           <a:xfrm>
-            <a:off x="868680" y="5038344"/>
+            <a:off x="868680" y="4087368"/>
             <a:ext cx="73152" cy="1143000"/>
           </a:xfrm>
           <a:prstGeom prst="rect">
@@ -7981,7 +9047,7 @@
         </p:nvSpPr>
         <p:spPr>
           <a:xfrm>
-            <a:off x="1078992" y="4974336"/>
+            <a:off x="1078992" y="4023360"/>
             <a:ext cx="6613855" cy="320040"/>
           </a:xfrm>
           <a:prstGeom prst="rect">
@@ -8005,7 +9071,7 @@
                 <a:ea typeface="Sarabun"/>
                 <a:cs typeface="Sarabun"/>
               </a:rPr>
-              <a:t>เขามาจากประเทศไทย</a:t>
+              <a:t>คุณคือ...ใช่ไหม</a:t>
             </a:r>
           </a:p>
         </p:txBody>
@@ -8018,7 +9084,7 @@
         </p:nvSpPr>
         <p:spPr>
           <a:xfrm>
-            <a:off x="1078992" y="5340096"/>
+            <a:off x="1078992" y="4389120"/>
             <a:ext cx="6613855" cy="274320"/>
           </a:xfrm>
           <a:prstGeom prst="rect">
@@ -8042,7 +9108,7 @@
                 <a:ea typeface="Sarabun"/>
                 <a:cs typeface="Sarabun"/>
               </a:rPr>
-              <a:t>khǎo maa-jàak prà-thêet thai</a:t>
+              <a:t>khun khuu... châi mái</a:t>
             </a:r>
           </a:p>
         </p:txBody>
@@ -8055,7 +9121,7 @@
         </p:nvSpPr>
         <p:spPr>
           <a:xfrm>
-            <a:off x="1078992" y="5715000"/>
+            <a:off x="1078992" y="4764024"/>
             <a:ext cx="6613855" cy="274320"/>
           </a:xfrm>
           <a:prstGeom prst="rect">
@@ -8079,7 +9145,202 @@
                 <a:ea typeface="Sarabun"/>
                 <a:cs typeface="Sarabun"/>
               </a:rPr>
-              <a:t>he/she comes from Thailand</a:t>
+              <a:t>you are... right?</a:t>
+            </a:r>
+          </a:p>
+        </p:txBody>
+      </p:sp>
+      <p:sp>
+        <p:nvSpPr>
+          <p:cNvPr id="21" name="Rounded Rectangle 20"/>
+          <p:cNvSpPr/>
+          <p:nvPr/>
+        </p:nvSpPr>
+        <p:spPr>
+          <a:xfrm>
+            <a:off x="731520" y="5166360"/>
+            <a:ext cx="7071055" cy="1572768"/>
+          </a:xfrm>
+          <a:prstGeom prst="roundRect">
+            <a:avLst/>
+          </a:prstGeom>
+          <a:noFill/>
+          <a:ln>
+            <a:noFill/>
+          </a:ln>
+        </p:spPr>
+        <p:style>
+          <a:lnRef idx="1">
+            <a:schemeClr val="accent1"/>
+          </a:lnRef>
+          <a:fillRef idx="3">
+            <a:schemeClr val="accent1"/>
+          </a:fillRef>
+          <a:effectRef idx="2">
+            <a:schemeClr val="accent1"/>
+          </a:effectRef>
+          <a:fontRef idx="minor">
+            <a:schemeClr val="lt1"/>
+          </a:fontRef>
+        </p:style>
+        <p:txBody>
+          <a:bodyPr rtlCol="0" anchor="ctr"/>
+          <a:lstStyle/>
+          <a:p>
+            <a:pPr algn="ctr"/>
+          </a:p>
+        </p:txBody>
+      </p:sp>
+      <p:sp>
+        <p:nvSpPr>
+          <p:cNvPr id="22" name="Rectangle 21"/>
+          <p:cNvSpPr/>
+          <p:nvPr/>
+        </p:nvSpPr>
+        <p:spPr>
+          <a:xfrm>
+            <a:off x="868680" y="5367528"/>
+            <a:ext cx="73152" cy="1143000"/>
+          </a:xfrm>
+          <a:prstGeom prst="rect">
+            <a:avLst/>
+          </a:prstGeom>
+          <a:solidFill>
+            <a:srgbClr val="355C7D"/>
+          </a:solidFill>
+          <a:ln>
+            <a:noFill/>
+          </a:ln>
+        </p:spPr>
+        <p:style>
+          <a:lnRef idx="1">
+            <a:schemeClr val="accent1"/>
+          </a:lnRef>
+          <a:fillRef idx="3">
+            <a:schemeClr val="accent1"/>
+          </a:fillRef>
+          <a:effectRef idx="2">
+            <a:schemeClr val="accent1"/>
+          </a:effectRef>
+          <a:fontRef idx="minor">
+            <a:schemeClr val="lt1"/>
+          </a:fontRef>
+        </p:style>
+        <p:txBody>
+          <a:bodyPr rtlCol="0" anchor="ctr"/>
+          <a:lstStyle/>
+          <a:p>
+            <a:pPr algn="ctr"/>
+          </a:p>
+        </p:txBody>
+      </p:sp>
+      <p:sp>
+        <p:nvSpPr>
+          <p:cNvPr id="23" name="TextBox 22"/>
+          <p:cNvSpPr txBox="1"/>
+          <p:nvPr/>
+        </p:nvSpPr>
+        <p:spPr>
+          <a:xfrm>
+            <a:off x="1078992" y="5303520"/>
+            <a:ext cx="6613855" cy="320040"/>
+          </a:xfrm>
+          <a:prstGeom prst="rect">
+            <a:avLst/>
+          </a:prstGeom>
+          <a:noFill/>
+        </p:spPr>
+        <p:txBody>
+          <a:bodyPr wrap="square" anchor="t">
+            <a:spAutoFit/>
+          </a:bodyPr>
+          <a:lstStyle/>
+          <a:p>
+            <a:pPr algn="l"/>
+            <a:r>
+              <a:rPr sz="1700" b="0" i="0" lang="th-TH" altLang="en-US">
+                <a:solidFill>
+                  <a:srgbClr val="24333D"/>
+                </a:solidFill>
+                <a:latin typeface="Sarabun"/>
+                <a:ea typeface="Sarabun"/>
+                <a:cs typeface="Sarabun"/>
+              </a:rPr>
+              <a:t>คุณคือคุณนิใช่ไหม</a:t>
+            </a:r>
+          </a:p>
+        </p:txBody>
+      </p:sp>
+      <p:sp>
+        <p:nvSpPr>
+          <p:cNvPr id="24" name="TextBox 23"/>
+          <p:cNvSpPr txBox="1"/>
+          <p:nvPr/>
+        </p:nvSpPr>
+        <p:spPr>
+          <a:xfrm>
+            <a:off x="1078992" y="5669280"/>
+            <a:ext cx="6613855" cy="274320"/>
+          </a:xfrm>
+          <a:prstGeom prst="rect">
+            <a:avLst/>
+          </a:prstGeom>
+          <a:noFill/>
+        </p:spPr>
+        <p:txBody>
+          <a:bodyPr wrap="square" anchor="t">
+            <a:spAutoFit/>
+          </a:bodyPr>
+          <a:lstStyle/>
+          <a:p>
+            <a:pPr algn="l"/>
+            <a:r>
+              <a:rPr sz="1700" b="0" i="1" lang="en-US" altLang="en-US">
+                <a:solidFill>
+                  <a:srgbClr val="566873"/>
+                </a:solidFill>
+                <a:latin typeface="Sarabun"/>
+                <a:ea typeface="Sarabun"/>
+                <a:cs typeface="Sarabun"/>
+              </a:rPr>
+              <a:t>khun khuu khun ní châi mái</a:t>
+            </a:r>
+          </a:p>
+        </p:txBody>
+      </p:sp>
+      <p:sp>
+        <p:nvSpPr>
+          <p:cNvPr id="25" name="TextBox 24"/>
+          <p:cNvSpPr txBox="1"/>
+          <p:nvPr/>
+        </p:nvSpPr>
+        <p:spPr>
+          <a:xfrm>
+            <a:off x="1078992" y="6044184"/>
+            <a:ext cx="6613855" cy="274320"/>
+          </a:xfrm>
+          <a:prstGeom prst="rect">
+            <a:avLst/>
+          </a:prstGeom>
+          <a:noFill/>
+        </p:spPr>
+        <p:txBody>
+          <a:bodyPr wrap="square" anchor="t">
+            <a:spAutoFit/>
+          </a:bodyPr>
+          <a:lstStyle/>
+          <a:p>
+            <a:pPr algn="l"/>
+            <a:r>
+              <a:rPr sz="1700" b="0" i="0" lang="en-US" altLang="en-US">
+                <a:solidFill>
+                  <a:srgbClr val="82909A"/>
+                </a:solidFill>
+                <a:latin typeface="Sarabun"/>
+                <a:ea typeface="Sarabun"/>
+                <a:cs typeface="Sarabun"/>
+              </a:rPr>
+              <a:t>you are Khun Ni, right?</a:t>
             </a:r>
           </a:p>
         </p:txBody>
@@ -8242,7 +9503,7 @@
                 <a:ea typeface="Sarabun"/>
                 <a:cs typeface="Sarabun"/>
               </a:rPr>
-              <a:t>Roleplay</a:t>
+              <a:t>Teaching slide</a:t>
             </a:r>
           </a:p>
         </p:txBody>
@@ -8271,7 +9532,7 @@
           <a:p>
             <a:pPr algn="l"/>
             <a:r>
-              <a:rPr sz="3600" b="1" i="0" lang="en-US" altLang="en-US">
+              <a:rPr sz="2800" b="1" i="0" lang="en-US" altLang="en-US">
                 <a:solidFill>
                   <a:srgbClr val="24333D"/>
                 </a:solidFill>
@@ -8279,7 +9540,7 @@
                 <a:ea typeface="Sarabun"/>
                 <a:cs typeface="Sarabun"/>
               </a:rPr>
-              <a:t>Roleplay</a:t>
+              <a:t>Pronunciation: rising tones in pronouns</a:t>
             </a:r>
           </a:p>
         </p:txBody>
@@ -8292,17 +9553,13 @@
         </p:nvSpPr>
         <p:spPr>
           <a:xfrm>
-            <a:off x="731520" y="1097280"/>
-            <a:ext cx="1051560" cy="274320"/>
+            <a:off x="731520" y="1325880"/>
+            <a:ext cx="7071055" cy="1572768"/>
           </a:xfrm>
           <a:prstGeom prst="roundRect">
-            <a:avLst>
-              <a:gd name="adj" fmla="val 28000"/>
-            </a:avLst>
-          </a:prstGeom>
-          <a:solidFill>
-            <a:srgbClr val="7A8F54"/>
-          </a:solidFill>
+            <a:avLst/>
+          </a:prstGeom>
+          <a:noFill/>
           <a:ln>
             <a:noFill/>
           </a:ln>
@@ -8322,153 +9579,29 @@
           </a:fontRef>
         </p:style>
         <p:txBody>
-          <a:bodyPr rtlCol="0" anchor="ctr" wrap="none"/>
+          <a:bodyPr rtlCol="0" anchor="ctr"/>
           <a:lstStyle/>
           <a:p>
             <a:pPr algn="ctr"/>
-            <a:r>
-              <a:rPr sz="1200" b="1" lang="en-US" altLang="en-US">
-                <a:solidFill>
-                  <a:srgbClr val="FFFFFF"/>
-                </a:solidFill>
-                <a:latin typeface="Sarabun"/>
-                <a:ea typeface="Sarabun"/>
-                <a:cs typeface="Sarabun"/>
-              </a:rPr>
-              <a:t>You</a:t>
-            </a:r>
-          </a:p>
-        </p:txBody>
-      </p:sp>
-      <p:sp>
-        <p:nvSpPr>
-          <p:cNvPr id="7" name="TextBox 6"/>
-          <p:cNvSpPr txBox="1"/>
-          <p:nvPr/>
-        </p:nvSpPr>
-        <p:spPr>
-          <a:xfrm>
-            <a:off x="1965960" y="1069848"/>
-            <a:ext cx="5836615" cy="228600"/>
-          </a:xfrm>
-          <a:prstGeom prst="rect">
-            <a:avLst/>
-          </a:prstGeom>
-          <a:noFill/>
-        </p:spPr>
-        <p:txBody>
-          <a:bodyPr wrap="square" anchor="t">
-            <a:spAutoFit/>
-          </a:bodyPr>
-          <a:lstStyle/>
-          <a:p>
-            <a:pPr algn="l"/>
-            <a:r>
-              <a:rPr sz="1700" b="0" i="0" lang="th-TH" altLang="en-US">
-                <a:solidFill>
-                  <a:srgbClr val="24333D"/>
-                </a:solidFill>
-                <a:latin typeface="Sarabun"/>
-                <a:ea typeface="Sarabun"/>
-                <a:cs typeface="Sarabun"/>
-              </a:rPr>
-              <a:t>ขอโทษครับ เขาคือใครครับ</a:t>
-            </a:r>
-          </a:p>
-        </p:txBody>
-      </p:sp>
-      <p:sp>
-        <p:nvSpPr>
-          <p:cNvPr id="8" name="TextBox 7"/>
-          <p:cNvSpPr txBox="1"/>
-          <p:nvPr/>
-        </p:nvSpPr>
-        <p:spPr>
-          <a:xfrm>
-            <a:off x="1965960" y="1298448"/>
-            <a:ext cx="5836615" cy="201168"/>
-          </a:xfrm>
-          <a:prstGeom prst="rect">
-            <a:avLst/>
-          </a:prstGeom>
-          <a:noFill/>
-        </p:spPr>
-        <p:txBody>
-          <a:bodyPr wrap="square" anchor="t">
-            <a:spAutoFit/>
-          </a:bodyPr>
-          <a:lstStyle/>
-          <a:p>
-            <a:pPr algn="l"/>
-            <a:r>
-              <a:rPr sz="1700" b="0" i="1" lang="en-US" altLang="en-US">
-                <a:solidFill>
-                  <a:srgbClr val="566873"/>
-                </a:solidFill>
-                <a:latin typeface="Sarabun"/>
-                <a:ea typeface="Sarabun"/>
-                <a:cs typeface="Sarabun"/>
-              </a:rPr>
-              <a:t>khǎaw-thôot khráp khǎo khuue khrai khráp</a:t>
-            </a:r>
-          </a:p>
-        </p:txBody>
-      </p:sp>
-      <p:sp>
-        <p:nvSpPr>
-          <p:cNvPr id="9" name="TextBox 8"/>
-          <p:cNvSpPr txBox="1"/>
-          <p:nvPr/>
-        </p:nvSpPr>
-        <p:spPr>
-          <a:xfrm>
-            <a:off x="1965960" y="1499616"/>
-            <a:ext cx="5836615" cy="201168"/>
-          </a:xfrm>
-          <a:prstGeom prst="rect">
-            <a:avLst/>
-          </a:prstGeom>
-          <a:noFill/>
-        </p:spPr>
-        <p:txBody>
-          <a:bodyPr wrap="square" anchor="t">
-            <a:spAutoFit/>
-          </a:bodyPr>
-          <a:lstStyle/>
-          <a:p>
-            <a:pPr algn="l"/>
-            <a:r>
-              <a:rPr sz="1700" b="0" i="0" lang="en-US" altLang="en-US">
-                <a:solidFill>
-                  <a:srgbClr val="566873"/>
-                </a:solidFill>
-                <a:latin typeface="Sarabun"/>
-                <a:ea typeface="Sarabun"/>
-                <a:cs typeface="Sarabun"/>
-              </a:rPr>
-              <a:t>Excuse me, who is he/she?</a:t>
-            </a:r>
-          </a:p>
-        </p:txBody>
-      </p:sp>
-      <p:sp>
-        <p:nvSpPr>
-          <p:cNvPr id="10" name="Rounded Rectangle 9"/>
+          </a:p>
+        </p:txBody>
+      </p:sp>
+      <p:sp>
+        <p:nvSpPr>
+          <p:cNvPr id="7" name="Rectangle 6"/>
           <p:cNvSpPr/>
           <p:nvPr/>
         </p:nvSpPr>
         <p:spPr>
           <a:xfrm>
-            <a:off x="731520" y="2011680"/>
-            <a:ext cx="1051560" cy="274320"/>
-          </a:xfrm>
-          <a:prstGeom prst="roundRect">
-            <a:avLst>
-              <a:gd name="adj" fmla="val 28000"/>
-            </a:avLst>
+            <a:off x="868680" y="1527048"/>
+            <a:ext cx="73152" cy="1143000"/>
+          </a:xfrm>
+          <a:prstGeom prst="rect">
+            <a:avLst/>
           </a:prstGeom>
           <a:solidFill>
-            <a:srgbClr val="C96F4A"/>
+            <a:srgbClr val="355C7D"/>
           </a:solidFill>
           <a:ln>
             <a:noFill/>
@@ -8489,34 +9622,23 @@
           </a:fontRef>
         </p:style>
         <p:txBody>
-          <a:bodyPr rtlCol="0" anchor="ctr" wrap="none"/>
+          <a:bodyPr rtlCol="0" anchor="ctr"/>
           <a:lstStyle/>
           <a:p>
             <a:pPr algn="ctr"/>
-            <a:r>
-              <a:rPr sz="1200" b="1" lang="en-US" altLang="en-US">
-                <a:solidFill>
-                  <a:srgbClr val="FFFFFF"/>
-                </a:solidFill>
-                <a:latin typeface="Sarabun"/>
-                <a:ea typeface="Sarabun"/>
-                <a:cs typeface="Sarabun"/>
-              </a:rPr>
-              <a:t>Friend</a:t>
-            </a:r>
-          </a:p>
-        </p:txBody>
-      </p:sp>
-      <p:sp>
-        <p:nvSpPr>
-          <p:cNvPr id="11" name="TextBox 10"/>
+          </a:p>
+        </p:txBody>
+      </p:sp>
+      <p:sp>
+        <p:nvSpPr>
+          <p:cNvPr id="8" name="TextBox 7"/>
           <p:cNvSpPr txBox="1"/>
           <p:nvPr/>
         </p:nvSpPr>
         <p:spPr>
           <a:xfrm>
-            <a:off x="1965960" y="1984248"/>
-            <a:ext cx="5836615" cy="228600"/>
+            <a:off x="1078992" y="1463040"/>
+            <a:ext cx="6613855" cy="320040"/>
           </a:xfrm>
           <a:prstGeom prst="rect">
             <a:avLst/>
@@ -8539,21 +9661,21 @@
                 <a:ea typeface="Sarabun"/>
                 <a:cs typeface="Sarabun"/>
               </a:rPr>
-              <a:t>นี่คือแอนค่ะ</a:t>
-            </a:r>
-          </a:p>
-        </p:txBody>
-      </p:sp>
-      <p:sp>
-        <p:nvSpPr>
-          <p:cNvPr id="12" name="TextBox 11"/>
+              <a:t>ฉัน</a:t>
+            </a:r>
+          </a:p>
+        </p:txBody>
+      </p:sp>
+      <p:sp>
+        <p:nvSpPr>
+          <p:cNvPr id="9" name="TextBox 8"/>
           <p:cNvSpPr txBox="1"/>
           <p:nvPr/>
         </p:nvSpPr>
         <p:spPr>
           <a:xfrm>
-            <a:off x="1965960" y="2212848"/>
-            <a:ext cx="5836615" cy="201168"/>
+            <a:off x="1078992" y="1828800"/>
+            <a:ext cx="6613855" cy="274320"/>
           </a:xfrm>
           <a:prstGeom prst="rect">
             <a:avLst/>
@@ -8576,21 +9698,21 @@
                 <a:ea typeface="Sarabun"/>
                 <a:cs typeface="Sarabun"/>
               </a:rPr>
-              <a:t>nîi khuue Anne khâ</a:t>
-            </a:r>
-          </a:p>
-        </p:txBody>
-      </p:sp>
-      <p:sp>
-        <p:nvSpPr>
-          <p:cNvPr id="13" name="TextBox 12"/>
+              <a:t>chǎn</a:t>
+            </a:r>
+          </a:p>
+        </p:txBody>
+      </p:sp>
+      <p:sp>
+        <p:nvSpPr>
+          <p:cNvPr id="10" name="TextBox 9"/>
           <p:cNvSpPr txBox="1"/>
           <p:nvPr/>
         </p:nvSpPr>
         <p:spPr>
           <a:xfrm>
-            <a:off x="1965960" y="2414016"/>
-            <a:ext cx="5836615" cy="201168"/>
+            <a:off x="1078992" y="2203704"/>
+            <a:ext cx="6613855" cy="274320"/>
           </a:xfrm>
           <a:prstGeom prst="rect">
             <a:avLst/>
@@ -8607,36 +9729,32 @@
             <a:r>
               <a:rPr sz="1700" b="0" i="0" lang="en-US" altLang="en-US">
                 <a:solidFill>
-                  <a:srgbClr val="566873"/>
+                  <a:srgbClr val="82909A"/>
                 </a:solidFill>
                 <a:latin typeface="Sarabun"/>
                 <a:ea typeface="Sarabun"/>
                 <a:cs typeface="Sarabun"/>
               </a:rPr>
-              <a:t>This is Anne.</a:t>
-            </a:r>
-          </a:p>
-        </p:txBody>
-      </p:sp>
-      <p:sp>
-        <p:nvSpPr>
-          <p:cNvPr id="14" name="Rounded Rectangle 13"/>
+              <a:t>rising tone ↗</a:t>
+            </a:r>
+          </a:p>
+        </p:txBody>
+      </p:sp>
+      <p:sp>
+        <p:nvSpPr>
+          <p:cNvPr id="11" name="Rounded Rectangle 10"/>
           <p:cNvSpPr/>
           <p:nvPr/>
         </p:nvSpPr>
         <p:spPr>
           <a:xfrm>
-            <a:off x="731520" y="2926080"/>
-            <a:ext cx="1051560" cy="274320"/>
+            <a:off x="731520" y="2606040"/>
+            <a:ext cx="7071055" cy="1572768"/>
           </a:xfrm>
           <a:prstGeom prst="roundRect">
-            <a:avLst>
-              <a:gd name="adj" fmla="val 28000"/>
-            </a:avLst>
-          </a:prstGeom>
-          <a:solidFill>
-            <a:srgbClr val="7A8F54"/>
-          </a:solidFill>
+            <a:avLst/>
+          </a:prstGeom>
+          <a:noFill/>
           <a:ln>
             <a:noFill/>
           </a:ln>
@@ -8656,153 +9774,29 @@
           </a:fontRef>
         </p:style>
         <p:txBody>
-          <a:bodyPr rtlCol="0" anchor="ctr" wrap="none"/>
+          <a:bodyPr rtlCol="0" anchor="ctr"/>
           <a:lstStyle/>
           <a:p>
             <a:pPr algn="ctr"/>
-            <a:r>
-              <a:rPr sz="1200" b="1" lang="en-US" altLang="en-US">
-                <a:solidFill>
-                  <a:srgbClr val="FFFFFF"/>
-                </a:solidFill>
-                <a:latin typeface="Sarabun"/>
-                <a:ea typeface="Sarabun"/>
-                <a:cs typeface="Sarabun"/>
-              </a:rPr>
-              <a:t>You</a:t>
-            </a:r>
-          </a:p>
-        </p:txBody>
-      </p:sp>
-      <p:sp>
-        <p:nvSpPr>
-          <p:cNvPr id="15" name="TextBox 14"/>
-          <p:cNvSpPr txBox="1"/>
-          <p:nvPr/>
-        </p:nvSpPr>
-        <p:spPr>
-          <a:xfrm>
-            <a:off x="1965960" y="2898648"/>
-            <a:ext cx="8823960" cy="228600"/>
-          </a:xfrm>
-          <a:prstGeom prst="rect">
-            <a:avLst/>
-          </a:prstGeom>
-          <a:noFill/>
-        </p:spPr>
-        <p:txBody>
-          <a:bodyPr wrap="square" anchor="t">
-            <a:spAutoFit/>
-          </a:bodyPr>
-          <a:lstStyle/>
-          <a:p>
-            <a:pPr algn="l"/>
-            <a:r>
-              <a:rPr sz="1700" b="0" i="0" lang="th-TH" altLang="en-US">
-                <a:solidFill>
-                  <a:srgbClr val="24333D"/>
-                </a:solidFill>
-                <a:latin typeface="Sarabun"/>
-                <a:ea typeface="Sarabun"/>
-                <a:cs typeface="Sarabun"/>
-              </a:rPr>
-              <a:t>เขามาจากประเทศอะไรครับ</a:t>
-            </a:r>
-          </a:p>
-        </p:txBody>
-      </p:sp>
-      <p:sp>
-        <p:nvSpPr>
-          <p:cNvPr id="16" name="TextBox 15"/>
-          <p:cNvSpPr txBox="1"/>
-          <p:nvPr/>
-        </p:nvSpPr>
-        <p:spPr>
-          <a:xfrm>
-            <a:off x="1965960" y="3127248"/>
-            <a:ext cx="8823960" cy="201168"/>
-          </a:xfrm>
-          <a:prstGeom prst="rect">
-            <a:avLst/>
-          </a:prstGeom>
-          <a:noFill/>
-        </p:spPr>
-        <p:txBody>
-          <a:bodyPr wrap="square" anchor="t">
-            <a:spAutoFit/>
-          </a:bodyPr>
-          <a:lstStyle/>
-          <a:p>
-            <a:pPr algn="l"/>
-            <a:r>
-              <a:rPr sz="1700" b="0" i="1" lang="en-US" altLang="en-US">
-                <a:solidFill>
-                  <a:srgbClr val="566873"/>
-                </a:solidFill>
-                <a:latin typeface="Sarabun"/>
-                <a:ea typeface="Sarabun"/>
-                <a:cs typeface="Sarabun"/>
-              </a:rPr>
-              <a:t>khǎo maa-jàak prà-thêet à-rai khráp</a:t>
-            </a:r>
-          </a:p>
-        </p:txBody>
-      </p:sp>
-      <p:sp>
-        <p:nvSpPr>
-          <p:cNvPr id="17" name="TextBox 16"/>
-          <p:cNvSpPr txBox="1"/>
-          <p:nvPr/>
-        </p:nvSpPr>
-        <p:spPr>
-          <a:xfrm>
-            <a:off x="1965960" y="3328416"/>
-            <a:ext cx="8823960" cy="201168"/>
-          </a:xfrm>
-          <a:prstGeom prst="rect">
-            <a:avLst/>
-          </a:prstGeom>
-          <a:noFill/>
-        </p:spPr>
-        <p:txBody>
-          <a:bodyPr wrap="square" anchor="t">
-            <a:spAutoFit/>
-          </a:bodyPr>
-          <a:lstStyle/>
-          <a:p>
-            <a:pPr algn="l"/>
-            <a:r>
-              <a:rPr sz="1700" b="0" i="0" lang="en-US" altLang="en-US">
-                <a:solidFill>
-                  <a:srgbClr val="566873"/>
-                </a:solidFill>
-                <a:latin typeface="Sarabun"/>
-                <a:ea typeface="Sarabun"/>
-                <a:cs typeface="Sarabun"/>
-              </a:rPr>
-              <a:t>What country is she from?</a:t>
-            </a:r>
-          </a:p>
-        </p:txBody>
-      </p:sp>
-      <p:sp>
-        <p:nvSpPr>
-          <p:cNvPr id="18" name="Rounded Rectangle 17"/>
+          </a:p>
+        </p:txBody>
+      </p:sp>
+      <p:sp>
+        <p:nvSpPr>
+          <p:cNvPr id="12" name="Rectangle 11"/>
           <p:cNvSpPr/>
           <p:nvPr/>
         </p:nvSpPr>
         <p:spPr>
           <a:xfrm>
-            <a:off x="731520" y="3840480"/>
-            <a:ext cx="1051560" cy="274320"/>
-          </a:xfrm>
-          <a:prstGeom prst="roundRect">
-            <a:avLst>
-              <a:gd name="adj" fmla="val 28000"/>
-            </a:avLst>
+            <a:off x="868680" y="2807208"/>
+            <a:ext cx="73152" cy="1143000"/>
+          </a:xfrm>
+          <a:prstGeom prst="rect">
+            <a:avLst/>
           </a:prstGeom>
           <a:solidFill>
-            <a:srgbClr val="C96F4A"/>
+            <a:srgbClr val="355C7D"/>
           </a:solidFill>
           <a:ln>
             <a:noFill/>
@@ -8823,34 +9817,23 @@
           </a:fontRef>
         </p:style>
         <p:txBody>
-          <a:bodyPr rtlCol="0" anchor="ctr" wrap="none"/>
+          <a:bodyPr rtlCol="0" anchor="ctr"/>
           <a:lstStyle/>
           <a:p>
             <a:pPr algn="ctr"/>
-            <a:r>
-              <a:rPr sz="1200" b="1" lang="en-US" altLang="en-US">
-                <a:solidFill>
-                  <a:srgbClr val="FFFFFF"/>
-                </a:solidFill>
-                <a:latin typeface="Sarabun"/>
-                <a:ea typeface="Sarabun"/>
-                <a:cs typeface="Sarabun"/>
-              </a:rPr>
-              <a:t>Friend</a:t>
-            </a:r>
-          </a:p>
-        </p:txBody>
-      </p:sp>
-      <p:sp>
-        <p:nvSpPr>
-          <p:cNvPr id="19" name="TextBox 18"/>
+          </a:p>
+        </p:txBody>
+      </p:sp>
+      <p:sp>
+        <p:nvSpPr>
+          <p:cNvPr id="13" name="TextBox 12"/>
           <p:cNvSpPr txBox="1"/>
           <p:nvPr/>
         </p:nvSpPr>
         <p:spPr>
           <a:xfrm>
-            <a:off x="1965960" y="3813048"/>
-            <a:ext cx="8823960" cy="228600"/>
+            <a:off x="1078992" y="2743200"/>
+            <a:ext cx="6613855" cy="320040"/>
           </a:xfrm>
           <a:prstGeom prst="rect">
             <a:avLst/>
@@ -8873,21 +9856,21 @@
                 <a:ea typeface="Sarabun"/>
                 <a:cs typeface="Sarabun"/>
               </a:rPr>
-              <a:t>เขามาจากประเทศไทยค่ะ</a:t>
-            </a:r>
-          </a:p>
-        </p:txBody>
-      </p:sp>
-      <p:sp>
-        <p:nvSpPr>
-          <p:cNvPr id="20" name="TextBox 19"/>
+              <a:t>ผม</a:t>
+            </a:r>
+          </a:p>
+        </p:txBody>
+      </p:sp>
+      <p:sp>
+        <p:nvSpPr>
+          <p:cNvPr id="14" name="TextBox 13"/>
           <p:cNvSpPr txBox="1"/>
           <p:nvPr/>
         </p:nvSpPr>
         <p:spPr>
           <a:xfrm>
-            <a:off x="1965960" y="4041648"/>
-            <a:ext cx="8823960" cy="201168"/>
+            <a:off x="1078992" y="3108960"/>
+            <a:ext cx="6613855" cy="274320"/>
           </a:xfrm>
           <a:prstGeom prst="rect">
             <a:avLst/>
@@ -8910,21 +9893,21 @@
                 <a:ea typeface="Sarabun"/>
                 <a:cs typeface="Sarabun"/>
               </a:rPr>
-              <a:t>khǎo maa-jàak prà-thêet thai khâ</a:t>
-            </a:r>
-          </a:p>
-        </p:txBody>
-      </p:sp>
-      <p:sp>
-        <p:nvSpPr>
-          <p:cNvPr id="21" name="TextBox 20"/>
+              <a:t>phǒm</a:t>
+            </a:r>
+          </a:p>
+        </p:txBody>
+      </p:sp>
+      <p:sp>
+        <p:nvSpPr>
+          <p:cNvPr id="15" name="TextBox 14"/>
           <p:cNvSpPr txBox="1"/>
           <p:nvPr/>
         </p:nvSpPr>
         <p:spPr>
           <a:xfrm>
-            <a:off x="1965960" y="4242816"/>
-            <a:ext cx="8823960" cy="201168"/>
+            <a:off x="1078992" y="3483864"/>
+            <a:ext cx="6613855" cy="274320"/>
           </a:xfrm>
           <a:prstGeom prst="rect">
             <a:avLst/>
@@ -8941,36 +9924,32 @@
             <a:r>
               <a:rPr sz="1700" b="0" i="0" lang="en-US" altLang="en-US">
                 <a:solidFill>
-                  <a:srgbClr val="566873"/>
+                  <a:srgbClr val="82909A"/>
                 </a:solidFill>
                 <a:latin typeface="Sarabun"/>
                 <a:ea typeface="Sarabun"/>
                 <a:cs typeface="Sarabun"/>
               </a:rPr>
-              <a:t>She's from Thailand.</a:t>
-            </a:r>
-          </a:p>
-        </p:txBody>
-      </p:sp>
-      <p:sp>
-        <p:nvSpPr>
-          <p:cNvPr id="22" name="Rounded Rectangle 21"/>
+              <a:t>rising tone ↗</a:t>
+            </a:r>
+          </a:p>
+        </p:txBody>
+      </p:sp>
+      <p:sp>
+        <p:nvSpPr>
+          <p:cNvPr id="16" name="Rounded Rectangle 15"/>
           <p:cNvSpPr/>
           <p:nvPr/>
         </p:nvSpPr>
         <p:spPr>
           <a:xfrm>
-            <a:off x="731520" y="4754880"/>
-            <a:ext cx="1051560" cy="274320"/>
+            <a:off x="731520" y="3886200"/>
+            <a:ext cx="7071055" cy="1572768"/>
           </a:xfrm>
           <a:prstGeom prst="roundRect">
-            <a:avLst>
-              <a:gd name="adj" fmla="val 28000"/>
-            </a:avLst>
-          </a:prstGeom>
-          <a:solidFill>
-            <a:srgbClr val="7A8F54"/>
-          </a:solidFill>
+            <a:avLst/>
+          </a:prstGeom>
+          <a:noFill/>
           <a:ln>
             <a:noFill/>
           </a:ln>
@@ -8990,34 +9969,66 @@
           </a:fontRef>
         </p:style>
         <p:txBody>
-          <a:bodyPr rtlCol="0" anchor="ctr" wrap="none"/>
+          <a:bodyPr rtlCol="0" anchor="ctr"/>
           <a:lstStyle/>
           <a:p>
             <a:pPr algn="ctr"/>
-            <a:r>
-              <a:rPr sz="1200" b="1" lang="en-US" altLang="en-US">
-                <a:solidFill>
-                  <a:srgbClr val="FFFFFF"/>
-                </a:solidFill>
-                <a:latin typeface="Sarabun"/>
-                <a:ea typeface="Sarabun"/>
-                <a:cs typeface="Sarabun"/>
-              </a:rPr>
-              <a:t>You</a:t>
-            </a:r>
-          </a:p>
-        </p:txBody>
-      </p:sp>
-      <p:sp>
-        <p:nvSpPr>
-          <p:cNvPr id="23" name="TextBox 22"/>
+          </a:p>
+        </p:txBody>
+      </p:sp>
+      <p:sp>
+        <p:nvSpPr>
+          <p:cNvPr id="17" name="Rectangle 16"/>
+          <p:cNvSpPr/>
+          <p:nvPr/>
+        </p:nvSpPr>
+        <p:spPr>
+          <a:xfrm>
+            <a:off x="868680" y="4087368"/>
+            <a:ext cx="73152" cy="1143000"/>
+          </a:xfrm>
+          <a:prstGeom prst="rect">
+            <a:avLst/>
+          </a:prstGeom>
+          <a:solidFill>
+            <a:srgbClr val="355C7D"/>
+          </a:solidFill>
+          <a:ln>
+            <a:noFill/>
+          </a:ln>
+        </p:spPr>
+        <p:style>
+          <a:lnRef idx="1">
+            <a:schemeClr val="accent1"/>
+          </a:lnRef>
+          <a:fillRef idx="3">
+            <a:schemeClr val="accent1"/>
+          </a:fillRef>
+          <a:effectRef idx="2">
+            <a:schemeClr val="accent1"/>
+          </a:effectRef>
+          <a:fontRef idx="minor">
+            <a:schemeClr val="lt1"/>
+          </a:fontRef>
+        </p:style>
+        <p:txBody>
+          <a:bodyPr rtlCol="0" anchor="ctr"/>
+          <a:lstStyle/>
+          <a:p>
+            <a:pPr algn="ctr"/>
+          </a:p>
+        </p:txBody>
+      </p:sp>
+      <p:sp>
+        <p:nvSpPr>
+          <p:cNvPr id="18" name="TextBox 17"/>
           <p:cNvSpPr txBox="1"/>
           <p:nvPr/>
         </p:nvSpPr>
         <p:spPr>
           <a:xfrm>
-            <a:off x="1965960" y="4727448"/>
-            <a:ext cx="8823960" cy="228600"/>
+            <a:off x="1078992" y="4023360"/>
+            <a:ext cx="6613855" cy="320040"/>
           </a:xfrm>
           <a:prstGeom prst="rect">
             <a:avLst/>
@@ -9040,21 +10051,21 @@
                 <a:ea typeface="Sarabun"/>
                 <a:cs typeface="Sarabun"/>
               </a:rPr>
-              <a:t>คนไทยใช่ไหมครับ</a:t>
-            </a:r>
-          </a:p>
-        </p:txBody>
-      </p:sp>
-      <p:sp>
-        <p:nvSpPr>
-          <p:cNvPr id="24" name="TextBox 23"/>
+              <a:t>เขา</a:t>
+            </a:r>
+          </a:p>
+        </p:txBody>
+      </p:sp>
+      <p:sp>
+        <p:nvSpPr>
+          <p:cNvPr id="19" name="TextBox 18"/>
           <p:cNvSpPr txBox="1"/>
           <p:nvPr/>
         </p:nvSpPr>
         <p:spPr>
           <a:xfrm>
-            <a:off x="1965960" y="4956048"/>
-            <a:ext cx="8823960" cy="201168"/>
+            <a:off x="1078992" y="4389120"/>
+            <a:ext cx="6613855" cy="274320"/>
           </a:xfrm>
           <a:prstGeom prst="rect">
             <a:avLst/>
@@ -9077,21 +10088,21 @@
                 <a:ea typeface="Sarabun"/>
                 <a:cs typeface="Sarabun"/>
               </a:rPr>
-              <a:t>khon thai châi mǎi khráp</a:t>
-            </a:r>
-          </a:p>
-        </p:txBody>
-      </p:sp>
-      <p:sp>
-        <p:nvSpPr>
-          <p:cNvPr id="25" name="TextBox 24"/>
+              <a:t>khǎo</a:t>
+            </a:r>
+          </a:p>
+        </p:txBody>
+      </p:sp>
+      <p:sp>
+        <p:nvSpPr>
+          <p:cNvPr id="20" name="TextBox 19"/>
           <p:cNvSpPr txBox="1"/>
           <p:nvPr/>
         </p:nvSpPr>
         <p:spPr>
           <a:xfrm>
-            <a:off x="1965960" y="5157216"/>
-            <a:ext cx="8823960" cy="201168"/>
+            <a:off x="1078992" y="4764024"/>
+            <a:ext cx="6613855" cy="274320"/>
           </a:xfrm>
           <a:prstGeom prst="rect">
             <a:avLst/>
@@ -9108,13 +10119,208 @@
             <a:r>
               <a:rPr sz="1700" b="0" i="0" lang="en-US" altLang="en-US">
                 <a:solidFill>
-                  <a:srgbClr val="566873"/>
+                  <a:srgbClr val="82909A"/>
                 </a:solidFill>
                 <a:latin typeface="Sarabun"/>
                 <a:ea typeface="Sarabun"/>
                 <a:cs typeface="Sarabun"/>
               </a:rPr>
-              <a:t>A Thai person, right?</a:t>
+              <a:t>rising tone ↗</a:t>
+            </a:r>
+          </a:p>
+        </p:txBody>
+      </p:sp>
+      <p:sp>
+        <p:nvSpPr>
+          <p:cNvPr id="21" name="Rounded Rectangle 20"/>
+          <p:cNvSpPr/>
+          <p:nvPr/>
+        </p:nvSpPr>
+        <p:spPr>
+          <a:xfrm>
+            <a:off x="731520" y="5166360"/>
+            <a:ext cx="7071055" cy="1572768"/>
+          </a:xfrm>
+          <a:prstGeom prst="roundRect">
+            <a:avLst/>
+          </a:prstGeom>
+          <a:noFill/>
+          <a:ln>
+            <a:noFill/>
+          </a:ln>
+        </p:spPr>
+        <p:style>
+          <a:lnRef idx="1">
+            <a:schemeClr val="accent1"/>
+          </a:lnRef>
+          <a:fillRef idx="3">
+            <a:schemeClr val="accent1"/>
+          </a:fillRef>
+          <a:effectRef idx="2">
+            <a:schemeClr val="accent1"/>
+          </a:effectRef>
+          <a:fontRef idx="minor">
+            <a:schemeClr val="lt1"/>
+          </a:fontRef>
+        </p:style>
+        <p:txBody>
+          <a:bodyPr rtlCol="0" anchor="ctr"/>
+          <a:lstStyle/>
+          <a:p>
+            <a:pPr algn="ctr"/>
+          </a:p>
+        </p:txBody>
+      </p:sp>
+      <p:sp>
+        <p:nvSpPr>
+          <p:cNvPr id="22" name="Rectangle 21"/>
+          <p:cNvSpPr/>
+          <p:nvPr/>
+        </p:nvSpPr>
+        <p:spPr>
+          <a:xfrm>
+            <a:off x="868680" y="5367528"/>
+            <a:ext cx="73152" cy="1143000"/>
+          </a:xfrm>
+          <a:prstGeom prst="rect">
+            <a:avLst/>
+          </a:prstGeom>
+          <a:solidFill>
+            <a:srgbClr val="355C7D"/>
+          </a:solidFill>
+          <a:ln>
+            <a:noFill/>
+          </a:ln>
+        </p:spPr>
+        <p:style>
+          <a:lnRef idx="1">
+            <a:schemeClr val="accent1"/>
+          </a:lnRef>
+          <a:fillRef idx="3">
+            <a:schemeClr val="accent1"/>
+          </a:fillRef>
+          <a:effectRef idx="2">
+            <a:schemeClr val="accent1"/>
+          </a:effectRef>
+          <a:fontRef idx="minor">
+            <a:schemeClr val="lt1"/>
+          </a:fontRef>
+        </p:style>
+        <p:txBody>
+          <a:bodyPr rtlCol="0" anchor="ctr"/>
+          <a:lstStyle/>
+          <a:p>
+            <a:pPr algn="ctr"/>
+          </a:p>
+        </p:txBody>
+      </p:sp>
+      <p:sp>
+        <p:nvSpPr>
+          <p:cNvPr id="23" name="TextBox 22"/>
+          <p:cNvSpPr txBox="1"/>
+          <p:nvPr/>
+        </p:nvSpPr>
+        <p:spPr>
+          <a:xfrm>
+            <a:off x="1078992" y="5303520"/>
+            <a:ext cx="6613855" cy="320040"/>
+          </a:xfrm>
+          <a:prstGeom prst="rect">
+            <a:avLst/>
+          </a:prstGeom>
+          <a:noFill/>
+        </p:spPr>
+        <p:txBody>
+          <a:bodyPr wrap="square" anchor="t">
+            <a:spAutoFit/>
+          </a:bodyPr>
+          <a:lstStyle/>
+          <a:p>
+            <a:pPr algn="l"/>
+            <a:r>
+              <a:rPr sz="1700" b="0" i="0" lang="th-TH" altLang="en-US">
+                <a:solidFill>
+                  <a:srgbClr val="24333D"/>
+                </a:solidFill>
+                <a:latin typeface="Sarabun"/>
+                <a:ea typeface="Sarabun"/>
+                <a:cs typeface="Sarabun"/>
+              </a:rPr>
+              <a:t>คุณ</a:t>
+            </a:r>
+          </a:p>
+        </p:txBody>
+      </p:sp>
+      <p:sp>
+        <p:nvSpPr>
+          <p:cNvPr id="24" name="TextBox 23"/>
+          <p:cNvSpPr txBox="1"/>
+          <p:nvPr/>
+        </p:nvSpPr>
+        <p:spPr>
+          <a:xfrm>
+            <a:off x="1078992" y="5669280"/>
+            <a:ext cx="6613855" cy="274320"/>
+          </a:xfrm>
+          <a:prstGeom prst="rect">
+            <a:avLst/>
+          </a:prstGeom>
+          <a:noFill/>
+        </p:spPr>
+        <p:txBody>
+          <a:bodyPr wrap="square" anchor="t">
+            <a:spAutoFit/>
+          </a:bodyPr>
+          <a:lstStyle/>
+          <a:p>
+            <a:pPr algn="l"/>
+            <a:r>
+              <a:rPr sz="1700" b="0" i="1" lang="en-US" altLang="en-US">
+                <a:solidFill>
+                  <a:srgbClr val="566873"/>
+                </a:solidFill>
+                <a:latin typeface="Sarabun"/>
+                <a:ea typeface="Sarabun"/>
+                <a:cs typeface="Sarabun"/>
+              </a:rPr>
+              <a:t>khun</a:t>
+            </a:r>
+          </a:p>
+        </p:txBody>
+      </p:sp>
+      <p:sp>
+        <p:nvSpPr>
+          <p:cNvPr id="25" name="TextBox 24"/>
+          <p:cNvSpPr txBox="1"/>
+          <p:nvPr/>
+        </p:nvSpPr>
+        <p:spPr>
+          <a:xfrm>
+            <a:off x="1078992" y="6044184"/>
+            <a:ext cx="6613855" cy="274320"/>
+          </a:xfrm>
+          <a:prstGeom prst="rect">
+            <a:avLst/>
+          </a:prstGeom>
+          <a:noFill/>
+        </p:spPr>
+        <p:txBody>
+          <a:bodyPr wrap="square" anchor="t">
+            <a:spAutoFit/>
+          </a:bodyPr>
+          <a:lstStyle/>
+          <a:p>
+            <a:pPr algn="l"/>
+            <a:r>
+              <a:rPr sz="1700" b="0" i="0" lang="en-US" altLang="en-US">
+                <a:solidFill>
+                  <a:srgbClr val="82909A"/>
+                </a:solidFill>
+                <a:latin typeface="Sarabun"/>
+                <a:ea typeface="Sarabun"/>
+                <a:cs typeface="Sarabun"/>
+              </a:rPr>
+              <a:t>mid tone →</a:t>
             </a:r>
           </a:p>
         </p:txBody>
@@ -9277,7 +10483,7 @@
                 <a:ea typeface="Sarabun"/>
                 <a:cs typeface="Sarabun"/>
               </a:rPr>
-              <a:t>Recap</a:t>
+              <a:t>Roleplay</a:t>
             </a:r>
           </a:p>
         </p:txBody>
@@ -9314,696 +10520,26 @@
                 <a:ea typeface="Sarabun"/>
                 <a:cs typeface="Sarabun"/>
               </a:rPr>
-              <a:t>Recap</a:t>
-            </a:r>
-          </a:p>
-        </p:txBody>
-      </p:sp>
-      <p:sp>
-        <p:nvSpPr>
-          <p:cNvPr id="6" name="TextBox 5"/>
-          <p:cNvSpPr txBox="1"/>
-          <p:nvPr/>
-        </p:nvSpPr>
-        <p:spPr>
-          <a:xfrm>
-            <a:off x="932688" y="1563624"/>
-            <a:ext cx="6705295" cy="228600"/>
-          </a:xfrm>
-          <a:prstGeom prst="rect">
-            <a:avLst/>
-          </a:prstGeom>
-          <a:noFill/>
-        </p:spPr>
-        <p:txBody>
-          <a:bodyPr wrap="square" anchor="t">
-            <a:spAutoFit/>
-          </a:bodyPr>
-          <a:lstStyle/>
-          <a:p>
-            <a:pPr algn="l"/>
-            <a:r>
-              <a:rPr sz="1700" b="1" i="0" lang="en-US" altLang="en-US">
-                <a:solidFill>
-                  <a:srgbClr val="355C7D"/>
-                </a:solidFill>
-                <a:latin typeface="Sarabun"/>
-                <a:ea typeface="Sarabun"/>
-                <a:cs typeface="Sarabun"/>
-              </a:rPr>
-              <a:t>What you can now do</a:t>
-            </a:r>
-          </a:p>
-        </p:txBody>
-      </p:sp>
-      <p:sp>
-        <p:nvSpPr>
-          <p:cNvPr id="7" name="Oval 6"/>
+              <a:t>Roleplay</a:t>
+            </a:r>
+          </a:p>
+        </p:txBody>
+      </p:sp>
+      <p:sp>
+        <p:nvSpPr>
+          <p:cNvPr id="6" name="Rounded Rectangle 5"/>
           <p:cNvSpPr/>
           <p:nvPr/>
         </p:nvSpPr>
         <p:spPr>
           <a:xfrm>
-            <a:off x="932688" y="1947672"/>
-            <a:ext cx="82296" cy="82296"/>
-          </a:xfrm>
-          <a:prstGeom prst="ellipse">
-            <a:avLst/>
-          </a:prstGeom>
-          <a:solidFill>
-            <a:srgbClr val="355C7D"/>
-          </a:solidFill>
-          <a:ln>
-            <a:noFill/>
-          </a:ln>
-        </p:spPr>
-        <p:style>
-          <a:lnRef idx="1">
-            <a:schemeClr val="accent1"/>
-          </a:lnRef>
-          <a:fillRef idx="3">
-            <a:schemeClr val="accent1"/>
-          </a:fillRef>
-          <a:effectRef idx="2">
-            <a:schemeClr val="accent1"/>
-          </a:effectRef>
-          <a:fontRef idx="minor">
-            <a:schemeClr val="lt1"/>
-          </a:fontRef>
-        </p:style>
-        <p:txBody>
-          <a:bodyPr rtlCol="0" anchor="ctr"/>
-          <a:lstStyle/>
-          <a:p>
-            <a:pPr algn="ctr"/>
-          </a:p>
-        </p:txBody>
-      </p:sp>
-      <p:sp>
-        <p:nvSpPr>
-          <p:cNvPr id="8" name="TextBox 7"/>
-          <p:cNvSpPr txBox="1"/>
-          <p:nvPr/>
-        </p:nvSpPr>
-        <p:spPr>
-          <a:xfrm>
-            <a:off x="1078992" y="1856232"/>
-            <a:ext cx="6568135" cy="274320"/>
-          </a:xfrm>
-          <a:prstGeom prst="rect">
-            <a:avLst/>
-          </a:prstGeom>
-          <a:noFill/>
-        </p:spPr>
-        <p:txBody>
-          <a:bodyPr wrap="square" anchor="t">
-            <a:spAutoFit/>
-          </a:bodyPr>
-          <a:lstStyle/>
-          <a:p>
-            <a:pPr algn="l"/>
-            <a:r>
-              <a:rPr sz="1700" b="0" i="0" lang="th-TH" altLang="en-US">
-                <a:solidFill>
-                  <a:srgbClr val="24333D"/>
-                </a:solidFill>
-                <a:latin typeface="Sarabun"/>
-                <a:ea typeface="Sarabun"/>
-                <a:cs typeface="Sarabun"/>
-              </a:rPr>
-              <a:t>How do you say I if you are male? ผม (phǒm).</a:t>
-            </a:r>
-          </a:p>
-        </p:txBody>
-      </p:sp>
-      <p:sp>
-        <p:nvSpPr>
-          <p:cNvPr id="9" name="Oval 8"/>
-          <p:cNvSpPr/>
-          <p:nvPr/>
-        </p:nvSpPr>
-        <p:spPr>
-          <a:xfrm>
-            <a:off x="932688" y="2276856"/>
-            <a:ext cx="82296" cy="82296"/>
-          </a:xfrm>
-          <a:prstGeom prst="ellipse">
-            <a:avLst/>
-          </a:prstGeom>
-          <a:solidFill>
-            <a:srgbClr val="355C7D"/>
-          </a:solidFill>
-          <a:ln>
-            <a:noFill/>
-          </a:ln>
-        </p:spPr>
-        <p:style>
-          <a:lnRef idx="1">
-            <a:schemeClr val="accent1"/>
-          </a:lnRef>
-          <a:fillRef idx="3">
-            <a:schemeClr val="accent1"/>
-          </a:fillRef>
-          <a:effectRef idx="2">
-            <a:schemeClr val="accent1"/>
-          </a:effectRef>
-          <a:fontRef idx="minor">
-            <a:schemeClr val="lt1"/>
-          </a:fontRef>
-        </p:style>
-        <p:txBody>
-          <a:bodyPr rtlCol="0" anchor="ctr"/>
-          <a:lstStyle/>
-          <a:p>
-            <a:pPr algn="ctr"/>
-          </a:p>
-        </p:txBody>
-      </p:sp>
-      <p:sp>
-        <p:nvSpPr>
-          <p:cNvPr id="10" name="TextBox 9"/>
-          <p:cNvSpPr txBox="1"/>
-          <p:nvPr/>
-        </p:nvSpPr>
-        <p:spPr>
-          <a:xfrm>
-            <a:off x="1078992" y="2185416"/>
-            <a:ext cx="6568135" cy="475488"/>
-          </a:xfrm>
-          <a:prstGeom prst="rect">
-            <a:avLst/>
-          </a:prstGeom>
-          <a:noFill/>
-        </p:spPr>
-        <p:txBody>
-          <a:bodyPr wrap="square" anchor="t">
-            <a:spAutoFit/>
-          </a:bodyPr>
-          <a:lstStyle/>
-          <a:p>
-            <a:pPr algn="l"/>
-            <a:r>
-              <a:rPr sz="1700" b="0" i="0" lang="en-US" altLang="en-US">
-                <a:solidFill>
-                  <a:srgbClr val="24333D"/>
-                </a:solidFill>
-                <a:latin typeface="Sarabun"/>
-                <a:ea typeface="Sarabun"/>
-                <a:cs typeface="Sarabun"/>
-              </a:rPr>
-              <a:t>How do you say this is...? </a:t>
-            </a:r>
-            <a:r>
-              <a:rPr sz="1700" b="0" i="0" lang="th-TH" altLang="en-US">
-                <a:solidFill>
-                  <a:srgbClr val="24333D"/>
-                </a:solidFill>
-                <a:latin typeface="Sarabun"/>
-                <a:ea typeface="Sarabun"/>
-                <a:cs typeface="Sarabun"/>
-              </a:rPr>
-              <a:t>นี่</a:t>
-            </a:r>
-            <a:r>
-              <a:rPr sz="1700" b="0" i="1" lang="en-US" altLang="en-US">
-                <a:solidFill>
-                  <a:srgbClr val="566873"/>
-                </a:solidFill>
-                <a:latin typeface="Sarabun"/>
-                <a:ea typeface="Sarabun"/>
-                <a:cs typeface="Sarabun"/>
-              </a:rPr>
-              <a:t> (nîi)</a:t>
-            </a:r>
-            <a:r>
-              <a:rPr sz="1700" b="0" i="0" lang="th-TH" altLang="en-US">
-                <a:solidFill>
-                  <a:srgbClr val="24333D"/>
-                </a:solidFill>
-                <a:latin typeface="Sarabun"/>
-                <a:ea typeface="Sarabun"/>
-                <a:cs typeface="Sarabun"/>
-              </a:rPr>
-              <a:t>คือ</a:t>
-            </a:r>
-            <a:r>
-              <a:rPr sz="1700" b="0" i="1" lang="en-US" altLang="en-US">
-                <a:solidFill>
-                  <a:srgbClr val="566873"/>
-                </a:solidFill>
-                <a:latin typeface="Sarabun"/>
-                <a:ea typeface="Sarabun"/>
-                <a:cs typeface="Sarabun"/>
-              </a:rPr>
-              <a:t> (khuue)</a:t>
-            </a:r>
-            <a:r>
-              <a:rPr sz="1700" b="0" i="0" lang="en-US" altLang="en-US">
-                <a:solidFill>
-                  <a:srgbClr val="24333D"/>
-                </a:solidFill>
-                <a:latin typeface="Sarabun"/>
-                <a:ea typeface="Sarabun"/>
-                <a:cs typeface="Sarabun"/>
-              </a:rPr>
-              <a:t>... (nîi khuue...).</a:t>
-            </a:r>
-          </a:p>
-        </p:txBody>
-      </p:sp>
-      <p:sp>
-        <p:nvSpPr>
-          <p:cNvPr id="11" name="Oval 10"/>
-          <p:cNvSpPr/>
-          <p:nvPr/>
-        </p:nvSpPr>
-        <p:spPr>
-          <a:xfrm>
-            <a:off x="932688" y="2807208"/>
-            <a:ext cx="82296" cy="82296"/>
-          </a:xfrm>
-          <a:prstGeom prst="ellipse">
-            <a:avLst/>
-          </a:prstGeom>
-          <a:solidFill>
-            <a:srgbClr val="355C7D"/>
-          </a:solidFill>
-          <a:ln>
-            <a:noFill/>
-          </a:ln>
-        </p:spPr>
-        <p:style>
-          <a:lnRef idx="1">
-            <a:schemeClr val="accent1"/>
-          </a:lnRef>
-          <a:fillRef idx="3">
-            <a:schemeClr val="accent1"/>
-          </a:fillRef>
-          <a:effectRef idx="2">
-            <a:schemeClr val="accent1"/>
-          </a:effectRef>
-          <a:fontRef idx="minor">
-            <a:schemeClr val="lt1"/>
-          </a:fontRef>
-        </p:style>
-        <p:txBody>
-          <a:bodyPr rtlCol="0" anchor="ctr"/>
-          <a:lstStyle/>
-          <a:p>
-            <a:pPr algn="ctr"/>
-          </a:p>
-        </p:txBody>
-      </p:sp>
-      <p:sp>
-        <p:nvSpPr>
-          <p:cNvPr id="12" name="TextBox 11"/>
-          <p:cNvSpPr txBox="1"/>
-          <p:nvPr/>
-        </p:nvSpPr>
-        <p:spPr>
-          <a:xfrm>
-            <a:off x="1078992" y="2715768"/>
-            <a:ext cx="6568135" cy="475488"/>
-          </a:xfrm>
-          <a:prstGeom prst="rect">
-            <a:avLst/>
-          </a:prstGeom>
-          <a:noFill/>
-        </p:spPr>
-        <p:txBody>
-          <a:bodyPr wrap="square" anchor="t">
-            <a:spAutoFit/>
-          </a:bodyPr>
-          <a:lstStyle/>
-          <a:p>
-            <a:pPr algn="l"/>
-            <a:r>
-              <a:rPr sz="1700" b="0" i="0" lang="en-US" altLang="en-US">
-                <a:solidFill>
-                  <a:srgbClr val="24333D"/>
-                </a:solidFill>
-                <a:latin typeface="Sarabun"/>
-                <a:ea typeface="Sarabun"/>
-                <a:cs typeface="Sarabun"/>
-              </a:rPr>
-              <a:t>How do you ask who someone is? </a:t>
-            </a:r>
-            <a:r>
-              <a:rPr sz="1700" b="0" i="0" lang="th-TH" altLang="en-US">
-                <a:solidFill>
-                  <a:srgbClr val="24333D"/>
-                </a:solidFill>
-                <a:latin typeface="Sarabun"/>
-                <a:ea typeface="Sarabun"/>
-                <a:cs typeface="Sarabun"/>
-              </a:rPr>
-              <a:t>เขา</a:t>
-            </a:r>
-            <a:r>
-              <a:rPr sz="1700" b="0" i="1" lang="en-US" altLang="en-US">
-                <a:solidFill>
-                  <a:srgbClr val="566873"/>
-                </a:solidFill>
-                <a:latin typeface="Sarabun"/>
-                <a:ea typeface="Sarabun"/>
-                <a:cs typeface="Sarabun"/>
-              </a:rPr>
-              <a:t> (khǎo)</a:t>
-            </a:r>
-            <a:r>
-              <a:rPr sz="1700" b="0" i="0" lang="th-TH" altLang="en-US">
-                <a:solidFill>
-                  <a:srgbClr val="24333D"/>
-                </a:solidFill>
-                <a:latin typeface="Sarabun"/>
-                <a:ea typeface="Sarabun"/>
-                <a:cs typeface="Sarabun"/>
-              </a:rPr>
-              <a:t>คือ</a:t>
-            </a:r>
-            <a:r>
-              <a:rPr sz="1700" b="0" i="1" lang="en-US" altLang="en-US">
-                <a:solidFill>
-                  <a:srgbClr val="566873"/>
-                </a:solidFill>
-                <a:latin typeface="Sarabun"/>
-                <a:ea typeface="Sarabun"/>
-                <a:cs typeface="Sarabun"/>
-              </a:rPr>
-              <a:t> (khuue)</a:t>
-            </a:r>
-            <a:r>
-              <a:rPr sz="1700" b="0" i="0" lang="th-TH" altLang="en-US">
-                <a:solidFill>
-                  <a:srgbClr val="24333D"/>
-                </a:solidFill>
-                <a:latin typeface="Sarabun"/>
-                <a:ea typeface="Sarabun"/>
-                <a:cs typeface="Sarabun"/>
-              </a:rPr>
-              <a:t>ใคร (khǎo khuue khrai).</a:t>
-            </a:r>
-          </a:p>
-        </p:txBody>
-      </p:sp>
-      <p:sp>
-        <p:nvSpPr>
-          <p:cNvPr id="13" name="Oval 12"/>
-          <p:cNvSpPr/>
-          <p:nvPr/>
-        </p:nvSpPr>
-        <p:spPr>
-          <a:xfrm>
-            <a:off x="932688" y="3337560"/>
-            <a:ext cx="82296" cy="82296"/>
-          </a:xfrm>
-          <a:prstGeom prst="ellipse">
-            <a:avLst/>
-          </a:prstGeom>
-          <a:solidFill>
-            <a:srgbClr val="355C7D"/>
-          </a:solidFill>
-          <a:ln>
-            <a:noFill/>
-          </a:ln>
-        </p:spPr>
-        <p:style>
-          <a:lnRef idx="1">
-            <a:schemeClr val="accent1"/>
-          </a:lnRef>
-          <a:fillRef idx="3">
-            <a:schemeClr val="accent1"/>
-          </a:fillRef>
-          <a:effectRef idx="2">
-            <a:schemeClr val="accent1"/>
-          </a:effectRef>
-          <a:fontRef idx="minor">
-            <a:schemeClr val="lt1"/>
-          </a:fontRef>
-        </p:style>
-        <p:txBody>
-          <a:bodyPr rtlCol="0" anchor="ctr"/>
-          <a:lstStyle/>
-          <a:p>
-            <a:pPr algn="ctr"/>
-          </a:p>
-        </p:txBody>
-      </p:sp>
-      <p:sp>
-        <p:nvSpPr>
-          <p:cNvPr id="14" name="TextBox 13"/>
-          <p:cNvSpPr txBox="1"/>
-          <p:nvPr/>
-        </p:nvSpPr>
-        <p:spPr>
-          <a:xfrm>
-            <a:off x="1078992" y="3246120"/>
-            <a:ext cx="6568135" cy="475488"/>
-          </a:xfrm>
-          <a:prstGeom prst="rect">
-            <a:avLst/>
-          </a:prstGeom>
-          <a:noFill/>
-        </p:spPr>
-        <p:txBody>
-          <a:bodyPr wrap="square" anchor="t">
-            <a:spAutoFit/>
-          </a:bodyPr>
-          <a:lstStyle/>
-          <a:p>
-            <a:pPr algn="l"/>
-            <a:r>
-              <a:rPr sz="1700" b="0" i="0" lang="en-US" altLang="en-US">
-                <a:solidFill>
-                  <a:srgbClr val="24333D"/>
-                </a:solidFill>
-                <a:latin typeface="Sarabun"/>
-                <a:ea typeface="Sarabun"/>
-                <a:cs typeface="Sarabun"/>
-              </a:rPr>
-              <a:t>How do you confirm someone's identity? </a:t>
-            </a:r>
-            <a:r>
-              <a:rPr sz="1700" b="0" i="0" lang="th-TH" altLang="en-US">
-                <a:solidFill>
-                  <a:srgbClr val="24333D"/>
-                </a:solidFill>
-                <a:latin typeface="Sarabun"/>
-                <a:ea typeface="Sarabun"/>
-                <a:cs typeface="Sarabun"/>
-              </a:rPr>
-              <a:t>คุณ</a:t>
-            </a:r>
-            <a:r>
-              <a:rPr sz="1700" b="0" i="1" lang="en-US" altLang="en-US">
-                <a:solidFill>
-                  <a:srgbClr val="566873"/>
-                </a:solidFill>
-                <a:latin typeface="Sarabun"/>
-                <a:ea typeface="Sarabun"/>
-                <a:cs typeface="Sarabun"/>
-              </a:rPr>
-              <a:t> (khun)</a:t>
-            </a:r>
-            <a:r>
-              <a:rPr sz="1700" b="0" i="0" lang="th-TH" altLang="en-US">
-                <a:solidFill>
-                  <a:srgbClr val="24333D"/>
-                </a:solidFill>
-                <a:latin typeface="Sarabun"/>
-                <a:ea typeface="Sarabun"/>
-                <a:cs typeface="Sarabun"/>
-              </a:rPr>
-              <a:t>คือ</a:t>
-            </a:r>
-            <a:r>
-              <a:rPr sz="1700" b="0" i="1" lang="en-US" altLang="en-US">
-                <a:solidFill>
-                  <a:srgbClr val="566873"/>
-                </a:solidFill>
-                <a:latin typeface="Sarabun"/>
-                <a:ea typeface="Sarabun"/>
-                <a:cs typeface="Sarabun"/>
-              </a:rPr>
-              <a:t> (khuue)</a:t>
-            </a:r>
-            <a:r>
-              <a:rPr sz="1700" b="0" i="0" lang="th-TH" altLang="en-US">
-                <a:solidFill>
-                  <a:srgbClr val="24333D"/>
-                </a:solidFill>
-                <a:latin typeface="Sarabun"/>
-                <a:ea typeface="Sarabun"/>
-                <a:cs typeface="Sarabun"/>
-              </a:rPr>
-              <a:t>...ใช่ไหม (khun khuue...châi mǎi).</a:t>
-            </a:r>
-          </a:p>
-        </p:txBody>
-      </p:sp>
-      <p:sp>
-        <p:nvSpPr>
-          <p:cNvPr id="15" name="Oval 14"/>
-          <p:cNvSpPr/>
-          <p:nvPr/>
-        </p:nvSpPr>
-        <p:spPr>
-          <a:xfrm>
-            <a:off x="932688" y="3867912"/>
-            <a:ext cx="82296" cy="82296"/>
-          </a:xfrm>
-          <a:prstGeom prst="ellipse">
-            <a:avLst/>
-          </a:prstGeom>
-          <a:solidFill>
-            <a:srgbClr val="355C7D"/>
-          </a:solidFill>
-          <a:ln>
-            <a:noFill/>
-          </a:ln>
-        </p:spPr>
-        <p:style>
-          <a:lnRef idx="1">
-            <a:schemeClr val="accent1"/>
-          </a:lnRef>
-          <a:fillRef idx="3">
-            <a:schemeClr val="accent1"/>
-          </a:fillRef>
-          <a:effectRef idx="2">
-            <a:schemeClr val="accent1"/>
-          </a:effectRef>
-          <a:fontRef idx="minor">
-            <a:schemeClr val="lt1"/>
-          </a:fontRef>
-        </p:style>
-        <p:txBody>
-          <a:bodyPr rtlCol="0" anchor="ctr"/>
-          <a:lstStyle/>
-          <a:p>
-            <a:pPr algn="ctr"/>
-          </a:p>
-        </p:txBody>
-      </p:sp>
-      <p:sp>
-        <p:nvSpPr>
-          <p:cNvPr id="16" name="TextBox 15"/>
-          <p:cNvSpPr txBox="1"/>
-          <p:nvPr/>
-        </p:nvSpPr>
-        <p:spPr>
-          <a:xfrm>
-            <a:off x="1078992" y="3776472"/>
-            <a:ext cx="6568135" cy="475488"/>
-          </a:xfrm>
-          <a:prstGeom prst="rect">
-            <a:avLst/>
-          </a:prstGeom>
-          <a:noFill/>
-        </p:spPr>
-        <p:txBody>
-          <a:bodyPr wrap="square" anchor="t">
-            <a:spAutoFit/>
-          </a:bodyPr>
-          <a:lstStyle/>
-          <a:p>
-            <a:pPr algn="l"/>
-            <a:r>
-              <a:rPr sz="1700" b="0" i="0" lang="en-US" altLang="en-US">
-                <a:solidFill>
-                  <a:srgbClr val="24333D"/>
-                </a:solidFill>
-                <a:latin typeface="Sarabun"/>
-                <a:ea typeface="Sarabun"/>
-                <a:cs typeface="Sarabun"/>
-              </a:rPr>
-              <a:t>What does </a:t>
-            </a:r>
-            <a:r>
-              <a:rPr sz="1700" b="0" i="0" lang="th-TH" altLang="en-US">
-                <a:solidFill>
-                  <a:srgbClr val="24333D"/>
-                </a:solidFill>
-                <a:latin typeface="Sarabun"/>
-                <a:ea typeface="Sarabun"/>
-                <a:cs typeface="Sarabun"/>
-              </a:rPr>
-              <a:t>คือ</a:t>
-            </a:r>
-            <a:r>
-              <a:rPr sz="1700" b="0" i="1" lang="en-US" altLang="en-US">
-                <a:solidFill>
-                  <a:srgbClr val="566873"/>
-                </a:solidFill>
-                <a:latin typeface="Sarabun"/>
-                <a:ea typeface="Sarabun"/>
-                <a:cs typeface="Sarabun"/>
-              </a:rPr>
-              <a:t> (khuue)</a:t>
-            </a:r>
-            <a:r>
-              <a:rPr sz="1700" b="0" i="0" lang="en-US" altLang="en-US">
-                <a:solidFill>
-                  <a:srgbClr val="24333D"/>
-                </a:solidFill>
-                <a:latin typeface="Sarabun"/>
-                <a:ea typeface="Sarabun"/>
-                <a:cs typeface="Sarabun"/>
-              </a:rPr>
-              <a:t> mean? It connects a person to their identity — is.</a:t>
-            </a:r>
-          </a:p>
-        </p:txBody>
-      </p:sp>
-      <p:sp>
-        <p:nvSpPr>
-          <p:cNvPr id="17" name="TextBox 16"/>
-          <p:cNvSpPr txBox="1"/>
-          <p:nvPr/>
-        </p:nvSpPr>
-        <p:spPr>
-          <a:xfrm>
-            <a:off x="932688" y="4727448"/>
-            <a:ext cx="9692640" cy="228600"/>
-          </a:xfrm>
-          <a:prstGeom prst="rect">
-            <a:avLst/>
-          </a:prstGeom>
-          <a:noFill/>
-        </p:spPr>
-        <p:txBody>
-          <a:bodyPr wrap="square" anchor="t">
-            <a:spAutoFit/>
-          </a:bodyPr>
-          <a:lstStyle/>
-          <a:p>
-            <a:pPr algn="l"/>
-            <a:r>
-              <a:rPr sz="1700" b="1" i="0" lang="en-US" altLang="en-US">
-                <a:solidFill>
-                  <a:srgbClr val="7A8F54"/>
-                </a:solidFill>
-                <a:latin typeface="Sarabun"/>
-                <a:ea typeface="Sarabun"/>
-                <a:cs typeface="Sarabun"/>
-              </a:rPr>
-              <a:t>Remember</a:t>
-            </a:r>
-          </a:p>
-        </p:txBody>
-      </p:sp>
-      <p:sp>
-        <p:nvSpPr>
-          <p:cNvPr id="18" name="Oval 17"/>
-          <p:cNvSpPr/>
-          <p:nvPr/>
-        </p:nvSpPr>
-        <p:spPr>
-          <a:xfrm>
-            <a:off x="932688" y="5111496"/>
-            <a:ext cx="82296" cy="82296"/>
-          </a:xfrm>
-          <a:prstGeom prst="ellipse">
-            <a:avLst/>
+            <a:off x="731520" y="1097280"/>
+            <a:ext cx="1051560" cy="274320"/>
+          </a:xfrm>
+          <a:prstGeom prst="roundRect">
+            <a:avLst>
+              <a:gd name="adj" fmla="val 28000"/>
+            </a:avLst>
           </a:prstGeom>
           <a:solidFill>
             <a:srgbClr val="7A8F54"/>
@@ -10027,23 +10563,34 @@
           </a:fontRef>
         </p:style>
         <p:txBody>
-          <a:bodyPr rtlCol="0" anchor="ctr"/>
+          <a:bodyPr rtlCol="0" anchor="ctr" wrap="none"/>
           <a:lstStyle/>
           <a:p>
             <a:pPr algn="ctr"/>
-          </a:p>
-        </p:txBody>
-      </p:sp>
-      <p:sp>
-        <p:nvSpPr>
-          <p:cNvPr id="19" name="TextBox 18"/>
+            <a:r>
+              <a:rPr sz="1200" b="1" lang="en-US" altLang="en-US">
+                <a:solidFill>
+                  <a:srgbClr val="FFFFFF"/>
+                </a:solidFill>
+                <a:latin typeface="Sarabun"/>
+                <a:ea typeface="Sarabun"/>
+                <a:cs typeface="Sarabun"/>
+              </a:rPr>
+              <a:t>You</a:t>
+            </a:r>
+          </a:p>
+        </p:txBody>
+      </p:sp>
+      <p:sp>
+        <p:nvSpPr>
+          <p:cNvPr id="7" name="TextBox 6"/>
           <p:cNvSpPr txBox="1"/>
           <p:nvPr/>
         </p:nvSpPr>
         <p:spPr>
           <a:xfrm>
-            <a:off x="1078992" y="5020056"/>
-            <a:ext cx="9555480" cy="274320"/>
+            <a:off x="1965960" y="1069848"/>
+            <a:ext cx="5836615" cy="228600"/>
           </a:xfrm>
           <a:prstGeom prst="rect">
             <a:avLst/>
@@ -10058,7 +10605,7 @@
           <a:p>
             <a:pPr algn="l"/>
             <a:r>
-              <a:rPr sz="1700" b="0" i="0" lang="en-US" altLang="en-US">
+              <a:rPr sz="1700" b="0" i="0" lang="th-TH" altLang="en-US">
                 <a:solidFill>
                   <a:srgbClr val="24333D"/>
                 </a:solidFill>
@@ -10066,21 +10613,73 @@
                 <a:ea typeface="Sarabun"/>
                 <a:cs typeface="Sarabun"/>
               </a:rPr>
-              <a:t>What does </a:t>
-            </a:r>
-            <a:r>
-              <a:rPr sz="1700" b="0" i="0" lang="th-TH" altLang="en-US">
-                <a:solidFill>
-                  <a:srgbClr val="24333D"/>
+              <a:t>ขอโทษครับ เขาคือใคร</a:t>
+            </a:r>
+          </a:p>
+        </p:txBody>
+      </p:sp>
+      <p:sp>
+        <p:nvSpPr>
+          <p:cNvPr id="8" name="TextBox 7"/>
+          <p:cNvSpPr txBox="1"/>
+          <p:nvPr/>
+        </p:nvSpPr>
+        <p:spPr>
+          <a:xfrm>
+            <a:off x="1965960" y="1298448"/>
+            <a:ext cx="5836615" cy="201168"/>
+          </a:xfrm>
+          <a:prstGeom prst="rect">
+            <a:avLst/>
+          </a:prstGeom>
+          <a:noFill/>
+        </p:spPr>
+        <p:txBody>
+          <a:bodyPr wrap="square" anchor="t">
+            <a:spAutoFit/>
+          </a:bodyPr>
+          <a:lstStyle/>
+          <a:p>
+            <a:pPr algn="l"/>
+            <a:r>
+              <a:rPr sz="1700" b="0" i="1" lang="en-US" altLang="en-US">
+                <a:solidFill>
+                  <a:srgbClr val="566873"/>
                 </a:solidFill>
                 <a:latin typeface="Sarabun"/>
                 <a:ea typeface="Sarabun"/>
                 <a:cs typeface="Sarabun"/>
               </a:rPr>
-              <a:t>คือ</a:t>
-            </a:r>
-            <a:r>
-              <a:rPr sz="1700" b="0" i="1" lang="en-US" altLang="en-US">
+              <a:t>khǎaw-thôot khráp khǎo khuu khrai</a:t>
+            </a:r>
+          </a:p>
+        </p:txBody>
+      </p:sp>
+      <p:sp>
+        <p:nvSpPr>
+          <p:cNvPr id="9" name="TextBox 8"/>
+          <p:cNvSpPr txBox="1"/>
+          <p:nvPr/>
+        </p:nvSpPr>
+        <p:spPr>
+          <a:xfrm>
+            <a:off x="1965960" y="1499616"/>
+            <a:ext cx="5836615" cy="201168"/>
+          </a:xfrm>
+          <a:prstGeom prst="rect">
+            <a:avLst/>
+          </a:prstGeom>
+          <a:noFill/>
+        </p:spPr>
+        <p:txBody>
+          <a:bodyPr wrap="square" anchor="t">
+            <a:spAutoFit/>
+          </a:bodyPr>
+          <a:lstStyle/>
+          <a:p>
+            <a:pPr algn="l"/>
+            <a:r>
+              <a:rPr sz="1700" b="0" i="0" lang="en-US" altLang="en-US">
                 <a:solidFill>
                   <a:srgbClr val="566873"/>
                 </a:solidFill>
@@ -10088,18 +10687,675 @@
                 <a:ea typeface="Sarabun"/>
                 <a:cs typeface="Sarabun"/>
               </a:rPr>
-              <a:t> (khuue)</a:t>
-            </a:r>
-            <a:r>
-              <a:rPr sz="1700" b="0" i="0" lang="en-US" altLang="en-US">
-                <a:solidFill>
-                  <a:srgbClr val="24333D"/>
+              <a:t>Excuse me, who is he/she?</a:t>
+            </a:r>
+          </a:p>
+        </p:txBody>
+      </p:sp>
+      <p:sp>
+        <p:nvSpPr>
+          <p:cNvPr id="10" name="Rounded Rectangle 9"/>
+          <p:cNvSpPr/>
+          <p:nvPr/>
+        </p:nvSpPr>
+        <p:spPr>
+          <a:xfrm>
+            <a:off x="731520" y="2011680"/>
+            <a:ext cx="1051560" cy="274320"/>
+          </a:xfrm>
+          <a:prstGeom prst="roundRect">
+            <a:avLst>
+              <a:gd name="adj" fmla="val 28000"/>
+            </a:avLst>
+          </a:prstGeom>
+          <a:solidFill>
+            <a:srgbClr val="C96F4A"/>
+          </a:solidFill>
+          <a:ln>
+            <a:noFill/>
+          </a:ln>
+        </p:spPr>
+        <p:style>
+          <a:lnRef idx="1">
+            <a:schemeClr val="accent1"/>
+          </a:lnRef>
+          <a:fillRef idx="3">
+            <a:schemeClr val="accent1"/>
+          </a:fillRef>
+          <a:effectRef idx="2">
+            <a:schemeClr val="accent1"/>
+          </a:effectRef>
+          <a:fontRef idx="minor">
+            <a:schemeClr val="lt1"/>
+          </a:fontRef>
+        </p:style>
+        <p:txBody>
+          <a:bodyPr rtlCol="0" anchor="ctr" wrap="none"/>
+          <a:lstStyle/>
+          <a:p>
+            <a:pPr algn="ctr"/>
+            <a:r>
+              <a:rPr sz="1200" b="1" lang="en-US" altLang="en-US">
+                <a:solidFill>
+                  <a:srgbClr val="FFFFFF"/>
                 </a:solidFill>
                 <a:latin typeface="Sarabun"/>
                 <a:ea typeface="Sarabun"/>
                 <a:cs typeface="Sarabun"/>
               </a:rPr>
-              <a:t> mean? It connects a person to their identity — is.</a:t>
+              <a:t>Friend</a:t>
+            </a:r>
+          </a:p>
+        </p:txBody>
+      </p:sp>
+      <p:sp>
+        <p:nvSpPr>
+          <p:cNvPr id="11" name="TextBox 10"/>
+          <p:cNvSpPr txBox="1"/>
+          <p:nvPr/>
+        </p:nvSpPr>
+        <p:spPr>
+          <a:xfrm>
+            <a:off x="1965960" y="1984248"/>
+            <a:ext cx="5836615" cy="228600"/>
+          </a:xfrm>
+          <a:prstGeom prst="rect">
+            <a:avLst/>
+          </a:prstGeom>
+          <a:noFill/>
+        </p:spPr>
+        <p:txBody>
+          <a:bodyPr wrap="square" anchor="t">
+            <a:spAutoFit/>
+          </a:bodyPr>
+          <a:lstStyle/>
+          <a:p>
+            <a:pPr algn="l"/>
+            <a:r>
+              <a:rPr sz="1700" b="0" i="0" lang="th-TH" altLang="en-US">
+                <a:solidFill>
+                  <a:srgbClr val="24333D"/>
+                </a:solidFill>
+                <a:latin typeface="Sarabun"/>
+                <a:ea typeface="Sarabun"/>
+                <a:cs typeface="Sarabun"/>
+              </a:rPr>
+              <a:t>นี่คือคุณนิค่ะ</a:t>
+            </a:r>
+          </a:p>
+        </p:txBody>
+      </p:sp>
+      <p:sp>
+        <p:nvSpPr>
+          <p:cNvPr id="12" name="TextBox 11"/>
+          <p:cNvSpPr txBox="1"/>
+          <p:nvPr/>
+        </p:nvSpPr>
+        <p:spPr>
+          <a:xfrm>
+            <a:off x="1965960" y="2212848"/>
+            <a:ext cx="5836615" cy="201168"/>
+          </a:xfrm>
+          <a:prstGeom prst="rect">
+            <a:avLst/>
+          </a:prstGeom>
+          <a:noFill/>
+        </p:spPr>
+        <p:txBody>
+          <a:bodyPr wrap="square" anchor="t">
+            <a:spAutoFit/>
+          </a:bodyPr>
+          <a:lstStyle/>
+          <a:p>
+            <a:pPr algn="l"/>
+            <a:r>
+              <a:rPr sz="1700" b="0" i="1" lang="en-US" altLang="en-US">
+                <a:solidFill>
+                  <a:srgbClr val="566873"/>
+                </a:solidFill>
+                <a:latin typeface="Sarabun"/>
+                <a:ea typeface="Sarabun"/>
+                <a:cs typeface="Sarabun"/>
+              </a:rPr>
+              <a:t>nîi khuu khun ní khâ</a:t>
+            </a:r>
+          </a:p>
+        </p:txBody>
+      </p:sp>
+      <p:sp>
+        <p:nvSpPr>
+          <p:cNvPr id="13" name="TextBox 12"/>
+          <p:cNvSpPr txBox="1"/>
+          <p:nvPr/>
+        </p:nvSpPr>
+        <p:spPr>
+          <a:xfrm>
+            <a:off x="1965960" y="2414016"/>
+            <a:ext cx="5836615" cy="201168"/>
+          </a:xfrm>
+          <a:prstGeom prst="rect">
+            <a:avLst/>
+          </a:prstGeom>
+          <a:noFill/>
+        </p:spPr>
+        <p:txBody>
+          <a:bodyPr wrap="square" anchor="t">
+            <a:spAutoFit/>
+          </a:bodyPr>
+          <a:lstStyle/>
+          <a:p>
+            <a:pPr algn="l"/>
+            <a:r>
+              <a:rPr sz="1700" b="0" i="0" lang="en-US" altLang="en-US">
+                <a:solidFill>
+                  <a:srgbClr val="566873"/>
+                </a:solidFill>
+                <a:latin typeface="Sarabun"/>
+                <a:ea typeface="Sarabun"/>
+                <a:cs typeface="Sarabun"/>
+              </a:rPr>
+              <a:t>This is Khun Ni.</a:t>
+            </a:r>
+          </a:p>
+        </p:txBody>
+      </p:sp>
+      <p:sp>
+        <p:nvSpPr>
+          <p:cNvPr id="14" name="Rounded Rectangle 13"/>
+          <p:cNvSpPr/>
+          <p:nvPr/>
+        </p:nvSpPr>
+        <p:spPr>
+          <a:xfrm>
+            <a:off x="731520" y="2926080"/>
+            <a:ext cx="1051560" cy="274320"/>
+          </a:xfrm>
+          <a:prstGeom prst="roundRect">
+            <a:avLst>
+              <a:gd name="adj" fmla="val 28000"/>
+            </a:avLst>
+          </a:prstGeom>
+          <a:solidFill>
+            <a:srgbClr val="7A8F54"/>
+          </a:solidFill>
+          <a:ln>
+            <a:noFill/>
+          </a:ln>
+        </p:spPr>
+        <p:style>
+          <a:lnRef idx="1">
+            <a:schemeClr val="accent1"/>
+          </a:lnRef>
+          <a:fillRef idx="3">
+            <a:schemeClr val="accent1"/>
+          </a:fillRef>
+          <a:effectRef idx="2">
+            <a:schemeClr val="accent1"/>
+          </a:effectRef>
+          <a:fontRef idx="minor">
+            <a:schemeClr val="lt1"/>
+          </a:fontRef>
+        </p:style>
+        <p:txBody>
+          <a:bodyPr rtlCol="0" anchor="ctr" wrap="none"/>
+          <a:lstStyle/>
+          <a:p>
+            <a:pPr algn="ctr"/>
+            <a:r>
+              <a:rPr sz="1200" b="1" lang="en-US" altLang="en-US">
+                <a:solidFill>
+                  <a:srgbClr val="FFFFFF"/>
+                </a:solidFill>
+                <a:latin typeface="Sarabun"/>
+                <a:ea typeface="Sarabun"/>
+                <a:cs typeface="Sarabun"/>
+              </a:rPr>
+              <a:t>You</a:t>
+            </a:r>
+          </a:p>
+        </p:txBody>
+      </p:sp>
+      <p:sp>
+        <p:nvSpPr>
+          <p:cNvPr id="15" name="TextBox 14"/>
+          <p:cNvSpPr txBox="1"/>
+          <p:nvPr/>
+        </p:nvSpPr>
+        <p:spPr>
+          <a:xfrm>
+            <a:off x="1965960" y="2898648"/>
+            <a:ext cx="8823960" cy="228600"/>
+          </a:xfrm>
+          <a:prstGeom prst="rect">
+            <a:avLst/>
+          </a:prstGeom>
+          <a:noFill/>
+        </p:spPr>
+        <p:txBody>
+          <a:bodyPr wrap="square" anchor="t">
+            <a:spAutoFit/>
+          </a:bodyPr>
+          <a:lstStyle/>
+          <a:p>
+            <a:pPr algn="l"/>
+            <a:r>
+              <a:rPr sz="1700" b="0" i="0" lang="th-TH" altLang="en-US">
+                <a:solidFill>
+                  <a:srgbClr val="24333D"/>
+                </a:solidFill>
+                <a:latin typeface="Sarabun"/>
+                <a:ea typeface="Sarabun"/>
+                <a:cs typeface="Sarabun"/>
+              </a:rPr>
+              <a:t>คุณคือคุณนิใช่ไหมครับ</a:t>
+            </a:r>
+          </a:p>
+        </p:txBody>
+      </p:sp>
+      <p:sp>
+        <p:nvSpPr>
+          <p:cNvPr id="16" name="TextBox 15"/>
+          <p:cNvSpPr txBox="1"/>
+          <p:nvPr/>
+        </p:nvSpPr>
+        <p:spPr>
+          <a:xfrm>
+            <a:off x="1965960" y="3127248"/>
+            <a:ext cx="8823960" cy="201168"/>
+          </a:xfrm>
+          <a:prstGeom prst="rect">
+            <a:avLst/>
+          </a:prstGeom>
+          <a:noFill/>
+        </p:spPr>
+        <p:txBody>
+          <a:bodyPr wrap="square" anchor="t">
+            <a:spAutoFit/>
+          </a:bodyPr>
+          <a:lstStyle/>
+          <a:p>
+            <a:pPr algn="l"/>
+            <a:r>
+              <a:rPr sz="1700" b="0" i="1" lang="en-US" altLang="en-US">
+                <a:solidFill>
+                  <a:srgbClr val="566873"/>
+                </a:solidFill>
+                <a:latin typeface="Sarabun"/>
+                <a:ea typeface="Sarabun"/>
+                <a:cs typeface="Sarabun"/>
+              </a:rPr>
+              <a:t>khun khuu khun ní châi mái khráp</a:t>
+            </a:r>
+          </a:p>
+        </p:txBody>
+      </p:sp>
+      <p:sp>
+        <p:nvSpPr>
+          <p:cNvPr id="17" name="TextBox 16"/>
+          <p:cNvSpPr txBox="1"/>
+          <p:nvPr/>
+        </p:nvSpPr>
+        <p:spPr>
+          <a:xfrm>
+            <a:off x="1965960" y="3328416"/>
+            <a:ext cx="8823960" cy="201168"/>
+          </a:xfrm>
+          <a:prstGeom prst="rect">
+            <a:avLst/>
+          </a:prstGeom>
+          <a:noFill/>
+        </p:spPr>
+        <p:txBody>
+          <a:bodyPr wrap="square" anchor="t">
+            <a:spAutoFit/>
+          </a:bodyPr>
+          <a:lstStyle/>
+          <a:p>
+            <a:pPr algn="l"/>
+            <a:r>
+              <a:rPr sz="1700" b="0" i="0" lang="en-US" altLang="en-US">
+                <a:solidFill>
+                  <a:srgbClr val="566873"/>
+                </a:solidFill>
+                <a:latin typeface="Sarabun"/>
+                <a:ea typeface="Sarabun"/>
+                <a:cs typeface="Sarabun"/>
+              </a:rPr>
+              <a:t>You are Khun Ni, right?</a:t>
+            </a:r>
+          </a:p>
+        </p:txBody>
+      </p:sp>
+      <p:sp>
+        <p:nvSpPr>
+          <p:cNvPr id="18" name="Rounded Rectangle 17"/>
+          <p:cNvSpPr/>
+          <p:nvPr/>
+        </p:nvSpPr>
+        <p:spPr>
+          <a:xfrm>
+            <a:off x="731520" y="3840480"/>
+            <a:ext cx="1051560" cy="274320"/>
+          </a:xfrm>
+          <a:prstGeom prst="roundRect">
+            <a:avLst>
+              <a:gd name="adj" fmla="val 28000"/>
+            </a:avLst>
+          </a:prstGeom>
+          <a:solidFill>
+            <a:srgbClr val="C96F4A"/>
+          </a:solidFill>
+          <a:ln>
+            <a:noFill/>
+          </a:ln>
+        </p:spPr>
+        <p:style>
+          <a:lnRef idx="1">
+            <a:schemeClr val="accent1"/>
+          </a:lnRef>
+          <a:fillRef idx="3">
+            <a:schemeClr val="accent1"/>
+          </a:fillRef>
+          <a:effectRef idx="2">
+            <a:schemeClr val="accent1"/>
+          </a:effectRef>
+          <a:fontRef idx="minor">
+            <a:schemeClr val="lt1"/>
+          </a:fontRef>
+        </p:style>
+        <p:txBody>
+          <a:bodyPr rtlCol="0" anchor="ctr" wrap="none"/>
+          <a:lstStyle/>
+          <a:p>
+            <a:pPr algn="ctr"/>
+            <a:r>
+              <a:rPr sz="1200" b="1" lang="en-US" altLang="en-US">
+                <a:solidFill>
+                  <a:srgbClr val="FFFFFF"/>
+                </a:solidFill>
+                <a:latin typeface="Sarabun"/>
+                <a:ea typeface="Sarabun"/>
+                <a:cs typeface="Sarabun"/>
+              </a:rPr>
+              <a:t>Friend</a:t>
+            </a:r>
+          </a:p>
+        </p:txBody>
+      </p:sp>
+      <p:sp>
+        <p:nvSpPr>
+          <p:cNvPr id="19" name="TextBox 18"/>
+          <p:cNvSpPr txBox="1"/>
+          <p:nvPr/>
+        </p:nvSpPr>
+        <p:spPr>
+          <a:xfrm>
+            <a:off x="1965960" y="3813048"/>
+            <a:ext cx="8823960" cy="228600"/>
+          </a:xfrm>
+          <a:prstGeom prst="rect">
+            <a:avLst/>
+          </a:prstGeom>
+          <a:noFill/>
+        </p:spPr>
+        <p:txBody>
+          <a:bodyPr wrap="square" anchor="t">
+            <a:spAutoFit/>
+          </a:bodyPr>
+          <a:lstStyle/>
+          <a:p>
+            <a:pPr algn="l"/>
+            <a:r>
+              <a:rPr sz="1700" b="0" i="0" lang="th-TH" altLang="en-US">
+                <a:solidFill>
+                  <a:srgbClr val="24333D"/>
+                </a:solidFill>
+                <a:latin typeface="Sarabun"/>
+                <a:ea typeface="Sarabun"/>
+                <a:cs typeface="Sarabun"/>
+              </a:rPr>
+              <a:t>ใช่ค่ะ</a:t>
+            </a:r>
+          </a:p>
+        </p:txBody>
+      </p:sp>
+      <p:sp>
+        <p:nvSpPr>
+          <p:cNvPr id="20" name="TextBox 19"/>
+          <p:cNvSpPr txBox="1"/>
+          <p:nvPr/>
+        </p:nvSpPr>
+        <p:spPr>
+          <a:xfrm>
+            <a:off x="1965960" y="4041648"/>
+            <a:ext cx="8823960" cy="201168"/>
+          </a:xfrm>
+          <a:prstGeom prst="rect">
+            <a:avLst/>
+          </a:prstGeom>
+          <a:noFill/>
+        </p:spPr>
+        <p:txBody>
+          <a:bodyPr wrap="square" anchor="t">
+            <a:spAutoFit/>
+          </a:bodyPr>
+          <a:lstStyle/>
+          <a:p>
+            <a:pPr algn="l"/>
+            <a:r>
+              <a:rPr sz="1700" b="0" i="1" lang="en-US" altLang="en-US">
+                <a:solidFill>
+                  <a:srgbClr val="566873"/>
+                </a:solidFill>
+                <a:latin typeface="Sarabun"/>
+                <a:ea typeface="Sarabun"/>
+                <a:cs typeface="Sarabun"/>
+              </a:rPr>
+              <a:t>châi khâ</a:t>
+            </a:r>
+          </a:p>
+        </p:txBody>
+      </p:sp>
+      <p:sp>
+        <p:nvSpPr>
+          <p:cNvPr id="21" name="TextBox 20"/>
+          <p:cNvSpPr txBox="1"/>
+          <p:nvPr/>
+        </p:nvSpPr>
+        <p:spPr>
+          <a:xfrm>
+            <a:off x="1965960" y="4242816"/>
+            <a:ext cx="8823960" cy="201168"/>
+          </a:xfrm>
+          <a:prstGeom prst="rect">
+            <a:avLst/>
+          </a:prstGeom>
+          <a:noFill/>
+        </p:spPr>
+        <p:txBody>
+          <a:bodyPr wrap="square" anchor="t">
+            <a:spAutoFit/>
+          </a:bodyPr>
+          <a:lstStyle/>
+          <a:p>
+            <a:pPr algn="l"/>
+            <a:r>
+              <a:rPr sz="1700" b="0" i="0" lang="en-US" altLang="en-US">
+                <a:solidFill>
+                  <a:srgbClr val="566873"/>
+                </a:solidFill>
+                <a:latin typeface="Sarabun"/>
+                <a:ea typeface="Sarabun"/>
+                <a:cs typeface="Sarabun"/>
+              </a:rPr>
+              <a:t>Yes.</a:t>
+            </a:r>
+          </a:p>
+        </p:txBody>
+      </p:sp>
+      <p:sp>
+        <p:nvSpPr>
+          <p:cNvPr id="22" name="Rounded Rectangle 21"/>
+          <p:cNvSpPr/>
+          <p:nvPr/>
+        </p:nvSpPr>
+        <p:spPr>
+          <a:xfrm>
+            <a:off x="731520" y="4754880"/>
+            <a:ext cx="1051560" cy="274320"/>
+          </a:xfrm>
+          <a:prstGeom prst="roundRect">
+            <a:avLst>
+              <a:gd name="adj" fmla="val 28000"/>
+            </a:avLst>
+          </a:prstGeom>
+          <a:solidFill>
+            <a:srgbClr val="7A8F54"/>
+          </a:solidFill>
+          <a:ln>
+            <a:noFill/>
+          </a:ln>
+        </p:spPr>
+        <p:style>
+          <a:lnRef idx="1">
+            <a:schemeClr val="accent1"/>
+          </a:lnRef>
+          <a:fillRef idx="3">
+            <a:schemeClr val="accent1"/>
+          </a:fillRef>
+          <a:effectRef idx="2">
+            <a:schemeClr val="accent1"/>
+          </a:effectRef>
+          <a:fontRef idx="minor">
+            <a:schemeClr val="lt1"/>
+          </a:fontRef>
+        </p:style>
+        <p:txBody>
+          <a:bodyPr rtlCol="0" anchor="ctr" wrap="none"/>
+          <a:lstStyle/>
+          <a:p>
+            <a:pPr algn="ctr"/>
+            <a:r>
+              <a:rPr sz="1200" b="1" lang="en-US" altLang="en-US">
+                <a:solidFill>
+                  <a:srgbClr val="FFFFFF"/>
+                </a:solidFill>
+                <a:latin typeface="Sarabun"/>
+                <a:ea typeface="Sarabun"/>
+                <a:cs typeface="Sarabun"/>
+              </a:rPr>
+              <a:t>You</a:t>
+            </a:r>
+          </a:p>
+        </p:txBody>
+      </p:sp>
+      <p:sp>
+        <p:nvSpPr>
+          <p:cNvPr id="23" name="TextBox 22"/>
+          <p:cNvSpPr txBox="1"/>
+          <p:nvPr/>
+        </p:nvSpPr>
+        <p:spPr>
+          <a:xfrm>
+            <a:off x="1965960" y="4727448"/>
+            <a:ext cx="8823960" cy="228600"/>
+          </a:xfrm>
+          <a:prstGeom prst="rect">
+            <a:avLst/>
+          </a:prstGeom>
+          <a:noFill/>
+        </p:spPr>
+        <p:txBody>
+          <a:bodyPr wrap="square" anchor="t">
+            <a:spAutoFit/>
+          </a:bodyPr>
+          <a:lstStyle/>
+          <a:p>
+            <a:pPr algn="l"/>
+            <a:r>
+              <a:rPr sz="1700" b="0" i="0" lang="th-TH" altLang="en-US">
+                <a:solidFill>
+                  <a:srgbClr val="24333D"/>
+                </a:solidFill>
+                <a:latin typeface="Sarabun"/>
+                <a:ea typeface="Sarabun"/>
+                <a:cs typeface="Sarabun"/>
+              </a:rPr>
+              <a:t>สวัสดีครับ ผมชื่อมาร์คครับ</a:t>
+            </a:r>
+          </a:p>
+        </p:txBody>
+      </p:sp>
+      <p:sp>
+        <p:nvSpPr>
+          <p:cNvPr id="24" name="TextBox 23"/>
+          <p:cNvSpPr txBox="1"/>
+          <p:nvPr/>
+        </p:nvSpPr>
+        <p:spPr>
+          <a:xfrm>
+            <a:off x="1965960" y="4956048"/>
+            <a:ext cx="8823960" cy="201168"/>
+          </a:xfrm>
+          <a:prstGeom prst="rect">
+            <a:avLst/>
+          </a:prstGeom>
+          <a:noFill/>
+        </p:spPr>
+        <p:txBody>
+          <a:bodyPr wrap="square" anchor="t">
+            <a:spAutoFit/>
+          </a:bodyPr>
+          <a:lstStyle/>
+          <a:p>
+            <a:pPr algn="l"/>
+            <a:r>
+              <a:rPr sz="1700" b="0" i="1" lang="en-US" altLang="en-US">
+                <a:solidFill>
+                  <a:srgbClr val="566873"/>
+                </a:solidFill>
+                <a:latin typeface="Sarabun"/>
+                <a:ea typeface="Sarabun"/>
+                <a:cs typeface="Sarabun"/>
+              </a:rPr>
+              <a:t>sà-wàt-dii khráp phǒm chûue máak khráp</a:t>
+            </a:r>
+          </a:p>
+        </p:txBody>
+      </p:sp>
+      <p:sp>
+        <p:nvSpPr>
+          <p:cNvPr id="25" name="TextBox 24"/>
+          <p:cNvSpPr txBox="1"/>
+          <p:nvPr/>
+        </p:nvSpPr>
+        <p:spPr>
+          <a:xfrm>
+            <a:off x="1965960" y="5157216"/>
+            <a:ext cx="8823960" cy="201168"/>
+          </a:xfrm>
+          <a:prstGeom prst="rect">
+            <a:avLst/>
+          </a:prstGeom>
+          <a:noFill/>
+        </p:spPr>
+        <p:txBody>
+          <a:bodyPr wrap="square" anchor="t">
+            <a:spAutoFit/>
+          </a:bodyPr>
+          <a:lstStyle/>
+          <a:p>
+            <a:pPr algn="l"/>
+            <a:r>
+              <a:rPr sz="1700" b="0" i="0" lang="en-US" altLang="en-US">
+                <a:solidFill>
+                  <a:srgbClr val="566873"/>
+                </a:solidFill>
+                <a:latin typeface="Sarabun"/>
+                <a:ea typeface="Sarabun"/>
+                <a:cs typeface="Sarabun"/>
+              </a:rPr>
+              <a:t>Hello, my name is Mark.</a:t>
             </a:r>
           </a:p>
         </p:txBody>
@@ -10262,7 +11518,7 @@
                 <a:ea typeface="Sarabun"/>
                 <a:cs typeface="Sarabun"/>
               </a:rPr>
-              <a:t>Closing</a:t>
+              <a:t>Recap</a:t>
             </a:r>
           </a:p>
         </p:txBody>
@@ -10299,7 +11555,7 @@
                 <a:ea typeface="Sarabun"/>
                 <a:cs typeface="Sarabun"/>
               </a:rPr>
-              <a:t>Closing</a:t>
+              <a:t>Recap</a:t>
             </a:r>
           </a:p>
         </p:txBody>
@@ -10312,7 +11568,7 @@
         </p:nvSpPr>
         <p:spPr>
           <a:xfrm>
-            <a:off x="932688" y="1746504"/>
+            <a:off x="932688" y="1563624"/>
             <a:ext cx="6705295" cy="228600"/>
           </a:xfrm>
           <a:prstGeom prst="rect">
@@ -10330,13 +11586,13 @@
             <a:r>
               <a:rPr sz="1700" b="1" i="0" lang="en-US" altLang="en-US">
                 <a:solidFill>
-                  <a:srgbClr val="C96F4A"/>
+                  <a:srgbClr val="355C7D"/>
                 </a:solidFill>
                 <a:latin typeface="Sarabun"/>
                 <a:ea typeface="Sarabun"/>
                 <a:cs typeface="Sarabun"/>
               </a:rPr>
-              <a:t>Next steps</a:t>
+              <a:t>What you can now do</a:t>
             </a:r>
           </a:p>
         </p:txBody>
@@ -10349,14 +11605,14 @@
         </p:nvSpPr>
         <p:spPr>
           <a:xfrm>
-            <a:off x="932688" y="2130552"/>
+            <a:off x="932688" y="1947672"/>
             <a:ext cx="82296" cy="82296"/>
           </a:xfrm>
           <a:prstGeom prst="ellipse">
             <a:avLst/>
           </a:prstGeom>
           <a:solidFill>
-            <a:srgbClr val="C96F4A"/>
+            <a:srgbClr val="355C7D"/>
           </a:solidFill>
           <a:ln>
             <a:noFill/>
@@ -10392,7 +11648,7 @@
         </p:nvSpPr>
         <p:spPr>
           <a:xfrm>
-            <a:off x="1078992" y="2039112"/>
+            <a:off x="1078992" y="1856232"/>
             <a:ext cx="6568135" cy="475488"/>
           </a:xfrm>
           <a:prstGeom prst="rect">
@@ -10416,7 +11672,7 @@
                 <a:ea typeface="Sarabun"/>
                 <a:cs typeface="Sarabun"/>
               </a:rPr>
-              <a:t>You can now say I, you, he/she, point to someone and say who they are, and ask who someone is.</a:t>
+              <a:t>How do you say 'I' as a male speaker? Say it before looking.</a:t>
             </a:r>
           </a:p>
         </p:txBody>
@@ -10429,14 +11685,14 @@
         </p:nvSpPr>
         <p:spPr>
           <a:xfrm>
-            <a:off x="932688" y="2660904"/>
+            <a:off x="932688" y="2478024"/>
             <a:ext cx="82296" cy="82296"/>
           </a:xfrm>
           <a:prstGeom prst="ellipse">
             <a:avLst/>
           </a:prstGeom>
           <a:solidFill>
-            <a:srgbClr val="C96F4A"/>
+            <a:srgbClr val="355C7D"/>
           </a:solidFill>
           <a:ln>
             <a:noFill/>
@@ -10472,7 +11728,7 @@
         </p:nvSpPr>
         <p:spPr>
           <a:xfrm>
-            <a:off x="1078992" y="2569464"/>
+            <a:off x="1078992" y="2386584"/>
             <a:ext cx="6568135" cy="274320"/>
           </a:xfrm>
           <a:prstGeom prst="rect">
@@ -10496,7 +11752,364 @@
                 <a:ea typeface="Sarabun"/>
                 <a:cs typeface="Sarabun"/>
               </a:rPr>
-              <a:t>Next: First Contact and Courtesy continues.</a:t>
+              <a:t>Point to someone and say 'who is he?' in Thai.</a:t>
+            </a:r>
+          </a:p>
+        </p:txBody>
+      </p:sp>
+      <p:sp>
+        <p:nvSpPr>
+          <p:cNvPr id="11" name="Oval 10"/>
+          <p:cNvSpPr/>
+          <p:nvPr/>
+        </p:nvSpPr>
+        <p:spPr>
+          <a:xfrm>
+            <a:off x="932688" y="2807208"/>
+            <a:ext cx="82296" cy="82296"/>
+          </a:xfrm>
+          <a:prstGeom prst="ellipse">
+            <a:avLst/>
+          </a:prstGeom>
+          <a:solidFill>
+            <a:srgbClr val="355C7D"/>
+          </a:solidFill>
+          <a:ln>
+            <a:noFill/>
+          </a:ln>
+        </p:spPr>
+        <p:style>
+          <a:lnRef idx="1">
+            <a:schemeClr val="accent1"/>
+          </a:lnRef>
+          <a:fillRef idx="3">
+            <a:schemeClr val="accent1"/>
+          </a:fillRef>
+          <a:effectRef idx="2">
+            <a:schemeClr val="accent1"/>
+          </a:effectRef>
+          <a:fontRef idx="minor">
+            <a:schemeClr val="lt1"/>
+          </a:fontRef>
+        </p:style>
+        <p:txBody>
+          <a:bodyPr rtlCol="0" anchor="ctr"/>
+          <a:lstStyle/>
+          <a:p>
+            <a:pPr algn="ctr"/>
+          </a:p>
+        </p:txBody>
+      </p:sp>
+      <p:sp>
+        <p:nvSpPr>
+          <p:cNvPr id="12" name="TextBox 11"/>
+          <p:cNvSpPr txBox="1"/>
+          <p:nvPr/>
+        </p:nvSpPr>
+        <p:spPr>
+          <a:xfrm>
+            <a:off x="1078992" y="2715768"/>
+            <a:ext cx="6568135" cy="274320"/>
+          </a:xfrm>
+          <a:prstGeom prst="rect">
+            <a:avLst/>
+          </a:prstGeom>
+          <a:noFill/>
+        </p:spPr>
+        <p:txBody>
+          <a:bodyPr wrap="square" anchor="t">
+            <a:spAutoFit/>
+          </a:bodyPr>
+          <a:lstStyle/>
+          <a:p>
+            <a:pPr algn="l"/>
+            <a:r>
+              <a:rPr sz="1700" b="0" i="0" lang="en-US" altLang="en-US">
+                <a:solidFill>
+                  <a:srgbClr val="24333D"/>
+                </a:solidFill>
+                <a:latin typeface="Sarabun"/>
+                <a:ea typeface="Sarabun"/>
+                <a:cs typeface="Sarabun"/>
+              </a:rPr>
+              <a:t>Introduce a friend: say 'this is Khun Ni' in Thai.</a:t>
+            </a:r>
+          </a:p>
+        </p:txBody>
+      </p:sp>
+      <p:sp>
+        <p:nvSpPr>
+          <p:cNvPr id="13" name="Oval 12"/>
+          <p:cNvSpPr/>
+          <p:nvPr/>
+        </p:nvSpPr>
+        <p:spPr>
+          <a:xfrm>
+            <a:off x="932688" y="3136392"/>
+            <a:ext cx="82296" cy="82296"/>
+          </a:xfrm>
+          <a:prstGeom prst="ellipse">
+            <a:avLst/>
+          </a:prstGeom>
+          <a:solidFill>
+            <a:srgbClr val="355C7D"/>
+          </a:solidFill>
+          <a:ln>
+            <a:noFill/>
+          </a:ln>
+        </p:spPr>
+        <p:style>
+          <a:lnRef idx="1">
+            <a:schemeClr val="accent1"/>
+          </a:lnRef>
+          <a:fillRef idx="3">
+            <a:schemeClr val="accent1"/>
+          </a:fillRef>
+          <a:effectRef idx="2">
+            <a:schemeClr val="accent1"/>
+          </a:effectRef>
+          <a:fontRef idx="minor">
+            <a:schemeClr val="lt1"/>
+          </a:fontRef>
+        </p:style>
+        <p:txBody>
+          <a:bodyPr rtlCol="0" anchor="ctr"/>
+          <a:lstStyle/>
+          <a:p>
+            <a:pPr algn="ctr"/>
+          </a:p>
+        </p:txBody>
+      </p:sp>
+      <p:sp>
+        <p:nvSpPr>
+          <p:cNvPr id="14" name="TextBox 13"/>
+          <p:cNvSpPr txBox="1"/>
+          <p:nvPr/>
+        </p:nvSpPr>
+        <p:spPr>
+          <a:xfrm>
+            <a:off x="1078992" y="3044952"/>
+            <a:ext cx="6568135" cy="475488"/>
+          </a:xfrm>
+          <a:prstGeom prst="rect">
+            <a:avLst/>
+          </a:prstGeom>
+          <a:noFill/>
+        </p:spPr>
+        <p:txBody>
+          <a:bodyPr wrap="square" anchor="t">
+            <a:spAutoFit/>
+          </a:bodyPr>
+          <a:lstStyle/>
+          <a:p>
+            <a:pPr algn="l"/>
+            <a:r>
+              <a:rPr sz="1700" b="0" i="0" lang="en-US" altLang="en-US">
+                <a:solidFill>
+                  <a:srgbClr val="24333D"/>
+                </a:solidFill>
+                <a:latin typeface="Sarabun"/>
+                <a:ea typeface="Sarabun"/>
+                <a:cs typeface="Sarabun"/>
+              </a:rPr>
+              <a:t>Confirm identity: say 'you are Khun Mark, right?' in Thai.</a:t>
+            </a:r>
+          </a:p>
+        </p:txBody>
+      </p:sp>
+      <p:sp>
+        <p:nvSpPr>
+          <p:cNvPr id="15" name="Oval 14"/>
+          <p:cNvSpPr/>
+          <p:nvPr/>
+        </p:nvSpPr>
+        <p:spPr>
+          <a:xfrm>
+            <a:off x="932688" y="3666744"/>
+            <a:ext cx="82296" cy="82296"/>
+          </a:xfrm>
+          <a:prstGeom prst="ellipse">
+            <a:avLst/>
+          </a:prstGeom>
+          <a:solidFill>
+            <a:srgbClr val="355C7D"/>
+          </a:solidFill>
+          <a:ln>
+            <a:noFill/>
+          </a:ln>
+        </p:spPr>
+        <p:style>
+          <a:lnRef idx="1">
+            <a:schemeClr val="accent1"/>
+          </a:lnRef>
+          <a:fillRef idx="3">
+            <a:schemeClr val="accent1"/>
+          </a:fillRef>
+          <a:effectRef idx="2">
+            <a:schemeClr val="accent1"/>
+          </a:effectRef>
+          <a:fontRef idx="minor">
+            <a:schemeClr val="lt1"/>
+          </a:fontRef>
+        </p:style>
+        <p:txBody>
+          <a:bodyPr rtlCol="0" anchor="ctr"/>
+          <a:lstStyle/>
+          <a:p>
+            <a:pPr algn="ctr"/>
+          </a:p>
+        </p:txBody>
+      </p:sp>
+      <p:sp>
+        <p:nvSpPr>
+          <p:cNvPr id="16" name="TextBox 15"/>
+          <p:cNvSpPr txBox="1"/>
+          <p:nvPr/>
+        </p:nvSpPr>
+        <p:spPr>
+          <a:xfrm>
+            <a:off x="1078992" y="3575304"/>
+            <a:ext cx="6568135" cy="274320"/>
+          </a:xfrm>
+          <a:prstGeom prst="rect">
+            <a:avLst/>
+          </a:prstGeom>
+          <a:noFill/>
+        </p:spPr>
+        <p:txBody>
+          <a:bodyPr wrap="square" anchor="t">
+            <a:spAutoFit/>
+          </a:bodyPr>
+          <a:lstStyle/>
+          <a:p>
+            <a:pPr algn="l"/>
+            <a:r>
+              <a:rPr sz="1700" b="0" i="0" lang="en-US" altLang="en-US">
+                <a:solidFill>
+                  <a:srgbClr val="24333D"/>
+                </a:solidFill>
+                <a:latin typeface="Sarabun"/>
+                <a:ea typeface="Sarabun"/>
+                <a:cs typeface="Sarabun"/>
+              </a:rPr>
+              <a:t>What word means 'this'? And what word means 'is'?</a:t>
+            </a:r>
+          </a:p>
+        </p:txBody>
+      </p:sp>
+      <p:sp>
+        <p:nvSpPr>
+          <p:cNvPr id="17" name="TextBox 16"/>
+          <p:cNvSpPr txBox="1"/>
+          <p:nvPr/>
+        </p:nvSpPr>
+        <p:spPr>
+          <a:xfrm>
+            <a:off x="932688" y="4325112"/>
+            <a:ext cx="9692640" cy="228600"/>
+          </a:xfrm>
+          <a:prstGeom prst="rect">
+            <a:avLst/>
+          </a:prstGeom>
+          <a:noFill/>
+        </p:spPr>
+        <p:txBody>
+          <a:bodyPr wrap="square" anchor="t">
+            <a:spAutoFit/>
+          </a:bodyPr>
+          <a:lstStyle/>
+          <a:p>
+            <a:pPr algn="l"/>
+            <a:r>
+              <a:rPr sz="1700" b="1" i="0" lang="en-US" altLang="en-US">
+                <a:solidFill>
+                  <a:srgbClr val="7A8F54"/>
+                </a:solidFill>
+                <a:latin typeface="Sarabun"/>
+                <a:ea typeface="Sarabun"/>
+                <a:cs typeface="Sarabun"/>
+              </a:rPr>
+              <a:t>Remember</a:t>
+            </a:r>
+          </a:p>
+        </p:txBody>
+      </p:sp>
+      <p:sp>
+        <p:nvSpPr>
+          <p:cNvPr id="18" name="Oval 17"/>
+          <p:cNvSpPr/>
+          <p:nvPr/>
+        </p:nvSpPr>
+        <p:spPr>
+          <a:xfrm>
+            <a:off x="932688" y="4709160"/>
+            <a:ext cx="82296" cy="82296"/>
+          </a:xfrm>
+          <a:prstGeom prst="ellipse">
+            <a:avLst/>
+          </a:prstGeom>
+          <a:solidFill>
+            <a:srgbClr val="7A8F54"/>
+          </a:solidFill>
+          <a:ln>
+            <a:noFill/>
+          </a:ln>
+        </p:spPr>
+        <p:style>
+          <a:lnRef idx="1">
+            <a:schemeClr val="accent1"/>
+          </a:lnRef>
+          <a:fillRef idx="3">
+            <a:schemeClr val="accent1"/>
+          </a:fillRef>
+          <a:effectRef idx="2">
+            <a:schemeClr val="accent1"/>
+          </a:effectRef>
+          <a:fontRef idx="minor">
+            <a:schemeClr val="lt1"/>
+          </a:fontRef>
+        </p:style>
+        <p:txBody>
+          <a:bodyPr rtlCol="0" anchor="ctr"/>
+          <a:lstStyle/>
+          <a:p>
+            <a:pPr algn="ctr"/>
+          </a:p>
+        </p:txBody>
+      </p:sp>
+      <p:sp>
+        <p:nvSpPr>
+          <p:cNvPr id="19" name="TextBox 18"/>
+          <p:cNvSpPr txBox="1"/>
+          <p:nvPr/>
+        </p:nvSpPr>
+        <p:spPr>
+          <a:xfrm>
+            <a:off x="1078992" y="4617720"/>
+            <a:ext cx="9555480" cy="274320"/>
+          </a:xfrm>
+          <a:prstGeom prst="rect">
+            <a:avLst/>
+          </a:prstGeom>
+          <a:noFill/>
+        </p:spPr>
+        <p:txBody>
+          <a:bodyPr wrap="square" anchor="t">
+            <a:spAutoFit/>
+          </a:bodyPr>
+          <a:lstStyle/>
+          <a:p>
+            <a:pPr algn="l"/>
+            <a:r>
+              <a:rPr sz="1700" b="0" i="0" lang="en-US" altLang="en-US">
+                <a:solidFill>
+                  <a:srgbClr val="24333D"/>
+                </a:solidFill>
+                <a:latin typeface="Sarabun"/>
+                <a:ea typeface="Sarabun"/>
+                <a:cs typeface="Sarabun"/>
+              </a:rPr>
+              <a:t>What word means 'this'? And what word means 'is'?</a:t>
             </a:r>
           </a:p>
         </p:txBody>
